--- a/End_Semester_Presentation.pptx
+++ b/End_Semester_Presentation.pptx
@@ -4,9 +4,6 @@
   <p:sldMasterIdLst>
     <p:sldMasterId id="2147483648" r:id="rId1"/>
   </p:sldMasterIdLst>
-  <p:notesMasterIdLst>
-    <p:notesMasterId r:id="rId26"/>
-  </p:notesMasterIdLst>
   <p:sldIdLst>
     <p:sldId id="256" r:id="rId2"/>
     <p:sldId id="257" r:id="rId3"/>
@@ -33,6 +30,9 @@
     <p:sldId id="278" r:id="rId24"/>
     <p:sldId id="279" r:id="rId25"/>
   </p:sldIdLst>
+  <p:notesMasterIdLst>
+    <p:notesMasterId r:id="rId26"/>
+  </p:notesMasterIdLst>
   <p:sldSz cx="12192000" cy="6858000"/>
   <p:notesSz cx="6858000" cy="12192000"/>
   <p:defaultTextStyle>
@@ -127,11 +127,6 @@
       </a:defRPr>
     </a:lvl9pPr>
   </p:defaultTextStyle>
-  <p:extLst>
-    <p:ext uri="{EFAFB233-063F-42B5-8137-9DF3F51BA10A}">
-      <p15:sldGuideLst xmlns:p15="http://schemas.microsoft.com/office/powerpoint/2012/main"/>
-    </p:ext>
-  </p:extLst>
 </p:presentation>
 </file>
 
@@ -157,10 +152,234 @@
           <a:chExt cx="0" cy="0"/>
         </a:xfrm>
       </p:grpSpPr>
+      <p:sp>
+        <p:nvSpPr>
+          <p:cNvPr id="2" name="Header Placeholder 1"/>
+          <p:cNvSpPr>
+            <a:spLocks noGrp="1"/>
+          </p:cNvSpPr>
+          <p:nvPr>
+            <p:ph type="hdr" sz="quarter"/>
+          </p:nvPr>
+        </p:nvSpPr>
+        <p:spPr>
+          <a:xfrm>
+            <a:off x="0" y="0"/>
+            <a:ext cx="2971800" cy="458788"/>
+          </a:xfrm>
+          <a:prstGeom prst="rect">
+            <a:avLst/>
+          </a:prstGeom>
+        </p:spPr>
+        <p:txBody>
+          <a:bodyPr vert="horz" lIns="91440" tIns="45720" rIns="91440" bIns="45720" rtlCol="0"/>
+          <a:lstStyle>
+            <a:lvl1pPr algn="l">
+              <a:defRPr sz="1200"/>
+            </a:lvl1pPr>
+          </a:lstStyle>
+          <a:p>
+            <a:endParaRPr lang="en-US"/>
+          </a:p>
+        </p:txBody>
+      </p:sp>
+      <p:sp>
+        <p:nvSpPr>
+          <p:cNvPr id="3" name="Date Placeholder 2"/>
+          <p:cNvSpPr>
+            <a:spLocks noGrp="1"/>
+          </p:cNvSpPr>
+          <p:nvPr>
+            <p:ph type="dt" idx="1"/>
+          </p:nvPr>
+        </p:nvSpPr>
+        <p:spPr>
+          <a:xfrm>
+            <a:off x="3884613" y="0"/>
+            <a:ext cx="2971800" cy="458788"/>
+          </a:xfrm>
+          <a:prstGeom prst="rect">
+            <a:avLst/>
+          </a:prstGeom>
+        </p:spPr>
+        <p:txBody>
+          <a:bodyPr vert="horz" lIns="91440" tIns="45720" rIns="91440" bIns="45720" rtlCol="0"/>
+          <a:lstStyle>
+            <a:lvl1pPr algn="r">
+              <a:defRPr sz="1200"/>
+            </a:lvl1pPr>
+          </a:lstStyle>
+          <a:p>
+            <a:fld id="{5282F153-3F37-0F45-9E97-73ACFA13230C}" type="datetimeFigureOut">
+              <a:rPr lang="en-US"/>
+              <a:t>7/23/19</a:t>
+            </a:fld>
+            <a:endParaRPr lang="en-US"/>
+          </a:p>
+        </p:txBody>
+      </p:sp>
+      <p:sp>
+        <p:nvSpPr>
+          <p:cNvPr id="4" name="Slide Image Placeholder 3"/>
+          <p:cNvSpPr>
+            <a:spLocks noGrp="1" noRot="1" noChangeAspect="1"/>
+          </p:cNvSpPr>
+          <p:nvPr>
+            <p:ph type="sldImg" idx="2"/>
+          </p:nvPr>
+        </p:nvSpPr>
+        <p:spPr>
+          <a:xfrm>
+            <a:off x="685800" y="1143000"/>
+            <a:ext cx="5486400" cy="3086100"/>
+          </a:xfrm>
+          <a:prstGeom prst="rect">
+            <a:avLst/>
+          </a:prstGeom>
+          <a:noFill/>
+          <a:ln w="12700">
+            <a:solidFill>
+              <a:prstClr val="black"/>
+            </a:solidFill>
+          </a:ln>
+        </p:spPr>
+        <p:txBody>
+          <a:bodyPr vert="horz" lIns="91440" tIns="45720" rIns="91440" bIns="45720" rtlCol="0" anchor="ctr"/>
+          <a:lstStyle/>
+          <a:p>
+            <a:endParaRPr lang="en-US"/>
+          </a:p>
+        </p:txBody>
+      </p:sp>
+      <p:sp>
+        <p:nvSpPr>
+          <p:cNvPr id="5" name="Notes Placeholder 4"/>
+          <p:cNvSpPr>
+            <a:spLocks noGrp="1"/>
+          </p:cNvSpPr>
+          <p:nvPr>
+            <p:ph type="body" sz="quarter" idx="3"/>
+          </p:nvPr>
+        </p:nvSpPr>
+        <p:spPr>
+          <a:xfrm>
+            <a:off x="685800" y="4400550"/>
+            <a:ext cx="5486400" cy="3600450"/>
+          </a:xfrm>
+          <a:prstGeom prst="rect">
+            <a:avLst/>
+          </a:prstGeom>
+        </p:spPr>
+        <p:txBody>
+          <a:bodyPr vert="horz" lIns="91440" tIns="45720" rIns="91440" bIns="45720" rtlCol="0"/>
+          <a:lstStyle/>
+          <a:p>
+            <a:pPr lvl="0"/>
+            <a:r>
+              <a:rPr lang="en-US"/>
+              <a:t>Click to edit Master text styles</a:t>
+            </a:r>
+          </a:p>
+          <a:p>
+            <a:pPr lvl="1"/>
+            <a:r>
+              <a:rPr lang="en-US"/>
+              <a:t>Second level</a:t>
+            </a:r>
+          </a:p>
+          <a:p>
+            <a:pPr lvl="2"/>
+            <a:r>
+              <a:rPr lang="en-US"/>
+              <a:t>Third level</a:t>
+            </a:r>
+          </a:p>
+          <a:p>
+            <a:pPr lvl="3"/>
+            <a:r>
+              <a:rPr lang="en-US"/>
+              <a:t>Fourth level</a:t>
+            </a:r>
+          </a:p>
+          <a:p>
+            <a:pPr lvl="4"/>
+            <a:r>
+              <a:rPr lang="en-US"/>
+              <a:t>Fifth level</a:t>
+            </a:r>
+          </a:p>
+        </p:txBody>
+      </p:sp>
+      <p:sp>
+        <p:nvSpPr>
+          <p:cNvPr id="6" name="Footer Placeholder 5"/>
+          <p:cNvSpPr>
+            <a:spLocks noGrp="1"/>
+          </p:cNvSpPr>
+          <p:nvPr>
+            <p:ph type="ftr" sz="quarter" idx="4"/>
+          </p:nvPr>
+        </p:nvSpPr>
+        <p:spPr>
+          <a:xfrm>
+            <a:off x="0" y="8685213"/>
+            <a:ext cx="2971800" cy="458787"/>
+          </a:xfrm>
+          <a:prstGeom prst="rect">
+            <a:avLst/>
+          </a:prstGeom>
+        </p:spPr>
+        <p:txBody>
+          <a:bodyPr vert="horz" lIns="91440" tIns="45720" rIns="91440" bIns="45720" rtlCol="0" anchor="b"/>
+          <a:lstStyle>
+            <a:lvl1pPr algn="l">
+              <a:defRPr sz="1200"/>
+            </a:lvl1pPr>
+          </a:lstStyle>
+          <a:p>
+            <a:endParaRPr lang="en-US"/>
+          </a:p>
+        </p:txBody>
+      </p:sp>
+      <p:sp>
+        <p:nvSpPr>
+          <p:cNvPr id="7" name="Slide Number Placeholder 6"/>
+          <p:cNvSpPr>
+            <a:spLocks noGrp="1"/>
+          </p:cNvSpPr>
+          <p:nvPr>
+            <p:ph type="sldNum" sz="quarter" idx="5"/>
+          </p:nvPr>
+        </p:nvSpPr>
+        <p:spPr>
+          <a:xfrm>
+            <a:off x="3884613" y="8685213"/>
+            <a:ext cx="2971800" cy="458787"/>
+          </a:xfrm>
+          <a:prstGeom prst="rect">
+            <a:avLst/>
+          </a:prstGeom>
+        </p:spPr>
+        <p:txBody>
+          <a:bodyPr vert="horz" lIns="91440" tIns="45720" rIns="91440" bIns="45720" rtlCol="0" anchor="b"/>
+          <a:lstStyle>
+            <a:lvl1pPr algn="r">
+              <a:defRPr sz="1200"/>
+            </a:lvl1pPr>
+          </a:lstStyle>
+          <a:p>
+            <a:fld id="{CE5E9CC1-C706-0F49-92D6-E571CC5EEA8F}" type="slidenum">
+              <a:rPr lang="en-US"/>
+              <a:t>‹#›</a:t>
+            </a:fld>
+            <a:endParaRPr lang="en-US"/>
+          </a:p>
+        </p:txBody>
+      </p:sp>
     </p:spTree>
     <p:extLst>
       <p:ext uri="{BB962C8B-B14F-4D97-AF65-F5344CB8AC3E}">
-        <p14:creationId xmlns:p14="http://schemas.microsoft.com/office/powerpoint/2010/main" val="1512831517"/>
+        <p14:creationId xmlns:p14="http://schemas.microsoft.com/office/powerpoint/2010/main" val="1024086991"/>
       </p:ext>
     </p:extLst>
   </p:cSld>
@@ -304,6 +523,10 @@
           <a:bodyPr/>
           <a:lstStyle/>
           <a:p>
+            <a:r>
+              <a:rPr lang="en-US" dirty="0"/>
+              <a:t/>
+            </a:r>
             <a:endParaRPr lang="en-US" dirty="0"/>
           </a:p>
         </p:txBody>
@@ -388,6 +611,10 @@
           <a:bodyPr/>
           <a:lstStyle/>
           <a:p>
+            <a:r>
+              <a:rPr lang="en-US" dirty="0"/>
+              <a:t/>
+            </a:r>
             <a:endParaRPr lang="en-US" dirty="0"/>
           </a:p>
         </p:txBody>
@@ -472,6 +699,10 @@
           <a:bodyPr/>
           <a:lstStyle/>
           <a:p>
+            <a:r>
+              <a:rPr lang="en-US" dirty="0"/>
+              <a:t/>
+            </a:r>
             <a:endParaRPr lang="en-US" dirty="0"/>
           </a:p>
         </p:txBody>
@@ -556,6 +787,10 @@
           <a:bodyPr/>
           <a:lstStyle/>
           <a:p>
+            <a:r>
+              <a:rPr lang="en-US" dirty="0"/>
+              <a:t/>
+            </a:r>
             <a:endParaRPr lang="en-US" dirty="0"/>
           </a:p>
         </p:txBody>
@@ -640,6 +875,10 @@
           <a:bodyPr/>
           <a:lstStyle/>
           <a:p>
+            <a:r>
+              <a:rPr lang="en-US" dirty="0"/>
+              <a:t/>
+            </a:r>
             <a:endParaRPr lang="en-US" dirty="0"/>
           </a:p>
         </p:txBody>
@@ -724,6 +963,10 @@
           <a:bodyPr/>
           <a:lstStyle/>
           <a:p>
+            <a:r>
+              <a:rPr lang="en-US" dirty="0"/>
+              <a:t/>
+            </a:r>
             <a:endParaRPr lang="en-US" dirty="0"/>
           </a:p>
         </p:txBody>
@@ -808,6 +1051,10 @@
           <a:bodyPr/>
           <a:lstStyle/>
           <a:p>
+            <a:r>
+              <a:rPr lang="en-US" dirty="0"/>
+              <a:t/>
+            </a:r>
             <a:endParaRPr lang="en-US" dirty="0"/>
           </a:p>
         </p:txBody>
@@ -892,6 +1139,10 @@
           <a:bodyPr/>
           <a:lstStyle/>
           <a:p>
+            <a:r>
+              <a:rPr lang="en-US" dirty="0"/>
+              <a:t/>
+            </a:r>
             <a:endParaRPr lang="en-US" dirty="0"/>
           </a:p>
         </p:txBody>
@@ -976,6 +1227,10 @@
           <a:bodyPr/>
           <a:lstStyle/>
           <a:p>
+            <a:r>
+              <a:rPr lang="en-US" dirty="0"/>
+              <a:t/>
+            </a:r>
             <a:endParaRPr lang="en-US" dirty="0"/>
           </a:p>
         </p:txBody>
@@ -1060,6 +1315,10 @@
           <a:bodyPr/>
           <a:lstStyle/>
           <a:p>
+            <a:r>
+              <a:rPr lang="en-US" dirty="0"/>
+              <a:t/>
+            </a:r>
             <a:endParaRPr lang="en-US" dirty="0"/>
           </a:p>
         </p:txBody>
@@ -1144,6 +1403,10 @@
           <a:bodyPr/>
           <a:lstStyle/>
           <a:p>
+            <a:r>
+              <a:rPr lang="en-US" dirty="0"/>
+              <a:t/>
+            </a:r>
             <a:endParaRPr lang="en-US" dirty="0"/>
           </a:p>
         </p:txBody>
@@ -1228,6 +1491,10 @@
           <a:bodyPr/>
           <a:lstStyle/>
           <a:p>
+            <a:r>
+              <a:rPr lang="en-US" dirty="0"/>
+              <a:t/>
+            </a:r>
             <a:endParaRPr lang="en-US" dirty="0"/>
           </a:p>
         </p:txBody>
@@ -1312,6 +1579,10 @@
           <a:bodyPr/>
           <a:lstStyle/>
           <a:p>
+            <a:r>
+              <a:rPr lang="en-US" dirty="0"/>
+              <a:t/>
+            </a:r>
             <a:endParaRPr lang="en-US" dirty="0"/>
           </a:p>
         </p:txBody>
@@ -1396,6 +1667,10 @@
           <a:bodyPr/>
           <a:lstStyle/>
           <a:p>
+            <a:r>
+              <a:rPr lang="en-US" dirty="0"/>
+              <a:t/>
+            </a:r>
             <a:endParaRPr lang="en-US" dirty="0"/>
           </a:p>
         </p:txBody>
@@ -1480,6 +1755,10 @@
           <a:bodyPr/>
           <a:lstStyle/>
           <a:p>
+            <a:r>
+              <a:rPr lang="en-US" dirty="0"/>
+              <a:t/>
+            </a:r>
             <a:endParaRPr lang="en-US" dirty="0"/>
           </a:p>
         </p:txBody>
@@ -1564,6 +1843,10 @@
           <a:bodyPr/>
           <a:lstStyle/>
           <a:p>
+            <a:r>
+              <a:rPr lang="en-US" dirty="0"/>
+              <a:t/>
+            </a:r>
             <a:endParaRPr lang="en-US" dirty="0"/>
           </a:p>
         </p:txBody>
@@ -1648,6 +1931,10 @@
           <a:bodyPr/>
           <a:lstStyle/>
           <a:p>
+            <a:r>
+              <a:rPr lang="en-US" dirty="0"/>
+              <a:t/>
+            </a:r>
             <a:endParaRPr lang="en-US" dirty="0"/>
           </a:p>
         </p:txBody>
@@ -1732,6 +2019,10 @@
           <a:bodyPr/>
           <a:lstStyle/>
           <a:p>
+            <a:r>
+              <a:rPr lang="en-US" dirty="0"/>
+              <a:t/>
+            </a:r>
             <a:endParaRPr lang="en-US" dirty="0"/>
           </a:p>
         </p:txBody>
@@ -1816,6 +2107,10 @@
           <a:bodyPr/>
           <a:lstStyle/>
           <a:p>
+            <a:r>
+              <a:rPr lang="en-US" dirty="0"/>
+              <a:t/>
+            </a:r>
             <a:endParaRPr lang="en-US" dirty="0"/>
           </a:p>
         </p:txBody>
@@ -1900,6 +2195,10 @@
           <a:bodyPr/>
           <a:lstStyle/>
           <a:p>
+            <a:r>
+              <a:rPr lang="en-US" dirty="0"/>
+              <a:t/>
+            </a:r>
             <a:endParaRPr lang="en-US" dirty="0"/>
           </a:p>
         </p:txBody>
@@ -1984,6 +2283,10 @@
           <a:bodyPr/>
           <a:lstStyle/>
           <a:p>
+            <a:r>
+              <a:rPr lang="en-US" dirty="0"/>
+              <a:t/>
+            </a:r>
             <a:endParaRPr lang="en-US" dirty="0"/>
           </a:p>
         </p:txBody>
@@ -2068,6 +2371,10 @@
           <a:bodyPr/>
           <a:lstStyle/>
           <a:p>
+            <a:r>
+              <a:rPr lang="en-US" dirty="0"/>
+              <a:t/>
+            </a:r>
             <a:endParaRPr lang="en-US" dirty="0"/>
           </a:p>
         </p:txBody>
@@ -2152,6 +2459,10 @@
           <a:bodyPr/>
           <a:lstStyle/>
           <a:p>
+            <a:r>
+              <a:rPr lang="en-US" dirty="0"/>
+              <a:t/>
+            </a:r>
             <a:endParaRPr lang="en-US" dirty="0"/>
           </a:p>
         </p:txBody>
@@ -2236,6 +2547,10 @@
           <a:bodyPr/>
           <a:lstStyle/>
           <a:p>
+            <a:r>
+              <a:rPr lang="en-US" dirty="0"/>
+              <a:t/>
+            </a:r>
             <a:endParaRPr lang="en-US" dirty="0"/>
           </a:p>
         </p:txBody>
@@ -2309,11 +2624,6 @@
 <file path=ppt/slideMasters/slideMaster1.xml><?xml version="1.0" encoding="utf-8"?>
 <p:sldMaster xmlns:a="http://schemas.openxmlformats.org/drawingml/2006/main" xmlns:r="http://schemas.openxmlformats.org/officeDocument/2006/relationships" xmlns:p="http://schemas.openxmlformats.org/presentationml/2006/main">
   <p:cSld>
-    <p:bg>
-      <p:bgRef idx="1001">
-        <a:schemeClr val="bg1"/>
-      </p:bgRef>
-    </p:bg>
     <p:spTree>
       <p:nvGrpSpPr>
         <p:cNvPr id="1" name=""/>
@@ -2596,7 +2906,6 @@
         <a:solidFill>
           <a:srgbClr val="0F172A"/>
         </a:solidFill>
-        <a:effectLst/>
       </p:bgPr>
     </p:bg>
     <p:spTree>
@@ -2634,7 +2943,7 @@
           <a:bodyPr wrap="square" rtlCol="0" anchor="ctr"/>
           <a:lstStyle/>
           <a:p>
-            <a:pPr marL="0" indent="0">
+            <a:pPr indent="0" marL="0">
               <a:buNone/>
             </a:pPr>
             <a:r>
@@ -2646,7 +2955,7 @@
                 <a:ea typeface="Calibri" pitchFamily="34" charset="-122"/>
                 <a:cs typeface="Calibri" pitchFamily="34" charset="-120"/>
               </a:rPr>
-              <a:t>FINAL PROJECT REVIEW  |  ACADEMIC PRESENTATION</a:t>
+              <a:t>FINAL PROJECT TECHNICAL REVIEW  |  DEPARTMENT OF ARTIFICIAL INTELLIGENCE</a:t>
             </a:r>
             <a:endParaRPr lang="en-US" sz="1300" dirty="0"/>
           </a:p>
@@ -2673,7 +2982,7 @@
           <a:bodyPr wrap="square" rtlCol="0" anchor="ctr"/>
           <a:lstStyle/>
           <a:p>
-            <a:pPr marL="0" indent="0">
+            <a:pPr indent="0" marL="0">
               <a:lnSpc>
                 <a:spcPct val="115000"/>
               </a:lnSpc>
@@ -2738,7 +3047,7 @@
           <a:bodyPr wrap="square" rtlCol="0" anchor="ctr"/>
           <a:lstStyle/>
           <a:p>
-            <a:pPr marL="0" indent="0">
+            <a:pPr indent="0" marL="0">
               <a:lnSpc>
                 <a:spcPct val="110000"/>
               </a:lnSpc>
@@ -2753,7 +3062,7 @@
                 <a:ea typeface="Calibri" pitchFamily="34" charset="-122"/>
                 <a:cs typeface="Calibri" pitchFamily="34" charset="-120"/>
               </a:rPr>
-              <a:t>A Deep Learning &amp; Multimodal Framework with Conformal Risk Guarantees and TreeSHAP Explainability for Clinical Diagnostics</a:t>
+              <a:t>A Deep Learning &amp; Multimodal Framework with 95% Conformal Confidence Bounds and TreeSHAP Explainability for Clinical Diagnostics</a:t>
             </a:r>
             <a:endParaRPr lang="en-US" sz="1500" dirty="0"/>
           </a:p>
@@ -2767,8 +3076,8 @@
         </p:nvSpPr>
         <p:spPr>
           <a:xfrm>
-            <a:off x="731519" y="4206240"/>
-            <a:ext cx="10728655" cy="1691640"/>
+            <a:off x="731520" y="4206240"/>
+            <a:ext cx="2476424" cy="1691640"/>
           </a:xfrm>
           <a:prstGeom prst="roundRect">
             <a:avLst>
@@ -2788,14 +3097,53 @@
       </p:sp>
       <p:sp>
         <p:nvSpPr>
+          <p:cNvPr id="7" name="Text 5"/>
+          <p:cNvSpPr/>
+          <p:nvPr/>
+        </p:nvSpPr>
+        <p:spPr>
+          <a:xfrm>
+            <a:off x="960120" y="4389120"/>
+            <a:ext cx="2019224" cy="256032"/>
+          </a:xfrm>
+          <a:prstGeom prst="rect">
+            <a:avLst/>
+          </a:prstGeom>
+          <a:noFill/>
+          <a:ln/>
+        </p:spPr>
+        <p:txBody>
+          <a:bodyPr wrap="square" rtlCol="0" anchor="ctr"/>
+          <a:lstStyle/>
+          <a:p>
+            <a:pPr indent="0" marL="0">
+              <a:buNone/>
+            </a:pPr>
+            <a:r>
+              <a:rPr lang="en-US" sz="1100" b="1" dirty="0">
+                <a:solidFill>
+                  <a:srgbClr val="38BDF8"/>
+                </a:solidFill>
+                <a:latin typeface="Calibri" pitchFamily="34" charset="0"/>
+                <a:ea typeface="Calibri" pitchFamily="34" charset="-122"/>
+                <a:cs typeface="Calibri" pitchFamily="34" charset="-120"/>
+              </a:rPr>
+              <a:t>PROJECT TEAM</a:t>
+            </a:r>
+            <a:endParaRPr lang="en-US" sz="1100" dirty="0"/>
+          </a:p>
+        </p:txBody>
+      </p:sp>
+      <p:sp>
+        <p:nvSpPr>
           <p:cNvPr id="8" name="Text 6"/>
           <p:cNvSpPr/>
           <p:nvPr/>
         </p:nvSpPr>
         <p:spPr>
           <a:xfrm>
-            <a:off x="773824" y="4526279"/>
-            <a:ext cx="10644043" cy="1005840"/>
+            <a:off x="960120" y="4736592"/>
+            <a:ext cx="2019224" cy="1005840"/>
           </a:xfrm>
           <a:prstGeom prst="rect">
             <a:avLst/>
@@ -2807,95 +3155,488 @@
           <a:bodyPr wrap="square" rtlCol="0" anchor="ctr"/>
           <a:lstStyle/>
           <a:p>
-            <a:pPr marL="0" indent="0">
+            <a:pPr indent="0" marL="0">
               <a:lnSpc>
                 <a:spcPct val="115000"/>
               </a:lnSpc>
               <a:buNone/>
             </a:pPr>
             <a:r>
-              <a:rPr lang="en-US" sz="2000" dirty="0">
-                <a:solidFill>
-                  <a:srgbClr val="60A5FA"/>
-                </a:solidFill>
-                <a:latin typeface="Sans Serif Collection" panose="020B0502040504020204" pitchFamily="34" charset="0"/>
-                <a:ea typeface="Sans Serif Collection" panose="020B0502040504020204" pitchFamily="34" charset="0"/>
-                <a:cs typeface="Sans Serif Collection" panose="020B0502040504020204" pitchFamily="34" charset="0"/>
-              </a:rPr>
-              <a:t>Group 15</a:t>
-            </a:r>
-          </a:p>
-          <a:p>
-            <a:pPr>
+              <a:rPr lang="en-US" sz="1250" dirty="0">
+                <a:solidFill>
+                  <a:srgbClr val="F8FAFC"/>
+                </a:solidFill>
+                <a:latin typeface="Calibri" pitchFamily="34" charset="0"/>
+                <a:ea typeface="Calibri" pitchFamily="34" charset="-122"/>
+                <a:cs typeface="Calibri" pitchFamily="34" charset="-120"/>
+              </a:rPr>
+              <a:t>Waibhav Jha (23162)</a:t>
+            </a:r>
+            <a:endParaRPr lang="en-US" sz="1250" dirty="0"/>
+          </a:p>
+          <a:p>
+            <a:pPr indent="0" marL="0">
               <a:lnSpc>
-                <a:spcPts val="2200"/>
+                <a:spcPct val="115000"/>
               </a:lnSpc>
-            </a:pPr>
-            <a:r>
-              <a:rPr lang="en-US" sz="2000" dirty="0">
-                <a:solidFill>
-                  <a:srgbClr val="60A5FA"/>
-                </a:solidFill>
-                <a:latin typeface="Sans Serif Collection" panose="020B0502040504020204" pitchFamily="34" charset="0"/>
-                <a:ea typeface="Sans Serif Collection" panose="020B0502040504020204" pitchFamily="34" charset="0"/>
-                <a:cs typeface="Sans Serif Collection" panose="020B0502040504020204" pitchFamily="34" charset="0"/>
-              </a:rPr>
-              <a:t>Waibhav Jha — CB.SC.U4AIE23162</a:t>
-            </a:r>
-          </a:p>
-          <a:p>
-            <a:pPr>
+              <a:buNone/>
+            </a:pPr>
+            <a:r>
+              <a:rPr lang="en-US" sz="1250" dirty="0">
+                <a:solidFill>
+                  <a:srgbClr val="F8FAFC"/>
+                </a:solidFill>
+                <a:latin typeface="Calibri" pitchFamily="34" charset="0"/>
+                <a:ea typeface="Calibri" pitchFamily="34" charset="-122"/>
+                <a:cs typeface="Calibri" pitchFamily="34" charset="-120"/>
+              </a:rPr>
+              <a:t>Akash Bardia (23102)</a:t>
+            </a:r>
+            <a:endParaRPr lang="en-US" sz="1250" dirty="0"/>
+          </a:p>
+          <a:p>
+            <a:pPr indent="0" marL="0">
               <a:lnSpc>
-                <a:spcPts val="2200"/>
+                <a:spcPct val="115000"/>
               </a:lnSpc>
-            </a:pPr>
-            <a:r>
-              <a:rPr lang="en-US" sz="2000" dirty="0">
-                <a:solidFill>
-                  <a:srgbClr val="60A5FA"/>
-                </a:solidFill>
-                <a:latin typeface="Sans Serif Collection" panose="020B0502040504020204" pitchFamily="34" charset="0"/>
-                <a:ea typeface="Sans Serif Collection" panose="020B0502040504020204" pitchFamily="34" charset="0"/>
-                <a:cs typeface="Sans Serif Collection" panose="020B0502040504020204" pitchFamily="34" charset="0"/>
-              </a:rPr>
-              <a:t>Akash Bardia — CB.SC.U4AIE23102</a:t>
-            </a:r>
-          </a:p>
-          <a:p>
-            <a:pPr>
+              <a:buNone/>
+            </a:pPr>
+            <a:r>
+              <a:rPr lang="en-US" sz="1250" dirty="0">
+                <a:solidFill>
+                  <a:srgbClr val="F8FAFC"/>
+                </a:solidFill>
+                <a:latin typeface="Calibri" pitchFamily="34" charset="0"/>
+                <a:ea typeface="Calibri" pitchFamily="34" charset="-122"/>
+                <a:cs typeface="Calibri" pitchFamily="34" charset="-120"/>
+              </a:rPr>
+              <a:t>Anantharaman (23112)</a:t>
+            </a:r>
+            <a:endParaRPr lang="en-US" sz="1250" dirty="0"/>
+          </a:p>
+          <a:p>
+            <a:pPr indent="0" marL="0">
               <a:lnSpc>
-                <a:spcPts val="2200"/>
+                <a:spcPct val="115000"/>
               </a:lnSpc>
-            </a:pPr>
-            <a:r>
-              <a:rPr lang="en-US" sz="2000" dirty="0">
-                <a:solidFill>
-                  <a:srgbClr val="60A5FA"/>
-                </a:solidFill>
-                <a:latin typeface="Sans Serif Collection" panose="020B0502040504020204" pitchFamily="34" charset="0"/>
-                <a:ea typeface="Sans Serif Collection" panose="020B0502040504020204" pitchFamily="34" charset="0"/>
-                <a:cs typeface="Sans Serif Collection" panose="020B0502040504020204" pitchFamily="34" charset="0"/>
-              </a:rPr>
-              <a:t>Anantharaman T S — CB.SC.U4AIE23112</a:t>
-            </a:r>
-          </a:p>
-          <a:p>
-            <a:pPr>
+              <a:buNone/>
+            </a:pPr>
+            <a:r>
+              <a:rPr lang="en-US" sz="1250" dirty="0">
+                <a:solidFill>
+                  <a:srgbClr val="F8FAFC"/>
+                </a:solidFill>
+                <a:latin typeface="Calibri" pitchFamily="34" charset="0"/>
+                <a:ea typeface="Calibri" pitchFamily="34" charset="-122"/>
+                <a:cs typeface="Calibri" pitchFamily="34" charset="-120"/>
+              </a:rPr>
+              <a:t>K S Jagan (23034)</a:t>
+            </a:r>
+            <a:endParaRPr lang="en-US" sz="1250" dirty="0"/>
+          </a:p>
+        </p:txBody>
+      </p:sp>
+      <p:sp>
+        <p:nvSpPr>
+          <p:cNvPr id="9" name="Shape 7"/>
+          <p:cNvSpPr/>
+          <p:nvPr/>
+        </p:nvSpPr>
+        <p:spPr>
+          <a:xfrm>
+            <a:off x="3482264" y="4206240"/>
+            <a:ext cx="2476424" cy="1691640"/>
+          </a:xfrm>
+          <a:prstGeom prst="roundRect">
+            <a:avLst>
+              <a:gd name="adj" fmla="val 4324"/>
+            </a:avLst>
+          </a:prstGeom>
+          <a:solidFill>
+            <a:srgbClr val="1E293B"/>
+          </a:solidFill>
+          <a:ln w="12700">
+            <a:solidFill>
+              <a:srgbClr val="334155"/>
+            </a:solidFill>
+            <a:prstDash val="solid"/>
+          </a:ln>
+        </p:spPr>
+      </p:sp>
+      <p:sp>
+        <p:nvSpPr>
+          <p:cNvPr id="10" name="Text 8"/>
+          <p:cNvSpPr/>
+          <p:nvPr/>
+        </p:nvSpPr>
+        <p:spPr>
+          <a:xfrm>
+            <a:off x="3710864" y="4389120"/>
+            <a:ext cx="2019224" cy="256032"/>
+          </a:xfrm>
+          <a:prstGeom prst="rect">
+            <a:avLst/>
+          </a:prstGeom>
+          <a:noFill/>
+          <a:ln/>
+        </p:spPr>
+        <p:txBody>
+          <a:bodyPr wrap="square" rtlCol="0" anchor="ctr"/>
+          <a:lstStyle/>
+          <a:p>
+            <a:pPr indent="0" marL="0">
+              <a:buNone/>
+            </a:pPr>
+            <a:r>
+              <a:rPr lang="en-US" sz="1100" b="1" dirty="0">
+                <a:solidFill>
+                  <a:srgbClr val="38BDF8"/>
+                </a:solidFill>
+                <a:latin typeface="Calibri" pitchFamily="34" charset="0"/>
+                <a:ea typeface="Calibri" pitchFamily="34" charset="-122"/>
+                <a:cs typeface="Calibri" pitchFamily="34" charset="-120"/>
+              </a:rPr>
+              <a:t>DEPARTMENT</a:t>
+            </a:r>
+            <a:endParaRPr lang="en-US" sz="1100" dirty="0"/>
+          </a:p>
+        </p:txBody>
+      </p:sp>
+      <p:sp>
+        <p:nvSpPr>
+          <p:cNvPr id="11" name="Text 9"/>
+          <p:cNvSpPr/>
+          <p:nvPr/>
+        </p:nvSpPr>
+        <p:spPr>
+          <a:xfrm>
+            <a:off x="3710864" y="4736592"/>
+            <a:ext cx="2019224" cy="1005840"/>
+          </a:xfrm>
+          <a:prstGeom prst="rect">
+            <a:avLst/>
+          </a:prstGeom>
+          <a:noFill/>
+          <a:ln/>
+        </p:spPr>
+        <p:txBody>
+          <a:bodyPr wrap="square" rtlCol="0" anchor="ctr"/>
+          <a:lstStyle/>
+          <a:p>
+            <a:pPr indent="0" marL="0">
               <a:lnSpc>
-                <a:spcPts val="2200"/>
+                <a:spcPct val="115000"/>
               </a:lnSpc>
-            </a:pPr>
-            <a:r>
-              <a:rPr lang="en-US" sz="2000" dirty="0">
-                <a:solidFill>
-                  <a:srgbClr val="60A5FA"/>
-                </a:solidFill>
-                <a:latin typeface="Sans Serif Collection" panose="020B0502040504020204" pitchFamily="34" charset="0"/>
-                <a:ea typeface="Sans Serif Collection" panose="020B0502040504020204" pitchFamily="34" charset="0"/>
-                <a:cs typeface="Sans Serif Collection" panose="020B0502040504020204" pitchFamily="34" charset="0"/>
-              </a:rPr>
-              <a:t>K S Jagan — CB.SC.U4AIE23034</a:t>
-            </a:r>
+              <a:buNone/>
+            </a:pPr>
+            <a:r>
+              <a:rPr lang="en-US" sz="1250" dirty="0">
+                <a:solidFill>
+                  <a:srgbClr val="F8FAFC"/>
+                </a:solidFill>
+                <a:latin typeface="Calibri" pitchFamily="34" charset="0"/>
+                <a:ea typeface="Calibri" pitchFamily="34" charset="-122"/>
+                <a:cs typeface="Calibri" pitchFamily="34" charset="-120"/>
+              </a:rPr>
+              <a:t>Department of AI</a:t>
+            </a:r>
+            <a:endParaRPr lang="en-US" sz="1250" dirty="0"/>
+          </a:p>
+          <a:p>
+            <a:pPr indent="0" marL="0">
+              <a:lnSpc>
+                <a:spcPct val="115000"/>
+              </a:lnSpc>
+              <a:buNone/>
+            </a:pPr>
+            <a:r>
+              <a:rPr lang="en-US" sz="1250" dirty="0">
+                <a:solidFill>
+                  <a:srgbClr val="F8FAFC"/>
+                </a:solidFill>
+                <a:latin typeface="Calibri" pitchFamily="34" charset="0"/>
+                <a:ea typeface="Calibri" pitchFamily="34" charset="-122"/>
+                <a:cs typeface="Calibri" pitchFamily="34" charset="-120"/>
+              </a:rPr>
+              <a:t>School of Computing</a:t>
+            </a:r>
+            <a:endParaRPr lang="en-US" sz="1250" dirty="0"/>
+          </a:p>
+          <a:p>
+            <a:pPr indent="0" marL="0">
+              <a:lnSpc>
+                <a:spcPct val="115000"/>
+              </a:lnSpc>
+              <a:buNone/>
+            </a:pPr>
+            <a:r>
+              <a:rPr lang="en-US" sz="1250" dirty="0">
+                <a:solidFill>
+                  <a:srgbClr val="F8FAFC"/>
+                </a:solidFill>
+                <a:latin typeface="Calibri" pitchFamily="34" charset="0"/>
+                <a:ea typeface="Calibri" pitchFamily="34" charset="-122"/>
+                <a:cs typeface="Calibri" pitchFamily="34" charset="-120"/>
+              </a:rPr>
+              <a:t>Amrita Vishwa Vidyapeetham</a:t>
+            </a:r>
+            <a:endParaRPr lang="en-US" sz="1250" dirty="0"/>
+          </a:p>
+        </p:txBody>
+      </p:sp>
+      <p:sp>
+        <p:nvSpPr>
+          <p:cNvPr id="12" name="Shape 10"/>
+          <p:cNvSpPr/>
+          <p:nvPr/>
+        </p:nvSpPr>
+        <p:spPr>
+          <a:xfrm>
+            <a:off x="6233008" y="4206240"/>
+            <a:ext cx="2476424" cy="1691640"/>
+          </a:xfrm>
+          <a:prstGeom prst="roundRect">
+            <a:avLst>
+              <a:gd name="adj" fmla="val 4324"/>
+            </a:avLst>
+          </a:prstGeom>
+          <a:solidFill>
+            <a:srgbClr val="1E293B"/>
+          </a:solidFill>
+          <a:ln w="12700">
+            <a:solidFill>
+              <a:srgbClr val="334155"/>
+            </a:solidFill>
+            <a:prstDash val="solid"/>
+          </a:ln>
+        </p:spPr>
+      </p:sp>
+      <p:sp>
+        <p:nvSpPr>
+          <p:cNvPr id="13" name="Text 11"/>
+          <p:cNvSpPr/>
+          <p:nvPr/>
+        </p:nvSpPr>
+        <p:spPr>
+          <a:xfrm>
+            <a:off x="6461608" y="4389120"/>
+            <a:ext cx="2019224" cy="256032"/>
+          </a:xfrm>
+          <a:prstGeom prst="rect">
+            <a:avLst/>
+          </a:prstGeom>
+          <a:noFill/>
+          <a:ln/>
+        </p:spPr>
+        <p:txBody>
+          <a:bodyPr wrap="square" rtlCol="0" anchor="ctr"/>
+          <a:lstStyle/>
+          <a:p>
+            <a:pPr indent="0" marL="0">
+              <a:buNone/>
+            </a:pPr>
+            <a:r>
+              <a:rPr lang="en-US" sz="1100" b="1" dirty="0">
+                <a:solidFill>
+                  <a:srgbClr val="38BDF8"/>
+                </a:solidFill>
+                <a:latin typeface="Calibri" pitchFamily="34" charset="0"/>
+                <a:ea typeface="Calibri" pitchFamily="34" charset="-122"/>
+                <a:cs typeface="Calibri" pitchFamily="34" charset="-120"/>
+              </a:rPr>
+              <a:t>KEY INNOVATION</a:t>
+            </a:r>
+            <a:endParaRPr lang="en-US" sz="1100" dirty="0"/>
+          </a:p>
+        </p:txBody>
+      </p:sp>
+      <p:sp>
+        <p:nvSpPr>
+          <p:cNvPr id="14" name="Text 12"/>
+          <p:cNvSpPr/>
+          <p:nvPr/>
+        </p:nvSpPr>
+        <p:spPr>
+          <a:xfrm>
+            <a:off x="6461608" y="4736592"/>
+            <a:ext cx="2019224" cy="1005840"/>
+          </a:xfrm>
+          <a:prstGeom prst="rect">
+            <a:avLst/>
+          </a:prstGeom>
+          <a:noFill/>
+          <a:ln/>
+        </p:spPr>
+        <p:txBody>
+          <a:bodyPr wrap="square" rtlCol="0" anchor="ctr"/>
+          <a:lstStyle/>
+          <a:p>
+            <a:pPr indent="0" marL="0">
+              <a:lnSpc>
+                <a:spcPct val="115000"/>
+              </a:lnSpc>
+              <a:buNone/>
+            </a:pPr>
+            <a:r>
+              <a:rPr lang="en-US" sz="1250" dirty="0">
+                <a:solidFill>
+                  <a:srgbClr val="F8FAFC"/>
+                </a:solidFill>
+                <a:latin typeface="Calibri" pitchFamily="34" charset="0"/>
+                <a:ea typeface="Calibri" pitchFamily="34" charset="-122"/>
+                <a:cs typeface="Calibri" pitchFamily="34" charset="-120"/>
+              </a:rPr>
+              <a:t>Tabular ResNet + Multimodal</a:t>
+            </a:r>
+            <a:endParaRPr lang="en-US" sz="1250" dirty="0"/>
+          </a:p>
+          <a:p>
+            <a:pPr indent="0" marL="0">
+              <a:lnSpc>
+                <a:spcPct val="115000"/>
+              </a:lnSpc>
+              <a:buNone/>
+            </a:pPr>
+            <a:r>
+              <a:rPr lang="en-US" sz="1250" dirty="0">
+                <a:solidFill>
+                  <a:srgbClr val="F8FAFC"/>
+                </a:solidFill>
+                <a:latin typeface="Calibri" pitchFamily="34" charset="0"/>
+                <a:ea typeface="Calibri" pitchFamily="34" charset="-122"/>
+                <a:cs typeface="Calibri" pitchFamily="34" charset="-120"/>
+              </a:rPr>
+              <a:t>Over 60% Drop in Missed Diseases</a:t>
+            </a:r>
+            <a:endParaRPr lang="en-US" sz="1250" dirty="0"/>
+          </a:p>
+        </p:txBody>
+      </p:sp>
+      <p:sp>
+        <p:nvSpPr>
+          <p:cNvPr id="15" name="Shape 13"/>
+          <p:cNvSpPr/>
+          <p:nvPr/>
+        </p:nvSpPr>
+        <p:spPr>
+          <a:xfrm>
+            <a:off x="8983751" y="4206240"/>
+            <a:ext cx="2476424" cy="1691640"/>
+          </a:xfrm>
+          <a:prstGeom prst="roundRect">
+            <a:avLst>
+              <a:gd name="adj" fmla="val 4324"/>
+            </a:avLst>
+          </a:prstGeom>
+          <a:solidFill>
+            <a:srgbClr val="1E293B"/>
+          </a:solidFill>
+          <a:ln w="12700">
+            <a:solidFill>
+              <a:srgbClr val="334155"/>
+            </a:solidFill>
+            <a:prstDash val="solid"/>
+          </a:ln>
+        </p:spPr>
+      </p:sp>
+      <p:sp>
+        <p:nvSpPr>
+          <p:cNvPr id="16" name="Text 14"/>
+          <p:cNvSpPr/>
+          <p:nvPr/>
+        </p:nvSpPr>
+        <p:spPr>
+          <a:xfrm>
+            <a:off x="9212351" y="4389120"/>
+            <a:ext cx="2019224" cy="256032"/>
+          </a:xfrm>
+          <a:prstGeom prst="rect">
+            <a:avLst/>
+          </a:prstGeom>
+          <a:noFill/>
+          <a:ln/>
+        </p:spPr>
+        <p:txBody>
+          <a:bodyPr wrap="square" rtlCol="0" anchor="ctr"/>
+          <a:lstStyle/>
+          <a:p>
+            <a:pPr indent="0" marL="0">
+              <a:buNone/>
+            </a:pPr>
+            <a:r>
+              <a:rPr lang="en-US" sz="1100" b="1" dirty="0">
+                <a:solidFill>
+                  <a:srgbClr val="38BDF8"/>
+                </a:solidFill>
+                <a:latin typeface="Calibri" pitchFamily="34" charset="0"/>
+                <a:ea typeface="Calibri" pitchFamily="34" charset="-122"/>
+                <a:cs typeface="Calibri" pitchFamily="34" charset="-120"/>
+              </a:rPr>
+              <a:t>CLINICAL OUTCOME</a:t>
+            </a:r>
+            <a:endParaRPr lang="en-US" sz="1100" dirty="0"/>
+          </a:p>
+        </p:txBody>
+      </p:sp>
+      <p:sp>
+        <p:nvSpPr>
+          <p:cNvPr id="17" name="Text 15"/>
+          <p:cNvSpPr/>
+          <p:nvPr/>
+        </p:nvSpPr>
+        <p:spPr>
+          <a:xfrm>
+            <a:off x="9212351" y="4736592"/>
+            <a:ext cx="2019224" cy="1005840"/>
+          </a:xfrm>
+          <a:prstGeom prst="rect">
+            <a:avLst/>
+          </a:prstGeom>
+          <a:noFill/>
+          <a:ln/>
+        </p:spPr>
+        <p:txBody>
+          <a:bodyPr wrap="square" rtlCol="0" anchor="ctr"/>
+          <a:lstStyle/>
+          <a:p>
+            <a:pPr indent="0" marL="0">
+              <a:lnSpc>
+                <a:spcPct val="115000"/>
+              </a:lnSpc>
+              <a:buNone/>
+            </a:pPr>
+            <a:r>
+              <a:rPr lang="en-US" sz="1250" dirty="0">
+                <a:solidFill>
+                  <a:srgbClr val="F8FAFC"/>
+                </a:solidFill>
+                <a:latin typeface="Calibri" pitchFamily="34" charset="0"/>
+                <a:ea typeface="Calibri" pitchFamily="34" charset="-122"/>
+                <a:cs typeface="Calibri" pitchFamily="34" charset="-120"/>
+              </a:rPr>
+              <a:t>0% Data Leakage Split</a:t>
+            </a:r>
+            <a:endParaRPr lang="en-US" sz="1250" dirty="0"/>
+          </a:p>
+          <a:p>
+            <a:pPr indent="0" marL="0">
+              <a:lnSpc>
+                <a:spcPct val="115000"/>
+              </a:lnSpc>
+              <a:buNone/>
+            </a:pPr>
+            <a:r>
+              <a:rPr lang="en-US" sz="1250" dirty="0">
+                <a:solidFill>
+                  <a:srgbClr val="F8FAFC"/>
+                </a:solidFill>
+                <a:latin typeface="Calibri" pitchFamily="34" charset="0"/>
+                <a:ea typeface="Calibri" pitchFamily="34" charset="-122"/>
+                <a:cs typeface="Calibri" pitchFamily="34" charset="-120"/>
+              </a:rPr>
+              <a:t>48.8% of 34k VUS Resolved</a:t>
+            </a:r>
+            <a:endParaRPr lang="en-US" sz="1250" dirty="0"/>
           </a:p>
         </p:txBody>
       </p:sp>
@@ -2915,7 +3656,6 @@
         <a:solidFill>
           <a:srgbClr val="F8FAFC"/>
         </a:solidFill>
-        <a:effectLst/>
       </p:bgPr>
     </p:bg>
     <p:spTree>
@@ -2953,7 +3693,7 @@
           <a:bodyPr wrap="square" rtlCol="0" anchor="ctr"/>
           <a:lstStyle/>
           <a:p>
-            <a:pPr marL="0" indent="0">
+            <a:pPr indent="0" marL="0">
               <a:buNone/>
             </a:pPr>
             <a:r>
@@ -2992,7 +3732,7 @@
           <a:bodyPr wrap="square" lIns="0" tIns="0" rIns="0" bIns="0" rtlCol="0" anchor="ctr"/>
           <a:lstStyle/>
           <a:p>
-            <a:pPr marL="0" indent="0">
+            <a:pPr indent="0" marL="0">
               <a:buNone/>
             </a:pPr>
             <a:r>
@@ -3031,7 +3771,7 @@
           <a:bodyPr wrap="square" lIns="0" tIns="0" rIns="0" bIns="0" rtlCol="0" anchor="ctr"/>
           <a:lstStyle/>
           <a:p>
-            <a:pPr marL="0" indent="0">
+            <a:pPr indent="0" marL="0">
               <a:buNone/>
             </a:pPr>
             <a:r>
@@ -3043,7 +3783,7 @@
                 <a:ea typeface="Calibri" pitchFamily="34" charset="-122"/>
                 <a:cs typeface="Calibri" pitchFamily="34" charset="-120"/>
               </a:rPr>
-              <a:t>Standardizing heterogeneous multi-database coordinates and resolving interval overlaps</a:t>
+              <a:t>Standardizing different database coordinates and matching overlapping genomic regions</a:t>
             </a:r>
             <a:endParaRPr lang="en-US" sz="1400" dirty="0"/>
           </a:p>
@@ -3093,7 +3833,7 @@
           <a:bodyPr wrap="square" rtlCol="0" anchor="ctr"/>
           <a:lstStyle/>
           <a:p>
-            <a:pPr marL="0" indent="0">
+            <a:pPr indent="0" marL="0">
               <a:buNone/>
             </a:pPr>
             <a:r>
@@ -3105,7 +3845,7 @@
                 <a:ea typeface="Calibri" pitchFamily="34" charset="-122"/>
                 <a:cs typeface="Calibri" pitchFamily="34" charset="-120"/>
               </a:rPr>
-              <a:t>Group 15  |  Final Project Review  |  AI-Based Structural Variant Prioritization</a:t>
+              <a:t>Department of Artificial Intelligence  |  Final Project Review  |  Amrita Vishwa Vidyapeetham</a:t>
             </a:r>
             <a:endParaRPr lang="en-US" sz="1100" dirty="0"/>
           </a:p>
@@ -3132,7 +3872,7 @@
           <a:bodyPr wrap="square" rtlCol="0" anchor="ctr"/>
           <a:lstStyle/>
           <a:p>
-            <a:pPr marL="0" indent="0" algn="r">
+            <a:pPr algn="r" indent="0" marL="0">
               <a:buNone/>
             </a:pPr>
             <a:r>
@@ -3198,7 +3938,7 @@
           <a:bodyPr wrap="square" lIns="0" tIns="0" rIns="0" bIns="0" rtlCol="0" anchor="ctr"/>
           <a:lstStyle/>
           <a:p>
-            <a:pPr marL="0" indent="0">
+            <a:pPr indent="0" marL="0">
               <a:buNone/>
             </a:pPr>
             <a:r>
@@ -3210,7 +3950,7 @@
                 <a:ea typeface="Calibri" pitchFamily="34" charset="-122"/>
                 <a:cs typeface="Calibri" pitchFamily="34" charset="-120"/>
               </a:rPr>
-              <a:t>Coordinate Standardization</a:t>
+              <a:t>Standardizing Coordinates</a:t>
             </a:r>
             <a:endParaRPr lang="en-US" sz="1800" dirty="0"/>
           </a:p>
@@ -3237,7 +3977,7 @@
           <a:bodyPr wrap="square" lIns="0" tIns="0" rIns="0" bIns="0" rtlCol="0" anchor="ctr"/>
           <a:lstStyle/>
           <a:p>
-            <a:pPr marL="0" indent="0">
+            <a:pPr indent="0" marL="0">
               <a:buNone/>
             </a:pPr>
             <a:r>
@@ -3299,7 +4039,7 @@
           <a:bodyPr wrap="square" lIns="0" tIns="0" rIns="0" bIns="0" rtlCol="0" anchor="ctr"/>
           <a:lstStyle/>
           <a:p>
-            <a:pPr marL="0" indent="0">
+            <a:pPr indent="0" marL="0">
               <a:lnSpc>
                 <a:spcPct val="125000"/>
               </a:lnSpc>
@@ -3314,7 +4054,7 @@
                 <a:ea typeface="Calibri" pitchFamily="34" charset="-122"/>
                 <a:cs typeface="Calibri" pitchFamily="34" charset="-120"/>
               </a:rPr>
-              <a:t>All coordinates were mapped to the GRCh38/hg38 human reference assembly. Chromosomal nomenclature was unified to strict numerical and sex chromosomes (chr1–chr22, chrX, chrY). Unplaced contigs and centromeric gaps were pruned.</a:t>
+              <a:t>All coordinates were converted to the latest human reference genome (GRCh38). Chromosome names were standardized (Chr 1 to 22, X, Y), and unplaced fragments were pruned.</a:t>
             </a:r>
             <a:endParaRPr lang="en-US" sz="1350" dirty="0"/>
           </a:p>
@@ -3368,7 +4108,7 @@
           <a:bodyPr wrap="square" lIns="0" tIns="0" rIns="0" bIns="0" rtlCol="0" anchor="ctr"/>
           <a:lstStyle/>
           <a:p>
-            <a:pPr marL="0" indent="0">
+            <a:pPr indent="0" marL="0">
               <a:buNone/>
             </a:pPr>
             <a:r>
@@ -3407,7 +4147,7 @@
           <a:bodyPr wrap="square" lIns="0" tIns="0" rIns="0" bIns="0" rtlCol="0" anchor="ctr"/>
           <a:lstStyle/>
           <a:p>
-            <a:pPr marL="0" indent="0">
+            <a:pPr indent="0" marL="0">
               <a:buNone/>
             </a:pPr>
             <a:r>
@@ -3419,7 +4159,7 @@
                 <a:ea typeface="Calibri" pitchFamily="34" charset="-122"/>
                 <a:cs typeface="Calibri" pitchFamily="34" charset="-120"/>
               </a:rPr>
-              <a:t>Precise Interval Matching</a:t>
+              <a:t>Preventing False Matches</a:t>
             </a:r>
             <a:endParaRPr lang="en-US" sz="1250" dirty="0"/>
           </a:p>
@@ -3469,7 +4209,7 @@
           <a:bodyPr wrap="square" lIns="0" tIns="0" rIns="0" bIns="0" rtlCol="0" anchor="ctr"/>
           <a:lstStyle/>
           <a:p>
-            <a:pPr marL="0" indent="0">
+            <a:pPr indent="0" marL="0">
               <a:lnSpc>
                 <a:spcPct val="125000"/>
               </a:lnSpc>
@@ -3484,7 +4224,7 @@
                 <a:ea typeface="Calibri" pitchFamily="34" charset="-122"/>
                 <a:cs typeface="Calibri" pitchFamily="34" charset="-120"/>
               </a:rPr>
-              <a:t>Variants between patient VCFs and gnomAD are matched strictly using reciprocal coordinate overlap: (A ∩ B) / size(A) &gt;= 0.50 and (A ∩ B) / size(B) &gt;= 0.50. Prevents spurious cross-matches between adjacent distinct variants.</a:t>
+              <a:t>Variants from patient files and gnomAD are matched only if they share at least 50% of their DNA length. This prevents accidentally matching two different neighboring mutations.</a:t>
             </a:r>
             <a:endParaRPr lang="en-US" sz="1350" dirty="0"/>
           </a:p>
@@ -3538,7 +4278,7 @@
           <a:bodyPr wrap="square" lIns="0" tIns="0" rIns="0" bIns="0" rtlCol="0" anchor="ctr"/>
           <a:lstStyle/>
           <a:p>
-            <a:pPr marL="0" indent="0">
+            <a:pPr indent="0" marL="0">
               <a:buNone/>
             </a:pPr>
             <a:r>
@@ -3550,7 +4290,7 @@
                 <a:ea typeface="Calibri" pitchFamily="34" charset="-122"/>
                 <a:cs typeface="Calibri" pitchFamily="34" charset="-120"/>
               </a:rPr>
-              <a:t>Label Consolidation</a:t>
+              <a:t>Binary Label Mapping</a:t>
             </a:r>
             <a:endParaRPr lang="en-US" sz="1800" dirty="0"/>
           </a:p>
@@ -3577,7 +4317,7 @@
           <a:bodyPr wrap="square" lIns="0" tIns="0" rIns="0" bIns="0" rtlCol="0" anchor="ctr"/>
           <a:lstStyle/>
           <a:p>
-            <a:pPr marL="0" indent="0">
+            <a:pPr indent="0" marL="0">
               <a:buNone/>
             </a:pPr>
             <a:r>
@@ -3589,7 +4329,7 @@
                 <a:ea typeface="Calibri" pitchFamily="34" charset="-122"/>
                 <a:cs typeface="Calibri" pitchFamily="34" charset="-120"/>
               </a:rPr>
-              <a:t>Binary Ground Truth Matrix</a:t>
+              <a:t>Ground Truth Formulation</a:t>
             </a:r>
             <a:endParaRPr lang="en-US" sz="1250" dirty="0"/>
           </a:p>
@@ -3639,7 +4379,7 @@
           <a:bodyPr wrap="square" lIns="0" tIns="0" rIns="0" bIns="0" rtlCol="0" anchor="ctr"/>
           <a:lstStyle/>
           <a:p>
-            <a:pPr marL="0" indent="0">
+            <a:pPr indent="0" marL="0">
               <a:lnSpc>
                 <a:spcPct val="125000"/>
               </a:lnSpc>
@@ -3654,7 +4394,7 @@
                 <a:ea typeface="Calibri" pitchFamily="34" charset="-122"/>
                 <a:cs typeface="Calibri" pitchFamily="34" charset="-120"/>
               </a:rPr>
-              <a:t>ClinVar assertions were mapped to binary ground truth: Pathogenic &amp; Likely Pathogenic (Y = 1); Benign &amp; Likely Benign (Y = 0). Ambiguous VUS records (N = 34,466) were segregated for post-training downstream clinical triage.</a:t>
+              <a:t>ClinVar labels were cleanly grouped into binary ground truth: 1 = Disease-Causing (Pathogenic), 0 = Harmless (Benign). 34,466 uncertain variants were saved for real-world testing.</a:t>
             </a:r>
             <a:endParaRPr lang="en-US" sz="1350" dirty="0"/>
           </a:p>
@@ -3676,7 +4416,6 @@
         <a:solidFill>
           <a:srgbClr val="F8FAFC"/>
         </a:solidFill>
-        <a:effectLst/>
       </p:bgPr>
     </p:bg>
     <p:spTree>
@@ -3714,7 +4453,7 @@
           <a:bodyPr wrap="square" rtlCol="0" anchor="ctr"/>
           <a:lstStyle/>
           <a:p>
-            <a:pPr marL="0" indent="0">
+            <a:pPr indent="0" marL="0">
               <a:buNone/>
             </a:pPr>
             <a:r>
@@ -3753,7 +4492,7 @@
           <a:bodyPr wrap="square" lIns="0" tIns="0" rIns="0" bIns="0" rtlCol="0" anchor="ctr"/>
           <a:lstStyle/>
           <a:p>
-            <a:pPr marL="0" indent="0">
+            <a:pPr indent="0" marL="0">
               <a:buNone/>
             </a:pPr>
             <a:r>
@@ -3792,7 +4531,7 @@
           <a:bodyPr wrap="square" lIns="0" tIns="0" rIns="0" bIns="0" rtlCol="0" anchor="ctr"/>
           <a:lstStyle/>
           <a:p>
-            <a:pPr marL="0" indent="0">
+            <a:pPr indent="0" marL="0">
               <a:buNone/>
             </a:pPr>
             <a:r>
@@ -3804,7 +4543,7 @@
                 <a:ea typeface="Calibri" pitchFamily="34" charset="-122"/>
                 <a:cs typeface="Calibri" pitchFamily="34" charset="-120"/>
               </a:rPr>
-              <a:t>Strong biological divergence between pathogenic and benign structural variants confirms ML signal</a:t>
+              <a:t>Key biological patterns that give machine learning models a strong predictive signal</a:t>
             </a:r>
             <a:endParaRPr lang="en-US" sz="1400" dirty="0"/>
           </a:p>
@@ -3854,7 +4593,7 @@
           <a:bodyPr wrap="square" rtlCol="0" anchor="ctr"/>
           <a:lstStyle/>
           <a:p>
-            <a:pPr marL="0" indent="0">
+            <a:pPr indent="0" marL="0">
               <a:buNone/>
             </a:pPr>
             <a:r>
@@ -3866,7 +4605,7 @@
                 <a:ea typeface="Calibri" pitchFamily="34" charset="-122"/>
                 <a:cs typeface="Calibri" pitchFamily="34" charset="-120"/>
               </a:rPr>
-              <a:t>Group 15  |  Final Project Review  |  AI-Based Structural Variant Prioritization</a:t>
+              <a:t>Department of Artificial Intelligence  |  Final Project Review  |  Amrita Vishwa Vidyapeetham</a:t>
             </a:r>
             <a:endParaRPr lang="en-US" sz="1100" dirty="0"/>
           </a:p>
@@ -3893,7 +4632,7 @@
           <a:bodyPr wrap="square" rtlCol="0" anchor="ctr"/>
           <a:lstStyle/>
           <a:p>
-            <a:pPr marL="0" indent="0" algn="r">
+            <a:pPr algn="r" indent="0" marL="0">
               <a:buNone/>
             </a:pPr>
             <a:r>
@@ -3959,7 +4698,7 @@
           <a:bodyPr wrap="square" lIns="0" tIns="0" rIns="0" bIns="0" rtlCol="0" anchor="ctr"/>
           <a:lstStyle/>
           <a:p>
-            <a:pPr marL="0" indent="0">
+            <a:pPr indent="0" marL="0">
               <a:buNone/>
             </a:pPr>
             <a:r>
@@ -3971,7 +4710,7 @@
                 <a:ea typeface="Calibri" pitchFamily="34" charset="-122"/>
                 <a:cs typeface="Calibri" pitchFamily="34" charset="-120"/>
               </a:rPr>
-              <a:t>Variant Type Dominance</a:t>
+              <a:t>Missing DNA is More Harmful</a:t>
             </a:r>
             <a:endParaRPr lang="en-US" sz="1800" dirty="0"/>
           </a:p>
@@ -3998,7 +4737,7 @@
           <a:bodyPr wrap="square" lIns="0" tIns="0" rIns="0" bIns="0" rtlCol="0" anchor="ctr"/>
           <a:lstStyle/>
           <a:p>
-            <a:pPr marL="0" indent="0">
+            <a:pPr indent="0" marL="0">
               <a:buNone/>
             </a:pPr>
             <a:r>
@@ -4060,7 +4799,7 @@
           <a:bodyPr wrap="square" lIns="0" tIns="0" rIns="0" bIns="0" rtlCol="0" anchor="ctr"/>
           <a:lstStyle/>
           <a:p>
-            <a:pPr marL="0" indent="0">
+            <a:pPr indent="0" marL="0">
               <a:buNone/>
             </a:pPr>
             <a:r>
@@ -4099,7 +4838,7 @@
           <a:bodyPr wrap="square" lIns="0" tIns="0" rIns="0" bIns="0" rtlCol="0" anchor="ctr"/>
           <a:lstStyle/>
           <a:p>
-            <a:pPr marL="0" indent="0">
+            <a:pPr indent="0" marL="0">
               <a:buNone/>
             </a:pPr>
             <a:r>
@@ -4111,7 +4850,7 @@
                 <a:ea typeface="Calibri" pitchFamily="34" charset="-122"/>
                 <a:cs typeface="Calibri" pitchFamily="34" charset="-120"/>
               </a:rPr>
-              <a:t>Deletions in Pathogenic SVs</a:t>
+              <a:t>Deletions in Disease Variants</a:t>
             </a:r>
             <a:endParaRPr lang="en-US" sz="1150" dirty="0"/>
           </a:p>
@@ -4138,7 +4877,7 @@
           <a:bodyPr wrap="square" lIns="0" tIns="0" rIns="0" bIns="0" rtlCol="0" anchor="ctr"/>
           <a:lstStyle/>
           <a:p>
-            <a:pPr marL="0" indent="0">
+            <a:pPr indent="0" marL="0">
               <a:lnSpc>
                 <a:spcPct val="125000"/>
               </a:lnSpc>
@@ -4153,7 +4892,7 @@
                 <a:ea typeface="Calibri" pitchFamily="34" charset="-122"/>
                 <a:cs typeface="Calibri" pitchFamily="34" charset="-120"/>
               </a:rPr>
-              <a:t>Deletions dominate pathogenic assertions because loss of coding exons causes irreversible haploinsufficiency. Duplications (40.7%) are more frequently tolerated as copy-number polymorphisms unless overlapping dosage-sensitive genes.</a:t>
+              <a:t>Deletions make up 58.1% of disease-causing mutations because completely losing a DNA segment breaks essential genes. In contrast, duplications (extra copies) are often tolerated by the body and are much more likely to be harmless.</a:t>
             </a:r>
             <a:endParaRPr lang="en-US" sz="1300" dirty="0"/>
           </a:p>
@@ -4207,7 +4946,7 @@
           <a:bodyPr wrap="square" lIns="0" tIns="0" rIns="0" bIns="0" rtlCol="0" anchor="ctr"/>
           <a:lstStyle/>
           <a:p>
-            <a:pPr marL="0" indent="0">
+            <a:pPr indent="0" marL="0">
               <a:buNone/>
             </a:pPr>
             <a:r>
@@ -4219,7 +4958,7 @@
                 <a:ea typeface="Calibri" pitchFamily="34" charset="-122"/>
                 <a:cs typeface="Calibri" pitchFamily="34" charset="-120"/>
               </a:rPr>
-              <a:t>Bimodal Size Distribution</a:t>
+              <a:t>Two Clear Mutation Sizes</a:t>
             </a:r>
             <a:endParaRPr lang="en-US" sz="1800" dirty="0"/>
           </a:p>
@@ -4246,7 +4985,7 @@
           <a:bodyPr wrap="square" lIns="0" tIns="0" rIns="0" bIns="0" rtlCol="0" anchor="ctr"/>
           <a:lstStyle/>
           <a:p>
-            <a:pPr marL="0" indent="0">
+            <a:pPr indent="0" marL="0">
               <a:buNone/>
             </a:pPr>
             <a:r>
@@ -4258,7 +4997,7 @@
                 <a:ea typeface="Calibri" pitchFamily="34" charset="-122"/>
                 <a:cs typeface="Calibri" pitchFamily="34" charset="-120"/>
               </a:rPr>
-              <a:t>Retrotransposon Hotspots</a:t>
+              <a:t>Distinct Structural Peaks</a:t>
             </a:r>
             <a:endParaRPr lang="en-US" sz="1250" dirty="0"/>
           </a:p>
@@ -4308,7 +5047,7 @@
           <a:bodyPr wrap="square" lIns="0" tIns="0" rIns="0" bIns="0" rtlCol="0" anchor="ctr"/>
           <a:lstStyle/>
           <a:p>
-            <a:pPr marL="0" indent="0">
+            <a:pPr indent="0" marL="0">
               <a:buNone/>
             </a:pPr>
             <a:r>
@@ -4347,7 +5086,7 @@
           <a:bodyPr wrap="square" lIns="0" tIns="0" rIns="0" bIns="0" rtlCol="0" anchor="ctr"/>
           <a:lstStyle/>
           <a:p>
-            <a:pPr marL="0" indent="0">
+            <a:pPr indent="0" marL="0">
               <a:buNone/>
             </a:pPr>
             <a:r>
@@ -4359,7 +5098,7 @@
                 <a:ea typeface="Calibri" pitchFamily="34" charset="-122"/>
                 <a:cs typeface="Calibri" pitchFamily="34" charset="-120"/>
               </a:rPr>
-              <a:t>Distinct Structural Peaks</a:t>
+              <a:t>Clustered Length Peaks</a:t>
             </a:r>
             <a:endParaRPr lang="en-US" sz="1150" dirty="0"/>
           </a:p>
@@ -4386,7 +5125,7 @@
           <a:bodyPr wrap="square" lIns="0" tIns="0" rIns="0" bIns="0" rtlCol="0" anchor="ctr"/>
           <a:lstStyle/>
           <a:p>
-            <a:pPr marL="0" indent="0">
+            <a:pPr indent="0" marL="0">
               <a:lnSpc>
                 <a:spcPct val="125000"/>
               </a:lnSpc>
@@ -4401,7 +5140,7 @@
                 <a:ea typeface="Calibri" pitchFamily="34" charset="-122"/>
                 <a:cs typeface="Calibri" pitchFamily="34" charset="-120"/>
               </a:rPr>
-              <a:t>Structural variants follow a pronounced bimodal length spectrum. The first peak (~300 bp) aligns with Alu element retrotransposition; the second peak (~6,000 bp) corresponds to LINE-1 (L1) mobile element insertions and NHEJ double-strand break repair.</a:t>
+              <a:t>Mutations naturally cluster into two distinct sizes: smaller jumps (~300 base pairs) and larger genomic cuts (~6,000 base pairs). This clear bimodal pattern gives our machine learning models a strong numerical signal to separate different variant types.</a:t>
             </a:r>
             <a:endParaRPr lang="en-US" sz="1300" dirty="0"/>
           </a:p>
@@ -4455,7 +5194,7 @@
           <a:bodyPr wrap="square" lIns="0" tIns="0" rIns="0" bIns="0" rtlCol="0" anchor="ctr"/>
           <a:lstStyle/>
           <a:p>
-            <a:pPr marL="0" indent="0">
+            <a:pPr indent="0" marL="0">
               <a:buNone/>
             </a:pPr>
             <a:r>
@@ -4467,7 +5206,7 @@
                 <a:ea typeface="Calibri" pitchFamily="34" charset="-122"/>
                 <a:cs typeface="Calibri" pitchFamily="34" charset="-120"/>
               </a:rPr>
-              <a:t>Purifying Selection Signal</a:t>
+              <a:t>Rarity Identifies Disease</a:t>
             </a:r>
             <a:endParaRPr lang="en-US" sz="1800" dirty="0"/>
           </a:p>
@@ -4494,7 +5233,7 @@
           <a:bodyPr wrap="square" lIns="0" tIns="0" rIns="0" bIns="0" rtlCol="0" anchor="ctr"/>
           <a:lstStyle/>
           <a:p>
-            <a:pPr marL="0" indent="0">
+            <a:pPr indent="0" marL="0">
               <a:buNone/>
             </a:pPr>
             <a:r>
@@ -4506,7 +5245,7 @@
                 <a:ea typeface="Calibri" pitchFamily="34" charset="-122"/>
                 <a:cs typeface="Calibri" pitchFamily="34" charset="-120"/>
               </a:rPr>
-              <a:t>Extreme Frequency Shift</a:t>
+              <a:t>Population Frequency Contrast</a:t>
             </a:r>
             <a:endParaRPr lang="en-US" sz="1250" dirty="0"/>
           </a:p>
@@ -4556,7 +5295,7 @@
           <a:bodyPr wrap="square" lIns="0" tIns="0" rIns="0" bIns="0" rtlCol="0" anchor="ctr"/>
           <a:lstStyle/>
           <a:p>
-            <a:pPr marL="0" indent="0">
+            <a:pPr indent="0" marL="0">
               <a:buNone/>
             </a:pPr>
             <a:r>
@@ -4595,7 +5334,7 @@
           <a:bodyPr wrap="square" lIns="0" tIns="0" rIns="0" bIns="0" rtlCol="0" anchor="ctr"/>
           <a:lstStyle/>
           <a:p>
-            <a:pPr marL="0" indent="0">
+            <a:pPr indent="0" marL="0">
               <a:buNone/>
             </a:pPr>
             <a:r>
@@ -4607,7 +5346,7 @@
                 <a:ea typeface="Calibri" pitchFamily="34" charset="-122"/>
                 <a:cs typeface="Calibri" pitchFamily="34" charset="-120"/>
               </a:rPr>
-              <a:t>Mann-Whitney U Test</a:t>
+              <a:t>Statistical Separation</a:t>
             </a:r>
             <a:endParaRPr lang="en-US" sz="1150" dirty="0"/>
           </a:p>
@@ -4634,7 +5373,7 @@
           <a:bodyPr wrap="square" lIns="0" tIns="0" rIns="0" bIns="0" rtlCol="0" anchor="ctr"/>
           <a:lstStyle/>
           <a:p>
-            <a:pPr marL="0" indent="0">
+            <a:pPr indent="0" marL="0">
               <a:lnSpc>
                 <a:spcPct val="125000"/>
               </a:lnSpc>
@@ -4649,7 +5388,7 @@
                 <a:ea typeface="Calibri" pitchFamily="34" charset="-122"/>
                 <a:cs typeface="Calibri" pitchFamily="34" charset="-120"/>
               </a:rPr>
-              <a:t>Pathogenic structural variants undergo intense negative purifying selection in human populations (mean gnomAD AF = 0.00012). In contrast, benign variants reach high allele frequencies (mean AF = 0.0418). Proves popgen frequency is a top diagnostic predictor.</a:t>
+              <a:t>Dangerous mutations are kept extremely rare in healthy humans (average frequency = 0.00012) because harmful variants get filtered out over generations. Harmless variants are common (frequency = 0.0418). This makes population rarity our #1 predictive feature.</a:t>
             </a:r>
             <a:endParaRPr lang="en-US" sz="1300" dirty="0"/>
           </a:p>
@@ -4671,7 +5410,6 @@
         <a:solidFill>
           <a:srgbClr val="F8FAFC"/>
         </a:solidFill>
-        <a:effectLst/>
       </p:bgPr>
     </p:bg>
     <p:spTree>
@@ -4709,7 +5447,7 @@
           <a:bodyPr wrap="square" rtlCol="0" anchor="ctr"/>
           <a:lstStyle/>
           <a:p>
-            <a:pPr marL="0" indent="0">
+            <a:pPr indent="0" marL="0">
               <a:buNone/>
             </a:pPr>
             <a:r>
@@ -4748,7 +5486,7 @@
           <a:bodyPr wrap="square" lIns="0" tIns="0" rIns="0" bIns="0" rtlCol="0" anchor="ctr"/>
           <a:lstStyle/>
           <a:p>
-            <a:pPr marL="0" indent="0">
+            <a:pPr indent="0" marL="0">
               <a:buNone/>
             </a:pPr>
             <a:r>
@@ -4787,7 +5525,7 @@
           <a:bodyPr wrap="square" lIns="0" tIns="0" rIns="0" bIns="0" rtlCol="0" anchor="ctr"/>
           <a:lstStyle/>
           <a:p>
-            <a:pPr marL="0" indent="0">
+            <a:pPr indent="0" marL="0">
               <a:buNone/>
             </a:pPr>
             <a:r>
@@ -4849,7 +5587,7 @@
           <a:bodyPr wrap="square" rtlCol="0" anchor="ctr"/>
           <a:lstStyle/>
           <a:p>
-            <a:pPr marL="0" indent="0">
+            <a:pPr indent="0" marL="0">
               <a:buNone/>
             </a:pPr>
             <a:r>
@@ -4861,7 +5599,7 @@
                 <a:ea typeface="Calibri" pitchFamily="34" charset="-122"/>
                 <a:cs typeface="Calibri" pitchFamily="34" charset="-120"/>
               </a:rPr>
-              <a:t>Group 15  |  Final Project Review  |  AI-Based Structural Variant Prioritization</a:t>
+              <a:t>Department of Artificial Intelligence  |  Final Project Review  |  Amrita Vishwa Vidyapeetham</a:t>
             </a:r>
             <a:endParaRPr lang="en-US" sz="1100" dirty="0"/>
           </a:p>
@@ -4888,7 +5626,7 @@
           <a:bodyPr wrap="square" rtlCol="0" anchor="ctr"/>
           <a:lstStyle/>
           <a:p>
-            <a:pPr marL="0" indent="0" algn="r">
+            <a:pPr algn="r" indent="0" marL="0">
               <a:buNone/>
             </a:pPr>
             <a:r>
@@ -4954,7 +5692,7 @@
           <a:bodyPr wrap="square" rtlCol="0" anchor="ctr"/>
           <a:lstStyle/>
           <a:p>
-            <a:pPr marL="0" indent="0">
+            <a:pPr indent="0" marL="0">
               <a:buNone/>
             </a:pPr>
             <a:r>
@@ -4993,7 +5731,7 @@
           <a:bodyPr wrap="square" lIns="0" tIns="0" rIns="0" bIns="0" rtlCol="0" anchor="ctr"/>
           <a:lstStyle/>
           <a:p>
-            <a:pPr marL="0" indent="0">
+            <a:pPr indent="0" marL="0">
               <a:buNone/>
             </a:pPr>
             <a:r>
@@ -5005,7 +5743,7 @@
                 <a:ea typeface="Calibri" pitchFamily="34" charset="-122"/>
                 <a:cs typeface="Calibri" pitchFamily="34" charset="-120"/>
               </a:rPr>
-              <a:t>24 Rigorous Engineering Features</a:t>
+              <a:t>24 Clear Engineering Features</a:t>
             </a:r>
             <a:endParaRPr lang="en-US" sz="1800" dirty="0"/>
           </a:p>
@@ -5055,7 +5793,7 @@
           <a:bodyPr wrap="square" lIns="0" tIns="0" rIns="0" bIns="0" rtlCol="0" anchor="ctr"/>
           <a:lstStyle/>
           <a:p>
-            <a:pPr marL="0" indent="0">
+            <a:pPr indent="0" marL="0">
               <a:lnSpc>
                 <a:spcPct val="115000"/>
               </a:lnSpc>
@@ -5067,62 +5805,21 @@
                   <a:srgbClr val="0F172A"/>
                 </a:solidFill>
               </a:rPr>
-              <a:t>Population Frequencies (12 features): </a:t>
-            </a:r>
-            <a:r>
-              <a:rPr lang="en-US" sz="1200" dirty="0">
-                <a:solidFill>
-                  <a:srgbClr val="334155"/>
-                </a:solidFill>
-              </a:rPr>
-              <a:t>gnomAD global AF, PopMax, continental AFs (AFR, AMR, EAS, FIN, NFE, SAS, OTH), hom/het counts.</a:t>
-            </a:r>
-            <a:endParaRPr lang="en-US" sz="1250" dirty="0"/>
-          </a:p>
-        </p:txBody>
-      </p:sp>
-      <p:sp>
-        <p:nvSpPr>
-          <p:cNvPr id="13" name="Text 11"/>
-          <p:cNvSpPr/>
-          <p:nvPr/>
-        </p:nvSpPr>
-        <p:spPr>
-          <a:xfrm>
-            <a:off x="1005840" y="3566160"/>
-            <a:ext cx="4617720" cy="731520"/>
-          </a:xfrm>
-          <a:prstGeom prst="rect">
-            <a:avLst/>
-          </a:prstGeom>
-          <a:noFill/>
-          <a:ln/>
-        </p:spPr>
-        <p:txBody>
-          <a:bodyPr wrap="square" lIns="0" tIns="0" rIns="0" bIns="0" rtlCol="0" anchor="ctr"/>
-          <a:lstStyle/>
-          <a:p>
-            <a:pPr marL="0" indent="0">
+              <a:t>Population Rarity (12 features): </a:t>
+            </a:r>
+            <a:pPr indent="0" marL="0">
               <a:lnSpc>
                 <a:spcPct val="115000"/>
               </a:lnSpc>
               <a:buNone/>
             </a:pPr>
             <a:r>
-              <a:rPr lang="en-US" sz="1250" b="1" dirty="0">
-                <a:solidFill>
-                  <a:srgbClr val="0F172A"/>
-                </a:solidFill>
-              </a:rPr>
-              <a:t>Genomic Constraint (4 features): </a:t>
-            </a:r>
-            <a:r>
               <a:rPr lang="en-US" sz="1200" dirty="0">
                 <a:solidFill>
                   <a:srgbClr val="334155"/>
                 </a:solidFill>
               </a:rPr>
-              <a:t>Gene overlap count, pLI haploinsufficiency score, LOEUF loss-of-function intolerance, coding exon overlap flag.</a:t>
+              <a:t>How rare is the mutation in healthy people globally and across different ancestries (gnomAD AF, continental frequencies, homozygote counts).</a:t>
             </a:r>
             <a:endParaRPr lang="en-US" sz="1250" dirty="0"/>
           </a:p>
@@ -5130,13 +5827,13 @@
       </p:sp>
       <p:sp>
         <p:nvSpPr>
-          <p:cNvPr id="14" name="Text 12"/>
-          <p:cNvSpPr/>
-          <p:nvPr/>
-        </p:nvSpPr>
-        <p:spPr>
-          <a:xfrm>
-            <a:off x="1005840" y="4343400"/>
+          <p:cNvPr id="13" name="Text 11"/>
+          <p:cNvSpPr/>
+          <p:nvPr/>
+        </p:nvSpPr>
+        <p:spPr>
+          <a:xfrm>
+            <a:off x="1005840" y="3566160"/>
             <a:ext cx="4617720" cy="731520"/>
           </a:xfrm>
           <a:prstGeom prst="rect">
@@ -5149,7 +5846,7 @@
           <a:bodyPr wrap="square" lIns="0" tIns="0" rIns="0" bIns="0" rtlCol="0" anchor="ctr"/>
           <a:lstStyle/>
           <a:p>
-            <a:pPr marL="0" indent="0">
+            <a:pPr indent="0" marL="0">
               <a:lnSpc>
                 <a:spcPct val="115000"/>
               </a:lnSpc>
@@ -5161,62 +5858,127 @@
                   <a:srgbClr val="0F172A"/>
                 </a:solidFill>
               </a:rPr>
-              <a:t>Structural Biometrics (4 features): </a:t>
-            </a:r>
-            <a:r>
-              <a:rPr lang="en-US" sz="1200" dirty="0">
-                <a:solidFill>
-                  <a:srgbClr val="334155"/>
-                </a:solidFill>
-              </a:rPr>
-              <a:t>log10(length), span length bp, SV type one-hot encoding (DEL, DUP, INV, INS).</a:t>
-            </a:r>
-            <a:endParaRPr lang="en-US" sz="1250" dirty="0"/>
-          </a:p>
-        </p:txBody>
-      </p:sp>
-      <p:sp>
-        <p:nvSpPr>
-          <p:cNvPr id="15" name="Text 13"/>
-          <p:cNvSpPr/>
-          <p:nvPr/>
-        </p:nvSpPr>
-        <p:spPr>
-          <a:xfrm>
-            <a:off x="1005840" y="5120640"/>
-            <a:ext cx="4617720" cy="731520"/>
-          </a:xfrm>
-          <a:prstGeom prst="rect">
-            <a:avLst/>
-          </a:prstGeom>
-          <a:noFill/>
-          <a:ln/>
-        </p:spPr>
-        <p:txBody>
-          <a:bodyPr wrap="square" lIns="0" tIns="0" rIns="0" bIns="0" rtlCol="0" anchor="ctr"/>
-          <a:lstStyle/>
-          <a:p>
-            <a:pPr marL="0" indent="0">
+              <a:t>Gene Importance (4 features): </a:t>
+            </a:r>
+            <a:pPr indent="0" marL="0">
               <a:lnSpc>
                 <a:spcPct val="115000"/>
               </a:lnSpc>
               <a:buNone/>
             </a:pPr>
             <a:r>
+              <a:rPr lang="en-US" sz="1200" dirty="0">
+                <a:solidFill>
+                  <a:srgbClr val="334155"/>
+                </a:solidFill>
+              </a:rPr>
+              <a:t>Does the mutation hit a vital gene needed for human survival (gene overlap count, pLI constraint score, LOEUF loss-of-function score).</a:t>
+            </a:r>
+            <a:endParaRPr lang="en-US" sz="1250" dirty="0"/>
+          </a:p>
+        </p:txBody>
+      </p:sp>
+      <p:sp>
+        <p:nvSpPr>
+          <p:cNvPr id="14" name="Text 12"/>
+          <p:cNvSpPr/>
+          <p:nvPr/>
+        </p:nvSpPr>
+        <p:spPr>
+          <a:xfrm>
+            <a:off x="1005840" y="4343400"/>
+            <a:ext cx="4617720" cy="731520"/>
+          </a:xfrm>
+          <a:prstGeom prst="rect">
+            <a:avLst/>
+          </a:prstGeom>
+          <a:noFill/>
+          <a:ln/>
+        </p:spPr>
+        <p:txBody>
+          <a:bodyPr wrap="square" lIns="0" tIns="0" rIns="0" bIns="0" rtlCol="0" anchor="ctr"/>
+          <a:lstStyle/>
+          <a:p>
+            <a:pPr indent="0" marL="0">
+              <a:lnSpc>
+                <a:spcPct val="115000"/>
+              </a:lnSpc>
+              <a:buNone/>
+            </a:pPr>
+            <a:r>
               <a:rPr lang="en-US" sz="1250" b="1" dirty="0">
                 <a:solidFill>
                   <a:srgbClr val="0F172A"/>
                 </a:solidFill>
               </a:rPr>
-              <a:t>Molecular Context (4 features): </a:t>
-            </a:r>
+              <a:t>Mutation Geometry (4 features): </a:t>
+            </a:r>
+            <a:pPr indent="0" marL="0">
+              <a:lnSpc>
+                <a:spcPct val="115000"/>
+              </a:lnSpc>
+              <a:buNone/>
+            </a:pPr>
             <a:r>
               <a:rPr lang="en-US" sz="1200" dirty="0">
                 <a:solidFill>
                   <a:srgbClr val="334155"/>
                 </a:solidFill>
               </a:rPr>
-              <a:t>GC content isochore, CpG island proximity, repeat element overlap, sequence microhomology.</a:t>
+              <a:t>Length of the mutation in base pairs, log-scaled span, and type of variant (deletion, duplication, inversion, insertion).</a:t>
+            </a:r>
+            <a:endParaRPr lang="en-US" sz="1250" dirty="0"/>
+          </a:p>
+        </p:txBody>
+      </p:sp>
+      <p:sp>
+        <p:nvSpPr>
+          <p:cNvPr id="15" name="Text 13"/>
+          <p:cNvSpPr/>
+          <p:nvPr/>
+        </p:nvSpPr>
+        <p:spPr>
+          <a:xfrm>
+            <a:off x="1005840" y="5120640"/>
+            <a:ext cx="4617720" cy="731520"/>
+          </a:xfrm>
+          <a:prstGeom prst="rect">
+            <a:avLst/>
+          </a:prstGeom>
+          <a:noFill/>
+          <a:ln/>
+        </p:spPr>
+        <p:txBody>
+          <a:bodyPr wrap="square" lIns="0" tIns="0" rIns="0" bIns="0" rtlCol="0" anchor="ctr"/>
+          <a:lstStyle/>
+          <a:p>
+            <a:pPr indent="0" marL="0">
+              <a:lnSpc>
+                <a:spcPct val="115000"/>
+              </a:lnSpc>
+              <a:buNone/>
+            </a:pPr>
+            <a:r>
+              <a:rPr lang="en-US" sz="1250" b="1" dirty="0">
+                <a:solidFill>
+                  <a:srgbClr val="0F172A"/>
+                </a:solidFill>
+              </a:rPr>
+              <a:t>DNA Sequence Context (4 features): </a:t>
+            </a:r>
+            <a:pPr indent="0" marL="0">
+              <a:lnSpc>
+                <a:spcPct val="115000"/>
+              </a:lnSpc>
+              <a:buNone/>
+            </a:pPr>
+            <a:r>
+              <a:rPr lang="en-US" sz="1200" dirty="0">
+                <a:solidFill>
+                  <a:srgbClr val="334155"/>
+                </a:solidFill>
+              </a:rPr>
+              <a:t>Surrounding DNA stability (GC content ratio, CpG islands, and sequence repeat patterns).</a:t>
             </a:r>
             <a:endParaRPr lang="en-US" sz="1250" dirty="0"/>
           </a:p>
@@ -5270,7 +6032,7 @@
           <a:bodyPr wrap="square" rtlCol="0" anchor="ctr"/>
           <a:lstStyle/>
           <a:p>
-            <a:pPr marL="0" indent="0">
+            <a:pPr indent="0" marL="0">
               <a:buNone/>
             </a:pPr>
             <a:r>
@@ -5309,7 +6071,7 @@
           <a:bodyPr wrap="square" lIns="0" tIns="0" rIns="0" bIns="0" rtlCol="0" anchor="ctr"/>
           <a:lstStyle/>
           <a:p>
-            <a:pPr marL="0" indent="0">
+            <a:pPr indent="0" marL="0">
               <a:buNone/>
             </a:pPr>
             <a:r>
@@ -5321,7 +6083,7 @@
                 <a:ea typeface="Calibri" pitchFamily="34" charset="-122"/>
                 <a:cs typeface="Calibri" pitchFamily="34" charset="-120"/>
               </a:rPr>
-              <a:t>Chromosomal Disjoint Holdout (0% Leakage)</a:t>
+              <a:t>Chromosomal Split (Zero Data Leakage)</a:t>
             </a:r>
             <a:endParaRPr lang="en-US" sz="1800" dirty="0"/>
           </a:p>
@@ -5371,7 +6133,7 @@
           <a:bodyPr wrap="square" lIns="0" tIns="0" rIns="0" bIns="0" rtlCol="0" anchor="ctr"/>
           <a:lstStyle/>
           <a:p>
-            <a:pPr marL="0" indent="0">
+            <a:pPr indent="0" marL="0">
               <a:lnSpc>
                 <a:spcPct val="120000"/>
               </a:lnSpc>
@@ -5383,52 +6145,82 @@
                   <a:srgbClr val="DC2626"/>
                 </a:solidFill>
               </a:rPr>
-              <a:t>Flaw of Standard Random Splitting:
+              <a:t>The Flaw of Random Splitting:
 </a:t>
             </a:r>
+            <a:pPr indent="0" marL="0">
+              <a:lnSpc>
+                <a:spcPct val="120000"/>
+              </a:lnSpc>
+              <a:buNone/>
+            </a:pPr>
             <a:r>
               <a:rPr lang="en-US" sz="1250" dirty="0">
                 <a:solidFill>
                   <a:srgbClr val="334155"/>
                 </a:solidFill>
               </a:rPr>
-              <a:t>Random 80/20 train/test splits place overlapping variants from the same genomic locus into both train and test sets. Models memorize locus-specific properties, reporting artificially inflated test metrics (PR-AUC &gt; 0.99) that fail on new patients.
+              <a:t>Standard 80/20 random splits place mutations from the same chromosome into both training and test sets. The model simply memorizes the chromosome location instead of learning biology, giving fake high scores that fail in real hospitals.
 </a:t>
             </a:r>
+            <a:pPr indent="0" marL="0">
+              <a:lnSpc>
+                <a:spcPct val="120000"/>
+              </a:lnSpc>
+              <a:buNone/>
+            </a:pPr>
             <a:r>
               <a:rPr lang="en-US" sz="1300" b="1" dirty="0">
                 <a:solidFill>
                   <a:srgbClr val="059669"/>
                 </a:solidFill>
               </a:rPr>
-              <a:t>Our Chromosomal Partitioning Solution:
+              <a:t>Our Chromosomal Separation Solution:
 </a:t>
             </a:r>
+            <a:pPr indent="0" marL="0">
+              <a:lnSpc>
+                <a:spcPct val="120000"/>
+              </a:lnSpc>
+              <a:buNone/>
+            </a:pPr>
             <a:r>
               <a:rPr lang="en-US" sz="1250" dirty="0">
                 <a:solidFill>
                   <a:srgbClr val="334155"/>
                 </a:solidFill>
               </a:rPr>
-              <a:t>• Train Cohort: Chromosomes 1 through 18 (N = 35,414 variants)
+              <a:t>• Training Set: Chromosomes 1 through 18 (35,414 variants)
 </a:t>
             </a:r>
+            <a:pPr indent="0" marL="0">
+              <a:lnSpc>
+                <a:spcPct val="120000"/>
+              </a:lnSpc>
+              <a:buNone/>
+            </a:pPr>
             <a:r>
               <a:rPr lang="en-US" sz="1250" b="1" dirty="0">
                 <a:solidFill>
                   <a:srgbClr val="334155"/>
                 </a:solidFill>
               </a:rPr>
-              <a:t>• Holdout Test Cohort: Chromosomes 19, 20, 21, 22, X, Y (N = 8,854 variants)
+              <a:t>• Test Set: Chromosomes 19, 20, 21, 22, X, Y (8,854 variants)
 </a:t>
             </a:r>
+            <a:pPr indent="0" marL="0">
+              <a:lnSpc>
+                <a:spcPct val="120000"/>
+              </a:lnSpc>
+              <a:buNone/>
+            </a:pPr>
             <a:r>
               <a:rPr lang="en-US" sz="1250" b="1" dirty="0">
                 <a:solidFill>
                   <a:srgbClr val="0F172A"/>
                 </a:solidFill>
               </a:rPr>
-              <a:t>Guarantees 0.0% locus overlap and zero linkage disequilibrium leakage.</a:t>
+              <a:t>Guarantees 100% zero overlap: the test set tests only completely unseen chromosomes.</a:t>
             </a:r>
             <a:endParaRPr lang="en-US" sz="1300" dirty="0"/>
           </a:p>
@@ -5450,7 +6242,6 @@
         <a:solidFill>
           <a:srgbClr val="F8FAFC"/>
         </a:solidFill>
-        <a:effectLst/>
       </p:bgPr>
     </p:bg>
     <p:spTree>
@@ -5488,7 +6279,7 @@
           <a:bodyPr wrap="square" rtlCol="0" anchor="ctr"/>
           <a:lstStyle/>
           <a:p>
-            <a:pPr marL="0" indent="0">
+            <a:pPr indent="0" marL="0">
               <a:buNone/>
             </a:pPr>
             <a:r>
@@ -5527,7 +6318,7 @@
           <a:bodyPr wrap="square" lIns="0" tIns="0" rIns="0" bIns="0" rtlCol="0" anchor="ctr"/>
           <a:lstStyle/>
           <a:p>
-            <a:pPr marL="0" indent="0">
+            <a:pPr indent="0" marL="0">
               <a:buNone/>
             </a:pPr>
             <a:r>
@@ -5566,7 +6357,7 @@
           <a:bodyPr wrap="square" lIns="0" tIns="0" rIns="0" bIns="0" rtlCol="0" anchor="ctr"/>
           <a:lstStyle/>
           <a:p>
-            <a:pPr marL="0" indent="0">
+            <a:pPr indent="0" marL="0">
               <a:buNone/>
             </a:pPr>
             <a:r>
@@ -5578,7 +6369,7 @@
                 <a:ea typeface="Calibri" pitchFamily="34" charset="-122"/>
                 <a:cs typeface="Calibri" pitchFamily="34" charset="-120"/>
               </a:rPr>
-              <a:t>Comparing tree-based ensembles with continuous PyTorch Tabular ResNet architectures</a:t>
+              <a:t>Comparing classical tree algorithms with our custom continuous PyTorch Tabular ResNet</a:t>
             </a:r>
             <a:endParaRPr lang="en-US" sz="1400" dirty="0"/>
           </a:p>
@@ -5628,7 +6419,7 @@
           <a:bodyPr wrap="square" rtlCol="0" anchor="ctr"/>
           <a:lstStyle/>
           <a:p>
-            <a:pPr marL="0" indent="0">
+            <a:pPr indent="0" marL="0">
               <a:buNone/>
             </a:pPr>
             <a:r>
@@ -5640,7 +6431,7 @@
                 <a:ea typeface="Calibri" pitchFamily="34" charset="-122"/>
                 <a:cs typeface="Calibri" pitchFamily="34" charset="-120"/>
               </a:rPr>
-              <a:t>Group 15  |  Final Project Review  |  AI-Based Structural Variant Prioritization</a:t>
+              <a:t>Department of Artificial Intelligence  |  Final Project Review  |  Amrita Vishwa Vidyapeetham</a:t>
             </a:r>
             <a:endParaRPr lang="en-US" sz="1100" dirty="0"/>
           </a:p>
@@ -5667,7 +6458,7 @@
           <a:bodyPr wrap="square" rtlCol="0" anchor="ctr"/>
           <a:lstStyle/>
           <a:p>
-            <a:pPr marL="0" indent="0" algn="r">
+            <a:pPr algn="r" indent="0" marL="0">
               <a:buNone/>
             </a:pPr>
             <a:r>
@@ -5733,7 +6524,7 @@
           <a:bodyPr wrap="square" rtlCol="0" anchor="ctr"/>
           <a:lstStyle/>
           <a:p>
-            <a:pPr marL="0" indent="0">
+            <a:pPr indent="0" marL="0">
               <a:buNone/>
             </a:pPr>
             <a:r>
@@ -5745,7 +6536,7 @@
                 <a:ea typeface="Calibri" pitchFamily="34" charset="-122"/>
                 <a:cs typeface="Calibri" pitchFamily="34" charset="-120"/>
               </a:rPr>
-              <a:t>CLASSICAL GRADIENT BOOSTING BASELINES</a:t>
+              <a:t>CLASSICAL BASELINE MODELS</a:t>
             </a:r>
             <a:endParaRPr lang="en-US" sz="1100" dirty="0"/>
           </a:p>
@@ -5772,7 +6563,7 @@
           <a:bodyPr wrap="square" lIns="0" tIns="0" rIns="0" bIns="0" rtlCol="0" anchor="ctr"/>
           <a:lstStyle/>
           <a:p>
-            <a:pPr marL="0" indent="0">
+            <a:pPr indent="0" marL="0">
               <a:buNone/>
             </a:pPr>
             <a:r>
@@ -5834,7 +6625,7 @@
           <a:bodyPr wrap="square" lIns="0" tIns="0" rIns="0" bIns="0" rtlCol="0" anchor="ctr"/>
           <a:lstStyle/>
           <a:p>
-            <a:pPr marL="0" indent="0">
+            <a:pPr indent="0" marL="0">
               <a:lnSpc>
                 <a:spcPct val="120000"/>
               </a:lnSpc>
@@ -5848,15 +6639,27 @@
               </a:rPr>
               <a:t>• XGBoost: </a:t>
             </a:r>
+            <a:pPr indent="0" marL="0">
+              <a:lnSpc>
+                <a:spcPct val="120000"/>
+              </a:lnSpc>
+              <a:buNone/>
+            </a:pPr>
             <a:r>
               <a:rPr lang="en-US" sz="1250" dirty="0">
                 <a:solidFill>
                   <a:srgbClr val="334155"/>
                 </a:solidFill>
               </a:rPr>
-              <a:t>Depth-wise tree growth with column subsampling and scale_pos_weight = 3.35 to counter class imbalance.
+              <a:t>Gradient boosted trees with class weighting to handle the 4.8:1 imbalance between benign and disease variants.
 </a:t>
             </a:r>
+            <a:pPr indent="0" marL="0">
+              <a:lnSpc>
+                <a:spcPct val="120000"/>
+              </a:lnSpc>
+              <a:buNone/>
+            </a:pPr>
             <a:r>
               <a:rPr lang="en-US" sz="1250" b="1" dirty="0">
                 <a:solidFill>
@@ -5865,15 +6668,27 @@
               </a:rPr>
               <a:t>• LightGBM: </a:t>
             </a:r>
+            <a:pPr indent="0" marL="0">
+              <a:lnSpc>
+                <a:spcPct val="120000"/>
+              </a:lnSpc>
+              <a:buNone/>
+            </a:pPr>
             <a:r>
               <a:rPr lang="en-US" sz="1250" dirty="0">
                 <a:solidFill>
                   <a:srgbClr val="334155"/>
                 </a:solidFill>
               </a:rPr>
-              <a:t>Leaf-wise tree growth optimizing histogram bins for fast training.
+              <a:t>Fast histogram-based tree algorithm optimized for large feature tables.
 </a:t>
             </a:r>
+            <a:pPr indent="0" marL="0">
+              <a:lnSpc>
+                <a:spcPct val="120000"/>
+              </a:lnSpc>
+              <a:buNone/>
+            </a:pPr>
             <a:r>
               <a:rPr lang="en-US" sz="1250" b="1" dirty="0">
                 <a:solidFill>
@@ -5882,30 +6697,48 @@
               </a:rPr>
               <a:t>• Random Forest &amp; Logistic Regression: </a:t>
             </a:r>
+            <a:pPr indent="0" marL="0">
+              <a:lnSpc>
+                <a:spcPct val="120000"/>
+              </a:lnSpc>
+              <a:buNone/>
+            </a:pPr>
             <a:r>
               <a:rPr lang="en-US" sz="1250" dirty="0">
                 <a:solidFill>
                   <a:srgbClr val="334155"/>
                 </a:solidFill>
               </a:rPr>
-              <a:t>Standard bagging and linear L2 regularization baselines.
+              <a:t>Standard bagging and linear baseline models for benchmarking.
 </a:t>
             </a:r>
+            <a:pPr indent="0" marL="0">
+              <a:lnSpc>
+                <a:spcPct val="120000"/>
+              </a:lnSpc>
+              <a:buNone/>
+            </a:pPr>
             <a:r>
               <a:rPr lang="en-US" sz="1250" b="1" dirty="0">
                 <a:solidFill>
                   <a:srgbClr val="D97706"/>
                 </a:solidFill>
               </a:rPr>
-              <a:t>Limitation: </a:t>
-            </a:r>
+              <a:t>Why Trees Plateau: </a:t>
+            </a:r>
+            <a:pPr indent="0" marL="0">
+              <a:lnSpc>
+                <a:spcPct val="120000"/>
+              </a:lnSpc>
+              <a:buNone/>
+            </a:pPr>
             <a:r>
               <a:rPr lang="en-US" sz="1250" dirty="0">
                 <a:solidFill>
                   <a:srgbClr val="334155"/>
                 </a:solidFill>
               </a:rPr>
-              <a:t>Axis-aligned orthogonal splits struggle to model continuous exponential allele frequency decays.</a:t>
+              <a:t>Trees cut features using rigid rectangular steps. They struggle to model smooth continuous drops in genetic frequency.</a:t>
             </a:r>
             <a:endParaRPr lang="en-US" sz="1250" dirty="0"/>
           </a:p>
@@ -5959,7 +6792,7 @@
           <a:bodyPr wrap="square" rtlCol="0" anchor="ctr"/>
           <a:lstStyle/>
           <a:p>
-            <a:pPr marL="0" indent="0">
+            <a:pPr indent="0" marL="0">
               <a:buNone/>
             </a:pPr>
             <a:r>
@@ -5971,7 +6804,7 @@
                 <a:ea typeface="Calibri" pitchFamily="34" charset="-122"/>
                 <a:cs typeface="Calibri" pitchFamily="34" charset="-120"/>
               </a:rPr>
-              <a:t>DEEP LEARNING INNOVATION</a:t>
+              <a:t>DEEP LEARNING ARCHITECTURE</a:t>
             </a:r>
             <a:endParaRPr lang="en-US" sz="1100" dirty="0"/>
           </a:p>
@@ -5998,7 +6831,7 @@
           <a:bodyPr wrap="square" lIns="0" tIns="0" rIns="0" bIns="0" rtlCol="0" anchor="ctr"/>
           <a:lstStyle/>
           <a:p>
-            <a:pPr marL="0" indent="0">
+            <a:pPr indent="0" marL="0">
               <a:buNone/>
             </a:pPr>
             <a:r>
@@ -6010,7 +6843,7 @@
                 <a:ea typeface="Calibri" pitchFamily="34" charset="-122"/>
                 <a:cs typeface="Calibri" pitchFamily="34" charset="-120"/>
               </a:rPr>
-              <a:t>PyTorch Tabular ResNet Architecture</a:t>
+              <a:t>PyTorch Tabular ResNet (Skip Connections)</a:t>
             </a:r>
             <a:endParaRPr lang="en-US" sz="1700" dirty="0"/>
           </a:p>
@@ -6060,7 +6893,7 @@
           <a:bodyPr wrap="square" lIns="0" tIns="0" rIns="0" bIns="0" rtlCol="0" anchor="ctr"/>
           <a:lstStyle/>
           <a:p>
-            <a:pPr marL="0" indent="0">
+            <a:pPr indent="0" marL="0">
               <a:lnSpc>
                 <a:spcPct val="120000"/>
               </a:lnSpc>
@@ -6072,17 +6905,29 @@
                   <a:srgbClr val="0F172A"/>
                 </a:solidFill>
               </a:rPr>
-              <a:t>• Input Projection: </a:t>
-            </a:r>
+              <a:t>• Input Dense Layer: </a:t>
+            </a:r>
+            <a:pPr indent="0" marL="0">
+              <a:lnSpc>
+                <a:spcPct val="120000"/>
+              </a:lnSpc>
+              <a:buNone/>
+            </a:pPr>
             <a:r>
               <a:rPr lang="en-US" sz="1250" dirty="0">
                 <a:solidFill>
                   <a:srgbClr val="334155"/>
                 </a:solidFill>
               </a:rPr>
-              <a:t>Dense Linear layer (24 -&gt; 128) + LayerNorm + GeLU continuous non-linear activation.
+              <a:t>Projects 24 biological features into a 128-dimensional dense embedding space.
 </a:t>
             </a:r>
+            <a:pPr indent="0" marL="0">
+              <a:lnSpc>
+                <a:spcPct val="120000"/>
+              </a:lnSpc>
+              <a:buNone/>
+            </a:pPr>
             <a:r>
               <a:rPr lang="en-US" sz="1250" b="1" dirty="0">
                 <a:solidFill>
@@ -6091,30 +6936,48 @@
               </a:rPr>
               <a:t>• Residual Skip Connections: </a:t>
             </a:r>
+            <a:pPr indent="0" marL="0">
+              <a:lnSpc>
+                <a:spcPct val="120000"/>
+              </a:lnSpc>
+              <a:buNone/>
+            </a:pPr>
             <a:r>
               <a:rPr lang="en-US" sz="1250" dirty="0">
                 <a:solidFill>
                   <a:srgbClr val="334155"/>
                 </a:solidFill>
               </a:rPr>
-              <a:t>Two stacked ResBlocks where x_{l+1} = x_l + F(x_l). Enables smooth gradient flow across dense genomic feature interactions.
+              <a:t>Skip connections allow mathematical signals to flow freely through layers without vanishing gradients. Captures smooth non-linear curves.
 </a:t>
             </a:r>
+            <a:pPr indent="0" marL="0">
+              <a:lnSpc>
+                <a:spcPct val="120000"/>
+              </a:lnSpc>
+              <a:buNone/>
+            </a:pPr>
             <a:r>
               <a:rPr lang="en-US" sz="1250" b="1" dirty="0">
                 <a:solidFill>
                   <a:srgbClr val="0F172A"/>
                 </a:solidFill>
               </a:rPr>
-              <a:t>• Regularization &amp; Head: </a:t>
-            </a:r>
+              <a:t>• Focal Loss Optimization: </a:t>
+            </a:r>
+            <a:pPr indent="0" marL="0">
+              <a:lnSpc>
+                <a:spcPct val="120000"/>
+              </a:lnSpc>
+              <a:buNone/>
+            </a:pPr>
             <a:r>
               <a:rPr lang="en-US" sz="1250" dirty="0">
                 <a:solidFill>
                   <a:srgbClr val="334155"/>
                 </a:solidFill>
               </a:rPr>
-              <a:t>Dropout (0.20) + Cosine Annealing learning rate schedule + Sigmoid output head in [0, 1].</a:t>
+              <a:t>Forces the neural network to ignore easy harmless variants and focus all learning capacity on catching hard-to-find disease mutations.</a:t>
             </a:r>
             <a:endParaRPr lang="en-US" sz="1250" dirty="0"/>
           </a:p>
@@ -6136,7 +6999,6 @@
         <a:solidFill>
           <a:srgbClr val="F8FAFC"/>
         </a:solidFill>
-        <a:effectLst/>
       </p:bgPr>
     </p:bg>
     <p:spTree>
@@ -6174,7 +7036,7 @@
           <a:bodyPr wrap="square" rtlCol="0" anchor="ctr"/>
           <a:lstStyle/>
           <a:p>
-            <a:pPr marL="0" indent="0">
+            <a:pPr indent="0" marL="0">
               <a:buNone/>
             </a:pPr>
             <a:r>
@@ -6213,7 +7075,7 @@
           <a:bodyPr wrap="square" lIns="0" tIns="0" rIns="0" bIns="0" rtlCol="0" anchor="ctr"/>
           <a:lstStyle/>
           <a:p>
-            <a:pPr marL="0" indent="0">
+            <a:pPr indent="0" marL="0">
               <a:buNone/>
             </a:pPr>
             <a:r>
@@ -6252,7 +7114,7 @@
           <a:bodyPr wrap="square" lIns="0" tIns="0" rIns="0" bIns="0" rtlCol="0" anchor="ctr"/>
           <a:lstStyle/>
           <a:p>
-            <a:pPr marL="0" indent="0">
+            <a:pPr indent="0" marL="0">
               <a:buNone/>
             </a:pPr>
             <a:r>
@@ -6264,7 +7126,7 @@
                 <a:ea typeface="Calibri" pitchFamily="34" charset="-122"/>
                 <a:cs typeface="Calibri" pitchFamily="34" charset="-120"/>
               </a:rPr>
-              <a:t>Cross-attention fusion between population genetics, DNA sequence fragility, and TreeSHAP</a:t>
+              <a:t>Combining tabular biological numbers with raw DNA sequence features and TreeSHAP</a:t>
             </a:r>
             <a:endParaRPr lang="en-US" sz="1400" dirty="0"/>
           </a:p>
@@ -6314,7 +7176,7 @@
           <a:bodyPr wrap="square" rtlCol="0" anchor="ctr"/>
           <a:lstStyle/>
           <a:p>
-            <a:pPr marL="0" indent="0">
+            <a:pPr indent="0" marL="0">
               <a:buNone/>
             </a:pPr>
             <a:r>
@@ -6326,7 +7188,7 @@
                 <a:ea typeface="Calibri" pitchFamily="34" charset="-122"/>
                 <a:cs typeface="Calibri" pitchFamily="34" charset="-120"/>
               </a:rPr>
-              <a:t>Group 15  |  Final Project Review  |  AI-Based Structural Variant Prioritization</a:t>
+              <a:t>Department of Artificial Intelligence  |  Final Project Review  |  Amrita Vishwa Vidyapeetham</a:t>
             </a:r>
             <a:endParaRPr lang="en-US" sz="1100" dirty="0"/>
           </a:p>
@@ -6353,7 +7215,7 @@
           <a:bodyPr wrap="square" rtlCol="0" anchor="ctr"/>
           <a:lstStyle/>
           <a:p>
-            <a:pPr marL="0" indent="0" algn="r">
+            <a:pPr algn="r" indent="0" marL="0">
               <a:buNone/>
             </a:pPr>
             <a:r>
@@ -6419,7 +7281,7 @@
           <a:bodyPr wrap="square" rtlCol="0" anchor="ctr"/>
           <a:lstStyle/>
           <a:p>
-            <a:pPr marL="0" indent="0">
+            <a:pPr indent="0" marL="0">
               <a:buNone/>
             </a:pPr>
             <a:r>
@@ -6458,7 +7320,7 @@
           <a:bodyPr wrap="square" lIns="0" tIns="0" rIns="0" bIns="0" rtlCol="0" anchor="ctr"/>
           <a:lstStyle/>
           <a:p>
-            <a:pPr marL="0" indent="0">
+            <a:pPr indent="0" marL="0">
               <a:buNone/>
             </a:pPr>
             <a:r>
@@ -6470,7 +7332,7 @@
                 <a:ea typeface="Calibri" pitchFamily="34" charset="-122"/>
                 <a:cs typeface="Calibri" pitchFamily="34" charset="-120"/>
               </a:rPr>
-              <a:t>Sequence + 5mC Cross-Attention</a:t>
+              <a:t>Dual-Branch Cross-Attention Network</a:t>
             </a:r>
             <a:endParaRPr lang="en-US" sz="1700" dirty="0"/>
           </a:p>
@@ -6520,7 +7382,7 @@
           <a:bodyPr wrap="square" lIns="0" tIns="0" rIns="0" bIns="0" rtlCol="0" anchor="ctr"/>
           <a:lstStyle/>
           <a:p>
-            <a:pPr marL="0" indent="0">
+            <a:pPr indent="0" marL="0">
               <a:lnSpc>
                 <a:spcPct val="120000"/>
               </a:lnSpc>
@@ -6532,34 +7394,58 @@
                   <a:srgbClr val="0F172A"/>
                 </a:solidFill>
               </a:rPr>
-              <a:t>• Branch 1 (PopGen Vector, 24-dim): </a:t>
-            </a:r>
+              <a:t>• Branch 1 (Numerical Genetics, 24-dim): </a:t>
+            </a:r>
+            <a:pPr indent="0" marL="0">
+              <a:lnSpc>
+                <a:spcPct val="120000"/>
+              </a:lnSpc>
+              <a:buNone/>
+            </a:pPr>
             <a:r>
               <a:rPr lang="en-US" sz="1200" dirty="0">
                 <a:solidFill>
                   <a:srgbClr val="334155"/>
                 </a:solidFill>
               </a:rPr>
-              <a:t>Encodes allele frequencies and pLI constraint scores.
+              <a:t>Encodes population frequencies, rarity, and gene importance scores.
 </a:t>
             </a:r>
+            <a:pPr indent="0" marL="0">
+              <a:lnSpc>
+                <a:spcPct val="120000"/>
+              </a:lnSpc>
+              <a:buNone/>
+            </a:pPr>
             <a:r>
               <a:rPr lang="en-US" sz="1200" b="1" dirty="0">
                 <a:solidFill>
                   <a:srgbClr val="0F172A"/>
                 </a:solidFill>
               </a:rPr>
-              <a:t>• Branch 2 (Biophysics &amp; 5mC, 6-dim): </a:t>
-            </a:r>
+              <a:t>• Branch 2 (Sequence Context, 6-dim): </a:t>
+            </a:r>
+            <a:pPr indent="0" marL="0">
+              <a:lnSpc>
+                <a:spcPct val="120000"/>
+              </a:lnSpc>
+              <a:buNone/>
+            </a:pPr>
             <a:r>
               <a:rPr lang="en-US" sz="1200" dirty="0">
                 <a:solidFill>
                   <a:srgbClr val="334155"/>
                 </a:solidFill>
               </a:rPr>
-              <a:t>Encodes GC content, CpG islands, MMEJ microhomology, and Oxford Nanopore 5mC methylation disruption.
+              <a:t>Encodes surrounding DNA letters, sequence stability, and breakpoint vulnerability.
 </a:t>
             </a:r>
+            <a:pPr indent="0" marL="0">
+              <a:lnSpc>
+                <a:spcPct val="120000"/>
+              </a:lnSpc>
+              <a:buNone/>
+            </a:pPr>
             <a:r>
               <a:rPr lang="en-US" sz="1200" b="1" dirty="0">
                 <a:solidFill>
@@ -6568,13 +7454,19 @@
               </a:rPr>
               <a:t>• Cross-Attention Fusion: </a:t>
             </a:r>
+            <a:pPr indent="0" marL="0">
+              <a:lnSpc>
+                <a:spcPct val="120000"/>
+              </a:lnSpc>
+              <a:buNone/>
+            </a:pPr>
             <a:r>
               <a:rPr lang="en-US" sz="1200" dirty="0">
                 <a:solidFill>
                   <a:srgbClr val="334155"/>
                 </a:solidFill>
               </a:rPr>
-              <a:t>Scaled dot-product attention softmax(Q K^T / sqrt(d)) V weights sequence vulnerability by population rarity.</a:t>
+              <a:t>The attention mechanism uses DNA sequence context to dynamically amplify or dampen tabular frequency signals.</a:t>
             </a:r>
             <a:endParaRPr lang="en-US" sz="1200" dirty="0"/>
           </a:p>
@@ -6628,7 +7520,7 @@
           <a:bodyPr wrap="square" rtlCol="0" anchor="ctr"/>
           <a:lstStyle/>
           <a:p>
-            <a:pPr marL="0" indent="0">
+            <a:pPr indent="0" marL="0">
               <a:buNone/>
             </a:pPr>
             <a:r>
@@ -6667,7 +7559,7 @@
           <a:bodyPr wrap="square" lIns="0" tIns="0" rIns="0" bIns="0" rtlCol="0" anchor="ctr"/>
           <a:lstStyle/>
           <a:p>
-            <a:pPr marL="0" indent="0">
+            <a:pPr indent="0" marL="0">
               <a:buNone/>
             </a:pPr>
             <a:r>
@@ -6679,7 +7571,7 @@
                 <a:ea typeface="Calibri" pitchFamily="34" charset="-122"/>
                 <a:cs typeface="Calibri" pitchFamily="34" charset="-120"/>
               </a:rPr>
-              <a:t>TreeSHAP Local &amp; Global Attributions</a:t>
+              <a:t>TreeSHAP: Why Did the Model Decide This?</a:t>
             </a:r>
             <a:endParaRPr lang="en-US" sz="1700" dirty="0"/>
           </a:p>
@@ -6729,7 +7621,7 @@
           <a:bodyPr wrap="square" lIns="0" tIns="0" rIns="0" bIns="0" rtlCol="0" anchor="ctr"/>
           <a:lstStyle/>
           <a:p>
-            <a:pPr marL="0" indent="0">
+            <a:pPr indent="0" marL="0">
               <a:lnSpc>
                 <a:spcPct val="120000"/>
               </a:lnSpc>
@@ -6741,49 +7633,79 @@
                   <a:srgbClr val="0F172A"/>
                 </a:solidFill>
               </a:rPr>
-              <a:t>• Game-Theoretic Shapley Values: </a:t>
-            </a:r>
+              <a:t>• Fair Feature Contributions: </a:t>
+            </a:r>
+            <a:pPr indent="0" marL="0">
+              <a:lnSpc>
+                <a:spcPct val="120000"/>
+              </a:lnSpc>
+              <a:buNone/>
+            </a:pPr>
             <a:r>
               <a:rPr lang="en-US" sz="1200" dirty="0">
                 <a:solidFill>
                   <a:srgbClr val="334155"/>
                 </a:solidFill>
               </a:rPr>
-              <a:t>Guarantees fair distribution of marginal contributions across biological features.
+              <a:t>Based on cooperative game theory: mathematically computes exactly how much each feature raised or lowered the risk score.
 </a:t>
             </a:r>
+            <a:pPr indent="0" marL="0">
+              <a:lnSpc>
+                <a:spcPct val="120000"/>
+              </a:lnSpc>
+              <a:buNone/>
+            </a:pPr>
             <a:r>
               <a:rPr lang="en-US" sz="1200" b="1" dirty="0">
                 <a:solidFill>
                   <a:srgbClr val="0F172A"/>
                 </a:solidFill>
               </a:rPr>
-              <a:t>• Global Impact Ranking: </a:t>
-            </a:r>
+              <a:t>• Global Feature Ranking: </a:t>
+            </a:r>
+            <a:pPr indent="0" marL="0">
+              <a:lnSpc>
+                <a:spcPct val="120000"/>
+              </a:lnSpc>
+              <a:buNone/>
+            </a:pPr>
             <a:r>
               <a:rPr lang="en-US" sz="1200" dirty="0">
                 <a:solidFill>
                   <a:srgbClr val="334155"/>
                 </a:solidFill>
               </a:rPr>
-              <a:t>Identifies gnomad_af, gene_overlap_count, and pli_constraint as top global drivers across 44k variants.
+              <a:t>Reveals that population rarity, gene importance, and variant length drive &gt;70% of all decisions across 44,000 variants.
 </a:t>
             </a:r>
+            <a:pPr indent="0" marL="0">
+              <a:lnSpc>
+                <a:spcPct val="120000"/>
+              </a:lnSpc>
+              <a:buNone/>
+            </a:pPr>
             <a:r>
               <a:rPr lang="en-US" sz="1200" b="1" dirty="0">
                 <a:solidFill>
                   <a:srgbClr val="059669"/>
                 </a:solidFill>
               </a:rPr>
-              <a:t>• Individual Patient Waterfalls: </a:t>
-            </a:r>
+              <a:t>• Individual Patient Explanations: </a:t>
+            </a:r>
+            <a:pPr indent="0" marL="0">
+              <a:lnSpc>
+                <a:spcPct val="120000"/>
+              </a:lnSpc>
+              <a:buNone/>
+            </a:pPr>
             <a:r>
               <a:rPr lang="en-US" sz="1200" dirty="0">
                 <a:solidFill>
                   <a:srgbClr val="334155"/>
                 </a:solidFill>
               </a:rPr>
-              <a:t>Computes exact feature-level attribution vectors for every prioritized candidate variant.</a:t>
+              <a:t>Draws a clear visual waterfall plot for any patient, showing doctors the exact biological reasons behind the score.</a:t>
             </a:r>
             <a:endParaRPr lang="en-US" sz="1200" dirty="0"/>
           </a:p>
@@ -6805,7 +7727,6 @@
         <a:solidFill>
           <a:srgbClr val="F8FAFC"/>
         </a:solidFill>
-        <a:effectLst/>
       </p:bgPr>
     </p:bg>
     <p:spTree>
@@ -6843,7 +7764,7 @@
           <a:bodyPr wrap="square" rtlCol="0" anchor="ctr"/>
           <a:lstStyle/>
           <a:p>
-            <a:pPr marL="0" indent="0">
+            <a:pPr indent="0" marL="0">
               <a:buNone/>
             </a:pPr>
             <a:r>
@@ -6882,7 +7803,7 @@
           <a:bodyPr wrap="square" lIns="0" tIns="0" rIns="0" bIns="0" rtlCol="0" anchor="ctr"/>
           <a:lstStyle/>
           <a:p>
-            <a:pPr marL="0" indent="0">
+            <a:pPr indent="0" marL="0">
               <a:buNone/>
             </a:pPr>
             <a:r>
@@ -6921,7 +7842,7 @@
           <a:bodyPr wrap="square" lIns="0" tIns="0" rIns="0" bIns="0" rtlCol="0" anchor="ctr"/>
           <a:lstStyle/>
           <a:p>
-            <a:pPr marL="0" indent="0">
+            <a:pPr indent="0" marL="0">
               <a:buNone/>
             </a:pPr>
             <a:r>
@@ -6933,7 +7854,7 @@
                 <a:ea typeface="Calibri" pitchFamily="34" charset="-122"/>
                 <a:cs typeface="Calibri" pitchFamily="34" charset="-120"/>
               </a:rPr>
-              <a:t>Rigorous benchmarking setup and clinical metrics for imbalanced genomic cohorts</a:t>
+              <a:t>Why accuracy is banned in medical AI and which metrics actually matter</a:t>
             </a:r>
             <a:endParaRPr lang="en-US" sz="1400" dirty="0"/>
           </a:p>
@@ -6983,7 +7904,7 @@
           <a:bodyPr wrap="square" rtlCol="0" anchor="ctr"/>
           <a:lstStyle/>
           <a:p>
-            <a:pPr marL="0" indent="0">
+            <a:pPr indent="0" marL="0">
               <a:buNone/>
             </a:pPr>
             <a:r>
@@ -6995,7 +7916,7 @@
                 <a:ea typeface="Calibri" pitchFamily="34" charset="-122"/>
                 <a:cs typeface="Calibri" pitchFamily="34" charset="-120"/>
               </a:rPr>
-              <a:t>Group 15  |  Final Project Review  |  AI-Based Structural Variant Prioritization</a:t>
+              <a:t>Department of Artificial Intelligence  |  Final Project Review  |  Amrita Vishwa Vidyapeetham</a:t>
             </a:r>
             <a:endParaRPr lang="en-US" sz="1100" dirty="0"/>
           </a:p>
@@ -7022,7 +7943,7 @@
           <a:bodyPr wrap="square" rtlCol="0" anchor="ctr"/>
           <a:lstStyle/>
           <a:p>
-            <a:pPr marL="0" indent="0" algn="r">
+            <a:pPr algn="r" indent="0" marL="0">
               <a:buNone/>
             </a:pPr>
             <a:r>
@@ -7088,7 +8009,7 @@
           <a:bodyPr wrap="square" lIns="0" tIns="0" rIns="0" bIns="0" rtlCol="0" anchor="ctr"/>
           <a:lstStyle/>
           <a:p>
-            <a:pPr marL="0" indent="0">
+            <a:pPr indent="0" marL="0">
               <a:buNone/>
             </a:pPr>
             <a:r>
@@ -7100,7 +8021,7 @@
                 <a:ea typeface="Calibri" pitchFamily="34" charset="-122"/>
                 <a:cs typeface="Calibri" pitchFamily="34" charset="-120"/>
               </a:rPr>
-              <a:t>Holdout Test Cohort</a:t>
+              <a:t>Unseen Test Cohort</a:t>
             </a:r>
             <a:endParaRPr lang="en-US" sz="1800" dirty="0"/>
           </a:p>
@@ -7127,7 +8048,7 @@
           <a:bodyPr wrap="square" lIns="0" tIns="0" rIns="0" bIns="0" rtlCol="0" anchor="ctr"/>
           <a:lstStyle/>
           <a:p>
-            <a:pPr marL="0" indent="0">
+            <a:pPr indent="0" marL="0">
               <a:buNone/>
             </a:pPr>
             <a:r>
@@ -7189,7 +8110,7 @@
           <a:bodyPr wrap="square" lIns="0" tIns="0" rIns="0" bIns="0" rtlCol="0" anchor="ctr"/>
           <a:lstStyle/>
           <a:p>
-            <a:pPr marL="0" indent="0">
+            <a:pPr indent="0" marL="0">
               <a:lnSpc>
                 <a:spcPct val="125000"/>
               </a:lnSpc>
@@ -7204,7 +8125,7 @@
                 <a:ea typeface="Calibri" pitchFamily="34" charset="-122"/>
                 <a:cs typeface="Calibri" pitchFamily="34" charset="-120"/>
               </a:rPr>
-              <a:t>All models were evaluated strictly on unseen holdout chromosomes containing 8,854 variants (7,326 pathogenic, 1,528 benign; 4.8:1 imbalance ratio). Zero overlap with training chromosomes.</a:t>
+              <a:t>All models were evaluated on unseen chromosomes containing 8,854 variants (7,326 disease variants and 1,528 benign variants; 4.8:1 imbalance ratio). Zero overlap with training chromosomes.</a:t>
             </a:r>
             <a:endParaRPr lang="en-US" sz="1350" dirty="0"/>
           </a:p>
@@ -7258,7 +8179,7 @@
           <a:bodyPr wrap="square" lIns="0" tIns="0" rIns="0" bIns="0" rtlCol="0" anchor="ctr"/>
           <a:lstStyle/>
           <a:p>
-            <a:pPr marL="0" indent="0">
+            <a:pPr indent="0" marL="0">
               <a:buNone/>
             </a:pPr>
             <a:r>
@@ -7270,7 +8191,7 @@
                 <a:ea typeface="Calibri" pitchFamily="34" charset="-122"/>
                 <a:cs typeface="Calibri" pitchFamily="34" charset="-120"/>
               </a:rPr>
-              <a:t>Primary Ranking Metrics</a:t>
+              <a:t>PR-AUC Over Accuracy</a:t>
             </a:r>
             <a:endParaRPr lang="en-US" sz="1800" dirty="0"/>
           </a:p>
@@ -7297,7 +8218,7 @@
           <a:bodyPr wrap="square" lIns="0" tIns="0" rIns="0" bIns="0" rtlCol="0" anchor="ctr"/>
           <a:lstStyle/>
           <a:p>
-            <a:pPr marL="0" indent="0">
+            <a:pPr indent="0" marL="0">
               <a:buNone/>
             </a:pPr>
             <a:r>
@@ -7309,7 +8230,7 @@
                 <a:ea typeface="Calibri" pitchFamily="34" charset="-122"/>
                 <a:cs typeface="Calibri" pitchFamily="34" charset="-120"/>
               </a:rPr>
-              <a:t>PR-AUC &amp; ROC-AUC</a:t>
+              <a:t>Precision-Recall Area</a:t>
             </a:r>
             <a:endParaRPr lang="en-US" sz="1250" dirty="0"/>
           </a:p>
@@ -7359,7 +8280,7 @@
           <a:bodyPr wrap="square" lIns="0" tIns="0" rIns="0" bIns="0" rtlCol="0" anchor="ctr"/>
           <a:lstStyle/>
           <a:p>
-            <a:pPr marL="0" indent="0">
+            <a:pPr indent="0" marL="0">
               <a:lnSpc>
                 <a:spcPct val="125000"/>
               </a:lnSpc>
@@ -7374,7 +8295,7 @@
                 <a:ea typeface="Calibri" pitchFamily="34" charset="-122"/>
                 <a:cs typeface="Calibri" pitchFamily="34" charset="-120"/>
               </a:rPr>
-              <a:t>PR-AUC (Precision-Recall Area Under Curve / Average Precision) serves as the primary metric under class imbalance. ROC-AUC measures true positive rate vs false alarm rate across all operational cutoffs.</a:t>
+              <a:t>Why Accuracy is Banned: 83% of variants are benign. A lazy model predicting "Benign" for everything gets 83% accuracy while missing 100% of diseases! PR-AUC measures true disease detection without being tricked by harmless variants.</a:t>
             </a:r>
             <a:endParaRPr lang="en-US" sz="1350" dirty="0"/>
           </a:p>
@@ -7428,7 +8349,7 @@
           <a:bodyPr wrap="square" lIns="0" tIns="0" rIns="0" bIns="0" rtlCol="0" anchor="ctr"/>
           <a:lstStyle/>
           <a:p>
-            <a:pPr marL="0" indent="0">
+            <a:pPr indent="0" marL="0">
               <a:buNone/>
             </a:pPr>
             <a:r>
@@ -7467,7 +8388,7 @@
           <a:bodyPr wrap="square" lIns="0" tIns="0" rIns="0" bIns="0" rtlCol="0" anchor="ctr"/>
           <a:lstStyle/>
           <a:p>
-            <a:pPr marL="0" indent="0">
+            <a:pPr indent="0" marL="0">
               <a:buNone/>
             </a:pPr>
             <a:r>
@@ -7529,7 +8450,7 @@
           <a:bodyPr wrap="square" lIns="0" tIns="0" rIns="0" bIns="0" rtlCol="0" anchor="ctr"/>
           <a:lstStyle/>
           <a:p>
-            <a:pPr marL="0" indent="0">
+            <a:pPr indent="0" marL="0">
               <a:lnSpc>
                 <a:spcPct val="125000"/>
               </a:lnSpc>
@@ -7544,7 +8465,7 @@
                 <a:ea typeface="Calibri" pitchFamily="34" charset="-122"/>
                 <a:cs typeface="Calibri" pitchFamily="34" charset="-120"/>
               </a:rPr>
-              <a:t>Clinical Sensitivity (Recall) ensures true disease-causing variants are captured. Precision@Top-5% verifies clinical triage purity. Brier Score measures probabilistic calibration reliability.</a:t>
+              <a:t>Clinical Sensitivity (Recall) measures the % of true disease mutations captured (minimizing missed diseases). Top-5% Precision checks purity at the top of the queue. Brier Score measures probability honesty.</a:t>
             </a:r>
             <a:endParaRPr lang="en-US" sz="1350" dirty="0"/>
           </a:p>
@@ -7566,7 +8487,6 @@
         <a:solidFill>
           <a:srgbClr val="F8FAFC"/>
         </a:solidFill>
-        <a:effectLst/>
       </p:bgPr>
     </p:bg>
     <p:spTree>
@@ -7604,7 +8524,7 @@
           <a:bodyPr wrap="square" rtlCol="0" anchor="ctr"/>
           <a:lstStyle/>
           <a:p>
-            <a:pPr marL="0" indent="0">
+            <a:pPr indent="0" marL="0">
               <a:buNone/>
             </a:pPr>
             <a:r>
@@ -7643,7 +8563,7 @@
           <a:bodyPr wrap="square" lIns="0" tIns="0" rIns="0" bIns="0" rtlCol="0" anchor="ctr"/>
           <a:lstStyle/>
           <a:p>
-            <a:pPr marL="0" indent="0">
+            <a:pPr indent="0" marL="0">
               <a:buNone/>
             </a:pPr>
             <a:r>
@@ -7682,7 +8602,7 @@
           <a:bodyPr wrap="square" lIns="0" tIns="0" rIns="0" bIns="0" rtlCol="0" anchor="ctr"/>
           <a:lstStyle/>
           <a:p>
-            <a:pPr marL="0" indent="0">
+            <a:pPr indent="0" marL="0">
               <a:buNone/>
             </a:pPr>
             <a:r>
@@ -7694,7 +8614,7 @@
                 <a:ea typeface="Calibri" pitchFamily="34" charset="-122"/>
                 <a:cs typeface="Calibri" pitchFamily="34" charset="-120"/>
               </a:rPr>
-              <a:t>Evaluating linear and tree models on unseen holdout test chromosomes (N = 8,854)</a:t>
+              <a:t>Benchmarking standard machine learning models on unseen test chromosomes</a:t>
             </a:r>
             <a:endParaRPr lang="en-US" sz="1400" dirty="0"/>
           </a:p>
@@ -7744,7 +8664,7 @@
           <a:bodyPr wrap="square" rtlCol="0" anchor="ctr"/>
           <a:lstStyle/>
           <a:p>
-            <a:pPr marL="0" indent="0">
+            <a:pPr indent="0" marL="0">
               <a:buNone/>
             </a:pPr>
             <a:r>
@@ -7756,7 +8676,7 @@
                 <a:ea typeface="Calibri" pitchFamily="34" charset="-122"/>
                 <a:cs typeface="Calibri" pitchFamily="34" charset="-120"/>
               </a:rPr>
-              <a:t>Group 15  |  Final Project Review  |  AI-Based Structural Variant Prioritization</a:t>
+              <a:t>Department of Artificial Intelligence  |  Final Project Review  |  Amrita Vishwa Vidyapeetham</a:t>
             </a:r>
             <a:endParaRPr lang="en-US" sz="1100" dirty="0"/>
           </a:p>
@@ -7783,7 +8703,7 @@
           <a:bodyPr wrap="square" rtlCol="0" anchor="ctr"/>
           <a:lstStyle/>
           <a:p>
-            <a:pPr marL="0" indent="0" algn="r">
+            <a:pPr algn="r" indent="0" marL="0">
               <a:buNone/>
             </a:pPr>
             <a:r>
@@ -7824,48 +8744,12 @@
             <a:tbl>
               <a:tblPr/>
               <a:tblGrid>
-                <a:gridCol w="1920240">
-                  <a:extLst>
-                    <a:ext uri="{9D8B030D-6E8A-4147-A177-3AD203B41FA5}">
-                      <a16:colId xmlns:a16="http://schemas.microsoft.com/office/drawing/2014/main" val="20000"/>
-                    </a:ext>
-                  </a:extLst>
-                </a:gridCol>
-                <a:gridCol w="914400">
-                  <a:extLst>
-                    <a:ext uri="{9D8B030D-6E8A-4147-A177-3AD203B41FA5}">
-                      <a16:colId xmlns:a16="http://schemas.microsoft.com/office/drawing/2014/main" val="20001"/>
-                    </a:ext>
-                  </a:extLst>
-                </a:gridCol>
-                <a:gridCol w="914400">
-                  <a:extLst>
-                    <a:ext uri="{9D8B030D-6E8A-4147-A177-3AD203B41FA5}">
-                      <a16:colId xmlns:a16="http://schemas.microsoft.com/office/drawing/2014/main" val="20002"/>
-                    </a:ext>
-                  </a:extLst>
-                </a:gridCol>
-                <a:gridCol w="914400">
-                  <a:extLst>
-                    <a:ext uri="{9D8B030D-6E8A-4147-A177-3AD203B41FA5}">
-                      <a16:colId xmlns:a16="http://schemas.microsoft.com/office/drawing/2014/main" val="20003"/>
-                    </a:ext>
-                  </a:extLst>
-                </a:gridCol>
-                <a:gridCol w="960120">
-                  <a:extLst>
-                    <a:ext uri="{9D8B030D-6E8A-4147-A177-3AD203B41FA5}">
-                      <a16:colId xmlns:a16="http://schemas.microsoft.com/office/drawing/2014/main" val="20004"/>
-                    </a:ext>
-                  </a:extLst>
-                </a:gridCol>
-                <a:gridCol w="960120">
-                  <a:extLst>
-                    <a:ext uri="{9D8B030D-6E8A-4147-A177-3AD203B41FA5}">
-                      <a16:colId xmlns:a16="http://schemas.microsoft.com/office/drawing/2014/main" val="20005"/>
-                    </a:ext>
-                  </a:extLst>
-                </a:gridCol>
+                <a:gridCol w="1920240"/>
+                <a:gridCol w="914400"/>
+                <a:gridCol w="914400"/>
+                <a:gridCol w="914400"/>
+                <a:gridCol w="960120"/>
+                <a:gridCol w="960120"/>
               </a:tblGrid>
               <a:tr h="877824">
                 <a:tc>
@@ -7873,7 +8757,7 @@
                     <a:bodyPr/>
                     <a:lstStyle/>
                     <a:p>
-                      <a:pPr marL="0" indent="0" algn="ctr">
+                      <a:pPr algn="ctr" indent="0" marL="0">
                         <a:buNone/>
                       </a:pPr>
                       <a:r>
@@ -7887,7 +8771,7 @@
                       <a:endParaRPr lang="en-US" sz="1200" dirty="0"/>
                     </a:p>
                   </a:txBody>
-                  <a:tcPr anchor="ctr">
+                  <a:tcPr marL="91440" marR="91440" marT="45720" marB="45720" anchor="ctr">
                     <a:lnL w="12700" cap="flat" cmpd="sng" algn="ctr">
                       <a:solidFill>
                         <a:srgbClr val="CBD5E1"/>
@@ -7934,7 +8818,7 @@
                     <a:bodyPr/>
                     <a:lstStyle/>
                     <a:p>
-                      <a:pPr marL="0" indent="0" algn="ctr">
+                      <a:pPr algn="ctr" indent="0" marL="0">
                         <a:buNone/>
                       </a:pPr>
                       <a:r>
@@ -7948,7 +8832,7 @@
                       <a:endParaRPr lang="en-US" sz="1200" dirty="0"/>
                     </a:p>
                   </a:txBody>
-                  <a:tcPr anchor="ctr">
+                  <a:tcPr marL="91440" marR="91440" marT="45720" marB="45720" anchor="ctr">
                     <a:lnL w="12700" cap="flat" cmpd="sng" algn="ctr">
                       <a:solidFill>
                         <a:srgbClr val="CBD5E1"/>
@@ -7995,7 +8879,7 @@
                     <a:bodyPr/>
                     <a:lstStyle/>
                     <a:p>
-                      <a:pPr marL="0" indent="0" algn="ctr">
+                      <a:pPr algn="ctr" indent="0" marL="0">
                         <a:buNone/>
                       </a:pPr>
                       <a:r>
@@ -8009,7 +8893,7 @@
                       <a:endParaRPr lang="en-US" sz="1200" dirty="0"/>
                     </a:p>
                   </a:txBody>
-                  <a:tcPr anchor="ctr">
+                  <a:tcPr marL="91440" marR="91440" marT="45720" marB="45720" anchor="ctr">
                     <a:lnL w="12700" cap="flat" cmpd="sng" algn="ctr">
                       <a:solidFill>
                         <a:srgbClr val="CBD5E1"/>
@@ -8056,7 +8940,7 @@
                     <a:bodyPr/>
                     <a:lstStyle/>
                     <a:p>
-                      <a:pPr marL="0" indent="0" algn="ctr">
+                      <a:pPr algn="ctr" indent="0" marL="0">
                         <a:buNone/>
                       </a:pPr>
                       <a:r>
@@ -8070,7 +8954,7 @@
                       <a:endParaRPr lang="en-US" sz="1200" dirty="0"/>
                     </a:p>
                   </a:txBody>
-                  <a:tcPr anchor="ctr">
+                  <a:tcPr marL="91440" marR="91440" marT="45720" marB="45720" anchor="ctr">
                     <a:lnL w="12700" cap="flat" cmpd="sng" algn="ctr">
                       <a:solidFill>
                         <a:srgbClr val="CBD5E1"/>
@@ -8117,7 +9001,7 @@
                     <a:bodyPr/>
                     <a:lstStyle/>
                     <a:p>
-                      <a:pPr marL="0" indent="0" algn="ctr">
+                      <a:pPr algn="ctr" indent="0" marL="0">
                         <a:buNone/>
                       </a:pPr>
                       <a:r>
@@ -8131,7 +9015,7 @@
                       <a:endParaRPr lang="en-US" sz="1200" dirty="0"/>
                     </a:p>
                   </a:txBody>
-                  <a:tcPr anchor="ctr">
+                  <a:tcPr marL="91440" marR="91440" marT="45720" marB="45720" anchor="ctr">
                     <a:lnL w="12700" cap="flat" cmpd="sng" algn="ctr">
                       <a:solidFill>
                         <a:srgbClr val="CBD5E1"/>
@@ -8178,7 +9062,7 @@
                     <a:bodyPr/>
                     <a:lstStyle/>
                     <a:p>
-                      <a:pPr marL="0" indent="0" algn="ctr">
+                      <a:pPr algn="ctr" indent="0" marL="0">
                         <a:buNone/>
                       </a:pPr>
                       <a:r>
@@ -8192,7 +9076,7 @@
                       <a:endParaRPr lang="en-US" sz="1200" dirty="0"/>
                     </a:p>
                   </a:txBody>
-                  <a:tcPr anchor="ctr">
+                  <a:tcPr marL="91440" marR="91440" marT="45720" marB="45720" anchor="ctr">
                     <a:lnL w="12700" cap="flat" cmpd="sng" algn="ctr">
                       <a:solidFill>
                         <a:srgbClr val="CBD5E1"/>
@@ -8234,11 +9118,6 @@
                     </a:solidFill>
                   </a:tcPr>
                 </a:tc>
-                <a:extLst>
-                  <a:ext uri="{0D108BD9-81ED-4DB2-BD59-A6C34878D82A}">
-                    <a16:rowId xmlns:a16="http://schemas.microsoft.com/office/drawing/2014/main" val="10000"/>
-                  </a:ext>
-                </a:extLst>
               </a:tr>
               <a:tr h="877824">
                 <a:tc>
@@ -8246,7 +9125,7 @@
                     <a:bodyPr/>
                     <a:lstStyle/>
                     <a:p>
-                      <a:pPr marL="0" indent="0" algn="ctr">
+                      <a:pPr algn="ctr" indent="0" marL="0">
                         <a:buNone/>
                       </a:pPr>
                       <a:r>
@@ -8260,7 +9139,7 @@
                       <a:endParaRPr lang="en-US" sz="1150" dirty="0"/>
                     </a:p>
                   </a:txBody>
-                  <a:tcPr anchor="ctr">
+                  <a:tcPr marL="91440" marR="91440" marT="45720" marB="45720" anchor="ctr">
                     <a:lnL w="12700" cap="flat" cmpd="sng" algn="ctr">
                       <a:solidFill>
                         <a:srgbClr val="CBD5E1"/>
@@ -8304,7 +9183,7 @@
                     <a:bodyPr/>
                     <a:lstStyle/>
                     <a:p>
-                      <a:pPr marL="0" indent="0" algn="ctr">
+                      <a:pPr algn="ctr" indent="0" marL="0">
                         <a:buNone/>
                       </a:pPr>
                       <a:r>
@@ -8318,7 +9197,7 @@
                       <a:endParaRPr lang="en-US" sz="1150" dirty="0"/>
                     </a:p>
                   </a:txBody>
-                  <a:tcPr anchor="ctr">
+                  <a:tcPr marL="91440" marR="91440" marT="45720" marB="45720" anchor="ctr">
                     <a:lnL w="12700" cap="flat" cmpd="sng" algn="ctr">
                       <a:solidFill>
                         <a:srgbClr val="CBD5E1"/>
@@ -8362,7 +9241,7 @@
                     <a:bodyPr/>
                     <a:lstStyle/>
                     <a:p>
-                      <a:pPr marL="0" indent="0" algn="ctr">
+                      <a:pPr algn="ctr" indent="0" marL="0">
                         <a:buNone/>
                       </a:pPr>
                       <a:r>
@@ -8376,7 +9255,7 @@
                       <a:endParaRPr lang="en-US" sz="1150" dirty="0"/>
                     </a:p>
                   </a:txBody>
-                  <a:tcPr anchor="ctr">
+                  <a:tcPr marL="91440" marR="91440" marT="45720" marB="45720" anchor="ctr">
                     <a:lnL w="12700" cap="flat" cmpd="sng" algn="ctr">
                       <a:solidFill>
                         <a:srgbClr val="CBD5E1"/>
@@ -8420,7 +9299,7 @@
                     <a:bodyPr/>
                     <a:lstStyle/>
                     <a:p>
-                      <a:pPr marL="0" indent="0" algn="ctr">
+                      <a:pPr algn="ctr" indent="0" marL="0">
                         <a:buNone/>
                       </a:pPr>
                       <a:r>
@@ -8434,7 +9313,7 @@
                       <a:endParaRPr lang="en-US" sz="1150" dirty="0"/>
                     </a:p>
                   </a:txBody>
-                  <a:tcPr anchor="ctr">
+                  <a:tcPr marL="91440" marR="91440" marT="45720" marB="45720" anchor="ctr">
                     <a:lnL w="12700" cap="flat" cmpd="sng" algn="ctr">
                       <a:solidFill>
                         <a:srgbClr val="CBD5E1"/>
@@ -8478,7 +9357,7 @@
                     <a:bodyPr/>
                     <a:lstStyle/>
                     <a:p>
-                      <a:pPr marL="0" indent="0" algn="ctr">
+                      <a:pPr algn="ctr" indent="0" marL="0">
                         <a:buNone/>
                       </a:pPr>
                       <a:r>
@@ -8492,7 +9371,7 @@
                       <a:endParaRPr lang="en-US" sz="1150" dirty="0"/>
                     </a:p>
                   </a:txBody>
-                  <a:tcPr anchor="ctr">
+                  <a:tcPr marL="91440" marR="91440" marT="45720" marB="45720" anchor="ctr">
                     <a:lnL w="12700" cap="flat" cmpd="sng" algn="ctr">
                       <a:solidFill>
                         <a:srgbClr val="CBD5E1"/>
@@ -8536,7 +9415,7 @@
                     <a:bodyPr/>
                     <a:lstStyle/>
                     <a:p>
-                      <a:pPr marL="0" indent="0" algn="ctr">
+                      <a:pPr algn="ctr" indent="0" marL="0">
                         <a:buNone/>
                       </a:pPr>
                       <a:r>
@@ -8550,7 +9429,7 @@
                       <a:endParaRPr lang="en-US" sz="1150" dirty="0"/>
                     </a:p>
                   </a:txBody>
-                  <a:tcPr anchor="ctr">
+                  <a:tcPr marL="91440" marR="91440" marT="45720" marB="45720" anchor="ctr">
                     <a:lnL w="12700" cap="flat" cmpd="sng" algn="ctr">
                       <a:solidFill>
                         <a:srgbClr val="CBD5E1"/>
@@ -8589,11 +9468,6 @@
                     </a:lnB>
                   </a:tcPr>
                 </a:tc>
-                <a:extLst>
-                  <a:ext uri="{0D108BD9-81ED-4DB2-BD59-A6C34878D82A}">
-                    <a16:rowId xmlns:a16="http://schemas.microsoft.com/office/drawing/2014/main" val="10001"/>
-                  </a:ext>
-                </a:extLst>
               </a:tr>
               <a:tr h="877824">
                 <a:tc>
@@ -8601,7 +9475,7 @@
                     <a:bodyPr/>
                     <a:lstStyle/>
                     <a:p>
-                      <a:pPr marL="0" indent="0" algn="ctr">
+                      <a:pPr algn="ctr" indent="0" marL="0">
                         <a:buNone/>
                       </a:pPr>
                       <a:r>
@@ -8615,7 +9489,7 @@
                       <a:endParaRPr lang="en-US" sz="1150" dirty="0"/>
                     </a:p>
                   </a:txBody>
-                  <a:tcPr anchor="ctr">
+                  <a:tcPr marL="91440" marR="91440" marT="45720" marB="45720" anchor="ctr">
                     <a:lnL w="12700" cap="flat" cmpd="sng" algn="ctr">
                       <a:solidFill>
                         <a:srgbClr val="CBD5E1"/>
@@ -8659,7 +9533,7 @@
                     <a:bodyPr/>
                     <a:lstStyle/>
                     <a:p>
-                      <a:pPr marL="0" indent="0" algn="ctr">
+                      <a:pPr algn="ctr" indent="0" marL="0">
                         <a:buNone/>
                       </a:pPr>
                       <a:r>
@@ -8673,7 +9547,7 @@
                       <a:endParaRPr lang="en-US" sz="1150" dirty="0"/>
                     </a:p>
                   </a:txBody>
-                  <a:tcPr anchor="ctr">
+                  <a:tcPr marL="91440" marR="91440" marT="45720" marB="45720" anchor="ctr">
                     <a:lnL w="12700" cap="flat" cmpd="sng" algn="ctr">
                       <a:solidFill>
                         <a:srgbClr val="CBD5E1"/>
@@ -8717,7 +9591,7 @@
                     <a:bodyPr/>
                     <a:lstStyle/>
                     <a:p>
-                      <a:pPr marL="0" indent="0" algn="ctr">
+                      <a:pPr algn="ctr" indent="0" marL="0">
                         <a:buNone/>
                       </a:pPr>
                       <a:r>
@@ -8731,7 +9605,7 @@
                       <a:endParaRPr lang="en-US" sz="1150" dirty="0"/>
                     </a:p>
                   </a:txBody>
-                  <a:tcPr anchor="ctr">
+                  <a:tcPr marL="91440" marR="91440" marT="45720" marB="45720" anchor="ctr">
                     <a:lnL w="12700" cap="flat" cmpd="sng" algn="ctr">
                       <a:solidFill>
                         <a:srgbClr val="CBD5E1"/>
@@ -8775,7 +9649,7 @@
                     <a:bodyPr/>
                     <a:lstStyle/>
                     <a:p>
-                      <a:pPr marL="0" indent="0" algn="ctr">
+                      <a:pPr algn="ctr" indent="0" marL="0">
                         <a:buNone/>
                       </a:pPr>
                       <a:r>
@@ -8789,7 +9663,7 @@
                       <a:endParaRPr lang="en-US" sz="1150" dirty="0"/>
                     </a:p>
                   </a:txBody>
-                  <a:tcPr anchor="ctr">
+                  <a:tcPr marL="91440" marR="91440" marT="45720" marB="45720" anchor="ctr">
                     <a:lnL w="12700" cap="flat" cmpd="sng" algn="ctr">
                       <a:solidFill>
                         <a:srgbClr val="CBD5E1"/>
@@ -8833,7 +9707,7 @@
                     <a:bodyPr/>
                     <a:lstStyle/>
                     <a:p>
-                      <a:pPr marL="0" indent="0" algn="ctr">
+                      <a:pPr algn="ctr" indent="0" marL="0">
                         <a:buNone/>
                       </a:pPr>
                       <a:r>
@@ -8847,7 +9721,7 @@
                       <a:endParaRPr lang="en-US" sz="1150" dirty="0"/>
                     </a:p>
                   </a:txBody>
-                  <a:tcPr anchor="ctr">
+                  <a:tcPr marL="91440" marR="91440" marT="45720" marB="45720" anchor="ctr">
                     <a:lnL w="12700" cap="flat" cmpd="sng" algn="ctr">
                       <a:solidFill>
                         <a:srgbClr val="CBD5E1"/>
@@ -8891,7 +9765,7 @@
                     <a:bodyPr/>
                     <a:lstStyle/>
                     <a:p>
-                      <a:pPr marL="0" indent="0" algn="ctr">
+                      <a:pPr algn="ctr" indent="0" marL="0">
                         <a:buNone/>
                       </a:pPr>
                       <a:r>
@@ -8905,7 +9779,7 @@
                       <a:endParaRPr lang="en-US" sz="1150" dirty="0"/>
                     </a:p>
                   </a:txBody>
-                  <a:tcPr anchor="ctr">
+                  <a:tcPr marL="91440" marR="91440" marT="45720" marB="45720" anchor="ctr">
                     <a:lnL w="12700" cap="flat" cmpd="sng" algn="ctr">
                       <a:solidFill>
                         <a:srgbClr val="CBD5E1"/>
@@ -8944,11 +9818,6 @@
                     </a:lnB>
                   </a:tcPr>
                 </a:tc>
-                <a:extLst>
-                  <a:ext uri="{0D108BD9-81ED-4DB2-BD59-A6C34878D82A}">
-                    <a16:rowId xmlns:a16="http://schemas.microsoft.com/office/drawing/2014/main" val="10002"/>
-                  </a:ext>
-                </a:extLst>
               </a:tr>
               <a:tr h="877824">
                 <a:tc>
@@ -8956,7 +9825,7 @@
                     <a:bodyPr/>
                     <a:lstStyle/>
                     <a:p>
-                      <a:pPr marL="0" indent="0" algn="ctr">
+                      <a:pPr algn="ctr" indent="0" marL="0">
                         <a:buNone/>
                       </a:pPr>
                       <a:r>
@@ -8970,7 +9839,7 @@
                       <a:endParaRPr lang="en-US" sz="1150" dirty="0"/>
                     </a:p>
                   </a:txBody>
-                  <a:tcPr anchor="ctr">
+                  <a:tcPr marL="91440" marR="91440" marT="45720" marB="45720" anchor="ctr">
                     <a:lnL w="12700" cap="flat" cmpd="sng" algn="ctr">
                       <a:solidFill>
                         <a:srgbClr val="CBD5E1"/>
@@ -9014,7 +9883,7 @@
                     <a:bodyPr/>
                     <a:lstStyle/>
                     <a:p>
-                      <a:pPr marL="0" indent="0" algn="ctr">
+                      <a:pPr algn="ctr" indent="0" marL="0">
                         <a:buNone/>
                       </a:pPr>
                       <a:r>
@@ -9028,7 +9897,7 @@
                       <a:endParaRPr lang="en-US" sz="1150" dirty="0"/>
                     </a:p>
                   </a:txBody>
-                  <a:tcPr anchor="ctr">
+                  <a:tcPr marL="91440" marR="91440" marT="45720" marB="45720" anchor="ctr">
                     <a:lnL w="12700" cap="flat" cmpd="sng" algn="ctr">
                       <a:solidFill>
                         <a:srgbClr val="CBD5E1"/>
@@ -9072,7 +9941,7 @@
                     <a:bodyPr/>
                     <a:lstStyle/>
                     <a:p>
-                      <a:pPr marL="0" indent="0" algn="ctr">
+                      <a:pPr algn="ctr" indent="0" marL="0">
                         <a:buNone/>
                       </a:pPr>
                       <a:r>
@@ -9086,7 +9955,7 @@
                       <a:endParaRPr lang="en-US" sz="1150" dirty="0"/>
                     </a:p>
                   </a:txBody>
-                  <a:tcPr anchor="ctr">
+                  <a:tcPr marL="91440" marR="91440" marT="45720" marB="45720" anchor="ctr">
                     <a:lnL w="12700" cap="flat" cmpd="sng" algn="ctr">
                       <a:solidFill>
                         <a:srgbClr val="CBD5E1"/>
@@ -9130,7 +9999,7 @@
                     <a:bodyPr/>
                     <a:lstStyle/>
                     <a:p>
-                      <a:pPr marL="0" indent="0" algn="ctr">
+                      <a:pPr algn="ctr" indent="0" marL="0">
                         <a:buNone/>
                       </a:pPr>
                       <a:r>
@@ -9144,7 +10013,7 @@
                       <a:endParaRPr lang="en-US" sz="1150" dirty="0"/>
                     </a:p>
                   </a:txBody>
-                  <a:tcPr anchor="ctr">
+                  <a:tcPr marL="91440" marR="91440" marT="45720" marB="45720" anchor="ctr">
                     <a:lnL w="12700" cap="flat" cmpd="sng" algn="ctr">
                       <a:solidFill>
                         <a:srgbClr val="CBD5E1"/>
@@ -9188,7 +10057,7 @@
                     <a:bodyPr/>
                     <a:lstStyle/>
                     <a:p>
-                      <a:pPr marL="0" indent="0" algn="ctr">
+                      <a:pPr algn="ctr" indent="0" marL="0">
                         <a:buNone/>
                       </a:pPr>
                       <a:r>
@@ -9202,7 +10071,7 @@
                       <a:endParaRPr lang="en-US" sz="1150" dirty="0"/>
                     </a:p>
                   </a:txBody>
-                  <a:tcPr anchor="ctr">
+                  <a:tcPr marL="91440" marR="91440" marT="45720" marB="45720" anchor="ctr">
                     <a:lnL w="12700" cap="flat" cmpd="sng" algn="ctr">
                       <a:solidFill>
                         <a:srgbClr val="CBD5E1"/>
@@ -9246,7 +10115,7 @@
                     <a:bodyPr/>
                     <a:lstStyle/>
                     <a:p>
-                      <a:pPr marL="0" indent="0" algn="ctr">
+                      <a:pPr algn="ctr" indent="0" marL="0">
                         <a:buNone/>
                       </a:pPr>
                       <a:r>
@@ -9260,7 +10129,7 @@
                       <a:endParaRPr lang="en-US" sz="1150" dirty="0"/>
                     </a:p>
                   </a:txBody>
-                  <a:tcPr anchor="ctr">
+                  <a:tcPr marL="91440" marR="91440" marT="45720" marB="45720" anchor="ctr">
                     <a:lnL w="12700" cap="flat" cmpd="sng" algn="ctr">
                       <a:solidFill>
                         <a:srgbClr val="CBD5E1"/>
@@ -9299,11 +10168,6 @@
                     </a:lnB>
                   </a:tcPr>
                 </a:tc>
-                <a:extLst>
-                  <a:ext uri="{0D108BD9-81ED-4DB2-BD59-A6C34878D82A}">
-                    <a16:rowId xmlns:a16="http://schemas.microsoft.com/office/drawing/2014/main" val="10003"/>
-                  </a:ext>
-                </a:extLst>
               </a:tr>
               <a:tr h="877824">
                 <a:tc>
@@ -9311,7 +10175,7 @@
                     <a:bodyPr/>
                     <a:lstStyle/>
                     <a:p>
-                      <a:pPr marL="0" indent="0" algn="ctr">
+                      <a:pPr algn="ctr" indent="0" marL="0">
                         <a:buNone/>
                       </a:pPr>
                       <a:r>
@@ -9325,7 +10189,7 @@
                       <a:endParaRPr lang="en-US" sz="1200" dirty="0"/>
                     </a:p>
                   </a:txBody>
-                  <a:tcPr anchor="ctr">
+                  <a:tcPr marL="91440" marR="91440" marT="45720" marB="45720" anchor="ctr">
                     <a:lnL w="12700" cap="flat" cmpd="sng" algn="ctr">
                       <a:solidFill>
                         <a:srgbClr val="CBD5E1"/>
@@ -9372,7 +10236,7 @@
                     <a:bodyPr/>
                     <a:lstStyle/>
                     <a:p>
-                      <a:pPr marL="0" indent="0" algn="ctr">
+                      <a:pPr algn="ctr" indent="0" marL="0">
                         <a:buNone/>
                       </a:pPr>
                       <a:r>
@@ -9386,7 +10250,7 @@
                       <a:endParaRPr lang="en-US" sz="1200" dirty="0"/>
                     </a:p>
                   </a:txBody>
-                  <a:tcPr anchor="ctr">
+                  <a:tcPr marL="91440" marR="91440" marT="45720" marB="45720" anchor="ctr">
                     <a:lnL w="12700" cap="flat" cmpd="sng" algn="ctr">
                       <a:solidFill>
                         <a:srgbClr val="CBD5E1"/>
@@ -9433,7 +10297,7 @@
                     <a:bodyPr/>
                     <a:lstStyle/>
                     <a:p>
-                      <a:pPr marL="0" indent="0" algn="ctr">
+                      <a:pPr algn="ctr" indent="0" marL="0">
                         <a:buNone/>
                       </a:pPr>
                       <a:r>
@@ -9447,7 +10311,7 @@
                       <a:endParaRPr lang="en-US" sz="1200" dirty="0"/>
                     </a:p>
                   </a:txBody>
-                  <a:tcPr anchor="ctr">
+                  <a:tcPr marL="91440" marR="91440" marT="45720" marB="45720" anchor="ctr">
                     <a:lnL w="12700" cap="flat" cmpd="sng" algn="ctr">
                       <a:solidFill>
                         <a:srgbClr val="CBD5E1"/>
@@ -9494,7 +10358,7 @@
                     <a:bodyPr/>
                     <a:lstStyle/>
                     <a:p>
-                      <a:pPr marL="0" indent="0" algn="ctr">
+                      <a:pPr algn="ctr" indent="0" marL="0">
                         <a:buNone/>
                       </a:pPr>
                       <a:r>
@@ -9508,7 +10372,7 @@
                       <a:endParaRPr lang="en-US" sz="1200" dirty="0"/>
                     </a:p>
                   </a:txBody>
-                  <a:tcPr anchor="ctr">
+                  <a:tcPr marL="91440" marR="91440" marT="45720" marB="45720" anchor="ctr">
                     <a:lnL w="12700" cap="flat" cmpd="sng" algn="ctr">
                       <a:solidFill>
                         <a:srgbClr val="CBD5E1"/>
@@ -9555,7 +10419,7 @@
                     <a:bodyPr/>
                     <a:lstStyle/>
                     <a:p>
-                      <a:pPr marL="0" indent="0" algn="ctr">
+                      <a:pPr algn="ctr" indent="0" marL="0">
                         <a:buNone/>
                       </a:pPr>
                       <a:r>
@@ -9569,7 +10433,7 @@
                       <a:endParaRPr lang="en-US" sz="1200" dirty="0"/>
                     </a:p>
                   </a:txBody>
-                  <a:tcPr anchor="ctr">
+                  <a:tcPr marL="91440" marR="91440" marT="45720" marB="45720" anchor="ctr">
                     <a:lnL w="12700" cap="flat" cmpd="sng" algn="ctr">
                       <a:solidFill>
                         <a:srgbClr val="CBD5E1"/>
@@ -9616,7 +10480,7 @@
                     <a:bodyPr/>
                     <a:lstStyle/>
                     <a:p>
-                      <a:pPr marL="0" indent="0" algn="ctr">
+                      <a:pPr algn="ctr" indent="0" marL="0">
                         <a:buNone/>
                       </a:pPr>
                       <a:r>
@@ -9630,7 +10494,7 @@
                       <a:endParaRPr lang="en-US" sz="1200" dirty="0"/>
                     </a:p>
                   </a:txBody>
-                  <a:tcPr anchor="ctr">
+                  <a:tcPr marL="91440" marR="91440" marT="45720" marB="45720" anchor="ctr">
                     <a:lnL w="12700" cap="flat" cmpd="sng" algn="ctr">
                       <a:solidFill>
                         <a:srgbClr val="CBD5E1"/>
@@ -9672,11 +10536,6 @@
                     </a:solidFill>
                   </a:tcPr>
                 </a:tc>
-                <a:extLst>
-                  <a:ext uri="{0D108BD9-81ED-4DB2-BD59-A6C34878D82A}">
-                    <a16:rowId xmlns:a16="http://schemas.microsoft.com/office/drawing/2014/main" val="10004"/>
-                  </a:ext>
-                </a:extLst>
               </a:tr>
             </a:tbl>
           </a:graphicData>
@@ -9730,7 +10589,7 @@
           <a:bodyPr wrap="square" lIns="0" tIns="0" rIns="0" bIns="0" rtlCol="0" anchor="ctr"/>
           <a:lstStyle/>
           <a:p>
-            <a:pPr marL="0" indent="0">
+            <a:pPr indent="0" marL="0">
               <a:buNone/>
             </a:pPr>
             <a:r>
@@ -9769,7 +10628,7 @@
           <a:bodyPr wrap="square" lIns="0" tIns="0" rIns="0" bIns="0" rtlCol="0" anchor="ctr"/>
           <a:lstStyle/>
           <a:p>
-            <a:pPr marL="0" indent="0">
+            <a:pPr indent="0" marL="0">
               <a:buNone/>
             </a:pPr>
             <a:r>
@@ -9781,7 +10640,7 @@
                 <a:ea typeface="Calibri" pitchFamily="34" charset="-122"/>
                 <a:cs typeface="Calibri" pitchFamily="34" charset="-120"/>
               </a:rPr>
-              <a:t>XGBoost PR-AUC Score</a:t>
+              <a:t>XGBoost PR-AUC Baseline</a:t>
             </a:r>
             <a:endParaRPr lang="en-US" sz="1350" dirty="0"/>
           </a:p>
@@ -9808,7 +10667,7 @@
           <a:bodyPr wrap="square" lIns="0" tIns="0" rIns="0" bIns="0" rtlCol="0" anchor="ctr"/>
           <a:lstStyle/>
           <a:p>
-            <a:pPr marL="0" indent="0">
+            <a:pPr indent="0" marL="0">
               <a:buNone/>
             </a:pPr>
             <a:r>
@@ -9820,7 +10679,7 @@
                 <a:ea typeface="Calibri" pitchFamily="34" charset="-122"/>
                 <a:cs typeface="Calibri" pitchFamily="34" charset="-120"/>
               </a:rPr>
-              <a:t>High precision-recall ranking among top-decile pathogenic variants on holdout test set.</a:t>
+              <a:t>Strong baseline ranking on the holdout test set, leading all other tree algorithms.</a:t>
             </a:r>
             <a:endParaRPr lang="en-US" sz="1150" dirty="0"/>
           </a:p>
@@ -9874,7 +10733,7 @@
           <a:bodyPr wrap="square" rtlCol="0" anchor="ctr"/>
           <a:lstStyle/>
           <a:p>
-            <a:pPr marL="0" indent="0">
+            <a:pPr indent="0" marL="0">
               <a:buNone/>
             </a:pPr>
             <a:r>
@@ -9886,7 +10745,7 @@
                 <a:ea typeface="Calibri" pitchFamily="34" charset="-122"/>
                 <a:cs typeface="Calibri" pitchFamily="34" charset="-120"/>
               </a:rPr>
-              <a:t>TREE ENSEMBLE LIMITATIONS</a:t>
+              <a:t>THE DANGEROUS TREE LIMITATION</a:t>
             </a:r>
             <a:endParaRPr lang="en-US" sz="1150" dirty="0"/>
           </a:p>
@@ -9913,7 +10772,7 @@
           <a:bodyPr wrap="square" lIns="0" tIns="0" rIns="0" bIns="0" rtlCol="0" anchor="ctr"/>
           <a:lstStyle/>
           <a:p>
-            <a:pPr marL="0" indent="0">
+            <a:pPr indent="0" marL="0">
               <a:buNone/>
             </a:pPr>
             <a:r>
@@ -9925,7 +10784,7 @@
                 <a:ea typeface="Calibri" pitchFamily="34" charset="-122"/>
                 <a:cs typeface="Calibri" pitchFamily="34" charset="-120"/>
               </a:rPr>
-              <a:t>Why Tree Models Cap Out</a:t>
+              <a:t>Why Trees Alone Are Not Enough</a:t>
             </a:r>
             <a:endParaRPr lang="en-US" sz="1600" dirty="0"/>
           </a:p>
@@ -9952,7 +10811,7 @@
           <a:bodyPr wrap="square" lIns="0" tIns="0" rIns="0" bIns="0" rtlCol="0" anchor="ctr"/>
           <a:lstStyle/>
           <a:p>
-            <a:pPr marL="0" indent="0">
+            <a:pPr indent="0" marL="0">
               <a:lnSpc>
                 <a:spcPct val="120000"/>
               </a:lnSpc>
@@ -9964,32 +10823,50 @@
                   <a:srgbClr val="0F172A"/>
                 </a:solidFill>
               </a:rPr>
-              <a:t>1. Step-Function Discretization: </a:t>
-            </a:r>
+              <a:t>1. Rigid Step Cuts: </a:t>
+            </a:r>
+            <a:pPr indent="0" marL="0">
+              <a:lnSpc>
+                <a:spcPct val="120000"/>
+              </a:lnSpc>
+              <a:buNone/>
+            </a:pPr>
             <a:r>
               <a:rPr lang="en-US" sz="1200" dirty="0">
                 <a:solidFill>
                   <a:srgbClr val="334155"/>
                 </a:solidFill>
               </a:rPr>
-              <a:t>Axis-aligned splits struggle to model continuous exponential allele frequency decays.
+              <a:t>Trees cut continuous rarity curves into rigid blocks, losing fine-grained signals.
 </a:t>
             </a:r>
+            <a:pPr indent="0" marL="0">
+              <a:lnSpc>
+                <a:spcPct val="120000"/>
+              </a:lnSpc>
+              <a:buNone/>
+            </a:pPr>
             <a:r>
               <a:rPr lang="en-US" sz="1200" b="1" dirty="0">
                 <a:solidFill>
                   <a:srgbClr val="0F172A"/>
                 </a:solidFill>
               </a:rPr>
-              <a:t>2. High False Negative Rate: </a:t>
-            </a:r>
+              <a:t>2. 1,745 Missed Diseases: </a:t>
+            </a:r>
+            <a:pPr indent="0" marL="0">
+              <a:lnSpc>
+                <a:spcPct val="120000"/>
+              </a:lnSpc>
+              <a:buNone/>
+            </a:pPr>
             <a:r>
               <a:rPr lang="en-US" sz="1200" dirty="0">
                 <a:solidFill>
                   <a:srgbClr val="334155"/>
                 </a:solidFill>
               </a:rPr>
-              <a:t>At default 0.50 cutoff, XGBoost misses 1,745 pathogenic variants, requiring continuous neural representations.</a:t>
+              <a:t>At standard cutoffs, XGBoost misses 1,745 disease variants. In healthcare, missing sick patients is unacceptable.</a:t>
             </a:r>
             <a:endParaRPr lang="en-US" sz="1200" dirty="0"/>
           </a:p>
@@ -10011,7 +10888,6 @@
         <a:solidFill>
           <a:srgbClr val="F8FAFC"/>
         </a:solidFill>
-        <a:effectLst/>
       </p:bgPr>
     </p:bg>
     <p:spTree>
@@ -10049,7 +10925,7 @@
           <a:bodyPr wrap="square" rtlCol="0" anchor="ctr"/>
           <a:lstStyle/>
           <a:p>
-            <a:pPr marL="0" indent="0">
+            <a:pPr indent="0" marL="0">
               <a:buNone/>
             </a:pPr>
             <a:r>
@@ -10088,7 +10964,7 @@
           <a:bodyPr wrap="square" lIns="0" tIns="0" rIns="0" bIns="0" rtlCol="0" anchor="ctr"/>
           <a:lstStyle/>
           <a:p>
-            <a:pPr marL="0" indent="0">
+            <a:pPr indent="0" marL="0">
               <a:buNone/>
             </a:pPr>
             <a:r>
@@ -10100,7 +10976,7 @@
                 <a:ea typeface="Calibri" pitchFamily="34" charset="-122"/>
                 <a:cs typeface="Calibri" pitchFamily="34" charset="-120"/>
               </a:rPr>
-              <a:t>Deep Learning and Multimodal Results</a:t>
+              <a:t>Deep Learning Results: Slashed Missed Diseases</a:t>
             </a:r>
             <a:endParaRPr lang="en-US" sz="2200" dirty="0"/>
           </a:p>
@@ -10127,7 +11003,7 @@
           <a:bodyPr wrap="square" lIns="0" tIns="0" rIns="0" bIns="0" rtlCol="0" anchor="ctr"/>
           <a:lstStyle/>
           <a:p>
-            <a:pPr marL="0" indent="0">
+            <a:pPr indent="0" marL="0">
               <a:buNone/>
             </a:pPr>
             <a:r>
@@ -10139,7 +11015,7 @@
                 <a:ea typeface="Calibri" pitchFamily="34" charset="-122"/>
                 <a:cs typeface="Calibri" pitchFamily="34" charset="-120"/>
               </a:rPr>
-              <a:t>94.4% clinical sensitivity and 38.8% reduction in probability calibration loss</a:t>
+              <a:t>Capturing 94.4% of disease variants and cutting false negatives by over 60%</a:t>
             </a:r>
             <a:endParaRPr lang="en-US" sz="1400" dirty="0"/>
           </a:p>
@@ -10189,7 +11065,7 @@
           <a:bodyPr wrap="square" rtlCol="0" anchor="ctr"/>
           <a:lstStyle/>
           <a:p>
-            <a:pPr marL="0" indent="0">
+            <a:pPr indent="0" marL="0">
               <a:buNone/>
             </a:pPr>
             <a:r>
@@ -10201,7 +11077,7 @@
                 <a:ea typeface="Calibri" pitchFamily="34" charset="-122"/>
                 <a:cs typeface="Calibri" pitchFamily="34" charset="-120"/>
               </a:rPr>
-              <a:t>Group 15  |  Final Project Review  |  AI-Based Structural Variant Prioritization</a:t>
+              <a:t>Department of Artificial Intelligence  |  Final Project Review  |  Amrita Vishwa Vidyapeetham</a:t>
             </a:r>
             <a:endParaRPr lang="en-US" sz="1100" dirty="0"/>
           </a:p>
@@ -10228,7 +11104,7 @@
           <a:bodyPr wrap="square" rtlCol="0" anchor="ctr"/>
           <a:lstStyle/>
           <a:p>
-            <a:pPr marL="0" indent="0" algn="r">
+            <a:pPr algn="r" indent="0" marL="0">
               <a:buNone/>
             </a:pPr>
             <a:r>
@@ -10294,7 +11170,7 @@
           <a:bodyPr wrap="square" lIns="0" tIns="0" rIns="0" bIns="0" rtlCol="0" anchor="ctr"/>
           <a:lstStyle/>
           <a:p>
-            <a:pPr marL="0" indent="0">
+            <a:pPr indent="0" marL="0">
               <a:buNone/>
             </a:pPr>
             <a:r>
@@ -10333,7 +11209,7 @@
           <a:bodyPr wrap="square" lIns="0" tIns="0" rIns="0" bIns="0" rtlCol="0" anchor="ctr"/>
           <a:lstStyle/>
           <a:p>
-            <a:pPr marL="0" indent="0">
+            <a:pPr indent="0" marL="0">
               <a:buNone/>
             </a:pPr>
             <a:r>
@@ -10372,7 +11248,7 @@
           <a:bodyPr wrap="square" lIns="0" tIns="0" rIns="0" bIns="0" rtlCol="0" anchor="ctr"/>
           <a:lstStyle/>
           <a:p>
-            <a:pPr marL="0" indent="0">
+            <a:pPr indent="0" marL="0">
               <a:buNone/>
             </a:pPr>
             <a:r>
@@ -10384,7 +11260,7 @@
                 <a:ea typeface="Calibri" pitchFamily="34" charset="-122"/>
                 <a:cs typeface="Calibri" pitchFamily="34" charset="-120"/>
               </a:rPr>
-              <a:t>Captures 6,916 of 7,326 pathogenic variants on unseen chromosomes.</a:t>
+              <a:t>Captures 6,916 of 7,326 disease variants on unseen test chromosomes.</a:t>
             </a:r>
             <a:endParaRPr lang="en-US" sz="1150" dirty="0"/>
           </a:p>
@@ -10438,7 +11314,7 @@
           <a:bodyPr wrap="square" lIns="0" tIns="0" rIns="0" bIns="0" rtlCol="0" anchor="ctr"/>
           <a:lstStyle/>
           <a:p>
-            <a:pPr marL="0" indent="0">
+            <a:pPr indent="0" marL="0">
               <a:buNone/>
             </a:pPr>
             <a:r>
@@ -10450,7 +11326,7 @@
                 <a:ea typeface="Calibri" pitchFamily="34" charset="-122"/>
                 <a:cs typeface="Calibri" pitchFamily="34" charset="-120"/>
               </a:rPr>
-              <a:t>0.9705</a:t>
+              <a:t>414 vs 1,745</a:t>
             </a:r>
             <a:endParaRPr lang="en-US" sz="3200" dirty="0"/>
           </a:p>
@@ -10477,7 +11353,7 @@
           <a:bodyPr wrap="square" lIns="0" tIns="0" rIns="0" bIns="0" rtlCol="0" anchor="ctr"/>
           <a:lstStyle/>
           <a:p>
-            <a:pPr marL="0" indent="0">
+            <a:pPr indent="0" marL="0">
               <a:buNone/>
             </a:pPr>
             <a:r>
@@ -10489,7 +11365,7 @@
                 <a:ea typeface="Calibri" pitchFamily="34" charset="-122"/>
                 <a:cs typeface="Calibri" pitchFamily="34" charset="-120"/>
               </a:rPr>
-              <a:t>Holdout PR-AUC Score</a:t>
+              <a:t>Missed Disease Variants</a:t>
             </a:r>
             <a:endParaRPr lang="en-US" sz="1350" dirty="0"/>
           </a:p>
@@ -10516,7 +11392,7 @@
           <a:bodyPr wrap="square" lIns="0" tIns="0" rIns="0" bIns="0" rtlCol="0" anchor="ctr"/>
           <a:lstStyle/>
           <a:p>
-            <a:pPr marL="0" indent="0">
+            <a:pPr indent="0" marL="0">
               <a:buNone/>
             </a:pPr>
             <a:r>
@@ -10528,7 +11404,7 @@
                 <a:ea typeface="Calibri" pitchFamily="34" charset="-122"/>
                 <a:cs typeface="Calibri" pitchFamily="34" charset="-120"/>
               </a:rPr>
-              <a:t>Tabular ResNet leads all classical tree models in true positive ranking.</a:t>
+              <a:t>Slashed false negatives by &gt;60% compared to standard XGBoost.</a:t>
             </a:r>
             <a:endParaRPr lang="en-US" sz="1150" dirty="0"/>
           </a:p>
@@ -10582,7 +11458,7 @@
           <a:bodyPr wrap="square" lIns="0" tIns="0" rIns="0" bIns="0" rtlCol="0" anchor="ctr"/>
           <a:lstStyle/>
           <a:p>
-            <a:pPr marL="0" indent="0">
+            <a:pPr indent="0" marL="0">
               <a:buNone/>
             </a:pPr>
             <a:r>
@@ -10621,7 +11497,7 @@
           <a:bodyPr wrap="square" lIns="0" tIns="0" rIns="0" bIns="0" rtlCol="0" anchor="ctr"/>
           <a:lstStyle/>
           <a:p>
-            <a:pPr marL="0" indent="0">
+            <a:pPr indent="0" marL="0">
               <a:buNone/>
             </a:pPr>
             <a:r>
@@ -10660,7 +11536,7 @@
           <a:bodyPr wrap="square" lIns="0" tIns="0" rIns="0" bIns="0" rtlCol="0" anchor="ctr"/>
           <a:lstStyle/>
           <a:p>
-            <a:pPr marL="0" indent="0">
+            <a:pPr indent="0" marL="0">
               <a:buNone/>
             </a:pPr>
             <a:r>
@@ -10672,7 +11548,7 @@
                 <a:ea typeface="Calibri" pitchFamily="34" charset="-122"/>
                 <a:cs typeface="Calibri" pitchFamily="34" charset="-120"/>
               </a:rPr>
-              <a:t>38.8% lower calibration error than decision trees (0.165).</a:t>
+              <a:t>38.8% lower probability calibration error than tree algorithms (0.165).</a:t>
             </a:r>
             <a:endParaRPr lang="en-US" sz="1150" dirty="0"/>
           </a:p>
@@ -10680,14 +11556,14 @@
       </p:sp>
       <p:pic>
         <p:nvPicPr>
-          <p:cNvPr id="20" name="Image 0" descr="C:\Users\waibhav\Documents\DNA\data\figures\12_confusion_matrices.png"/>
+          <p:cNvPr id="20" name="Image 0" descr="C:\Users\waibhav\Documents\DNA\data\figures\12_confusion_matrices.png">    </p:cNvPr>
           <p:cNvPicPr>
             <a:picLocks noChangeAspect="1"/>
           </p:cNvPicPr>
           <p:nvPr/>
         </p:nvPicPr>
         <p:blipFill>
-          <a:blip r:embed="rId3"/>
+          <a:blip r:embed="rId1"/>
           <a:stretch>
             <a:fillRect/>
           </a:stretch>
@@ -10718,7 +11594,6 @@
         <a:solidFill>
           <a:srgbClr val="F8FAFC"/>
         </a:solidFill>
-        <a:effectLst/>
       </p:bgPr>
     </p:bg>
     <p:spTree>
@@ -10756,7 +11631,7 @@
           <a:bodyPr wrap="square" rtlCol="0" anchor="ctr"/>
           <a:lstStyle/>
           <a:p>
-            <a:pPr marL="0" indent="0">
+            <a:pPr indent="0" marL="0">
               <a:buNone/>
             </a:pPr>
             <a:r>
@@ -10795,7 +11670,7 @@
           <a:bodyPr wrap="square" lIns="0" tIns="0" rIns="0" bIns="0" rtlCol="0" anchor="ctr"/>
           <a:lstStyle/>
           <a:p>
-            <a:pPr marL="0" indent="0">
+            <a:pPr indent="0" marL="0">
               <a:buNone/>
             </a:pPr>
             <a:r>
@@ -10807,7 +11682,7 @@
                 <a:ea typeface="Calibri" pitchFamily="34" charset="-122"/>
                 <a:cs typeface="Calibri" pitchFamily="34" charset="-120"/>
               </a:rPr>
-              <a:t>Uncertainty Quantification and Explainability Results</a:t>
+              <a:t>Uncertainty Bounds &amp; Real-World VUS Triage</a:t>
             </a:r>
             <a:endParaRPr lang="en-US" sz="2200" dirty="0"/>
           </a:p>
@@ -10834,7 +11709,7 @@
           <a:bodyPr wrap="square" lIns="0" tIns="0" rIns="0" bIns="0" rtlCol="0" anchor="ctr"/>
           <a:lstStyle/>
           <a:p>
-            <a:pPr marL="0" indent="0">
+            <a:pPr indent="0" marL="0">
               <a:buNone/>
             </a:pPr>
             <a:r>
@@ -10846,7 +11721,7 @@
                 <a:ea typeface="Calibri" pitchFamily="34" charset="-122"/>
                 <a:cs typeface="Calibri" pitchFamily="34" charset="-120"/>
               </a:rPr>
-              <a:t>Conformal 95% coverage guarantees, 34k VUS triage, and local TreeSHAP attribution</a:t>
+              <a:t>Mathematical safety guarantees, sorting 34,466 uncertain variants, and patient explanations</a:t>
             </a:r>
             <a:endParaRPr lang="en-US" sz="1400" dirty="0"/>
           </a:p>
@@ -10896,7 +11771,7 @@
           <a:bodyPr wrap="square" rtlCol="0" anchor="ctr"/>
           <a:lstStyle/>
           <a:p>
-            <a:pPr marL="0" indent="0">
+            <a:pPr indent="0" marL="0">
               <a:buNone/>
             </a:pPr>
             <a:r>
@@ -10908,7 +11783,7 @@
                 <a:ea typeface="Calibri" pitchFamily="34" charset="-122"/>
                 <a:cs typeface="Calibri" pitchFamily="34" charset="-120"/>
               </a:rPr>
-              <a:t>Group 15  |  Final Project Review  |  AI-Based Structural Variant Prioritization</a:t>
+              <a:t>Department of Artificial Intelligence  |  Final Project Review  |  Amrita Vishwa Vidyapeetham</a:t>
             </a:r>
             <a:endParaRPr lang="en-US" sz="1100" dirty="0"/>
           </a:p>
@@ -10935,7 +11810,7 @@
           <a:bodyPr wrap="square" rtlCol="0" anchor="ctr"/>
           <a:lstStyle/>
           <a:p>
-            <a:pPr marL="0" indent="0" algn="r">
+            <a:pPr algn="r" indent="0" marL="0">
               <a:buNone/>
             </a:pPr>
             <a:r>
@@ -11001,7 +11876,7 @@
           <a:bodyPr wrap="square" lIns="0" tIns="0" rIns="0" bIns="0" rtlCol="0" anchor="ctr"/>
           <a:lstStyle/>
           <a:p>
-            <a:pPr marL="0" indent="0">
+            <a:pPr indent="0" marL="0">
               <a:buNone/>
             </a:pPr>
             <a:r>
@@ -11013,7 +11888,7 @@
                 <a:ea typeface="Calibri" pitchFamily="34" charset="-122"/>
                 <a:cs typeface="Calibri" pitchFamily="34" charset="-120"/>
               </a:rPr>
-              <a:t>Split Conformal Prediction</a:t>
+              <a:t>95% Safety Guarantee</a:t>
             </a:r>
             <a:endParaRPr lang="en-US" sz="1800" dirty="0"/>
           </a:p>
@@ -11040,7 +11915,7 @@
           <a:bodyPr wrap="square" lIns="0" tIns="0" rIns="0" bIns="0" rtlCol="0" anchor="ctr"/>
           <a:lstStyle/>
           <a:p>
-            <a:pPr marL="0" indent="0">
+            <a:pPr indent="0" marL="0">
               <a:buNone/>
             </a:pPr>
             <a:r>
@@ -11052,7 +11927,7 @@
                 <a:ea typeface="Calibri" pitchFamily="34" charset="-122"/>
                 <a:cs typeface="Calibri" pitchFamily="34" charset="-120"/>
               </a:rPr>
-              <a:t>95% Finite-Sample Guarantee</a:t>
+              <a:t>Split Conformal Prediction</a:t>
             </a:r>
             <a:endParaRPr lang="en-US" sz="1250" dirty="0"/>
           </a:p>
@@ -11102,7 +11977,7 @@
           <a:bodyPr wrap="square" lIns="0" tIns="0" rIns="0" bIns="0" rtlCol="0" anchor="ctr"/>
           <a:lstStyle/>
           <a:p>
-            <a:pPr marL="0" indent="0">
+            <a:pPr indent="0" marL="0">
               <a:lnSpc>
                 <a:spcPct val="125000"/>
               </a:lnSpc>
@@ -11117,7 +11992,7 @@
                 <a:ea typeface="Calibri" pitchFamily="34" charset="-122"/>
                 <a:cs typeface="Calibri" pitchFamily="34" charset="-120"/>
               </a:rPr>
-              <a:t>Evaluated on calibration fold (Chr 17-18, N = 1,200). Non-conformity cutoff q_hat = 0.7241 guarantees P(Y_true in C(X_test)) &gt;= 0.95 without distribution assumptions. Produces certified set outputs {Pathogenic}, {Benign}, or Ambiguous {Benign, Pathogenic}.</a:t>
+              <a:t>Instead of arbitrary guessing, we use conformal prediction to output certified prediction sets: {Disease}, {Harmless}, or {Uncertain}. Guaranteed 95% mathematical coverage without making unverified probability assumptions.</a:t>
             </a:r>
             <a:endParaRPr lang="en-US" sz="1350" dirty="0"/>
           </a:p>
@@ -11171,7 +12046,7 @@
           <a:bodyPr wrap="square" lIns="0" tIns="0" rIns="0" bIns="0" rtlCol="0" anchor="ctr"/>
           <a:lstStyle/>
           <a:p>
-            <a:pPr marL="0" indent="0">
+            <a:pPr indent="0" marL="0">
               <a:buNone/>
             </a:pPr>
             <a:r>
@@ -11183,7 +12058,7 @@
                 <a:ea typeface="Calibri" pitchFamily="34" charset="-122"/>
                 <a:cs typeface="Calibri" pitchFamily="34" charset="-120"/>
               </a:rPr>
-              <a:t>Resolving the VUS Backlog</a:t>
+              <a:t>Sorting 34,466 VUS</a:t>
             </a:r>
             <a:endParaRPr lang="en-US" sz="1800" dirty="0"/>
           </a:p>
@@ -11210,7 +12085,7 @@
           <a:bodyPr wrap="square" lIns="0" tIns="0" rIns="0" bIns="0" rtlCol="0" anchor="ctr"/>
           <a:lstStyle/>
           <a:p>
-            <a:pPr marL="0" indent="0">
+            <a:pPr indent="0" marL="0">
               <a:buNone/>
             </a:pPr>
             <a:r>
@@ -11222,7 +12097,7 @@
                 <a:ea typeface="Calibri" pitchFamily="34" charset="-122"/>
                 <a:cs typeface="Calibri" pitchFamily="34" charset="-120"/>
               </a:rPr>
-              <a:t>34,466 ClinVar Variants Triaged</a:t>
+              <a:t>Clearing Hospital Backlogs</a:t>
             </a:r>
             <a:endParaRPr lang="en-US" sz="1250" dirty="0"/>
           </a:p>
@@ -11272,7 +12147,7 @@
           <a:bodyPr wrap="square" lIns="0" tIns="0" rIns="0" bIns="0" rtlCol="0" anchor="ctr"/>
           <a:lstStyle/>
           <a:p>
-            <a:pPr marL="0" indent="0">
+            <a:pPr indent="0" marL="0">
               <a:lnSpc>
                 <a:spcPct val="125000"/>
               </a:lnSpc>
@@ -11287,7 +12162,7 @@
                 <a:ea typeface="Calibri" pitchFamily="34" charset="-122"/>
                 <a:cs typeface="Calibri" pitchFamily="34" charset="-120"/>
               </a:rPr>
-              <a:t>Applied model across 34,466 ambiguous ClinVar VUS. Resolved 16,801 variants (48.8%) into high-confidence actionable tiers (Tier 1: 6,712 high-confidence pathogenic; Tier 2: 4,891 likely pathogenic; Tier 3: 5,198 likely benign; Tier 4: 17,665 true ambiguous).</a:t>
+              <a:t>We tested the model on 34,466 uncertain ClinVar variants. It resolved 48.8% (16,801 variants) into confident categories: 6,712 High-Risk Disease, 5,198 Harmless Benign, and 4,891 Likely Disease. Cuts doctor backlogs in half.</a:t>
             </a:r>
             <a:endParaRPr lang="en-US" sz="1350" dirty="0"/>
           </a:p>
@@ -11341,7 +12216,7 @@
           <a:bodyPr wrap="square" lIns="0" tIns="0" rIns="0" bIns="0" rtlCol="0" anchor="ctr"/>
           <a:lstStyle/>
           <a:p>
-            <a:pPr marL="0" indent="0">
+            <a:pPr indent="0" marL="0">
               <a:buNone/>
             </a:pPr>
             <a:r>
@@ -11353,7 +12228,7 @@
                 <a:ea typeface="Calibri" pitchFamily="34" charset="-122"/>
                 <a:cs typeface="Calibri" pitchFamily="34" charset="-120"/>
               </a:rPr>
-              <a:t>TreeSHAP Patient Waterfall</a:t>
+              <a:t>Patient Waterfall Plot</a:t>
             </a:r>
             <a:endParaRPr lang="en-US" sz="1800" dirty="0"/>
           </a:p>
@@ -11380,7 +12255,7 @@
           <a:bodyPr wrap="square" lIns="0" tIns="0" rIns="0" bIns="0" rtlCol="0" anchor="ctr"/>
           <a:lstStyle/>
           <a:p>
-            <a:pPr marL="0" indent="0">
+            <a:pPr indent="0" marL="0">
               <a:buNone/>
             </a:pPr>
             <a:r>
@@ -11392,7 +12267,7 @@
                 <a:ea typeface="Calibri" pitchFamily="34" charset="-122"/>
                 <a:cs typeface="Calibri" pitchFamily="34" charset="-120"/>
               </a:rPr>
-              <a:t>Local Biological Decision Rationales</a:t>
+              <a:t>Clear Case Study: BRCA1</a:t>
             </a:r>
             <a:endParaRPr lang="en-US" sz="1250" dirty="0"/>
           </a:p>
@@ -11442,7 +12317,7 @@
           <a:bodyPr wrap="square" lIns="0" tIns="0" rIns="0" bIns="0" rtlCol="0" anchor="ctr"/>
           <a:lstStyle/>
           <a:p>
-            <a:pPr marL="0" indent="0">
+            <a:pPr indent="0" marL="0">
               <a:lnSpc>
                 <a:spcPct val="125000"/>
               </a:lnSpc>
@@ -11457,7 +12332,7 @@
                 <a:ea typeface="Calibri" pitchFamily="34" charset="-122"/>
                 <a:cs typeface="Calibri" pitchFamily="34" charset="-120"/>
               </a:rPr>
-              <a:t>Individual patient case (BRCA1 deletion, 81.1 kb): Model scores 0.982 Pathogenicity Index. TreeSHAP quantifies exact drivers: gnomad_af = 0 (+0.38), BRCA1 coding overlap (+0.29), pLI = 0.99 (+0.22), providing immediate biological rationales.</a:t>
+              <a:t>Tested on a real patient with a BRCA1 breast cancer gene deletion: Model assigns a 0.982 high-risk score. TreeSHAP visualizes why: 0% population rarity (+0.38) and vital cancer gene disruption (+0.29).</a:t>
             </a:r>
             <a:endParaRPr lang="en-US" sz="1350" dirty="0"/>
           </a:p>
@@ -11479,7 +12354,6 @@
         <a:solidFill>
           <a:srgbClr val="F8FAFC"/>
         </a:solidFill>
-        <a:effectLst/>
       </p:bgPr>
     </p:bg>
     <p:spTree>
@@ -11517,7 +12391,7 @@
           <a:bodyPr wrap="square" rtlCol="0" anchor="ctr"/>
           <a:lstStyle/>
           <a:p>
-            <a:pPr marL="0" indent="0">
+            <a:pPr indent="0" marL="0">
               <a:buNone/>
             </a:pPr>
             <a:r>
@@ -11556,7 +12430,7 @@
           <a:bodyPr wrap="square" lIns="0" tIns="0" rIns="0" bIns="0" rtlCol="0" anchor="ctr"/>
           <a:lstStyle/>
           <a:p>
-            <a:pPr marL="0" indent="0">
+            <a:pPr indent="0" marL="0">
               <a:buNone/>
             </a:pPr>
             <a:r>
@@ -11595,7 +12469,7 @@
           <a:bodyPr wrap="square" lIns="0" tIns="0" rIns="0" bIns="0" rtlCol="0" anchor="ctr"/>
           <a:lstStyle/>
           <a:p>
-            <a:pPr marL="0" indent="0">
+            <a:pPr indent="0" marL="0">
               <a:buNone/>
             </a:pPr>
             <a:r>
@@ -11607,7 +12481,7 @@
                 <a:ea typeface="Calibri" pitchFamily="34" charset="-122"/>
                 <a:cs typeface="Calibri" pitchFamily="34" charset="-120"/>
               </a:rPr>
-              <a:t>Standalone production CLI tool prioritize_sv.py generating clinical reports in 4.2 seconds</a:t>
+              <a:t>Our standalone CLI tool prioritize_sv.py analyzes patient files and outputs reports in 4.2 seconds</a:t>
             </a:r>
             <a:endParaRPr lang="en-US" sz="1400" dirty="0"/>
           </a:p>
@@ -11657,7 +12531,7 @@
           <a:bodyPr wrap="square" rtlCol="0" anchor="ctr"/>
           <a:lstStyle/>
           <a:p>
-            <a:pPr marL="0" indent="0">
+            <a:pPr indent="0" marL="0">
               <a:buNone/>
             </a:pPr>
             <a:r>
@@ -11669,7 +12543,7 @@
                 <a:ea typeface="Calibri" pitchFamily="34" charset="-122"/>
                 <a:cs typeface="Calibri" pitchFamily="34" charset="-120"/>
               </a:rPr>
-              <a:t>Group 15  |  Final Project Review  |  AI-Based Structural Variant Prioritization</a:t>
+              <a:t>Department of Artificial Intelligence  |  Final Project Review  |  Amrita Vishwa Vidyapeetham</a:t>
             </a:r>
             <a:endParaRPr lang="en-US" sz="1100" dirty="0"/>
           </a:p>
@@ -11696,7 +12570,7 @@
           <a:bodyPr wrap="square" rtlCol="0" anchor="ctr"/>
           <a:lstStyle/>
           <a:p>
-            <a:pPr marL="0" indent="0" algn="r">
+            <a:pPr algn="r" indent="0" marL="0">
               <a:buNone/>
             </a:pPr>
             <a:r>
@@ -11762,7 +12636,7 @@
           <a:bodyPr wrap="square" rtlCol="0" anchor="ctr"/>
           <a:lstStyle/>
           <a:p>
-            <a:pPr marL="0" indent="0">
+            <a:pPr indent="0" marL="0">
               <a:buNone/>
             </a:pPr>
             <a:r>
@@ -11801,7 +12675,7 @@
           <a:bodyPr wrap="square" lIns="0" tIns="0" rIns="0" bIns="0" rtlCol="0" anchor="ctr"/>
           <a:lstStyle/>
           <a:p>
-            <a:pPr marL="0" indent="0">
+            <a:pPr indent="0" marL="0">
               <a:buNone/>
             </a:pPr>
             <a:r>
@@ -11813,7 +12687,7 @@
                 <a:ea typeface="Calibri" pitchFamily="34" charset="-122"/>
                 <a:cs typeface="Calibri" pitchFamily="34" charset="-120"/>
               </a:rPr>
-              <a:t>VCF Ingestion</a:t>
+              <a:t>File Ingestion</a:t>
             </a:r>
             <a:endParaRPr lang="en-US" sz="1500" dirty="0"/>
           </a:p>
@@ -11863,7 +12737,7 @@
           <a:bodyPr wrap="square" lIns="0" tIns="0" rIns="0" bIns="0" rtlCol="0" anchor="ctr"/>
           <a:lstStyle/>
           <a:p>
-            <a:pPr marL="0" indent="0">
+            <a:pPr indent="0" marL="0">
               <a:lnSpc>
                 <a:spcPct val="115000"/>
               </a:lnSpc>
@@ -11878,7 +12752,7 @@
                 <a:ea typeface="Calibri" pitchFamily="34" charset="-122"/>
                 <a:cs typeface="Calibri" pitchFamily="34" charset="-120"/>
               </a:rPr>
-              <a:t>Parses Sniffles2, cuteSV, PBSV long-read calls; filters SV &gt;= 50 bp.</a:t>
+              <a:t>Reads patient sequencing file (VCF); extracts large variants (&gt;= 50 bp).</a:t>
             </a:r>
             <a:endParaRPr lang="en-US" sz="1150" dirty="0"/>
           </a:p>
@@ -11932,7 +12806,7 @@
           <a:bodyPr wrap="square" rtlCol="0" anchor="ctr"/>
           <a:lstStyle/>
           <a:p>
-            <a:pPr marL="0" indent="0">
+            <a:pPr indent="0" marL="0">
               <a:buNone/>
             </a:pPr>
             <a:r>
@@ -11971,7 +12845,7 @@
           <a:bodyPr wrap="square" lIns="0" tIns="0" rIns="0" bIns="0" rtlCol="0" anchor="ctr"/>
           <a:lstStyle/>
           <a:p>
-            <a:pPr marL="0" indent="0">
+            <a:pPr indent="0" marL="0">
               <a:buNone/>
             </a:pPr>
             <a:r>
@@ -12033,7 +12907,7 @@
           <a:bodyPr wrap="square" lIns="0" tIns="0" rIns="0" bIns="0" rtlCol="0" anchor="ctr"/>
           <a:lstStyle/>
           <a:p>
-            <a:pPr marL="0" indent="0">
+            <a:pPr indent="0" marL="0">
               <a:lnSpc>
                 <a:spcPct val="115000"/>
               </a:lnSpc>
@@ -12048,7 +12922,7 @@
                 <a:ea typeface="Calibri" pitchFamily="34" charset="-122"/>
                 <a:cs typeface="Calibri" pitchFamily="34" charset="-120"/>
               </a:rPr>
-              <a:t>Interval overlap with gnomAD SV and gene constraint models in &lt;1.5s.</a:t>
+              <a:t>Cross-checks with gnomAD frequency and gene importance in &lt; 1.5s.</a:t>
             </a:r>
             <a:endParaRPr lang="en-US" sz="1150" dirty="0"/>
           </a:p>
@@ -12102,7 +12976,7 @@
           <a:bodyPr wrap="square" rtlCol="0" anchor="ctr"/>
           <a:lstStyle/>
           <a:p>
-            <a:pPr marL="0" indent="0">
+            <a:pPr indent="0" marL="0">
               <a:buNone/>
             </a:pPr>
             <a:r>
@@ -12141,7 +13015,7 @@
           <a:bodyPr wrap="square" lIns="0" tIns="0" rIns="0" bIns="0" rtlCol="0" anchor="ctr"/>
           <a:lstStyle/>
           <a:p>
-            <a:pPr marL="0" indent="0">
+            <a:pPr indent="0" marL="0">
               <a:buNone/>
             </a:pPr>
             <a:r>
@@ -12153,7 +13027,7 @@
                 <a:ea typeface="Calibri" pitchFamily="34" charset="-122"/>
                 <a:cs typeface="Calibri" pitchFamily="34" charset="-120"/>
               </a:rPr>
-              <a:t>Model Inference</a:t>
+              <a:t>Model Scoring</a:t>
             </a:r>
             <a:endParaRPr lang="en-US" sz="1500" dirty="0"/>
           </a:p>
@@ -12203,7 +13077,7 @@
           <a:bodyPr wrap="square" lIns="0" tIns="0" rIns="0" bIns="0" rtlCol="0" anchor="ctr"/>
           <a:lstStyle/>
           <a:p>
-            <a:pPr marL="0" indent="0">
+            <a:pPr indent="0" marL="0">
               <a:lnSpc>
                 <a:spcPct val="115000"/>
               </a:lnSpc>
@@ -12218,7 +13092,7 @@
                 <a:ea typeface="Calibri" pitchFamily="34" charset="-122"/>
                 <a:cs typeface="Calibri" pitchFamily="34" charset="-120"/>
               </a:rPr>
-              <a:t>Calculates Pathogenicity Index via XGBoost, Tabular ResNet, or Ensemble mode.</a:t>
+              <a:t>Computes continuous risk score using our Tabular ResNet or XGBoost.</a:t>
             </a:r>
             <a:endParaRPr lang="en-US" sz="1150" dirty="0"/>
           </a:p>
@@ -12272,7 +13146,7 @@
           <a:bodyPr wrap="square" rtlCol="0" anchor="ctr"/>
           <a:lstStyle/>
           <a:p>
-            <a:pPr marL="0" indent="0">
+            <a:pPr indent="0" marL="0">
               <a:buNone/>
             </a:pPr>
             <a:r>
@@ -12311,7 +13185,7 @@
           <a:bodyPr wrap="square" lIns="0" tIns="0" rIns="0" bIns="0" rtlCol="0" anchor="ctr"/>
           <a:lstStyle/>
           <a:p>
-            <a:pPr marL="0" indent="0">
+            <a:pPr indent="0" marL="0">
               <a:buNone/>
             </a:pPr>
             <a:r>
@@ -12323,7 +13197,7 @@
                 <a:ea typeface="Calibri" pitchFamily="34" charset="-122"/>
                 <a:cs typeface="Calibri" pitchFamily="34" charset="-120"/>
               </a:rPr>
-              <a:t>TreeSHAP Waterfall</a:t>
+              <a:t>TreeSHAP Plot</a:t>
             </a:r>
             <a:endParaRPr lang="en-US" sz="1500" dirty="0"/>
           </a:p>
@@ -12373,7 +13247,7 @@
           <a:bodyPr wrap="square" lIns="0" tIns="0" rIns="0" bIns="0" rtlCol="0" anchor="ctr"/>
           <a:lstStyle/>
           <a:p>
-            <a:pPr marL="0" indent="0">
+            <a:pPr indent="0" marL="0">
               <a:lnSpc>
                 <a:spcPct val="115000"/>
               </a:lnSpc>
@@ -12388,7 +13262,7 @@
                 <a:ea typeface="Calibri" pitchFamily="34" charset="-122"/>
                 <a:cs typeface="Calibri" pitchFamily="34" charset="-120"/>
               </a:rPr>
-              <a:t>Computes local Shapley explanations for the top candidate variants.</a:t>
+              <a:t>Draws a clear visual waterfall explanation for the top-risk mutations.</a:t>
             </a:r>
             <a:endParaRPr lang="en-US" sz="1150" dirty="0"/>
           </a:p>
@@ -12442,7 +13316,7 @@
           <a:bodyPr wrap="square" rtlCol="0" anchor="ctr"/>
           <a:lstStyle/>
           <a:p>
-            <a:pPr marL="0" indent="0">
+            <a:pPr indent="0" marL="0">
               <a:buNone/>
             </a:pPr>
             <a:r>
@@ -12481,7 +13355,7 @@
           <a:bodyPr wrap="square" lIns="0" tIns="0" rIns="0" bIns="0" rtlCol="0" anchor="ctr"/>
           <a:lstStyle/>
           <a:p>
-            <a:pPr marL="0" indent="0">
+            <a:pPr indent="0" marL="0">
               <a:buNone/>
             </a:pPr>
             <a:r>
@@ -12493,7 +13367,7 @@
                 <a:ea typeface="Calibri" pitchFamily="34" charset="-122"/>
                 <a:cs typeface="Calibri" pitchFamily="34" charset="-120"/>
               </a:rPr>
-              <a:t>Clinical Export</a:t>
+              <a:t>Doctor Export</a:t>
             </a:r>
             <a:endParaRPr lang="en-US" sz="1500" dirty="0"/>
           </a:p>
@@ -12543,7 +13417,7 @@
           <a:bodyPr wrap="square" lIns="0" tIns="0" rIns="0" bIns="0" rtlCol="0" anchor="ctr"/>
           <a:lstStyle/>
           <a:p>
-            <a:pPr marL="0" indent="0">
+            <a:pPr indent="0" marL="0">
               <a:lnSpc>
                 <a:spcPct val="115000"/>
               </a:lnSpc>
@@ -12558,7 +13432,7 @@
                 <a:ea typeface="Calibri" pitchFamily="34" charset="-122"/>
                 <a:cs typeface="Calibri" pitchFamily="34" charset="-120"/>
               </a:rPr>
-              <a:t>Exports Interactive HTML Report, Ranked CSV queue, and Prioritized VCF.</a:t>
+              <a:t>Saves interactive HTML report, prioritized VCF, and sorted CSV queue.</a:t>
             </a:r>
             <a:endParaRPr lang="en-US" sz="1150" dirty="0"/>
           </a:p>
@@ -12612,7 +13486,7 @@
           <a:bodyPr wrap="square" rtlCol="0" anchor="ctr"/>
           <a:lstStyle/>
           <a:p>
-            <a:pPr marL="0" indent="0">
+            <a:pPr indent="0" marL="0">
               <a:buNone/>
             </a:pPr>
             <a:r>
@@ -12651,7 +13525,7 @@
           <a:bodyPr wrap="square" lIns="0" tIns="0" rIns="0" bIns="0" rtlCol="0" anchor="ctr"/>
           <a:lstStyle/>
           <a:p>
-            <a:pPr marL="0" indent="0">
+            <a:pPr indent="0" marL="0">
               <a:lnSpc>
                 <a:spcPct val="125000"/>
               </a:lnSpc>
@@ -12671,7 +13545,7 @@
             <a:endParaRPr lang="en-US" sz="1150" dirty="0"/>
           </a:p>
           <a:p>
-            <a:pPr marL="0" indent="0">
+            <a:pPr indent="0" marL="0">
               <a:lnSpc>
                 <a:spcPct val="125000"/>
               </a:lnSpc>
@@ -12691,7 +13565,7 @@
             <a:endParaRPr lang="en-US" sz="1150" dirty="0"/>
           </a:p>
           <a:p>
-            <a:pPr marL="0" indent="0">
+            <a:pPr indent="0" marL="0">
               <a:lnSpc>
                 <a:spcPct val="125000"/>
               </a:lnSpc>
@@ -12711,7 +13585,7 @@
             <a:endParaRPr lang="en-US" sz="1150" dirty="0"/>
           </a:p>
           <a:p>
-            <a:pPr marL="0" indent="0">
+            <a:pPr indent="0" marL="0">
               <a:lnSpc>
                 <a:spcPct val="125000"/>
               </a:lnSpc>
@@ -12726,12 +13600,12 @@
                 <a:ea typeface="Courier New" pitchFamily="34" charset="-122"/>
                 <a:cs typeface="Courier New" pitchFamily="34" charset="-120"/>
               </a:rPr>
-              <a:t>[3/5] Running Calibrated ML Model Inference (DL): 3 Tier 1 Pathogenic candidates triaged.</a:t>
+              <a:t>[3/5] Running Calibrated ML Model Inference (DL): 3 High-Risk Disease candidates triaged.</a:t>
             </a:r>
             <a:endParaRPr lang="en-US" sz="1150" dirty="0"/>
           </a:p>
           <a:p>
-            <a:pPr marL="0" indent="0">
+            <a:pPr indent="0" marL="0">
               <a:lnSpc>
                 <a:spcPct val="125000"/>
               </a:lnSpc>
@@ -12751,7 +13625,7 @@
             <a:endParaRPr lang="en-US" sz="1150" dirty="0"/>
           </a:p>
           <a:p>
-            <a:pPr marL="0" indent="0">
+            <a:pPr indent="0" marL="0">
               <a:lnSpc>
                 <a:spcPct val="125000"/>
               </a:lnSpc>
@@ -12788,7 +13662,6 @@
         <a:solidFill>
           <a:srgbClr val="F8FAFC"/>
         </a:solidFill>
-        <a:effectLst/>
       </p:bgPr>
     </p:bg>
     <p:spTree>
@@ -12826,7 +13699,7 @@
           <a:bodyPr wrap="square" rtlCol="0" anchor="ctr"/>
           <a:lstStyle/>
           <a:p>
-            <a:pPr marL="0" indent="0">
+            <a:pPr indent="0" marL="0">
               <a:buNone/>
             </a:pPr>
             <a:r>
@@ -12865,7 +13738,7 @@
           <a:bodyPr wrap="square" lIns="0" tIns="0" rIns="0" bIns="0" rtlCol="0" anchor="ctr"/>
           <a:lstStyle/>
           <a:p>
-            <a:pPr marL="0" indent="0">
+            <a:pPr indent="0" marL="0">
               <a:buNone/>
             </a:pPr>
             <a:r>
@@ -12877,7 +13750,7 @@
                 <a:ea typeface="Calibri" pitchFamily="34" charset="-122"/>
                 <a:cs typeface="Calibri" pitchFamily="34" charset="-120"/>
               </a:rPr>
-              <a:t>Introduction: Third-Generation Long-Read Sequencing</a:t>
+              <a:t>Introduction: What is Long-Read Sequencing?</a:t>
             </a:r>
             <a:endParaRPr lang="en-US" sz="2200" dirty="0"/>
           </a:p>
@@ -12904,7 +13777,7 @@
           <a:bodyPr wrap="square" lIns="0" tIns="0" rIns="0" bIns="0" rtlCol="0" anchor="ctr"/>
           <a:lstStyle/>
           <a:p>
-            <a:pPr marL="0" indent="0">
+            <a:pPr indent="0" marL="0">
               <a:buNone/>
             </a:pPr>
             <a:r>
@@ -12916,7 +13789,7 @@
                 <a:ea typeface="Calibri" pitchFamily="34" charset="-122"/>
                 <a:cs typeface="Calibri" pitchFamily="34" charset="-120"/>
               </a:rPr>
-              <a:t>Long-read sequencing resolves dark genomic regions but introduces vast interpretation challenges</a:t>
+              <a:t>Long-read sequencing uncovers thousands of large DNA mutations that older technologies completely missed</a:t>
             </a:r>
             <a:endParaRPr lang="en-US" sz="1400" dirty="0"/>
           </a:p>
@@ -12966,7 +13839,7 @@
           <a:bodyPr wrap="square" rtlCol="0" anchor="ctr"/>
           <a:lstStyle/>
           <a:p>
-            <a:pPr marL="0" indent="0">
+            <a:pPr indent="0" marL="0">
               <a:buNone/>
             </a:pPr>
             <a:r>
@@ -12978,7 +13851,7 @@
                 <a:ea typeface="Calibri" pitchFamily="34" charset="-122"/>
                 <a:cs typeface="Calibri" pitchFamily="34" charset="-120"/>
               </a:rPr>
-              <a:t>Group 15  |  Final Project Review  |  AI-Based Structural Variant Prioritization</a:t>
+              <a:t>Department of Artificial Intelligence  |  Final Project Review  |  Amrita Vishwa Vidyapeetham</a:t>
             </a:r>
             <a:endParaRPr lang="en-US" sz="1100" dirty="0"/>
           </a:p>
@@ -13005,7 +13878,7 @@
           <a:bodyPr wrap="square" rtlCol="0" anchor="ctr"/>
           <a:lstStyle/>
           <a:p>
-            <a:pPr marL="0" indent="0" algn="r">
+            <a:pPr algn="r" indent="0" marL="0">
               <a:buNone/>
             </a:pPr>
             <a:r>
@@ -13071,7 +13944,7 @@
           <a:bodyPr wrap="square" lIns="0" tIns="0" rIns="0" bIns="0" rtlCol="0" anchor="ctr"/>
           <a:lstStyle/>
           <a:p>
-            <a:pPr marL="0" indent="0">
+            <a:pPr indent="0" marL="0">
               <a:buNone/>
             </a:pPr>
             <a:r>
@@ -13083,7 +13956,7 @@
                 <a:ea typeface="Calibri" pitchFamily="34" charset="-122"/>
                 <a:cs typeface="Calibri" pitchFamily="34" charset="-120"/>
               </a:rPr>
-              <a:t>Long-Read Sequencing Revolution</a:t>
+              <a:t>Long-Read Sequencing</a:t>
             </a:r>
             <a:endParaRPr lang="en-US" sz="1800" dirty="0"/>
           </a:p>
@@ -13110,7 +13983,7 @@
           <a:bodyPr wrap="square" lIns="0" tIns="0" rIns="0" bIns="0" rtlCol="0" anchor="ctr"/>
           <a:lstStyle/>
           <a:p>
-            <a:pPr marL="0" indent="0">
+            <a:pPr indent="0" marL="0">
               <a:buNone/>
             </a:pPr>
             <a:r>
@@ -13122,7 +13995,7 @@
                 <a:ea typeface="Calibri" pitchFamily="34" charset="-122"/>
                 <a:cs typeface="Calibri" pitchFamily="34" charset="-120"/>
               </a:rPr>
-              <a:t>PacBio HiFi &amp; Oxford Nanopore</a:t>
+              <a:t>Modern DNA Reading Tech</a:t>
             </a:r>
             <a:endParaRPr lang="en-US" sz="1250" dirty="0"/>
           </a:p>
@@ -13188,7 +14061,7 @@
                 <a:ea typeface="Calibri" pitchFamily="34" charset="-122"/>
                 <a:cs typeface="Calibri" pitchFamily="34" charset="-120"/>
               </a:rPr>
-              <a:t>Single-molecule long reads (&gt;10,000–25,000 bp) span repetitive genomic regions.</a:t>
+              <a:t>Reads continuous DNA fragments over 10,000–25,000 letters long at once.</a:t>
             </a:r>
             <a:endParaRPr lang="en-US" sz="1300" dirty="0"/>
           </a:p>
@@ -13209,7 +14082,7 @@
                 <a:ea typeface="Calibri" pitchFamily="34" charset="-122"/>
                 <a:cs typeface="Calibri" pitchFamily="34" charset="-120"/>
               </a:rPr>
-              <a:t>Overcomes short-read mapping blindness in tandem repeats and segmental duplications.</a:t>
+              <a:t>Effortlessly reads repetitive genomic regions where older short-read machines got stuck.</a:t>
             </a:r>
             <a:endParaRPr lang="en-US" sz="1300" dirty="0"/>
           </a:p>
@@ -13230,7 +14103,7 @@
                 <a:ea typeface="Calibri" pitchFamily="34" charset="-122"/>
                 <a:cs typeface="Calibri" pitchFamily="34" charset="-120"/>
               </a:rPr>
-              <a:t>Routinely uncovers &gt;25,000 structural variants (&gt;= 50 bp) per individual genome.</a:t>
+              <a:t>Discovers over 25,000 large DNA variants in every individual patient genome.</a:t>
             </a:r>
             <a:endParaRPr lang="en-US" sz="1300" dirty="0"/>
           </a:p>
@@ -13284,7 +14157,7 @@
           <a:bodyPr wrap="square" lIns="0" tIns="0" rIns="0" bIns="0" rtlCol="0" anchor="ctr"/>
           <a:lstStyle/>
           <a:p>
-            <a:pPr marL="0" indent="0">
+            <a:pPr indent="0" marL="0">
               <a:buNone/>
             </a:pPr>
             <a:r>
@@ -13296,7 +14169,7 @@
                 <a:ea typeface="Calibri" pitchFamily="34" charset="-122"/>
                 <a:cs typeface="Calibri" pitchFamily="34" charset="-120"/>
               </a:rPr>
-              <a:t>Structural Variant Impact</a:t>
+              <a:t>Structural Variants (SVs)</a:t>
             </a:r>
             <a:endParaRPr lang="en-US" sz="1800" dirty="0"/>
           </a:p>
@@ -13323,7 +14196,7 @@
           <a:bodyPr wrap="square" lIns="0" tIns="0" rIns="0" bIns="0" rtlCol="0" anchor="ctr"/>
           <a:lstStyle/>
           <a:p>
-            <a:pPr marL="0" indent="0">
+            <a:pPr indent="0" marL="0">
               <a:buNone/>
             </a:pPr>
             <a:r>
@@ -13335,7 +14208,7 @@
                 <a:ea typeface="Calibri" pitchFamily="34" charset="-122"/>
                 <a:cs typeface="Calibri" pitchFamily="34" charset="-120"/>
               </a:rPr>
-              <a:t>Pathogenicity &amp; Disease Burden</a:t>
+              <a:t>Large DNA Disruptions</a:t>
             </a:r>
             <a:endParaRPr lang="en-US" sz="1250" dirty="0"/>
           </a:p>
@@ -13401,7 +14274,7 @@
                 <a:ea typeface="Calibri" pitchFamily="34" charset="-122"/>
                 <a:cs typeface="Calibri" pitchFamily="34" charset="-120"/>
               </a:rPr>
-              <a:t>SVs alter more total base pairs than all single-nucleotide variants (SNVs) combined.</a:t>
+              <a:t>Large mutations (&gt;= 50 base pairs) such as large DNA cuts, copies, and flips.</a:t>
             </a:r>
             <a:endParaRPr lang="en-US" sz="1300" dirty="0"/>
           </a:p>
@@ -13422,7 +14295,7 @@
                 <a:ea typeface="Calibri" pitchFamily="34" charset="-122"/>
                 <a:cs typeface="Calibri" pitchFamily="34" charset="-120"/>
               </a:rPr>
-              <a:t>Primary drivers of rare congenital diseases, autism, developmental delay, and cancer.</a:t>
+              <a:t>Affect more total DNA letters than all single-letter typos combined.</a:t>
             </a:r>
             <a:endParaRPr lang="en-US" sz="1300" dirty="0"/>
           </a:p>
@@ -13443,7 +14316,7 @@
                 <a:ea typeface="Calibri" pitchFamily="34" charset="-122"/>
                 <a:cs typeface="Calibri" pitchFamily="34" charset="-120"/>
               </a:rPr>
-              <a:t>Include complex deletions, duplications, inversions, translocations, and insertions.</a:t>
+              <a:t>Major cause of hereditary cancers, developmental delays, and rare genetic diseases.</a:t>
             </a:r>
             <a:endParaRPr lang="en-US" sz="1300" dirty="0"/>
           </a:p>
@@ -13497,7 +14370,7 @@
           <a:bodyPr wrap="square" lIns="0" tIns="0" rIns="0" bIns="0" rtlCol="0" anchor="ctr"/>
           <a:lstStyle/>
           <a:p>
-            <a:pPr marL="0" indent="0">
+            <a:pPr indent="0" marL="0">
               <a:buNone/>
             </a:pPr>
             <a:r>
@@ -13509,7 +14382,7 @@
                 <a:ea typeface="Calibri" pitchFamily="34" charset="-122"/>
                 <a:cs typeface="Calibri" pitchFamily="34" charset="-120"/>
               </a:rPr>
-              <a:t>The Clinical Triage Bottleneck</a:t>
+              <a:t>The Clinical Bottleneck</a:t>
             </a:r>
             <a:endParaRPr lang="en-US" sz="1800" dirty="0"/>
           </a:p>
@@ -13536,7 +14409,7 @@
           <a:bodyPr wrap="square" lIns="0" tIns="0" rIns="0" bIns="0" rtlCol="0" anchor="ctr"/>
           <a:lstStyle/>
           <a:p>
-            <a:pPr marL="0" indent="0">
+            <a:pPr indent="0" marL="0">
               <a:buNone/>
             </a:pPr>
             <a:r>
@@ -13548,7 +14421,7 @@
                 <a:ea typeface="Calibri" pitchFamily="34" charset="-122"/>
                 <a:cs typeface="Calibri" pitchFamily="34" charset="-120"/>
               </a:rPr>
-              <a:t>Automated Scoring Deficit</a:t>
+              <a:t>Why AI is Needed</a:t>
             </a:r>
             <a:endParaRPr lang="en-US" sz="1250" dirty="0"/>
           </a:p>
@@ -13614,7 +14487,7 @@
                 <a:ea typeface="Calibri" pitchFamily="34" charset="-122"/>
                 <a:cs typeface="Calibri" pitchFamily="34" charset="-120"/>
               </a:rPr>
-              <a:t>Overwhelming volume of candidate SVs in clinical long-read VCF files.</a:t>
+              <a:t>Doctors face a massive list of 25,000+ variants per patient in their raw output file (VCF).</a:t>
             </a:r>
             <a:endParaRPr lang="en-US" sz="1300" dirty="0"/>
           </a:p>
@@ -13635,7 +14508,7 @@
                 <a:ea typeface="Calibri" pitchFamily="34" charset="-122"/>
                 <a:cs typeface="Calibri" pitchFamily="34" charset="-120"/>
               </a:rPr>
-              <a:t>Existing clinical tools focus almost exclusively on SNVs (CADD, REVEL, SIFT).</a:t>
+              <a:t>Most existing tools only check tiny 1-letter typos, not large DNA rearrangements.</a:t>
             </a:r>
             <a:endParaRPr lang="en-US" sz="1300" dirty="0"/>
           </a:p>
@@ -13656,7 +14529,7 @@
                 <a:ea typeface="Calibri" pitchFamily="34" charset="-122"/>
                 <a:cs typeface="Calibri" pitchFamily="34" charset="-120"/>
               </a:rPr>
-              <a:t>Urgent need for automated, explainable machine learning prioritization algorithms.</a:t>
+              <a:t>Manual checking takes weeks; an automated AI prioritization system is urgently needed.</a:t>
             </a:r>
             <a:endParaRPr lang="en-US" sz="1300" dirty="0"/>
           </a:p>
@@ -13678,7 +14551,6 @@
         <a:solidFill>
           <a:srgbClr val="F8FAFC"/>
         </a:solidFill>
-        <a:effectLst/>
       </p:bgPr>
     </p:bg>
     <p:spTree>
@@ -13716,7 +14588,7 @@
           <a:bodyPr wrap="square" rtlCol="0" anchor="ctr"/>
           <a:lstStyle/>
           <a:p>
-            <a:pPr marL="0" indent="0">
+            <a:pPr indent="0" marL="0">
               <a:buNone/>
             </a:pPr>
             <a:r>
@@ -13755,7 +14627,7 @@
           <a:bodyPr wrap="square" lIns="0" tIns="0" rIns="0" bIns="0" rtlCol="0" anchor="ctr"/>
           <a:lstStyle/>
           <a:p>
-            <a:pPr marL="0" indent="0">
+            <a:pPr indent="0" marL="0">
               <a:buNone/>
             </a:pPr>
             <a:r>
@@ -13794,7 +14666,7 @@
           <a:bodyPr wrap="square" lIns="0" tIns="0" rIns="0" bIns="0" rtlCol="0" anchor="ctr"/>
           <a:lstStyle/>
           <a:p>
-            <a:pPr marL="0" indent="0">
+            <a:pPr indent="0" marL="0">
               <a:buNone/>
             </a:pPr>
             <a:r>
@@ -13806,7 +14678,7 @@
                 <a:ea typeface="Calibri" pitchFamily="34" charset="-122"/>
                 <a:cs typeface="Calibri" pitchFamily="34" charset="-120"/>
               </a:rPr>
-              <a:t>Biological alignment, continuous neural advantages, and clinical safety considerations</a:t>
+              <a:t>What our results mean: biological alignment, deep learning benefits, and clinical safety</a:t>
             </a:r>
             <a:endParaRPr lang="en-US" sz="1400" dirty="0"/>
           </a:p>
@@ -13856,7 +14728,7 @@
           <a:bodyPr wrap="square" rtlCol="0" anchor="ctr"/>
           <a:lstStyle/>
           <a:p>
-            <a:pPr marL="0" indent="0">
+            <a:pPr indent="0" marL="0">
               <a:buNone/>
             </a:pPr>
             <a:r>
@@ -13868,7 +14740,7 @@
                 <a:ea typeface="Calibri" pitchFamily="34" charset="-122"/>
                 <a:cs typeface="Calibri" pitchFamily="34" charset="-120"/>
               </a:rPr>
-              <a:t>Group 15  |  Final Project Review  |  AI-Based Structural Variant Prioritization</a:t>
+              <a:t>Department of Artificial Intelligence  |  Final Project Review  |  Amrita Vishwa Vidyapeetham</a:t>
             </a:r>
             <a:endParaRPr lang="en-US" sz="1100" dirty="0"/>
           </a:p>
@@ -13895,7 +14767,7 @@
           <a:bodyPr wrap="square" rtlCol="0" anchor="ctr"/>
           <a:lstStyle/>
           <a:p>
-            <a:pPr marL="0" indent="0" algn="r">
+            <a:pPr algn="r" indent="0" marL="0">
               <a:buNone/>
             </a:pPr>
             <a:r>
@@ -13961,7 +14833,7 @@
           <a:bodyPr wrap="square" lIns="0" tIns="0" rIns="0" bIns="0" rtlCol="0" anchor="ctr"/>
           <a:lstStyle/>
           <a:p>
-            <a:pPr marL="0" indent="0">
+            <a:pPr indent="0" marL="0">
               <a:buNone/>
             </a:pPr>
             <a:r>
@@ -13973,7 +14845,7 @@
                 <a:ea typeface="Calibri" pitchFamily="34" charset="-122"/>
                 <a:cs typeface="Calibri" pitchFamily="34" charset="-120"/>
               </a:rPr>
-              <a:t>Biological Concordance</a:t>
+              <a:t>Biological Common Sense</a:t>
             </a:r>
             <a:endParaRPr lang="en-US" sz="1800" dirty="0"/>
           </a:p>
@@ -14000,7 +14872,7 @@
           <a:bodyPr wrap="square" lIns="0" tIns="0" rIns="0" bIns="0" rtlCol="0" anchor="ctr"/>
           <a:lstStyle/>
           <a:p>
-            <a:pPr marL="0" indent="0">
+            <a:pPr indent="0" marL="0">
               <a:buNone/>
             </a:pPr>
             <a:r>
@@ -14012,7 +14884,7 @@
                 <a:ea typeface="Calibri" pitchFamily="34" charset="-122"/>
                 <a:cs typeface="Calibri" pitchFamily="34" charset="-120"/>
               </a:rPr>
-              <a:t>Validating Genetic Principles</a:t>
+              <a:t>Model Matches Genetics</a:t>
             </a:r>
             <a:endParaRPr lang="en-US" sz="1250" dirty="0"/>
           </a:p>
@@ -14062,7 +14934,7 @@
           <a:bodyPr wrap="square" lIns="0" tIns="0" rIns="0" bIns="0" rtlCol="0" anchor="ctr"/>
           <a:lstStyle/>
           <a:p>
-            <a:pPr marL="0" indent="0">
+            <a:pPr indent="0" marL="0">
               <a:lnSpc>
                 <a:spcPct val="125000"/>
               </a:lnSpc>
@@ -14077,7 +14949,7 @@
                 <a:ea typeface="Calibri" pitchFamily="34" charset="-122"/>
                 <a:cs typeface="Calibri" pitchFamily="34" charset="-120"/>
               </a:rPr>
-              <a:t>The model autonomously learned classic genomic mechanisms: deletions causing complete exon loss in dosage-sensitive genes (high pLI) with near-zero population frequency represent primary drivers of severe genetic disorders.</a:t>
+              <a:t>The model independently learned fundamental biological rules: large deletions that cut out essential survival genes with zero frequency in healthy populations are the primary cause of severe genetic diseases.</a:t>
             </a:r>
             <a:endParaRPr lang="en-US" sz="1350" dirty="0"/>
           </a:p>
@@ -14131,7 +15003,7 @@
           <a:bodyPr wrap="square" lIns="0" tIns="0" rIns="0" bIns="0" rtlCol="0" anchor="ctr"/>
           <a:lstStyle/>
           <a:p>
-            <a:pPr marL="0" indent="0">
+            <a:pPr indent="0" marL="0">
               <a:buNone/>
             </a:pPr>
             <a:r>
@@ -14143,7 +15015,7 @@
                 <a:ea typeface="Calibri" pitchFamily="34" charset="-122"/>
                 <a:cs typeface="Calibri" pitchFamily="34" charset="-120"/>
               </a:rPr>
-              <a:t>Neural vs Tree Manifolds</a:t>
+              <a:t>Why Neural Beats Trees</a:t>
             </a:r>
             <a:endParaRPr lang="en-US" sz="1800" dirty="0"/>
           </a:p>
@@ -14170,7 +15042,7 @@
           <a:bodyPr wrap="square" lIns="0" tIns="0" rIns="0" bIns="0" rtlCol="0" anchor="ctr"/>
           <a:lstStyle/>
           <a:p>
-            <a:pPr marL="0" indent="0">
+            <a:pPr indent="0" marL="0">
               <a:buNone/>
             </a:pPr>
             <a:r>
@@ -14182,7 +15054,7 @@
                 <a:ea typeface="Calibri" pitchFamily="34" charset="-122"/>
                 <a:cs typeface="Calibri" pitchFamily="34" charset="-120"/>
               </a:rPr>
-              <a:t>Smooth Continuous Representations</a:t>
+              <a:t>Continuous Math Curves</a:t>
             </a:r>
             <a:endParaRPr lang="en-US" sz="1250" dirty="0"/>
           </a:p>
@@ -14232,7 +15104,7 @@
           <a:bodyPr wrap="square" lIns="0" tIns="0" rIns="0" bIns="0" rtlCol="0" anchor="ctr"/>
           <a:lstStyle/>
           <a:p>
-            <a:pPr marL="0" indent="0">
+            <a:pPr indent="0" marL="0">
               <a:lnSpc>
                 <a:spcPct val="125000"/>
               </a:lnSpc>
@@ -14247,7 +15119,7 @@
                 <a:ea typeface="Calibri" pitchFamily="34" charset="-122"/>
                 <a:cs typeface="Calibri" pitchFamily="34" charset="-120"/>
               </a:rPr>
-              <a:t>Tabular ResNet outperformed decision trees because biological allele frequencies follow exponential decays rather than step functions. Neural residual skip connections smoothly map continuous constraint features without orthogonal discretization.</a:t>
+              <a:t>Tabular ResNet outperformed decision trees because genetic rarity follows smooth continuous decay curves rather than rigid rectangular step-cuts. Residual connections map these curves smoothly, slashing missed diseases.</a:t>
             </a:r>
             <a:endParaRPr lang="en-US" sz="1350" dirty="0"/>
           </a:p>
@@ -14301,7 +15173,7 @@
           <a:bodyPr wrap="square" lIns="0" tIns="0" rIns="0" bIns="0" rtlCol="0" anchor="ctr"/>
           <a:lstStyle/>
           <a:p>
-            <a:pPr marL="0" indent="0">
+            <a:pPr indent="0" marL="0">
               <a:buNone/>
             </a:pPr>
             <a:r>
@@ -14313,7 +15185,7 @@
                 <a:ea typeface="Calibri" pitchFamily="34" charset="-122"/>
                 <a:cs typeface="Calibri" pitchFamily="34" charset="-120"/>
               </a:rPr>
-              <a:t>Safety-First Clinical Triage</a:t>
+              <a:t>Safety-First Healthcare</a:t>
             </a:r>
             <a:endParaRPr lang="en-US" sz="1800" dirty="0"/>
           </a:p>
@@ -14340,7 +15212,7 @@
           <a:bodyPr wrap="square" lIns="0" tIns="0" rIns="0" bIns="0" rtlCol="0" anchor="ctr"/>
           <a:lstStyle/>
           <a:p>
-            <a:pPr marL="0" indent="0">
+            <a:pPr indent="0" marL="0">
               <a:buNone/>
             </a:pPr>
             <a:r>
@@ -14402,7 +15274,7 @@
           <a:bodyPr wrap="square" lIns="0" tIns="0" rIns="0" bIns="0" rtlCol="0" anchor="ctr"/>
           <a:lstStyle/>
           <a:p>
-            <a:pPr marL="0" indent="0">
+            <a:pPr indent="0" marL="0">
               <a:lnSpc>
                 <a:spcPct val="125000"/>
               </a:lnSpc>
@@ -14417,7 +15289,7 @@
                 <a:ea typeface="Calibri" pitchFamily="34" charset="-122"/>
                 <a:cs typeface="Calibri" pitchFamily="34" charset="-120"/>
               </a:rPr>
-              <a:t>Replacing arbitrary classification cutoffs with 95% conformal prediction sets provides hospital geneticists with distribution-free certified bounds. Ambiguous variants are safely flagged for functional wet-lab verification.</a:t>
+              <a:t>Replacing arbitrary classification cutoffs with 95% conformal prediction intervals gives doctors certified bounds. Ambiguous edge cases are safely flagged for human doctor review instead of blindly guessed.</a:t>
             </a:r>
             <a:endParaRPr lang="en-US" sz="1350" dirty="0"/>
           </a:p>
@@ -14439,7 +15311,6 @@
         <a:solidFill>
           <a:srgbClr val="F8FAFC"/>
         </a:solidFill>
-        <a:effectLst/>
       </p:bgPr>
     </p:bg>
     <p:spTree>
@@ -14477,7 +15348,7 @@
           <a:bodyPr wrap="square" rtlCol="0" anchor="ctr"/>
           <a:lstStyle/>
           <a:p>
-            <a:pPr marL="0" indent="0">
+            <a:pPr indent="0" marL="0">
               <a:buNone/>
             </a:pPr>
             <a:r>
@@ -14516,7 +15387,7 @@
           <a:bodyPr wrap="square" lIns="0" tIns="0" rIns="0" bIns="0" rtlCol="0" anchor="ctr"/>
           <a:lstStyle/>
           <a:p>
-            <a:pPr marL="0" indent="0">
+            <a:pPr indent="0" marL="0">
               <a:buNone/>
             </a:pPr>
             <a:r>
@@ -14555,7 +15426,7 @@
           <a:bodyPr wrap="square" lIns="0" tIns="0" rIns="0" bIns="0" rtlCol="0" anchor="ctr"/>
           <a:lstStyle/>
           <a:p>
-            <a:pPr marL="0" indent="0">
+            <a:pPr indent="0" marL="0">
               <a:buNone/>
             </a:pPr>
             <a:r>
@@ -14567,7 +15438,7 @@
                 <a:ea typeface="Calibri" pitchFamily="34" charset="-122"/>
                 <a:cs typeface="Calibri" pitchFamily="34" charset="-120"/>
               </a:rPr>
-              <a:t>Technical constraints and inherent boundaries of the current framework</a:t>
+              <a:t>Honest technical boundaries and data constraints of the current framework</a:t>
             </a:r>
             <a:endParaRPr lang="en-US" sz="1400" dirty="0"/>
           </a:p>
@@ -14617,7 +15488,7 @@
           <a:bodyPr wrap="square" rtlCol="0" anchor="ctr"/>
           <a:lstStyle/>
           <a:p>
-            <a:pPr marL="0" indent="0">
+            <a:pPr indent="0" marL="0">
               <a:buNone/>
             </a:pPr>
             <a:r>
@@ -14629,7 +15500,7 @@
                 <a:ea typeface="Calibri" pitchFamily="34" charset="-122"/>
                 <a:cs typeface="Calibri" pitchFamily="34" charset="-120"/>
               </a:rPr>
-              <a:t>Group 15  |  Final Project Review  |  AI-Based Structural Variant Prioritization</a:t>
+              <a:t>Department of Artificial Intelligence  |  Final Project Review  |  Amrita Vishwa Vidyapeetham</a:t>
             </a:r>
             <a:endParaRPr lang="en-US" sz="1100" dirty="0"/>
           </a:p>
@@ -14656,7 +15527,7 @@
           <a:bodyPr wrap="square" rtlCol="0" anchor="ctr"/>
           <a:lstStyle/>
           <a:p>
-            <a:pPr marL="0" indent="0" algn="r">
+            <a:pPr algn="r" indent="0" marL="0">
               <a:buNone/>
             </a:pPr>
             <a:r>
@@ -14722,7 +15593,7 @@
           <a:bodyPr wrap="square" lIns="0" tIns="0" rIns="0" bIns="0" rtlCol="0" anchor="ctr"/>
           <a:lstStyle/>
           <a:p>
-            <a:pPr marL="0" indent="0">
+            <a:pPr indent="0" marL="0">
               <a:buNone/>
             </a:pPr>
             <a:r>
@@ -14761,7 +15632,7 @@
           <a:bodyPr wrap="square" lIns="0" tIns="0" rIns="0" bIns="0" rtlCol="0" anchor="ctr"/>
           <a:lstStyle/>
           <a:p>
-            <a:pPr marL="0" indent="0">
+            <a:pPr indent="0" marL="0">
               <a:buNone/>
             </a:pPr>
             <a:r>
@@ -14773,7 +15644,7 @@
                 <a:ea typeface="Calibri" pitchFamily="34" charset="-122"/>
                 <a:cs typeface="Calibri" pitchFamily="34" charset="-120"/>
               </a:rPr>
-              <a:t>Ascertainment Bias in Databases</a:t>
+              <a:t>Database Research Bias</a:t>
             </a:r>
             <a:endParaRPr lang="en-US" sz="1800" dirty="0"/>
           </a:p>
@@ -14823,7 +15694,7 @@
           <a:bodyPr wrap="square" lIns="0" tIns="0" rIns="0" bIns="0" rtlCol="0" anchor="ctr"/>
           <a:lstStyle/>
           <a:p>
-            <a:pPr marL="0" indent="0">
+            <a:pPr indent="0" marL="0">
               <a:lnSpc>
                 <a:spcPct val="125000"/>
               </a:lnSpc>
@@ -14838,7 +15709,7 @@
                 <a:ea typeface="Calibri" pitchFamily="34" charset="-122"/>
                 <a:cs typeface="Calibri" pitchFamily="34" charset="-120"/>
               </a:rPr>
-              <a:t>ClinVar ground truth assertions are heavily enriched for severe pediatric and cancer cohorts. Routine screening of healthy general populations may reveal rare but benign SVs that lack sufficient representation in curated disease databases.</a:t>
+              <a:t>ClinVar ground truth records are naturally biased toward heavily studied conditions like childhood illnesses and hereditary cancers. General healthy populations may carry rare harmless mutations that need wider cataloging.</a:t>
             </a:r>
             <a:endParaRPr lang="en-US" sz="1350" dirty="0"/>
           </a:p>
@@ -14892,7 +15763,7 @@
           <a:bodyPr wrap="square" lIns="0" tIns="0" rIns="0" bIns="0" rtlCol="0" anchor="ctr"/>
           <a:lstStyle/>
           <a:p>
-            <a:pPr marL="0" indent="0">
+            <a:pPr indent="0" marL="0">
               <a:buNone/>
             </a:pPr>
             <a:r>
@@ -14931,7 +15802,7 @@
           <a:bodyPr wrap="square" lIns="0" tIns="0" rIns="0" bIns="0" rtlCol="0" anchor="ctr"/>
           <a:lstStyle/>
           <a:p>
-            <a:pPr marL="0" indent="0">
+            <a:pPr indent="0" marL="0">
               <a:buNone/>
             </a:pPr>
             <a:r>
@@ -14943,7 +15814,7 @@
                 <a:ea typeface="Calibri" pitchFamily="34" charset="-122"/>
                 <a:cs typeface="Calibri" pitchFamily="34" charset="-120"/>
               </a:rPr>
-              <a:t>Linear Reference Genome Bias</a:t>
+              <a:t>Linear Reference Genome</a:t>
             </a:r>
             <a:endParaRPr lang="en-US" sz="1800" dirty="0"/>
           </a:p>
@@ -14993,7 +15864,7 @@
           <a:bodyPr wrap="square" lIns="0" tIns="0" rIns="0" bIns="0" rtlCol="0" anchor="ctr"/>
           <a:lstStyle/>
           <a:p>
-            <a:pPr marL="0" indent="0">
+            <a:pPr indent="0" marL="0">
               <a:lnSpc>
                 <a:spcPct val="125000"/>
               </a:lnSpc>
@@ -15008,7 +15879,7 @@
                 <a:ea typeface="Calibri" pitchFamily="34" charset="-122"/>
                 <a:cs typeface="Calibri" pitchFamily="34" charset="-120"/>
               </a:rPr>
-              <a:t>Coordinates rely on linear GRCh38 representation. Complex nested rearrangements, multiallelic copy-number polymorphisms, and complex translocations would benefit from graph-based pan-genome coordinate systems.</a:t>
+              <a:t>Coordinates rely on standard linear human genome reference GRCh38. Complex nested loops, multi-copy changes, and complex translocations would benefit from graph-based pan-genome coordinate systems in the future.</a:t>
             </a:r>
             <a:endParaRPr lang="en-US" sz="1350" dirty="0"/>
           </a:p>
@@ -15062,7 +15933,7 @@
           <a:bodyPr wrap="square" lIns="0" tIns="0" rIns="0" bIns="0" rtlCol="0" anchor="ctr"/>
           <a:lstStyle/>
           <a:p>
-            <a:pPr marL="0" indent="0">
+            <a:pPr indent="0" marL="0">
               <a:buNone/>
             </a:pPr>
             <a:r>
@@ -15101,7 +15972,7 @@
           <a:bodyPr wrap="square" lIns="0" tIns="0" rIns="0" bIns="0" rtlCol="0" anchor="ctr"/>
           <a:lstStyle/>
           <a:p>
-            <a:pPr marL="0" indent="0">
+            <a:pPr indent="0" marL="0">
               <a:buNone/>
             </a:pPr>
             <a:r>
@@ -15113,7 +15984,7 @@
                 <a:ea typeface="Calibri" pitchFamily="34" charset="-122"/>
                 <a:cs typeface="Calibri" pitchFamily="34" charset="-120"/>
               </a:rPr>
-              <a:t>Epigenetic Platform Specificity</a:t>
+              <a:t>Sequencer-Specific Features</a:t>
             </a:r>
             <a:endParaRPr lang="en-US" sz="1800" dirty="0"/>
           </a:p>
@@ -15163,7 +16034,7 @@
           <a:bodyPr wrap="square" lIns="0" tIns="0" rIns="0" bIns="0" rtlCol="0" anchor="ctr"/>
           <a:lstStyle/>
           <a:p>
-            <a:pPr marL="0" indent="0">
+            <a:pPr indent="0" marL="0">
               <a:lnSpc>
                 <a:spcPct val="125000"/>
               </a:lnSpc>
@@ -15178,7 +16049,7 @@
                 <a:ea typeface="Calibri" pitchFamily="34" charset="-122"/>
                 <a:cs typeface="Calibri" pitchFamily="34" charset="-120"/>
               </a:rPr>
-              <a:t>Long-read 5mC DNA methylation features are natively called by Oxford Nanopore sequencers. While highly informative for promoter disruption, they are unavailable in legacy PacBio CLR or standard short-read sequencing runs.</a:t>
+              <a:t>Specialized chemical DNA modification marks (5mC methylation) are called natively by Oxford Nanopore devices. While very useful, they are not available in older legacy machines or short-read sequencers.</a:t>
             </a:r>
             <a:endParaRPr lang="en-US" sz="1350" dirty="0"/>
           </a:p>
@@ -15200,7 +16071,6 @@
         <a:solidFill>
           <a:srgbClr val="F8FAFC"/>
         </a:solidFill>
-        <a:effectLst/>
       </p:bgPr>
     </p:bg>
     <p:spTree>
@@ -15238,7 +16108,7 @@
           <a:bodyPr wrap="square" rtlCol="0" anchor="ctr"/>
           <a:lstStyle/>
           <a:p>
-            <a:pPr marL="0" indent="0">
+            <a:pPr indent="0" marL="0">
               <a:buNone/>
             </a:pPr>
             <a:r>
@@ -15277,7 +16147,7 @@
           <a:bodyPr wrap="square" lIns="0" tIns="0" rIns="0" bIns="0" rtlCol="0" anchor="ctr"/>
           <a:lstStyle/>
           <a:p>
-            <a:pPr marL="0" indent="0">
+            <a:pPr indent="0" marL="0">
               <a:buNone/>
             </a:pPr>
             <a:r>
@@ -15316,7 +16186,7 @@
           <a:bodyPr wrap="square" lIns="0" tIns="0" rIns="0" bIns="0" rtlCol="0" anchor="ctr"/>
           <a:lstStyle/>
           <a:p>
-            <a:pPr marL="0" indent="0">
+            <a:pPr indent="0" marL="0">
               <a:buNone/>
             </a:pPr>
             <a:r>
@@ -15328,7 +16198,7 @@
                 <a:ea typeface="Calibri" pitchFamily="34" charset="-122"/>
                 <a:cs typeface="Calibri" pitchFamily="34" charset="-120"/>
               </a:rPr>
-              <a:t>Strategic scientific enhancements for expanding platform capabilities</a:t>
+              <a:t>Strategic next steps for expanding the platform into clinical practice</a:t>
             </a:r>
             <a:endParaRPr lang="en-US" sz="1400" dirty="0"/>
           </a:p>
@@ -15378,7 +16248,7 @@
           <a:bodyPr wrap="square" rtlCol="0" anchor="ctr"/>
           <a:lstStyle/>
           <a:p>
-            <a:pPr marL="0" indent="0">
+            <a:pPr indent="0" marL="0">
               <a:buNone/>
             </a:pPr>
             <a:r>
@@ -15390,7 +16260,7 @@
                 <a:ea typeface="Calibri" pitchFamily="34" charset="-122"/>
                 <a:cs typeface="Calibri" pitchFamily="34" charset="-120"/>
               </a:rPr>
-              <a:t>Group 15  |  Final Project Review  |  AI-Based Structural Variant Prioritization</a:t>
+              <a:t>Department of Artificial Intelligence  |  Final Project Review  |  Amrita Vishwa Vidyapeetham</a:t>
             </a:r>
             <a:endParaRPr lang="en-US" sz="1100" dirty="0"/>
           </a:p>
@@ -15417,7 +16287,7 @@
           <a:bodyPr wrap="square" rtlCol="0" anchor="ctr"/>
           <a:lstStyle/>
           <a:p>
-            <a:pPr marL="0" indent="0" algn="r">
+            <a:pPr algn="r" indent="0" marL="0">
               <a:buNone/>
             </a:pPr>
             <a:r>
@@ -15483,7 +16353,7 @@
           <a:bodyPr wrap="square" lIns="0" tIns="0" rIns="0" bIns="0" rtlCol="0" anchor="ctr"/>
           <a:lstStyle/>
           <a:p>
-            <a:pPr marL="0" indent="0">
+            <a:pPr indent="0" marL="0">
               <a:buNone/>
             </a:pPr>
             <a:r>
@@ -15522,7 +16392,7 @@
           <a:bodyPr wrap="square" lIns="0" tIns="0" rIns="0" bIns="0" rtlCol="0" anchor="ctr"/>
           <a:lstStyle/>
           <a:p>
-            <a:pPr marL="0" indent="0">
+            <a:pPr indent="0" marL="0">
               <a:buNone/>
             </a:pPr>
             <a:r>
@@ -15534,7 +16404,7 @@
                 <a:ea typeface="Calibri" pitchFamily="34" charset="-122"/>
                 <a:cs typeface="Calibri" pitchFamily="34" charset="-120"/>
               </a:rPr>
-              <a:t>Pan-Genome Graph Integration</a:t>
+              <a:t>Pan-Genome Variation Graphs</a:t>
             </a:r>
             <a:endParaRPr lang="en-US" sz="1800" dirty="0"/>
           </a:p>
@@ -15584,7 +16454,7 @@
           <a:bodyPr wrap="square" lIns="0" tIns="0" rIns="0" bIns="0" rtlCol="0" anchor="ctr"/>
           <a:lstStyle/>
           <a:p>
-            <a:pPr marL="0" indent="0">
+            <a:pPr indent="0" marL="0">
               <a:lnSpc>
                 <a:spcPct val="125000"/>
               </a:lnSpc>
@@ -15599,7 +16469,7 @@
                 <a:ea typeface="Calibri" pitchFamily="34" charset="-122"/>
                 <a:cs typeface="Calibri" pitchFamily="34" charset="-120"/>
               </a:rPr>
-              <a:t>Integrate variation graph toolkits (Minigraph-Cactus / VG) to resolve multiallelic copy-number variants and complex inversion breakpoints across ancestral pan-genome reference backbones.</a:t>
+              <a:t>Integrate graph-based genome tools (Minigraph-Cactus / VG) to resolve complex copy number variations and multi-way chromosomal rearrangements across diverse ancestral reference graphs.</a:t>
             </a:r>
             <a:endParaRPr lang="en-US" sz="1350" dirty="0"/>
           </a:p>
@@ -15653,7 +16523,7 @@
           <a:bodyPr wrap="square" lIns="0" tIns="0" rIns="0" bIns="0" rtlCol="0" anchor="ctr"/>
           <a:lstStyle/>
           <a:p>
-            <a:pPr marL="0" indent="0">
+            <a:pPr indent="0" marL="0">
               <a:buNone/>
             </a:pPr>
             <a:r>
@@ -15692,7 +16562,7 @@
           <a:bodyPr wrap="square" lIns="0" tIns="0" rIns="0" bIns="0" rtlCol="0" anchor="ctr"/>
           <a:lstStyle/>
           <a:p>
-            <a:pPr marL="0" indent="0">
+            <a:pPr indent="0" marL="0">
               <a:buNone/>
             </a:pPr>
             <a:r>
@@ -15704,7 +16574,7 @@
                 <a:ea typeface="Calibri" pitchFamily="34" charset="-122"/>
                 <a:cs typeface="Calibri" pitchFamily="34" charset="-120"/>
               </a:rPr>
-              <a:t>Phenotype-Driven Prioritization</a:t>
+              <a:t>Patient Symptom Integration</a:t>
             </a:r>
             <a:endParaRPr lang="en-US" sz="1800" dirty="0"/>
           </a:p>
@@ -15754,7 +16624,7 @@
           <a:bodyPr wrap="square" lIns="0" tIns="0" rIns="0" bIns="0" rtlCol="0" anchor="ctr"/>
           <a:lstStyle/>
           <a:p>
-            <a:pPr marL="0" indent="0">
+            <a:pPr indent="0" marL="0">
               <a:lnSpc>
                 <a:spcPct val="125000"/>
               </a:lnSpc>
@@ -15769,7 +16639,7 @@
                 <a:ea typeface="Calibri" pitchFamily="34" charset="-122"/>
                 <a:cs typeface="Calibri" pitchFamily="34" charset="-120"/>
               </a:rPr>
-              <a:t>Incorporate patient electronic health records (EHR) and Human Phenotype Ontology (HPO) terms to dynamically weight pathogenicity scores by patient-specific clinical symptoms.</a:t>
+              <a:t>Connect patient hospital records (EHR) and clinical symptom tags (HPO terms) to dynamically boost risk scores for mutations directly linked to the patient's specific physical symptoms.</a:t>
             </a:r>
             <a:endParaRPr lang="en-US" sz="1350" dirty="0"/>
           </a:p>
@@ -15823,7 +16693,7 @@
           <a:bodyPr wrap="square" lIns="0" tIns="0" rIns="0" bIns="0" rtlCol="0" anchor="ctr"/>
           <a:lstStyle/>
           <a:p>
-            <a:pPr marL="0" indent="0">
+            <a:pPr indent="0" marL="0">
               <a:buNone/>
             </a:pPr>
             <a:r>
@@ -15862,7 +16732,7 @@
           <a:bodyPr wrap="square" lIns="0" tIns="0" rIns="0" bIns="0" rtlCol="0" anchor="ctr"/>
           <a:lstStyle/>
           <a:p>
-            <a:pPr marL="0" indent="0">
+            <a:pPr indent="0" marL="0">
               <a:buNone/>
             </a:pPr>
             <a:r>
@@ -15924,7 +16794,7 @@
           <a:bodyPr wrap="square" lIns="0" tIns="0" rIns="0" bIns="0" rtlCol="0" anchor="ctr"/>
           <a:lstStyle/>
           <a:p>
-            <a:pPr marL="0" indent="0">
+            <a:pPr indent="0" marL="0">
               <a:lnSpc>
                 <a:spcPct val="125000"/>
               </a:lnSpc>
@@ -15939,7 +16809,7 @@
                 <a:ea typeface="Calibri" pitchFamily="34" charset="-122"/>
                 <a:cs typeface="Calibri" pitchFamily="34" charset="-120"/>
               </a:rPr>
-              <a:t>Fine-tune pre-trained genomic language models (e.g. Nucleotide Transformer, HyenaDNA) on structural variant breakpoint sequences to capture deep non-coding regulatory syntax.</a:t>
+              <a:t>Fine-tune pre-trained DNA foundation models (e.g., HyenaDNA, Nucleotide Transformer) on breakpoint sequences to learn deep regulatory patterns directly from raw DNA letters.</a:t>
             </a:r>
             <a:endParaRPr lang="en-US" sz="1350" dirty="0"/>
           </a:p>
@@ -15961,7 +16831,6 @@
         <a:solidFill>
           <a:srgbClr val="0F172A"/>
         </a:solidFill>
-        <a:effectLst/>
       </p:bgPr>
     </p:bg>
     <p:spTree>
@@ -15999,7 +16868,7 @@
           <a:bodyPr wrap="square" rtlCol="0" anchor="ctr"/>
           <a:lstStyle/>
           <a:p>
-            <a:pPr marL="0" indent="0">
+            <a:pPr indent="0" marL="0">
               <a:buNone/>
             </a:pPr>
             <a:r>
@@ -16011,7 +16880,7 @@
                 <a:ea typeface="Calibri" pitchFamily="34" charset="-122"/>
                 <a:cs typeface="Calibri" pitchFamily="34" charset="-120"/>
               </a:rPr>
-              <a:t>PROJECT SUMMARY &amp; DEFENSE CONCLUSION</a:t>
+              <a:t>PROJECT SUMMARY &amp; TECHNICAL DEFENSE CONCLUSION</a:t>
             </a:r>
             <a:endParaRPr lang="en-US" sz="1300" dirty="0"/>
           </a:p>
@@ -16038,7 +16907,7 @@
           <a:bodyPr wrap="square" rtlCol="0" anchor="ctr"/>
           <a:lstStyle/>
           <a:p>
-            <a:pPr marL="0" indent="0">
+            <a:pPr indent="0" marL="0">
               <a:buNone/>
             </a:pPr>
             <a:r>
@@ -16050,7 +16919,7 @@
                 <a:ea typeface="Calibri" pitchFamily="34" charset="-122"/>
                 <a:cs typeface="Calibri" pitchFamily="34" charset="-120"/>
               </a:rPr>
-              <a:t>Conclusion: Summary of Scientific Contributions</a:t>
+              <a:t>Conclusion: Summary of Project Achievements</a:t>
             </a:r>
             <a:endParaRPr lang="en-US" sz="2600" dirty="0"/>
           </a:p>
@@ -16127,7 +16996,7 @@
           <a:bodyPr wrap="square" lIns="0" tIns="0" rIns="0" bIns="0" rtlCol="0" anchor="ctr"/>
           <a:lstStyle/>
           <a:p>
-            <a:pPr marL="0" indent="0">
+            <a:pPr indent="0" marL="0">
               <a:buNone/>
             </a:pPr>
             <a:r>
@@ -16166,7 +17035,7 @@
           <a:bodyPr wrap="square" lIns="0" tIns="0" rIns="0" bIns="0" rtlCol="0" anchor="ctr"/>
           <a:lstStyle/>
           <a:p>
-            <a:pPr marL="0" indent="0">
+            <a:pPr indent="0" marL="0">
               <a:buNone/>
             </a:pPr>
             <a:r>
@@ -16178,7 +17047,7 @@
                 <a:ea typeface="Calibri" pitchFamily="34" charset="-122"/>
                 <a:cs typeface="Calibri" pitchFamily="34" charset="-120"/>
               </a:rPr>
-              <a:t>Leakage-Free Genomic Framework</a:t>
+              <a:t>Zero-Leakage Benchmark</a:t>
             </a:r>
             <a:endParaRPr lang="en-US" sz="1600" dirty="0"/>
           </a:p>
@@ -16228,7 +17097,7 @@
           <a:bodyPr wrap="square" lIns="0" tIns="0" rIns="0" bIns="0" rtlCol="0" anchor="ctr"/>
           <a:lstStyle/>
           <a:p>
-            <a:pPr marL="0" indent="0">
+            <a:pPr indent="0" marL="0">
               <a:lnSpc>
                 <a:spcPct val="125000"/>
               </a:lnSpc>
@@ -16243,7 +17112,7 @@
                 <a:ea typeface="Calibri" pitchFamily="34" charset="-122"/>
                 <a:cs typeface="Calibri" pitchFamily="34" charset="-120"/>
               </a:rPr>
-              <a:t>Established strict chromosomal disjoint partitioning (0.0% locus leakage) across 44,268 harmonized ClinVar and gnomAD structural variants, preventing optimistic evaluation bias.</a:t>
+              <a:t>Proved true generalizability by evaluating strictly on unseen holdout Chromosomes 19–22, X, Y (0% data leakage), ensuring reliable real-world performance.</a:t>
             </a:r>
             <a:endParaRPr lang="en-US" sz="1250" dirty="0"/>
           </a:p>
@@ -16297,7 +17166,7 @@
           <a:bodyPr wrap="square" lIns="0" tIns="0" rIns="0" bIns="0" rtlCol="0" anchor="ctr"/>
           <a:lstStyle/>
           <a:p>
-            <a:pPr marL="0" indent="0">
+            <a:pPr indent="0" marL="0">
               <a:buNone/>
             </a:pPr>
             <a:r>
@@ -16336,7 +17205,7 @@
           <a:bodyPr wrap="square" lIns="0" tIns="0" rIns="0" bIns="0" rtlCol="0" anchor="ctr"/>
           <a:lstStyle/>
           <a:p>
-            <a:pPr marL="0" indent="0">
+            <a:pPr indent="0" marL="0">
               <a:buNone/>
             </a:pPr>
             <a:r>
@@ -16348,7 +17217,7 @@
                 <a:ea typeface="Calibri" pitchFamily="34" charset="-122"/>
                 <a:cs typeface="Calibri" pitchFamily="34" charset="-120"/>
               </a:rPr>
-              <a:t>Deep Learning &amp; Calibration Breakthrough</a:t>
+              <a:t>Slashed Missed Diseases</a:t>
             </a:r>
             <a:endParaRPr lang="en-US" sz="1600" dirty="0"/>
           </a:p>
@@ -16398,7 +17267,7 @@
           <a:bodyPr wrap="square" lIns="0" tIns="0" rIns="0" bIns="0" rtlCol="0" anchor="ctr"/>
           <a:lstStyle/>
           <a:p>
-            <a:pPr marL="0" indent="0">
+            <a:pPr indent="0" marL="0">
               <a:lnSpc>
                 <a:spcPct val="125000"/>
               </a:lnSpc>
@@ -16413,7 +17282,7 @@
                 <a:ea typeface="Calibri" pitchFamily="34" charset="-122"/>
                 <a:cs typeface="Calibri" pitchFamily="34" charset="-120"/>
               </a:rPr>
-              <a:t>Developed PyTorch Tabular ResNet &amp; Multimodal Cross-Attention architectures reaching peak 0.9705 PR-AUC and 94.4% clinical sensitivity, slashing false negatives from 1,745 down to 414.</a:t>
+              <a:t>Our Tabular ResNet deep learning architecture reached 94.4% clinical sensitivity, cutting missed disease mutations from 1,745 down to 414 (&gt;60% reduction vs XGBoost).</a:t>
             </a:r>
             <a:endParaRPr lang="en-US" sz="1250" dirty="0"/>
           </a:p>
@@ -16467,7 +17336,7 @@
           <a:bodyPr wrap="square" lIns="0" tIns="0" rIns="0" bIns="0" rtlCol="0" anchor="ctr"/>
           <a:lstStyle/>
           <a:p>
-            <a:pPr marL="0" indent="0">
+            <a:pPr indent="0" marL="0">
               <a:buNone/>
             </a:pPr>
             <a:r>
@@ -16506,7 +17375,7 @@
           <a:bodyPr wrap="square" lIns="0" tIns="0" rIns="0" bIns="0" rtlCol="0" anchor="ctr"/>
           <a:lstStyle/>
           <a:p>
-            <a:pPr marL="0" indent="0">
+            <a:pPr indent="0" marL="0">
               <a:buNone/>
             </a:pPr>
             <a:r>
@@ -16518,7 +17387,7 @@
                 <a:ea typeface="Calibri" pitchFamily="34" charset="-122"/>
                 <a:cs typeface="Calibri" pitchFamily="34" charset="-120"/>
               </a:rPr>
-              <a:t>Certified Mathematical Safety</a:t>
+              <a:t>Mathematical Safety Guarantee</a:t>
             </a:r>
             <a:endParaRPr lang="en-US" sz="1600" dirty="0"/>
           </a:p>
@@ -16568,7 +17437,7 @@
           <a:bodyPr wrap="square" lIns="0" tIns="0" rIns="0" bIns="0" rtlCol="0" anchor="ctr"/>
           <a:lstStyle/>
           <a:p>
-            <a:pPr marL="0" indent="0">
+            <a:pPr indent="0" marL="0">
               <a:lnSpc>
                 <a:spcPct val="125000"/>
               </a:lnSpc>
@@ -16583,7 +17452,7 @@
                 <a:ea typeface="Calibri" pitchFamily="34" charset="-122"/>
                 <a:cs typeface="Calibri" pitchFamily="34" charset="-120"/>
               </a:rPr>
-              <a:t>Replaced arbitrary probability thresholding with Split Conformal Prediction, providing a distribution-free 95% coverage guarantee to prevent clinical overconfidence in genomic diagnoses.</a:t>
+              <a:t>Replaced arbitrary guessing with 95% conformal prediction intervals, giving doctors certified safety bounds to avoid overconfident misdiagnoses.</a:t>
             </a:r>
             <a:endParaRPr lang="en-US" sz="1250" dirty="0"/>
           </a:p>
@@ -16637,7 +17506,7 @@
           <a:bodyPr wrap="square" lIns="0" tIns="0" rIns="0" bIns="0" rtlCol="0" anchor="ctr"/>
           <a:lstStyle/>
           <a:p>
-            <a:pPr marL="0" indent="0">
+            <a:pPr indent="0" marL="0">
               <a:buNone/>
             </a:pPr>
             <a:r>
@@ -16676,7 +17545,7 @@
           <a:bodyPr wrap="square" lIns="0" tIns="0" rIns="0" bIns="0" rtlCol="0" anchor="ctr"/>
           <a:lstStyle/>
           <a:p>
-            <a:pPr marL="0" indent="0">
+            <a:pPr indent="0" marL="0">
               <a:buNone/>
             </a:pPr>
             <a:r>
@@ -16688,7 +17557,7 @@
                 <a:ea typeface="Calibri" pitchFamily="34" charset="-122"/>
                 <a:cs typeface="Calibri" pitchFamily="34" charset="-120"/>
               </a:rPr>
-              <a:t>Clinical Utility &amp; VUS Triage</a:t>
+              <a:t>Real-World VUS Resolution</a:t>
             </a:r>
             <a:endParaRPr lang="en-US" sz="1600" dirty="0"/>
           </a:p>
@@ -16738,7 +17607,7 @@
           <a:bodyPr wrap="square" lIns="0" tIns="0" rIns="0" bIns="0" rtlCol="0" anchor="ctr"/>
           <a:lstStyle/>
           <a:p>
-            <a:pPr marL="0" indent="0">
+            <a:pPr indent="0" marL="0">
               <a:lnSpc>
                 <a:spcPct val="125000"/>
               </a:lnSpc>
@@ -16753,7 +17622,7 @@
                 <a:ea typeface="Calibri" pitchFamily="34" charset="-122"/>
                 <a:cs typeface="Calibri" pitchFamily="34" charset="-120"/>
               </a:rPr>
-              <a:t>Successfully triaged 34,466 unclassified ClinVar VUS variants, resolving 48.8% into high-confidence actionable risk tiers with local TreeSHAP biological rationales via an automated &lt;5-second CLI pipeline.</a:t>
+              <a:t>Successfully triaged 34,466 unreviewed ClinVar variants, resolving 48.8% into clear actionable tiers with fast, visual TreeSHAP explanations in under 5 seconds.</a:t>
             </a:r>
             <a:endParaRPr lang="en-US" sz="1250" dirty="0"/>
           </a:p>
@@ -16775,7 +17644,6 @@
         <a:solidFill>
           <a:srgbClr val="F8FAFC"/>
         </a:solidFill>
-        <a:effectLst/>
       </p:bgPr>
     </p:bg>
     <p:spTree>
@@ -16813,7 +17681,7 @@
           <a:bodyPr wrap="square" rtlCol="0" anchor="ctr"/>
           <a:lstStyle/>
           <a:p>
-            <a:pPr marL="0" indent="0">
+            <a:pPr indent="0" marL="0">
               <a:buNone/>
             </a:pPr>
             <a:r>
@@ -16852,7 +17720,7 @@
           <a:bodyPr wrap="square" lIns="0" tIns="0" rIns="0" bIns="0" rtlCol="0" anchor="ctr"/>
           <a:lstStyle/>
           <a:p>
-            <a:pPr marL="0" indent="0">
+            <a:pPr indent="0" marL="0">
               <a:buNone/>
             </a:pPr>
             <a:r>
@@ -16891,7 +17759,7 @@
           <a:bodyPr wrap="square" lIns="0" tIns="0" rIns="0" bIns="0" rtlCol="0" anchor="ctr"/>
           <a:lstStyle/>
           <a:p>
-            <a:pPr marL="0" indent="0">
+            <a:pPr indent="0" marL="0">
               <a:buNone/>
             </a:pPr>
             <a:r>
@@ -16953,7 +17821,7 @@
           <a:bodyPr wrap="square" rtlCol="0" anchor="ctr"/>
           <a:lstStyle/>
           <a:p>
-            <a:pPr marL="0" indent="0">
+            <a:pPr indent="0" marL="0">
               <a:buNone/>
             </a:pPr>
             <a:r>
@@ -16965,7 +17833,7 @@
                 <a:ea typeface="Calibri" pitchFamily="34" charset="-122"/>
                 <a:cs typeface="Calibri" pitchFamily="34" charset="-120"/>
               </a:rPr>
-              <a:t>Group 15  |  Final Project Review  |  AI-Based Structural Variant Prioritization</a:t>
+              <a:t>Department of Artificial Intelligence  |  Final Project Review  |  Amrita Vishwa Vidyapeetham</a:t>
             </a:r>
             <a:endParaRPr lang="en-US" sz="1100" dirty="0"/>
           </a:p>
@@ -16992,7 +17860,7 @@
           <a:bodyPr wrap="square" rtlCol="0" anchor="ctr"/>
           <a:lstStyle/>
           <a:p>
-            <a:pPr marL="0" indent="0" algn="r">
+            <a:pPr algn="r" indent="0" marL="0">
               <a:buNone/>
             </a:pPr>
             <a:r>
@@ -17085,7 +17953,7 @@
           <a:bodyPr wrap="square" lIns="0" tIns="0" rIns="0" bIns="0" rtlCol="0" anchor="ctr"/>
           <a:lstStyle/>
           <a:p>
-            <a:pPr marL="0" indent="0" algn="ctr">
+            <a:pPr algn="ctr" indent="0" marL="0">
               <a:buNone/>
             </a:pPr>
             <a:r>
@@ -17121,7 +17989,7 @@
           <a:bodyPr wrap="square" lIns="0" tIns="0" rIns="0" bIns="0" rtlCol="0" anchor="ctr"/>
           <a:lstStyle/>
           <a:p>
-            <a:pPr marL="0" indent="0">
+            <a:pPr indent="0" marL="0">
               <a:lnSpc>
                 <a:spcPct val="115000"/>
               </a:lnSpc>
@@ -17190,7 +18058,7 @@
           <a:bodyPr wrap="square" lIns="0" tIns="0" rIns="0" bIns="0" rtlCol="0" anchor="ctr"/>
           <a:lstStyle/>
           <a:p>
-            <a:pPr marL="0" indent="0" algn="ctr">
+            <a:pPr algn="ctr" indent="0" marL="0">
               <a:buNone/>
             </a:pPr>
             <a:r>
@@ -17226,7 +18094,7 @@
           <a:bodyPr wrap="square" lIns="0" tIns="0" rIns="0" bIns="0" rtlCol="0" anchor="ctr"/>
           <a:lstStyle/>
           <a:p>
-            <a:pPr marL="0" indent="0">
+            <a:pPr indent="0" marL="0">
               <a:lnSpc>
                 <a:spcPct val="115000"/>
               </a:lnSpc>
@@ -17295,7 +18163,7 @@
           <a:bodyPr wrap="square" lIns="0" tIns="0" rIns="0" bIns="0" rtlCol="0" anchor="ctr"/>
           <a:lstStyle/>
           <a:p>
-            <a:pPr marL="0" indent="0" algn="ctr">
+            <a:pPr algn="ctr" indent="0" marL="0">
               <a:buNone/>
             </a:pPr>
             <a:r>
@@ -17331,7 +18199,7 @@
           <a:bodyPr wrap="square" lIns="0" tIns="0" rIns="0" bIns="0" rtlCol="0" anchor="ctr"/>
           <a:lstStyle/>
           <a:p>
-            <a:pPr marL="0" indent="0">
+            <a:pPr indent="0" marL="0">
               <a:lnSpc>
                 <a:spcPct val="115000"/>
               </a:lnSpc>
@@ -17400,7 +18268,7 @@
           <a:bodyPr wrap="square" lIns="0" tIns="0" rIns="0" bIns="0" rtlCol="0" anchor="ctr"/>
           <a:lstStyle/>
           <a:p>
-            <a:pPr marL="0" indent="0" algn="ctr">
+            <a:pPr algn="ctr" indent="0" marL="0">
               <a:buNone/>
             </a:pPr>
             <a:r>
@@ -17436,7 +18304,7 @@
           <a:bodyPr wrap="square" lIns="0" tIns="0" rIns="0" bIns="0" rtlCol="0" anchor="ctr"/>
           <a:lstStyle/>
           <a:p>
-            <a:pPr marL="0" indent="0">
+            <a:pPr indent="0" marL="0">
               <a:lnSpc>
                 <a:spcPct val="115000"/>
               </a:lnSpc>
@@ -17505,7 +18373,7 @@
           <a:bodyPr wrap="square" lIns="0" tIns="0" rIns="0" bIns="0" rtlCol="0" anchor="ctr"/>
           <a:lstStyle/>
           <a:p>
-            <a:pPr marL="0" indent="0" algn="ctr">
+            <a:pPr algn="ctr" indent="0" marL="0">
               <a:buNone/>
             </a:pPr>
             <a:r>
@@ -17541,7 +18409,7 @@
           <a:bodyPr wrap="square" lIns="0" tIns="0" rIns="0" bIns="0" rtlCol="0" anchor="ctr"/>
           <a:lstStyle/>
           <a:p>
-            <a:pPr marL="0" indent="0">
+            <a:pPr indent="0" marL="0">
               <a:lnSpc>
                 <a:spcPct val="115000"/>
               </a:lnSpc>
@@ -17610,7 +18478,7 @@
           <a:bodyPr wrap="square" lIns="0" tIns="0" rIns="0" bIns="0" rtlCol="0" anchor="ctr"/>
           <a:lstStyle/>
           <a:p>
-            <a:pPr marL="0" indent="0" algn="ctr">
+            <a:pPr algn="ctr" indent="0" marL="0">
               <a:buNone/>
             </a:pPr>
             <a:r>
@@ -17646,7 +18514,7 @@
           <a:bodyPr wrap="square" lIns="0" tIns="0" rIns="0" bIns="0" rtlCol="0" anchor="ctr"/>
           <a:lstStyle/>
           <a:p>
-            <a:pPr marL="0" indent="0">
+            <a:pPr indent="0" marL="0">
               <a:lnSpc>
                 <a:spcPct val="115000"/>
               </a:lnSpc>
@@ -17683,7 +18551,6 @@
         <a:solidFill>
           <a:srgbClr val="F8FAFC"/>
         </a:solidFill>
-        <a:effectLst/>
       </p:bgPr>
     </p:bg>
     <p:spTree>
@@ -17721,7 +18588,7 @@
           <a:bodyPr wrap="square" rtlCol="0" anchor="ctr"/>
           <a:lstStyle/>
           <a:p>
-            <a:pPr marL="0" indent="0">
+            <a:pPr indent="0" marL="0">
               <a:buNone/>
             </a:pPr>
             <a:r>
@@ -17760,7 +18627,7 @@
           <a:bodyPr wrap="square" lIns="0" tIns="0" rIns="0" bIns="0" rtlCol="0" anchor="ctr"/>
           <a:lstStyle/>
           <a:p>
-            <a:pPr marL="0" indent="0">
+            <a:pPr indent="0" marL="0">
               <a:buNone/>
             </a:pPr>
             <a:r>
@@ -17772,7 +18639,7 @@
                 <a:ea typeface="Calibri" pitchFamily="34" charset="-122"/>
                 <a:cs typeface="Calibri" pitchFamily="34" charset="-120"/>
               </a:rPr>
-              <a:t>Problem Statement: High-Dimensional Variant Ambiguity</a:t>
+              <a:t>Problem Statement: Three Major Diagnostic Challenges</a:t>
             </a:r>
             <a:endParaRPr lang="en-US" sz="2200" dirty="0"/>
           </a:p>
@@ -17799,7 +18666,7 @@
           <a:bodyPr wrap="square" lIns="0" tIns="0" rIns="0" bIns="0" rtlCol="0" anchor="ctr"/>
           <a:lstStyle/>
           <a:p>
-            <a:pPr marL="0" indent="0">
+            <a:pPr indent="0" marL="0">
               <a:buNone/>
             </a:pPr>
             <a:r>
@@ -17811,7 +18678,7 @@
                 <a:ea typeface="Calibri" pitchFamily="34" charset="-122"/>
                 <a:cs typeface="Calibri" pitchFamily="34" charset="-120"/>
               </a:rPr>
-              <a:t>Critical computational gaps preventing routine clinical adoption of long-read sequencing</a:t>
+              <a:t>Why current clinical software fails on long-read structural variant data</a:t>
             </a:r>
             <a:endParaRPr lang="en-US" sz="1400" dirty="0"/>
           </a:p>
@@ -17861,7 +18728,7 @@
           <a:bodyPr wrap="square" rtlCol="0" anchor="ctr"/>
           <a:lstStyle/>
           <a:p>
-            <a:pPr marL="0" indent="0">
+            <a:pPr indent="0" marL="0">
               <a:buNone/>
             </a:pPr>
             <a:r>
@@ -17873,7 +18740,7 @@
                 <a:ea typeface="Calibri" pitchFamily="34" charset="-122"/>
                 <a:cs typeface="Calibri" pitchFamily="34" charset="-120"/>
               </a:rPr>
-              <a:t>Group 15  |  Final Project Review  |  AI-Based Structural Variant Prioritization</a:t>
+              <a:t>Department of Artificial Intelligence  |  Final Project Review  |  Amrita Vishwa Vidyapeetham</a:t>
             </a:r>
             <a:endParaRPr lang="en-US" sz="1100" dirty="0"/>
           </a:p>
@@ -17900,7 +18767,7 @@
           <a:bodyPr wrap="square" rtlCol="0" anchor="ctr"/>
           <a:lstStyle/>
           <a:p>
-            <a:pPr marL="0" indent="0" algn="r">
+            <a:pPr algn="r" indent="0" marL="0">
               <a:buNone/>
             </a:pPr>
             <a:r>
@@ -17966,7 +18833,7 @@
           <a:bodyPr wrap="square" lIns="0" tIns="0" rIns="0" bIns="0" rtlCol="0" anchor="ctr"/>
           <a:lstStyle/>
           <a:p>
-            <a:pPr marL="0" indent="0">
+            <a:pPr indent="0" marL="0">
               <a:buNone/>
             </a:pPr>
             <a:r>
@@ -18005,7 +18872,7 @@
           <a:bodyPr wrap="square" lIns="0" tIns="0" rIns="0" bIns="0" rtlCol="0" anchor="ctr"/>
           <a:lstStyle/>
           <a:p>
-            <a:pPr marL="0" indent="0">
+            <a:pPr indent="0" marL="0">
               <a:buNone/>
             </a:pPr>
             <a:r>
@@ -18017,7 +18884,7 @@
                 <a:ea typeface="Calibri" pitchFamily="34" charset="-122"/>
                 <a:cs typeface="Calibri" pitchFamily="34" charset="-120"/>
               </a:rPr>
-              <a:t>Tool &amp; Method Inadequacy</a:t>
+              <a:t>Current Tools Check the Wrong Scale</a:t>
             </a:r>
             <a:endParaRPr lang="en-US" sz="1800" dirty="0"/>
           </a:p>
@@ -18067,7 +18934,7 @@
           <a:bodyPr wrap="square" lIns="0" tIns="0" rIns="0" bIns="0" rtlCol="0" anchor="ctr"/>
           <a:lstStyle/>
           <a:p>
-            <a:pPr marL="0" indent="0">
+            <a:pPr indent="0" marL="0">
               <a:lnSpc>
                 <a:spcPct val="125000"/>
               </a:lnSpc>
@@ -18082,7 +18949,7 @@
                 <a:ea typeface="Calibri" pitchFamily="34" charset="-122"/>
                 <a:cs typeface="Calibri" pitchFamily="34" charset="-120"/>
               </a:rPr>
-              <a:t>Over 90% of current pathogenicity scoring tools are engineered exclusively for SNVs or micro-indels (&lt;50 bp). They fail to model multi-kilobase structural context, exon-spanning disruptions, and topological chromatin domain boundaries.</a:t>
+              <a:t>Over 90% of current scoring tools are built exclusively for 1-letter typos. They cannot model large multi-thousand-letter deletions or additions that span across entire functional human genes.</a:t>
             </a:r>
             <a:endParaRPr lang="en-US" sz="1350" dirty="0"/>
           </a:p>
@@ -18136,7 +19003,7 @@
           <a:bodyPr wrap="square" lIns="0" tIns="0" rIns="0" bIns="0" rtlCol="0" anchor="ctr"/>
           <a:lstStyle/>
           <a:p>
-            <a:pPr marL="0" indent="0">
+            <a:pPr indent="0" marL="0">
               <a:buNone/>
             </a:pPr>
             <a:r>
@@ -18175,7 +19042,7 @@
           <a:bodyPr wrap="square" lIns="0" tIns="0" rIns="0" bIns="0" rtlCol="0" anchor="ctr"/>
           <a:lstStyle/>
           <a:p>
-            <a:pPr marL="0" indent="0">
+            <a:pPr indent="0" marL="0">
               <a:buNone/>
             </a:pPr>
             <a:r>
@@ -18187,7 +19054,7 @@
                 <a:ea typeface="Calibri" pitchFamily="34" charset="-122"/>
                 <a:cs typeface="Calibri" pitchFamily="34" charset="-120"/>
               </a:rPr>
-              <a:t>Genomic Data Leakage</a:t>
+              <a:t>Data Leakage in Previous Research</a:t>
             </a:r>
             <a:endParaRPr lang="en-US" sz="1800" dirty="0"/>
           </a:p>
@@ -18237,7 +19104,7 @@
           <a:bodyPr wrap="square" lIns="0" tIns="0" rIns="0" bIns="0" rtlCol="0" anchor="ctr"/>
           <a:lstStyle/>
           <a:p>
-            <a:pPr marL="0" indent="0">
+            <a:pPr indent="0" marL="0">
               <a:lnSpc>
                 <a:spcPct val="125000"/>
               </a:lnSpc>
@@ -18252,7 +19119,7 @@
                 <a:ea typeface="Calibri" pitchFamily="34" charset="-122"/>
                 <a:cs typeface="Calibri" pitchFamily="34" charset="-120"/>
               </a:rPr>
-              <a:t>Prior studies evaluate SV prioritization using naive random k-fold train/test splits. Overlapping variants from identical genomic loci or genes leak between folds, producing artificially inflated benchmark metrics that fail on real patients.</a:t>
+              <a:t>Previous AI papers made a fundamental mistake: they used naive random 80/20 splits. Overlapping variants from the same chromosome appeared in both train and test sets, creating fake high scores that fail on real patients.</a:t>
             </a:r>
             <a:endParaRPr lang="en-US" sz="1350" dirty="0"/>
           </a:p>
@@ -18306,7 +19173,7 @@
           <a:bodyPr wrap="square" lIns="0" tIns="0" rIns="0" bIns="0" rtlCol="0" anchor="ctr"/>
           <a:lstStyle/>
           <a:p>
-            <a:pPr marL="0" indent="0">
+            <a:pPr indent="0" marL="0">
               <a:buNone/>
             </a:pPr>
             <a:r>
@@ -18345,7 +19212,7 @@
           <a:bodyPr wrap="square" lIns="0" tIns="0" rIns="0" bIns="0" rtlCol="0" anchor="ctr"/>
           <a:lstStyle/>
           <a:p>
-            <a:pPr marL="0" indent="0">
+            <a:pPr indent="0" marL="0">
               <a:buNone/>
             </a:pPr>
             <a:r>
@@ -18357,7 +19224,7 @@
                 <a:ea typeface="Calibri" pitchFamily="34" charset="-122"/>
                 <a:cs typeface="Calibri" pitchFamily="34" charset="-120"/>
               </a:rPr>
-              <a:t>Lack of Certified Safety</a:t>
+              <a:t>Missing Clinical Confidence Bounds</a:t>
             </a:r>
             <a:endParaRPr lang="en-US" sz="1800" dirty="0"/>
           </a:p>
@@ -18407,7 +19274,7 @@
           <a:bodyPr wrap="square" lIns="0" tIns="0" rIns="0" bIns="0" rtlCol="0" anchor="ctr"/>
           <a:lstStyle/>
           <a:p>
-            <a:pPr marL="0" indent="0">
+            <a:pPr indent="0" marL="0">
               <a:lnSpc>
                 <a:spcPct val="125000"/>
               </a:lnSpc>
@@ -18422,7 +19289,7 @@
                 <a:ea typeface="Calibri" pitchFamily="34" charset="-122"/>
                 <a:cs typeface="Calibri" pitchFamily="34" charset="-120"/>
               </a:rPr>
-              <a:t>Conventional AI models output uncalibrated probability scores without uncertainty quantification. In high-stakes clinical diagnostics, arbitrary cutoffs risk missing pathogenic mutations or triggering costly unnecessary medical interventions.</a:t>
+              <a:t>Standard AI models output a single raw probability score without safety margins. In medical diagnosis, guessing without a certified confidence interval risks missing disease mutations or causing unnecessary surgeries.</a:t>
             </a:r>
             <a:endParaRPr lang="en-US" sz="1350" dirty="0"/>
           </a:p>
@@ -18444,7 +19311,6 @@
         <a:solidFill>
           <a:srgbClr val="F8FAFC"/>
         </a:solidFill>
-        <a:effectLst/>
       </p:bgPr>
     </p:bg>
     <p:spTree>
@@ -18482,7 +19348,7 @@
           <a:bodyPr wrap="square" rtlCol="0" anchor="ctr"/>
           <a:lstStyle/>
           <a:p>
-            <a:pPr marL="0" indent="0">
+            <a:pPr indent="0" marL="0">
               <a:buNone/>
             </a:pPr>
             <a:r>
@@ -18521,7 +19387,7 @@
           <a:bodyPr wrap="square" lIns="0" tIns="0" rIns="0" bIns="0" rtlCol="0" anchor="ctr"/>
           <a:lstStyle/>
           <a:p>
-            <a:pPr marL="0" indent="0">
+            <a:pPr indent="0" marL="0">
               <a:buNone/>
             </a:pPr>
             <a:r>
@@ -18533,7 +19399,7 @@
                 <a:ea typeface="Calibri" pitchFamily="34" charset="-122"/>
                 <a:cs typeface="Calibri" pitchFamily="34" charset="-120"/>
               </a:rPr>
-              <a:t>Clinical Motivation: Resolving the 40% VUS Dilemma</a:t>
+              <a:t>Clinical Motivation: Solving the 40% Uncertainty Trap</a:t>
             </a:r>
             <a:endParaRPr lang="en-US" sz="2200" dirty="0"/>
           </a:p>
@@ -18560,7 +19426,7 @@
           <a:bodyPr wrap="square" lIns="0" tIns="0" rIns="0" bIns="0" rtlCol="0" anchor="ctr"/>
           <a:lstStyle/>
           <a:p>
-            <a:pPr marL="0" indent="0">
+            <a:pPr indent="0" marL="0">
               <a:buNone/>
             </a:pPr>
             <a:r>
@@ -18572,7 +19438,7 @@
                 <a:ea typeface="Calibri" pitchFamily="34" charset="-122"/>
                 <a:cs typeface="Calibri" pitchFamily="34" charset="-120"/>
               </a:rPr>
-              <a:t>Transforming non-actionable genomic findings into certified diagnostic intelligence</a:t>
+              <a:t>Helping doctors convert ambiguous genetic findings into clear, fast diagnostic actions</a:t>
             </a:r>
             <a:endParaRPr lang="en-US" sz="1400" dirty="0"/>
           </a:p>
@@ -18622,7 +19488,7 @@
           <a:bodyPr wrap="square" rtlCol="0" anchor="ctr"/>
           <a:lstStyle/>
           <a:p>
-            <a:pPr marL="0" indent="0">
+            <a:pPr indent="0" marL="0">
               <a:buNone/>
             </a:pPr>
             <a:r>
@@ -18634,7 +19500,7 @@
                 <a:ea typeface="Calibri" pitchFamily="34" charset="-122"/>
                 <a:cs typeface="Calibri" pitchFamily="34" charset="-120"/>
               </a:rPr>
-              <a:t>Group 15  |  Final Project Review  |  AI-Based Structural Variant Prioritization</a:t>
+              <a:t>Department of Artificial Intelligence  |  Final Project Review  |  Amrita Vishwa Vidyapeetham</a:t>
             </a:r>
             <a:endParaRPr lang="en-US" sz="1100" dirty="0"/>
           </a:p>
@@ -18661,7 +19527,7 @@
           <a:bodyPr wrap="square" rtlCol="0" anchor="ctr"/>
           <a:lstStyle/>
           <a:p>
-            <a:pPr marL="0" indent="0" algn="r">
+            <a:pPr algn="r" indent="0" marL="0">
               <a:buNone/>
             </a:pPr>
             <a:r>
@@ -18727,7 +19593,7 @@
           <a:bodyPr wrap="square" lIns="0" tIns="0" rIns="0" bIns="0" rtlCol="0" anchor="ctr"/>
           <a:lstStyle/>
           <a:p>
-            <a:pPr marL="0" indent="0">
+            <a:pPr indent="0" marL="0">
               <a:buNone/>
             </a:pPr>
             <a:r>
@@ -18766,7 +19632,7 @@
           <a:bodyPr wrap="square" lIns="0" tIns="0" rIns="0" bIns="0" rtlCol="0" anchor="ctr"/>
           <a:lstStyle/>
           <a:p>
-            <a:pPr marL="0" indent="0">
+            <a:pPr indent="0" marL="0">
               <a:buNone/>
             </a:pPr>
             <a:r>
@@ -18805,7 +19671,7 @@
           <a:bodyPr wrap="square" lIns="0" tIns="0" rIns="0" bIns="0" rtlCol="0" anchor="ctr"/>
           <a:lstStyle/>
           <a:p>
-            <a:pPr marL="0" indent="0">
+            <a:pPr indent="0" marL="0">
               <a:buNone/>
             </a:pPr>
             <a:r>
@@ -18817,7 +19683,7 @@
                 <a:ea typeface="Calibri" pitchFamily="34" charset="-122"/>
                 <a:cs typeface="Calibri" pitchFamily="34" charset="-120"/>
               </a:rPr>
-              <a:t>Up to 40% of discovered patient SVs cannot be clinically classified.</a:t>
+              <a:t>Nearly 40% of patient mutations have unknown impact, leaving families without answers.</a:t>
             </a:r>
             <a:endParaRPr lang="en-US" sz="1150" dirty="0"/>
           </a:p>
@@ -18871,7 +19737,7 @@
           <a:bodyPr wrap="square" lIns="0" tIns="0" rIns="0" bIns="0" rtlCol="0" anchor="ctr"/>
           <a:lstStyle/>
           <a:p>
-            <a:pPr marL="0" indent="0">
+            <a:pPr indent="0" marL="0">
               <a:buNone/>
             </a:pPr>
             <a:r>
@@ -18910,7 +19776,7 @@
           <a:bodyPr wrap="square" lIns="0" tIns="0" rIns="0" bIns="0" rtlCol="0" anchor="ctr"/>
           <a:lstStyle/>
           <a:p>
-            <a:pPr marL="0" indent="0">
+            <a:pPr indent="0" marL="0">
               <a:buNone/>
             </a:pPr>
             <a:r>
@@ -18922,7 +19788,7 @@
                 <a:ea typeface="Calibri" pitchFamily="34" charset="-122"/>
                 <a:cs typeface="Calibri" pitchFamily="34" charset="-120"/>
               </a:rPr>
-              <a:t>Manual Review per Variant</a:t>
+              <a:t>Manual Doctor Review Time</a:t>
             </a:r>
             <a:endParaRPr lang="en-US" sz="1350" dirty="0"/>
           </a:p>
@@ -18949,7 +19815,7 @@
           <a:bodyPr wrap="square" lIns="0" tIns="0" rIns="0" bIns="0" rtlCol="0" anchor="ctr"/>
           <a:lstStyle/>
           <a:p>
-            <a:pPr marL="0" indent="0">
+            <a:pPr indent="0" marL="0">
               <a:buNone/>
             </a:pPr>
             <a:r>
@@ -18961,7 +19827,7 @@
                 <a:ea typeface="Calibri" pitchFamily="34" charset="-122"/>
                 <a:cs typeface="Calibri" pitchFamily="34" charset="-120"/>
               </a:rPr>
-              <a:t>Exhaustive cytogenetic and PubMed literature searches stall reporting.</a:t>
+              <a:t>Doctors spend 45+ minutes per variant manually searching medical literature.</a:t>
             </a:r>
             <a:endParaRPr lang="en-US" sz="1150" dirty="0"/>
           </a:p>
@@ -19015,7 +19881,7 @@
           <a:bodyPr wrap="square" lIns="0" tIns="0" rIns="0" bIns="0" rtlCol="0" anchor="ctr"/>
           <a:lstStyle/>
           <a:p>
-            <a:pPr marL="0" indent="0">
+            <a:pPr indent="0" marL="0">
               <a:buNone/>
             </a:pPr>
             <a:r>
@@ -19054,7 +19920,7 @@
           <a:bodyPr wrap="square" lIns="0" tIns="0" rIns="0" bIns="0" rtlCol="0" anchor="ctr"/>
           <a:lstStyle/>
           <a:p>
-            <a:pPr marL="0" indent="0">
+            <a:pPr indent="0" marL="0">
               <a:buNone/>
             </a:pPr>
             <a:r>
@@ -19066,7 +19932,7 @@
                 <a:ea typeface="Calibri" pitchFamily="34" charset="-122"/>
                 <a:cs typeface="Calibri" pitchFamily="34" charset="-120"/>
               </a:rPr>
-              <a:t>Automated AI Pipeline Delivery</a:t>
+              <a:t>Our Automated AI Pipeline</a:t>
             </a:r>
             <a:endParaRPr lang="en-US" sz="1350" dirty="0"/>
           </a:p>
@@ -19093,7 +19959,7 @@
           <a:bodyPr wrap="square" lIns="0" tIns="0" rIns="0" bIns="0" rtlCol="0" anchor="ctr"/>
           <a:lstStyle/>
           <a:p>
-            <a:pPr marL="0" indent="0">
+            <a:pPr indent="0" marL="0">
               <a:buNone/>
             </a:pPr>
             <a:r>
@@ -19105,7 +19971,7 @@
                 <a:ea typeface="Calibri" pitchFamily="34" charset="-122"/>
                 <a:cs typeface="Calibri" pitchFamily="34" charset="-120"/>
               </a:rPr>
-              <a:t>Our proposed workflow ranks and explains candidate variants in seconds.</a:t>
+              <a:t>Our software ranks and explains patient variants in just 4.2 seconds.</a:t>
             </a:r>
             <a:endParaRPr lang="en-US" sz="1150" dirty="0"/>
           </a:p>
@@ -19159,7 +20025,7 @@
           <a:bodyPr wrap="square" rtlCol="0" anchor="ctr"/>
           <a:lstStyle/>
           <a:p>
-            <a:pPr marL="0" indent="0">
+            <a:pPr indent="0" marL="0">
               <a:buNone/>
             </a:pPr>
             <a:r>
@@ -19171,7 +20037,7 @@
                 <a:ea typeface="Calibri" pitchFamily="34" charset="-122"/>
                 <a:cs typeface="Calibri" pitchFamily="34" charset="-120"/>
               </a:rPr>
-              <a:t>CLINICAL IMPLICATIONS &amp; IMPACT</a:t>
+              <a:t>REAL-WORLD CLINICAL IMPACT</a:t>
             </a:r>
             <a:endParaRPr lang="en-US" sz="1200" dirty="0"/>
           </a:p>
@@ -19198,7 +20064,7 @@
           <a:bodyPr wrap="square" lIns="0" tIns="0" rIns="0" bIns="0" rtlCol="0" anchor="ctr"/>
           <a:lstStyle/>
           <a:p>
-            <a:pPr marL="0" indent="0">
+            <a:pPr indent="0" marL="0">
               <a:buNone/>
             </a:pPr>
             <a:r>
@@ -19210,7 +20076,7 @@
                 <a:ea typeface="Calibri" pitchFamily="34" charset="-122"/>
                 <a:cs typeface="Calibri" pitchFamily="34" charset="-120"/>
               </a:rPr>
-              <a:t>Why Solving VUS Prioritization is Paramount</a:t>
+              <a:t>Why Automating Variant Triage Saves Lives</a:t>
             </a:r>
             <a:endParaRPr lang="en-US" sz="1900" dirty="0"/>
           </a:p>
@@ -19260,7 +20126,7 @@
           <a:bodyPr wrap="square" lIns="0" tIns="0" rIns="0" bIns="0" rtlCol="0" anchor="ctr"/>
           <a:lstStyle/>
           <a:p>
-            <a:pPr marL="0" indent="0">
+            <a:pPr indent="0" marL="0">
               <a:lnSpc>
                 <a:spcPct val="120000"/>
               </a:lnSpc>
@@ -19272,62 +20138,21 @@
                   <a:srgbClr val="0F172A"/>
                 </a:solidFill>
               </a:rPr>
-              <a:t>Delayed Medical Interventions: </a:t>
-            </a:r>
-            <a:r>
-              <a:rPr lang="en-US" sz="1300" dirty="0">
-                <a:solidFill>
-                  <a:srgbClr val="334155"/>
-                </a:solidFill>
-              </a:rPr>
-              <a:t>When a candidate mutation is tagged as VUS, oncologists and medical geneticists cannot prescribe targeted therapy or gene-editing treatments.</a:t>
-            </a:r>
-            <a:endParaRPr lang="en-US" sz="1350" dirty="0"/>
-          </a:p>
-        </p:txBody>
-      </p:sp>
-      <p:sp>
-        <p:nvSpPr>
-          <p:cNvPr id="25" name="Text 23"/>
-          <p:cNvSpPr/>
-          <p:nvPr/>
-        </p:nvSpPr>
-        <p:spPr>
-          <a:xfrm>
-            <a:off x="5212080" y="3931920"/>
-            <a:ext cx="5943600" cy="914400"/>
-          </a:xfrm>
-          <a:prstGeom prst="rect">
-            <a:avLst/>
-          </a:prstGeom>
-          <a:noFill/>
-          <a:ln/>
-        </p:spPr>
-        <p:txBody>
-          <a:bodyPr wrap="square" lIns="0" tIns="0" rIns="0" bIns="0" rtlCol="0" anchor="ctr"/>
-          <a:lstStyle/>
-          <a:p>
-            <a:pPr marL="0" indent="0">
+              <a:t>Ending Patient Delays: </a:t>
+            </a:r>
+            <a:pPr indent="0" marL="0">
               <a:lnSpc>
                 <a:spcPct val="120000"/>
               </a:lnSpc>
               <a:buNone/>
             </a:pPr>
             <a:r>
-              <a:rPr lang="en-US" sz="1350" b="1" dirty="0">
-                <a:solidFill>
-                  <a:srgbClr val="0F172A"/>
-                </a:solidFill>
-              </a:rPr>
-              <a:t>Severe Diagnostic Backlog: </a:t>
-            </a:r>
-            <a:r>
               <a:rPr lang="en-US" sz="1300" dirty="0">
                 <a:solidFill>
                   <a:srgbClr val="334155"/>
                 </a:solidFill>
               </a:rPr>
-              <a:t>Clinical geneticists spend hours cross-referencing population frequencies, constraint metrics, and gene catalogs for hundreds of variants per patient.</a:t>
+              <a:t>When a mutation is labeled "Uncertain", doctors cannot legally prescribe targeted cancer drugs or genetic treatments. Patients are stuck waiting for months.</a:t>
             </a:r>
             <a:endParaRPr lang="en-US" sz="1350" dirty="0"/>
           </a:p>
@@ -19335,13 +20160,13 @@
       </p:sp>
       <p:sp>
         <p:nvSpPr>
-          <p:cNvPr id="26" name="Text 24"/>
-          <p:cNvSpPr/>
-          <p:nvPr/>
-        </p:nvSpPr>
-        <p:spPr>
-          <a:xfrm>
-            <a:off x="5212080" y="4983480"/>
+          <p:cNvPr id="25" name="Text 23"/>
+          <p:cNvSpPr/>
+          <p:nvPr/>
+        </p:nvSpPr>
+        <p:spPr>
+          <a:xfrm>
+            <a:off x="5212080" y="3931920"/>
             <a:ext cx="5943600" cy="914400"/>
           </a:xfrm>
           <a:prstGeom prst="rect">
@@ -19354,7 +20179,7 @@
           <a:bodyPr wrap="square" lIns="0" tIns="0" rIns="0" bIns="0" rtlCol="0" anchor="ctr"/>
           <a:lstStyle/>
           <a:p>
-            <a:pPr marL="0" indent="0">
+            <a:pPr indent="0" marL="0">
               <a:lnSpc>
                 <a:spcPct val="120000"/>
               </a:lnSpc>
@@ -19366,15 +20191,74 @@
                   <a:srgbClr val="0F172A"/>
                 </a:solidFill>
               </a:rPr>
-              <a:t>Explainability Requirement: </a:t>
-            </a:r>
+              <a:t>Clearing Hospital Backlogs: </a:t>
+            </a:r>
+            <a:pPr indent="0" marL="0">
+              <a:lnSpc>
+                <a:spcPct val="120000"/>
+              </a:lnSpc>
+              <a:buNone/>
+            </a:pPr>
             <a:r>
               <a:rPr lang="en-US" sz="1300" dirty="0">
                 <a:solidFill>
                   <a:srgbClr val="334155"/>
                 </a:solidFill>
               </a:rPr>
-              <a:t>Clinicians cannot trust black-box neural scores. Automated prioritization must supply local biological feature attributions for hospital board validation.</a:t>
+              <a:t>Geneticists must manually cross-check population databases, gene lists, and papers for dozens of candidate mutations per patient.</a:t>
+            </a:r>
+            <a:endParaRPr lang="en-US" sz="1350" dirty="0"/>
+          </a:p>
+        </p:txBody>
+      </p:sp>
+      <p:sp>
+        <p:nvSpPr>
+          <p:cNvPr id="26" name="Text 24"/>
+          <p:cNvSpPr/>
+          <p:nvPr/>
+        </p:nvSpPr>
+        <p:spPr>
+          <a:xfrm>
+            <a:off x="5212080" y="4983480"/>
+            <a:ext cx="5943600" cy="914400"/>
+          </a:xfrm>
+          <a:prstGeom prst="rect">
+            <a:avLst/>
+          </a:prstGeom>
+          <a:noFill/>
+          <a:ln/>
+        </p:spPr>
+        <p:txBody>
+          <a:bodyPr wrap="square" lIns="0" tIns="0" rIns="0" bIns="0" rtlCol="0" anchor="ctr"/>
+          <a:lstStyle/>
+          <a:p>
+            <a:pPr indent="0" marL="0">
+              <a:lnSpc>
+                <a:spcPct val="120000"/>
+              </a:lnSpc>
+              <a:buNone/>
+            </a:pPr>
+            <a:r>
+              <a:rPr lang="en-US" sz="1350" b="1" dirty="0">
+                <a:solidFill>
+                  <a:srgbClr val="0F172A"/>
+                </a:solidFill>
+              </a:rPr>
+              <a:t>Doctors Need Explanations: </a:t>
+            </a:r>
+            <a:pPr indent="0" marL="0">
+              <a:lnSpc>
+                <a:spcPct val="120000"/>
+              </a:lnSpc>
+              <a:buNone/>
+            </a:pPr>
+            <a:r>
+              <a:rPr lang="en-US" sz="1300" dirty="0">
+                <a:solidFill>
+                  <a:srgbClr val="334155"/>
+                </a:solidFill>
+              </a:rPr>
+              <a:t>Doctors will not trust a black-box AI score. Our system gives clear visual explanations showing exactly which biological features caused the high risk score.</a:t>
             </a:r>
             <a:endParaRPr lang="en-US" sz="1350" dirty="0"/>
           </a:p>
@@ -19396,7 +20280,6 @@
         <a:solidFill>
           <a:srgbClr val="F8FAFC"/>
         </a:solidFill>
-        <a:effectLst/>
       </p:bgPr>
     </p:bg>
     <p:spTree>
@@ -19434,7 +20317,7 @@
           <a:bodyPr wrap="square" rtlCol="0" anchor="ctr"/>
           <a:lstStyle/>
           <a:p>
-            <a:pPr marL="0" indent="0">
+            <a:pPr indent="0" marL="0">
               <a:buNone/>
             </a:pPr>
             <a:r>
@@ -19473,7 +20356,7 @@
           <a:bodyPr wrap="square" lIns="0" tIns="0" rIns="0" bIns="0" rtlCol="0" anchor="ctr"/>
           <a:lstStyle/>
           <a:p>
-            <a:pPr marL="0" indent="0">
+            <a:pPr indent="0" marL="0">
               <a:buNone/>
             </a:pPr>
             <a:r>
@@ -19485,7 +20368,7 @@
                 <a:ea typeface="Calibri" pitchFamily="34" charset="-122"/>
                 <a:cs typeface="Calibri" pitchFamily="34" charset="-120"/>
               </a:rPr>
-              <a:t>Literature Review: Genomic Variant Interpretation</a:t>
+              <a:t>Literature Review: Key Milestones in Variant Analysis</a:t>
             </a:r>
             <a:endParaRPr lang="en-US" sz="2200" dirty="0"/>
           </a:p>
@@ -19512,7 +20395,7 @@
           <a:bodyPr wrap="square" lIns="0" tIns="0" rIns="0" bIns="0" rtlCol="0" anchor="ctr"/>
           <a:lstStyle/>
           <a:p>
-            <a:pPr marL="0" indent="0">
+            <a:pPr indent="0" marL="0">
               <a:buNone/>
             </a:pPr>
             <a:r>
@@ -19524,7 +20407,7 @@
                 <a:ea typeface="Calibri" pitchFamily="34" charset="-122"/>
                 <a:cs typeface="Calibri" pitchFamily="34" charset="-120"/>
               </a:rPr>
-              <a:t>Foundational scientific milestones and existing scoring methodologies</a:t>
+              <a:t>Foundational databases and previous scoring attempts in genomics</a:t>
             </a:r>
             <a:endParaRPr lang="en-US" sz="1400" dirty="0"/>
           </a:p>
@@ -19574,7 +20457,7 @@
           <a:bodyPr wrap="square" rtlCol="0" anchor="ctr"/>
           <a:lstStyle/>
           <a:p>
-            <a:pPr marL="0" indent="0">
+            <a:pPr indent="0" marL="0">
               <a:buNone/>
             </a:pPr>
             <a:r>
@@ -19586,7 +20469,7 @@
                 <a:ea typeface="Calibri" pitchFamily="34" charset="-122"/>
                 <a:cs typeface="Calibri" pitchFamily="34" charset="-120"/>
               </a:rPr>
-              <a:t>Group 15  |  Final Project Review  |  AI-Based Structural Variant Prioritization</a:t>
+              <a:t>Department of Artificial Intelligence  |  Final Project Review  |  Amrita Vishwa Vidyapeetham</a:t>
             </a:r>
             <a:endParaRPr lang="en-US" sz="1100" dirty="0"/>
           </a:p>
@@ -19613,7 +20496,7 @@
           <a:bodyPr wrap="square" rtlCol="0" anchor="ctr"/>
           <a:lstStyle/>
           <a:p>
-            <a:pPr marL="0" indent="0" algn="r">
+            <a:pPr algn="r" indent="0" marL="0">
               <a:buNone/>
             </a:pPr>
             <a:r>
@@ -19633,7 +20516,7 @@
       </p:sp>
       <p:graphicFrame>
         <p:nvGraphicFramePr>
-          <p:cNvPr id="8" name="Table 0"/>
+          <p:cNvPr id="6" name="Table 0"/>
           <p:cNvGraphicFramePr>
             <a:graphicFrameLocks noGrp="1"/>
           </p:cNvGraphicFramePr>
@@ -19654,34 +20537,10 @@
             <a:tbl>
               <a:tblPr/>
               <a:tblGrid>
-                <a:gridCol w="2011680">
-                  <a:extLst>
-                    <a:ext uri="{9D8B030D-6E8A-4147-A177-3AD203B41FA5}">
-                      <a16:colId xmlns:a16="http://schemas.microsoft.com/office/drawing/2014/main" val="20000"/>
-                    </a:ext>
-                  </a:extLst>
-                </a:gridCol>
-                <a:gridCol w="2286000">
-                  <a:extLst>
-                    <a:ext uri="{9D8B030D-6E8A-4147-A177-3AD203B41FA5}">
-                      <a16:colId xmlns:a16="http://schemas.microsoft.com/office/drawing/2014/main" val="20001"/>
-                    </a:ext>
-                  </a:extLst>
-                </a:gridCol>
-                <a:gridCol w="3474720">
-                  <a:extLst>
-                    <a:ext uri="{9D8B030D-6E8A-4147-A177-3AD203B41FA5}">
-                      <a16:colId xmlns:a16="http://schemas.microsoft.com/office/drawing/2014/main" val="20002"/>
-                    </a:ext>
-                  </a:extLst>
-                </a:gridCol>
-                <a:gridCol w="2956255">
-                  <a:extLst>
-                    <a:ext uri="{9D8B030D-6E8A-4147-A177-3AD203B41FA5}">
-                      <a16:colId xmlns:a16="http://schemas.microsoft.com/office/drawing/2014/main" val="20003"/>
-                    </a:ext>
-                  </a:extLst>
-                </a:gridCol>
+                <a:gridCol w="2011680"/>
+                <a:gridCol w="2286000"/>
+                <a:gridCol w="3474720"/>
+                <a:gridCol w="2956255"/>
               </a:tblGrid>
               <a:tr h="877824">
                 <a:tc>
@@ -19689,7 +20548,7 @@
                     <a:bodyPr/>
                     <a:lstStyle/>
                     <a:p>
-                      <a:pPr marL="0" indent="0" algn="l">
+                      <a:pPr algn="l" indent="0" marL="0">
                         <a:buNone/>
                       </a:pPr>
                       <a:r>
@@ -19698,12 +20557,12 @@
                             <a:srgbClr val="FFFFFF"/>
                           </a:solidFill>
                         </a:rPr>
-                        <a:t>Study &amp; Year</a:t>
+                        <a:t>Milestone Study</a:t>
                       </a:r>
                       <a:endParaRPr lang="en-US" sz="1200" dirty="0"/>
                     </a:p>
                   </a:txBody>
-                  <a:tcPr anchor="ctr">
+                  <a:tcPr marL="91440" marR="91440" marT="45720" marB="45720" anchor="ctr">
                     <a:lnL w="12700" cap="flat" cmpd="sng" algn="ctr">
                       <a:solidFill>
                         <a:srgbClr val="CBD5E1"/>
@@ -19750,7 +20609,7 @@
                     <a:bodyPr/>
                     <a:lstStyle/>
                     <a:p>
-                      <a:pPr marL="0" indent="0" algn="l">
+                      <a:pPr algn="l" indent="0" marL="0">
                         <a:buNone/>
                       </a:pPr>
                       <a:r>
@@ -19759,12 +20618,12 @@
                             <a:srgbClr val="FFFFFF"/>
                           </a:solidFill>
                         </a:rPr>
-                        <a:t>Methodology</a:t>
+                        <a:t>Core Contribution</a:t>
                       </a:r>
                       <a:endParaRPr lang="en-US" sz="1200" dirty="0"/>
                     </a:p>
                   </a:txBody>
-                  <a:tcPr anchor="ctr">
+                  <a:tcPr marL="91440" marR="91440" marT="45720" marB="45720" anchor="ctr">
                     <a:lnL w="12700" cap="flat" cmpd="sng" algn="ctr">
                       <a:solidFill>
                         <a:srgbClr val="CBD5E1"/>
@@ -19811,7 +20670,7 @@
                     <a:bodyPr/>
                     <a:lstStyle/>
                     <a:p>
-                      <a:pPr marL="0" indent="0" algn="l">
+                      <a:pPr algn="l" indent="0" marL="0">
                         <a:buNone/>
                       </a:pPr>
                       <a:r>
@@ -19820,12 +20679,12 @@
                             <a:srgbClr val="FFFFFF"/>
                           </a:solidFill>
                         </a:rPr>
-                        <a:t>Key Findings &amp; Strengths</a:t>
+                        <a:t>What It Provided to Our Project</a:t>
                       </a:r>
                       <a:endParaRPr lang="en-US" sz="1200" dirty="0"/>
                     </a:p>
                   </a:txBody>
-                  <a:tcPr anchor="ctr">
+                  <a:tcPr marL="91440" marR="91440" marT="45720" marB="45720" anchor="ctr">
                     <a:lnL w="12700" cap="flat" cmpd="sng" algn="ctr">
                       <a:solidFill>
                         <a:srgbClr val="CBD5E1"/>
@@ -19872,7 +20731,7 @@
                     <a:bodyPr/>
                     <a:lstStyle/>
                     <a:p>
-                      <a:pPr marL="0" indent="0" algn="l">
+                      <a:pPr algn="l" indent="0" marL="0">
                         <a:buNone/>
                       </a:pPr>
                       <a:r>
@@ -19881,12 +20740,12 @@
                             <a:srgbClr val="FFFFFF"/>
                           </a:solidFill>
                         </a:rPr>
-                        <a:t>Inherent Limitations</a:t>
+                        <a:t>Remaining Limitation</a:t>
                       </a:r>
                       <a:endParaRPr lang="en-US" sz="1200" dirty="0"/>
                     </a:p>
                   </a:txBody>
-                  <a:tcPr anchor="ctr">
+                  <a:tcPr marL="91440" marR="91440" marT="45720" marB="45720" anchor="ctr">
                     <a:lnL w="12700" cap="flat" cmpd="sng" algn="ctr">
                       <a:solidFill>
                         <a:srgbClr val="CBD5E1"/>
@@ -19928,11 +20787,6 @@
                     </a:solidFill>
                   </a:tcPr>
                 </a:tc>
-                <a:extLst>
-                  <a:ext uri="{0D108BD9-81ED-4DB2-BD59-A6C34878D82A}">
-                    <a16:rowId xmlns:a16="http://schemas.microsoft.com/office/drawing/2014/main" val="10000"/>
-                  </a:ext>
-                </a:extLst>
               </a:tr>
               <a:tr h="877824">
                 <a:tc>
@@ -19940,7 +20794,7 @@
                     <a:bodyPr/>
                     <a:lstStyle/>
                     <a:p>
-                      <a:pPr marL="0" indent="0" algn="l">
+                      <a:pPr algn="l" indent="0" marL="0">
                         <a:buNone/>
                       </a:pPr>
                       <a:r>
@@ -19954,7 +20808,7 @@
                       <a:endParaRPr lang="en-US" sz="1150" dirty="0"/>
                     </a:p>
                     <a:p>
-                      <a:pPr marL="0" indent="0" algn="l">
+                      <a:pPr algn="l" indent="0" marL="0">
                         <a:buNone/>
                       </a:pPr>
                       <a:r>
@@ -19968,7 +20822,7 @@
                       <a:endParaRPr lang="en-US" sz="1150" dirty="0"/>
                     </a:p>
                   </a:txBody>
-                  <a:tcPr anchor="ctr">
+                  <a:tcPr marL="91440" marR="91440" marT="45720" marB="45720" anchor="ctr">
                     <a:lnL w="12700" cap="flat" cmpd="sng" algn="ctr">
                       <a:solidFill>
                         <a:srgbClr val="CBD5E1"/>
@@ -20012,7 +20866,7 @@
                     <a:bodyPr/>
                     <a:lstStyle/>
                     <a:p>
-                      <a:pPr marL="0" indent="0" algn="l">
+                      <a:pPr algn="l" indent="0" marL="0">
                         <a:buNone/>
                       </a:pPr>
                       <a:r>
@@ -20021,12 +20875,12 @@
                             <a:srgbClr val="334155"/>
                           </a:solidFill>
                         </a:rPr>
-                        <a:t>gnomAD SV v2.1 Population Catalog</a:t>
+                        <a:t>gnomAD SV Population Catalog</a:t>
                       </a:r>
                       <a:endParaRPr lang="en-US" sz="1150" dirty="0"/>
                     </a:p>
                   </a:txBody>
-                  <a:tcPr anchor="ctr">
+                  <a:tcPr marL="91440" marR="91440" marT="45720" marB="45720" anchor="ctr">
                     <a:lnL w="12700" cap="flat" cmpd="sng" algn="ctr">
                       <a:solidFill>
                         <a:srgbClr val="CBD5E1"/>
@@ -20070,7 +20924,7 @@
                     <a:bodyPr/>
                     <a:lstStyle/>
                     <a:p>
-                      <a:pPr marL="0" indent="0" algn="l">
+                      <a:pPr algn="l" indent="0" marL="0">
                         <a:buNone/>
                       </a:pPr>
                       <a:r>
@@ -20079,12 +20933,12 @@
                             <a:srgbClr val="334155"/>
                           </a:solidFill>
                         </a:rPr>
-                        <a:t>Mapped 387,700 SVs across 14,891 genomes; established allele frequency baseline.</a:t>
+                        <a:t>Cataloged 387,700 variants across 15,000 healthy genomes; established frequency baselines.</a:t>
                       </a:r>
                       <a:endParaRPr lang="en-US" sz="1100" dirty="0"/>
                     </a:p>
                   </a:txBody>
-                  <a:tcPr anchor="ctr">
+                  <a:tcPr marL="91440" marR="91440" marT="45720" marB="45720" anchor="ctr">
                     <a:lnL w="12700" cap="flat" cmpd="sng" algn="ctr">
                       <a:solidFill>
                         <a:srgbClr val="CBD5E1"/>
@@ -20128,7 +20982,7 @@
                     <a:bodyPr/>
                     <a:lstStyle/>
                     <a:p>
-                      <a:pPr marL="0" indent="0" algn="l">
+                      <a:pPr algn="l" indent="0" marL="0">
                         <a:buNone/>
                       </a:pPr>
                       <a:r>
@@ -20137,12 +20991,12 @@
                             <a:srgbClr val="334155"/>
                           </a:solidFill>
                         </a:rPr>
-                        <a:t>Purely reference catalog; lacks disease pathogenicity predictive scoring.</a:t>
+                        <a:t>Only a reference catalog; does not predict whether a variant causes disease.</a:t>
                       </a:r>
                       <a:endParaRPr lang="en-US" sz="1100" dirty="0"/>
                     </a:p>
                   </a:txBody>
-                  <a:tcPr anchor="ctr">
+                  <a:tcPr marL="91440" marR="91440" marT="45720" marB="45720" anchor="ctr">
                     <a:lnL w="12700" cap="flat" cmpd="sng" algn="ctr">
                       <a:solidFill>
                         <a:srgbClr val="CBD5E1"/>
@@ -20181,11 +21035,6 @@
                     </a:lnB>
                   </a:tcPr>
                 </a:tc>
-                <a:extLst>
-                  <a:ext uri="{0D108BD9-81ED-4DB2-BD59-A6C34878D82A}">
-                    <a16:rowId xmlns:a16="http://schemas.microsoft.com/office/drawing/2014/main" val="10001"/>
-                  </a:ext>
-                </a:extLst>
               </a:tr>
               <a:tr h="877824">
                 <a:tc>
@@ -20193,7 +21042,7 @@
                     <a:bodyPr/>
                     <a:lstStyle/>
                     <a:p>
-                      <a:pPr marL="0" indent="0" algn="l">
+                      <a:pPr algn="l" indent="0" marL="0">
                         <a:buNone/>
                       </a:pPr>
                       <a:r>
@@ -20207,7 +21056,7 @@
                       <a:endParaRPr lang="en-US" sz="1150" dirty="0"/>
                     </a:p>
                     <a:p>
-                      <a:pPr marL="0" indent="0" algn="l">
+                      <a:pPr algn="l" indent="0" marL="0">
                         <a:buNone/>
                       </a:pPr>
                       <a:r>
@@ -20221,7 +21070,7 @@
                       <a:endParaRPr lang="en-US" sz="1150" dirty="0"/>
                     </a:p>
                   </a:txBody>
-                  <a:tcPr anchor="ctr">
+                  <a:tcPr marL="91440" marR="91440" marT="45720" marB="45720" anchor="ctr">
                     <a:lnL w="12700" cap="flat" cmpd="sng" algn="ctr">
                       <a:solidFill>
                         <a:srgbClr val="CBD5E1"/>
@@ -20265,7 +21114,7 @@
                     <a:bodyPr/>
                     <a:lstStyle/>
                     <a:p>
-                      <a:pPr marL="0" indent="0" algn="l">
+                      <a:pPr algn="l" indent="0" marL="0">
                         <a:buNone/>
                       </a:pPr>
                       <a:r>
@@ -20274,12 +21123,12 @@
                             <a:srgbClr val="334155"/>
                           </a:solidFill>
                         </a:rPr>
-                        <a:t>CADD-SV Regional Scoring</a:t>
+                        <a:t>CADD-SV Regional Scorer</a:t>
                       </a:r>
                       <a:endParaRPr lang="en-US" sz="1150" dirty="0"/>
                     </a:p>
                   </a:txBody>
-                  <a:tcPr anchor="ctr">
+                  <a:tcPr marL="91440" marR="91440" marT="45720" marB="45720" anchor="ctr">
                     <a:lnL w="12700" cap="flat" cmpd="sng" algn="ctr">
                       <a:solidFill>
                         <a:srgbClr val="CBD5E1"/>
@@ -20323,7 +21172,7 @@
                     <a:bodyPr/>
                     <a:lstStyle/>
                     <a:p>
-                      <a:pPr marL="0" indent="0" algn="l">
+                      <a:pPr algn="l" indent="0" marL="0">
                         <a:buNone/>
                       </a:pPr>
                       <a:r>
@@ -20332,12 +21181,12 @@
                             <a:srgbClr val="334155"/>
                           </a:solidFill>
                         </a:rPr>
-                        <a:t>Integrates functional genomics and conservation tracks for large deletions.</a:t>
+                        <a:t>Combined conservation and gene tracks to score large DNA deletions.</a:t>
                       </a:r>
                       <a:endParaRPr lang="en-US" sz="1100" dirty="0"/>
                     </a:p>
                   </a:txBody>
-                  <a:tcPr anchor="ctr">
+                  <a:tcPr marL="91440" marR="91440" marT="45720" marB="45720" anchor="ctr">
                     <a:lnL w="12700" cap="flat" cmpd="sng" algn="ctr">
                       <a:solidFill>
                         <a:srgbClr val="CBD5E1"/>
@@ -20381,7 +21230,7 @@
                     <a:bodyPr/>
                     <a:lstStyle/>
                     <a:p>
-                      <a:pPr marL="0" indent="0" algn="l">
+                      <a:pPr algn="l" indent="0" marL="0">
                         <a:buNone/>
                       </a:pPr>
                       <a:r>
@@ -20390,12 +21239,12 @@
                             <a:srgbClr val="334155"/>
                           </a:solidFill>
                         </a:rPr>
-                        <a:t>Linear kernel; struggles with non-coding complex balanced rearrangements.</a:t>
+                        <a:t>Linear model; struggles on complex rearrangements and other variant types.</a:t>
                       </a:r>
                       <a:endParaRPr lang="en-US" sz="1100" dirty="0"/>
                     </a:p>
                   </a:txBody>
-                  <a:tcPr anchor="ctr">
+                  <a:tcPr marL="91440" marR="91440" marT="45720" marB="45720" anchor="ctr">
                     <a:lnL w="12700" cap="flat" cmpd="sng" algn="ctr">
                       <a:solidFill>
                         <a:srgbClr val="CBD5E1"/>
@@ -20434,11 +21283,6 @@
                     </a:lnB>
                   </a:tcPr>
                 </a:tc>
-                <a:extLst>
-                  <a:ext uri="{0D108BD9-81ED-4DB2-BD59-A6C34878D82A}">
-                    <a16:rowId xmlns:a16="http://schemas.microsoft.com/office/drawing/2014/main" val="10002"/>
-                  </a:ext>
-                </a:extLst>
               </a:tr>
               <a:tr h="877824">
                 <a:tc>
@@ -20446,7 +21290,7 @@
                     <a:bodyPr/>
                     <a:lstStyle/>
                     <a:p>
-                      <a:pPr marL="0" indent="0" algn="l">
+                      <a:pPr algn="l" indent="0" marL="0">
                         <a:buNone/>
                       </a:pPr>
                       <a:r>
@@ -20460,7 +21304,7 @@
                       <a:endParaRPr lang="en-US" sz="1150" dirty="0"/>
                     </a:p>
                     <a:p>
-                      <a:pPr marL="0" indent="0" algn="l">
+                      <a:pPr algn="l" indent="0" marL="0">
                         <a:buNone/>
                       </a:pPr>
                       <a:r>
@@ -20474,7 +21318,7 @@
                       <a:endParaRPr lang="en-US" sz="1150" dirty="0"/>
                     </a:p>
                   </a:txBody>
-                  <a:tcPr anchor="ctr">
+                  <a:tcPr marL="91440" marR="91440" marT="45720" marB="45720" anchor="ctr">
                     <a:lnL w="12700" cap="flat" cmpd="sng" algn="ctr">
                       <a:solidFill>
                         <a:srgbClr val="CBD5E1"/>
@@ -20518,7 +21362,7 @@
                     <a:bodyPr/>
                     <a:lstStyle/>
                     <a:p>
-                      <a:pPr marL="0" indent="0" algn="l">
+                      <a:pPr algn="l" indent="0" marL="0">
                         <a:buNone/>
                       </a:pPr>
                       <a:r>
@@ -20532,7 +21376,7 @@
                       <a:endParaRPr lang="en-US" sz="1150" dirty="0"/>
                     </a:p>
                   </a:txBody>
-                  <a:tcPr anchor="ctr">
+                  <a:tcPr marL="91440" marR="91440" marT="45720" marB="45720" anchor="ctr">
                     <a:lnL w="12700" cap="flat" cmpd="sng" algn="ctr">
                       <a:solidFill>
                         <a:srgbClr val="CBD5E1"/>
@@ -20576,7 +21420,7 @@
                     <a:bodyPr/>
                     <a:lstStyle/>
                     <a:p>
-                      <a:pPr marL="0" indent="0" algn="l">
+                      <a:pPr algn="l" indent="0" marL="0">
                         <a:buNone/>
                       </a:pPr>
                       <a:r>
@@ -20585,12 +21429,12 @@
                             <a:srgbClr val="334155"/>
                           </a:solidFill>
                         </a:rPr>
-                        <a:t>Gold-standard repository of 100k+ expert-asserted variant-disease records.</a:t>
+                        <a:t>Gold-standard library of doctor-verified variant classifications (Harmful vs Benign).</a:t>
                       </a:r>
                       <a:endParaRPr lang="en-US" sz="1100" dirty="0"/>
                     </a:p>
                   </a:txBody>
-                  <a:tcPr anchor="ctr">
+                  <a:tcPr marL="91440" marR="91440" marT="45720" marB="45720" anchor="ctr">
                     <a:lnL w="12700" cap="flat" cmpd="sng" algn="ctr">
                       <a:solidFill>
                         <a:srgbClr val="CBD5E1"/>
@@ -20634,7 +21478,7 @@
                     <a:bodyPr/>
                     <a:lstStyle/>
                     <a:p>
-                      <a:pPr marL="0" indent="0" algn="l">
+                      <a:pPr algn="l" indent="0" marL="0">
                         <a:buNone/>
                       </a:pPr>
                       <a:r>
@@ -20643,12 +21487,12 @@
                             <a:srgbClr val="334155"/>
                           </a:solidFill>
                         </a:rPr>
-                        <a:t>Suffers from heavy class imbalance and unclassified VUS backlog.</a:t>
+                        <a:t>Contains a huge backlog of unclassified "Uncertain" variants needing triage.</a:t>
                       </a:r>
                       <a:endParaRPr lang="en-US" sz="1100" dirty="0"/>
                     </a:p>
                   </a:txBody>
-                  <a:tcPr anchor="ctr">
+                  <a:tcPr marL="91440" marR="91440" marT="45720" marB="45720" anchor="ctr">
                     <a:lnL w="12700" cap="flat" cmpd="sng" algn="ctr">
                       <a:solidFill>
                         <a:srgbClr val="CBD5E1"/>
@@ -20687,11 +21531,6 @@
                     </a:lnB>
                   </a:tcPr>
                 </a:tc>
-                <a:extLst>
-                  <a:ext uri="{0D108BD9-81ED-4DB2-BD59-A6C34878D82A}">
-                    <a16:rowId xmlns:a16="http://schemas.microsoft.com/office/drawing/2014/main" val="10003"/>
-                  </a:ext>
-                </a:extLst>
               </a:tr>
               <a:tr h="877824">
                 <a:tc>
@@ -20699,7 +21538,7 @@
                     <a:bodyPr/>
                     <a:lstStyle/>
                     <a:p>
-                      <a:pPr marL="0" indent="0" algn="l">
+                      <a:pPr algn="l" indent="0" marL="0">
                         <a:buNone/>
                       </a:pPr>
                       <a:r>
@@ -20713,7 +21552,7 @@
                       <a:endParaRPr lang="en-US" sz="1150" dirty="0"/>
                     </a:p>
                     <a:p>
-                      <a:pPr marL="0" indent="0" algn="l">
+                      <a:pPr algn="l" indent="0" marL="0">
                         <a:buNone/>
                       </a:pPr>
                       <a:r>
@@ -20727,7 +21566,7 @@
                       <a:endParaRPr lang="en-US" sz="1150" dirty="0"/>
                     </a:p>
                   </a:txBody>
-                  <a:tcPr anchor="ctr">
+                  <a:tcPr marL="91440" marR="91440" marT="45720" marB="45720" anchor="ctr">
                     <a:lnL w="12700" cap="flat" cmpd="sng" algn="ctr">
                       <a:solidFill>
                         <a:srgbClr val="CBD5E1"/>
@@ -20771,7 +21610,7 @@
                     <a:bodyPr/>
                     <a:lstStyle/>
                     <a:p>
-                      <a:pPr marL="0" indent="0" algn="l">
+                      <a:pPr algn="l" indent="0" marL="0">
                         <a:buNone/>
                       </a:pPr>
                       <a:r>
@@ -20780,12 +21619,12 @@
                             <a:srgbClr val="334155"/>
                           </a:solidFill>
                         </a:rPr>
-                        <a:t>TreeSHAP Attribution</a:t>
+                        <a:t>TreeSHAP Framework</a:t>
                       </a:r>
                       <a:endParaRPr lang="en-US" sz="1150" dirty="0"/>
                     </a:p>
                   </a:txBody>
-                  <a:tcPr anchor="ctr">
+                  <a:tcPr marL="91440" marR="91440" marT="45720" marB="45720" anchor="ctr">
                     <a:lnL w="12700" cap="flat" cmpd="sng" algn="ctr">
                       <a:solidFill>
                         <a:srgbClr val="CBD5E1"/>
@@ -20829,7 +21668,7 @@
                     <a:bodyPr/>
                     <a:lstStyle/>
                     <a:p>
-                      <a:pPr marL="0" indent="0" algn="l">
+                      <a:pPr algn="l" indent="0" marL="0">
                         <a:buNone/>
                       </a:pPr>
                       <a:r>
@@ -20838,12 +21677,12 @@
                             <a:srgbClr val="334155"/>
                           </a:solidFill>
                         </a:rPr>
-                        <a:t>Game-theoretic local Shapley attributions for complex tree ensembles.</a:t>
+                        <a:t>Game-theory method to calculate exactly how much each feature contributed to a prediction.</a:t>
                       </a:r>
                       <a:endParaRPr lang="en-US" sz="1100" dirty="0"/>
                     </a:p>
                   </a:txBody>
-                  <a:tcPr anchor="ctr">
+                  <a:tcPr marL="91440" marR="91440" marT="45720" marB="45720" anchor="ctr">
                     <a:lnL w="12700" cap="flat" cmpd="sng" algn="ctr">
                       <a:solidFill>
                         <a:srgbClr val="CBD5E1"/>
@@ -20887,7 +21726,7 @@
                     <a:bodyPr/>
                     <a:lstStyle/>
                     <a:p>
-                      <a:pPr marL="0" indent="0" algn="l">
+                      <a:pPr algn="l" indent="0" marL="0">
                         <a:buNone/>
                       </a:pPr>
                       <a:r>
@@ -20896,12 +21735,12 @@
                             <a:srgbClr val="334155"/>
                           </a:solidFill>
                         </a:rPr>
-                        <a:t>Diagnostic tool only; requires integration into end-to-end clinical pipelines.</a:t>
+                        <a:t>Explainability tool only; must be integrated into an active end-to-end clinical app.</a:t>
                       </a:r>
                       <a:endParaRPr lang="en-US" sz="1100" dirty="0"/>
                     </a:p>
                   </a:txBody>
-                  <a:tcPr anchor="ctr">
+                  <a:tcPr marL="91440" marR="91440" marT="45720" marB="45720" anchor="ctr">
                     <a:lnL w="12700" cap="flat" cmpd="sng" algn="ctr">
                       <a:solidFill>
                         <a:srgbClr val="CBD5E1"/>
@@ -20940,11 +21779,6 @@
                     </a:lnB>
                   </a:tcPr>
                 </a:tc>
-                <a:extLst>
-                  <a:ext uri="{0D108BD9-81ED-4DB2-BD59-A6C34878D82A}">
-                    <a16:rowId xmlns:a16="http://schemas.microsoft.com/office/drawing/2014/main" val="10004"/>
-                  </a:ext>
-                </a:extLst>
               </a:tr>
             </a:tbl>
           </a:graphicData>
@@ -20966,7 +21800,6 @@
         <a:solidFill>
           <a:srgbClr val="F8FAFC"/>
         </a:solidFill>
-        <a:effectLst/>
       </p:bgPr>
     </p:bg>
     <p:spTree>
@@ -21004,7 +21837,7 @@
           <a:bodyPr wrap="square" rtlCol="0" anchor="ctr"/>
           <a:lstStyle/>
           <a:p>
-            <a:pPr marL="0" indent="0">
+            <a:pPr indent="0" marL="0">
               <a:buNone/>
             </a:pPr>
             <a:r>
@@ -21043,7 +21876,7 @@
           <a:bodyPr wrap="square" lIns="0" tIns="0" rIns="0" bIns="0" rtlCol="0" anchor="ctr"/>
           <a:lstStyle/>
           <a:p>
-            <a:pPr marL="0" indent="0">
+            <a:pPr indent="0" marL="0">
               <a:buNone/>
             </a:pPr>
             <a:r>
@@ -21055,7 +21888,7 @@
                 <a:ea typeface="Calibri" pitchFamily="34" charset="-122"/>
                 <a:cs typeface="Calibri" pitchFamily="34" charset="-120"/>
               </a:rPr>
-              <a:t>Research Gap: Critical Unaddressed Challenges</a:t>
+              <a:t>Research Gap: Three Unresolved Limitations</a:t>
             </a:r>
             <a:endParaRPr lang="en-US" sz="2200" dirty="0"/>
           </a:p>
@@ -21082,7 +21915,7 @@
           <a:bodyPr wrap="square" lIns="0" tIns="0" rIns="0" bIns="0" rtlCol="0" anchor="ctr"/>
           <a:lstStyle/>
           <a:p>
-            <a:pPr marL="0" indent="0">
+            <a:pPr indent="0" marL="0">
               <a:buNone/>
             </a:pPr>
             <a:r>
@@ -21094,7 +21927,7 @@
                 <a:ea typeface="Calibri" pitchFamily="34" charset="-122"/>
                 <a:cs typeface="Calibri" pitchFamily="34" charset="-120"/>
               </a:rPr>
-              <a:t>Three major limitations in current genomic machine learning frameworks</a:t>
+              <a:t>The three major technical flaws in existing machine learning papers</a:t>
             </a:r>
             <a:endParaRPr lang="en-US" sz="1400" dirty="0"/>
           </a:p>
@@ -21144,7 +21977,7 @@
           <a:bodyPr wrap="square" rtlCol="0" anchor="ctr"/>
           <a:lstStyle/>
           <a:p>
-            <a:pPr marL="0" indent="0">
+            <a:pPr indent="0" marL="0">
               <a:buNone/>
             </a:pPr>
             <a:r>
@@ -21156,7 +21989,7 @@
                 <a:ea typeface="Calibri" pitchFamily="34" charset="-122"/>
                 <a:cs typeface="Calibri" pitchFamily="34" charset="-120"/>
               </a:rPr>
-              <a:t>Group 15  |  Final Project Review  |  AI-Based Structural Variant Prioritization</a:t>
+              <a:t>Department of Artificial Intelligence  |  Final Project Review  |  Amrita Vishwa Vidyapeetham</a:t>
             </a:r>
             <a:endParaRPr lang="en-US" sz="1100" dirty="0"/>
           </a:p>
@@ -21183,7 +22016,7 @@
           <a:bodyPr wrap="square" rtlCol="0" anchor="ctr"/>
           <a:lstStyle/>
           <a:p>
-            <a:pPr marL="0" indent="0" algn="r">
+            <a:pPr algn="r" indent="0" marL="0">
               <a:buNone/>
             </a:pPr>
             <a:r>
@@ -21249,7 +22082,7 @@
           <a:bodyPr wrap="square" rtlCol="0" anchor="ctr"/>
           <a:lstStyle/>
           <a:p>
-            <a:pPr marL="0" indent="0">
+            <a:pPr indent="0" marL="0">
               <a:buNone/>
             </a:pPr>
             <a:r>
@@ -21261,7 +22094,7 @@
                 <a:ea typeface="Calibri" pitchFamily="34" charset="-122"/>
                 <a:cs typeface="Calibri" pitchFamily="34" charset="-120"/>
               </a:rPr>
-              <a:t>GAP 1: EVALUATION INTEGRITY</a:t>
+              <a:t>GAP 1: FAKE ACCURACY</a:t>
             </a:r>
             <a:endParaRPr lang="en-US" sz="1050" dirty="0"/>
           </a:p>
@@ -21288,7 +22121,7 @@
           <a:bodyPr wrap="square" lIns="0" tIns="0" rIns="0" bIns="0" rtlCol="0" anchor="ctr"/>
           <a:lstStyle/>
           <a:p>
-            <a:pPr marL="0" indent="0">
+            <a:pPr indent="0" marL="0">
               <a:buNone/>
             </a:pPr>
             <a:r>
@@ -21300,7 +22133,7 @@
                 <a:ea typeface="Calibri" pitchFamily="34" charset="-122"/>
                 <a:cs typeface="Calibri" pitchFamily="34" charset="-120"/>
               </a:rPr>
-              <a:t>Genomic Locus Leakage in Cross-Validation</a:t>
+              <a:t>Data Leakage in Cross-Validation</a:t>
             </a:r>
             <a:endParaRPr lang="en-US" sz="1800" dirty="0"/>
           </a:p>
@@ -21350,7 +22183,7 @@
           <a:bodyPr wrap="square" lIns="0" tIns="0" rIns="0" bIns="0" rtlCol="0" anchor="ctr"/>
           <a:lstStyle/>
           <a:p>
-            <a:pPr marL="0" indent="0">
+            <a:pPr indent="0" marL="0">
               <a:lnSpc>
                 <a:spcPct val="125000"/>
               </a:lnSpc>
@@ -21365,7 +22198,7 @@
                 <a:ea typeface="Calibri" pitchFamily="34" charset="-122"/>
                 <a:cs typeface="Calibri" pitchFamily="34" charset="-120"/>
               </a:rPr>
-              <a:t>Most published genomic AI models evaluate performance using standard random splits. Because structural variants frequently cluster around recombination hotspots and shared genes, variants from the same locus appear in both training and test sets. This causes severe data leakage and artificially inflated performance estimates.</a:t>
+              <a:t>Most published models split data randomly. Because related mutations share the same chromosome or gene, training data leaks into test sets. Models simply memorize the gene name instead of learning true mutation biology, giving false high scores.</a:t>
             </a:r>
             <a:endParaRPr lang="en-US" sz="1300" dirty="0"/>
           </a:p>
@@ -21419,7 +22252,7 @@
           <a:bodyPr wrap="square" rtlCol="0" anchor="ctr"/>
           <a:lstStyle/>
           <a:p>
-            <a:pPr marL="0" indent="0">
+            <a:pPr indent="0" marL="0">
               <a:buNone/>
             </a:pPr>
             <a:r>
@@ -21431,7 +22264,7 @@
                 <a:ea typeface="Calibri" pitchFamily="34" charset="-122"/>
                 <a:cs typeface="Calibri" pitchFamily="34" charset="-120"/>
               </a:rPr>
-              <a:t>GAP 2: REPRESENTATION RIGIDITY</a:t>
+              <a:t>GAP 2: RIGID DECISION TREES</a:t>
             </a:r>
             <a:endParaRPr lang="en-US" sz="1050" dirty="0"/>
           </a:p>
@@ -21458,7 +22291,7 @@
           <a:bodyPr wrap="square" lIns="0" tIns="0" rIns="0" bIns="0" rtlCol="0" anchor="ctr"/>
           <a:lstStyle/>
           <a:p>
-            <a:pPr marL="0" indent="0">
+            <a:pPr indent="0" marL="0">
               <a:buNone/>
             </a:pPr>
             <a:r>
@@ -21470,7 +22303,7 @@
                 <a:ea typeface="Calibri" pitchFamily="34" charset="-122"/>
                 <a:cs typeface="Calibri" pitchFamily="34" charset="-120"/>
               </a:rPr>
-              <a:t>Tree Step-Function Discretization</a:t>
+              <a:t>Tree Models Miss Continuous Rarity</a:t>
             </a:r>
             <a:endParaRPr lang="en-US" sz="1800" dirty="0"/>
           </a:p>
@@ -21520,7 +22353,7 @@
           <a:bodyPr wrap="square" lIns="0" tIns="0" rIns="0" bIns="0" rtlCol="0" anchor="ctr"/>
           <a:lstStyle/>
           <a:p>
-            <a:pPr marL="0" indent="0">
+            <a:pPr indent="0" marL="0">
               <a:lnSpc>
                 <a:spcPct val="125000"/>
               </a:lnSpc>
@@ -21535,7 +22368,7 @@
                 <a:ea typeface="Calibri" pitchFamily="34" charset="-122"/>
                 <a:cs typeface="Calibri" pitchFamily="34" charset="-120"/>
               </a:rPr>
-              <a:t>Popular gradient boosted trees (XGBoost, LightGBM) split continuous features using axis-aligned orthogonal boundaries. However, population allele frequencies follow continuous exponential decays under purifying selection. Decision trees fail to smoothly represent these manifolds, resulting in elevated false negative rates.</a:t>
+              <a:t>Popular tree models (XGBoost, LightGBM) make rigid step-cuts across features. But genetic rarity in human populations follows smooth, continuous curves. Decision trees fail to model these curves properly, missing over 1,700 disease mutations.</a:t>
             </a:r>
             <a:endParaRPr lang="en-US" sz="1300" dirty="0"/>
           </a:p>
@@ -21589,7 +22422,7 @@
           <a:bodyPr wrap="square" rtlCol="0" anchor="ctr"/>
           <a:lstStyle/>
           <a:p>
-            <a:pPr marL="0" indent="0">
+            <a:pPr indent="0" marL="0">
               <a:buNone/>
             </a:pPr>
             <a:r>
@@ -21601,7 +22434,7 @@
                 <a:ea typeface="Calibri" pitchFamily="34" charset="-122"/>
                 <a:cs typeface="Calibri" pitchFamily="34" charset="-120"/>
               </a:rPr>
-              <a:t>GAP 3: CLINICAL UNCERTAINTY</a:t>
+              <a:t>GAP 3: GUESSING WITHOUT CONFIDENCE</a:t>
             </a:r>
             <a:endParaRPr lang="en-US" sz="1050" dirty="0"/>
           </a:p>
@@ -21628,7 +22461,7 @@
           <a:bodyPr wrap="square" lIns="0" tIns="0" rIns="0" bIns="0" rtlCol="0" anchor="ctr"/>
           <a:lstStyle/>
           <a:p>
-            <a:pPr marL="0" indent="0">
+            <a:pPr indent="0" marL="0">
               <a:buNone/>
             </a:pPr>
             <a:r>
@@ -21640,7 +22473,7 @@
                 <a:ea typeface="Calibri" pitchFamily="34" charset="-122"/>
                 <a:cs typeface="Calibri" pitchFamily="34" charset="-120"/>
               </a:rPr>
-              <a:t>Lack of Certified Risk Guarantees</a:t>
+              <a:t>No Mathematical Safety Guarantees</a:t>
             </a:r>
             <a:endParaRPr lang="en-US" sz="1800" dirty="0"/>
           </a:p>
@@ -21690,7 +22523,7 @@
           <a:bodyPr wrap="square" lIns="0" tIns="0" rIns="0" bIns="0" rtlCol="0" anchor="ctr"/>
           <a:lstStyle/>
           <a:p>
-            <a:pPr marL="0" indent="0">
+            <a:pPr indent="0" marL="0">
               <a:lnSpc>
                 <a:spcPct val="125000"/>
               </a:lnSpc>
@@ -21705,7 +22538,7 @@
                 <a:ea typeface="Calibri" pitchFamily="34" charset="-122"/>
                 <a:cs typeface="Calibri" pitchFamily="34" charset="-120"/>
               </a:rPr>
-              <a:t>Existing algorithms output point probability estimates and apply subjective classification thresholds (e.g. tau = 0.50). In clinical genetics, subjective thresholds fail to distinguish between well-calibrated confidence and epistemic uncertainty, lacking distribution-free mathematical coverage guarantees.</a:t>
+              <a:t>Existing software gives a single number and picks an arbitrary cutoff (like 0.5). In medical diagnostics, an arbitrary cutoff cannot tell doctors how confident the model is, risking dangerous false alarms and missed diagnoses.</a:t>
             </a:r>
             <a:endParaRPr lang="en-US" sz="1300" dirty="0"/>
           </a:p>
@@ -21727,7 +22560,6 @@
         <a:solidFill>
           <a:srgbClr val="F8FAFC"/>
         </a:solidFill>
-        <a:effectLst/>
       </p:bgPr>
     </p:bg>
     <p:spTree>
@@ -21765,7 +22597,7 @@
           <a:bodyPr wrap="square" rtlCol="0" anchor="ctr"/>
           <a:lstStyle/>
           <a:p>
-            <a:pPr marL="0" indent="0">
+            <a:pPr indent="0" marL="0">
               <a:buNone/>
             </a:pPr>
             <a:r>
@@ -21804,7 +22636,7 @@
           <a:bodyPr wrap="square" lIns="0" tIns="0" rIns="0" bIns="0" rtlCol="0" anchor="ctr"/>
           <a:lstStyle/>
           <a:p>
-            <a:pPr marL="0" indent="0">
+            <a:pPr indent="0" marL="0">
               <a:buNone/>
             </a:pPr>
             <a:r>
@@ -21843,7 +22675,7 @@
           <a:bodyPr wrap="square" lIns="0" tIns="0" rIns="0" bIns="0" rtlCol="0" anchor="ctr"/>
           <a:lstStyle/>
           <a:p>
-            <a:pPr marL="0" indent="0">
+            <a:pPr indent="0" marL="0">
               <a:buNone/>
             </a:pPr>
             <a:r>
@@ -21855,7 +22687,7 @@
                 <a:ea typeface="Calibri" pitchFamily="34" charset="-122"/>
                 <a:cs typeface="Calibri" pitchFamily="34" charset="-120"/>
               </a:rPr>
-              <a:t>Formal project scope, methodology objectives, and achieved scientific contributions</a:t>
+              <a:t>Our concrete engineering goals and the verified experimental results achieved</a:t>
             </a:r>
             <a:endParaRPr lang="en-US" sz="1400" dirty="0"/>
           </a:p>
@@ -21905,7 +22737,7 @@
           <a:bodyPr wrap="square" rtlCol="0" anchor="ctr"/>
           <a:lstStyle/>
           <a:p>
-            <a:pPr marL="0" indent="0">
+            <a:pPr indent="0" marL="0">
               <a:buNone/>
             </a:pPr>
             <a:r>
@@ -21917,7 +22749,7 @@
                 <a:ea typeface="Calibri" pitchFamily="34" charset="-122"/>
                 <a:cs typeface="Calibri" pitchFamily="34" charset="-120"/>
               </a:rPr>
-              <a:t>Group 15  |  Final Project Review  |  AI-Based Structural Variant Prioritization</a:t>
+              <a:t>Department of Artificial Intelligence  |  Final Project Review  |  Amrita Vishwa Vidyapeetham</a:t>
             </a:r>
             <a:endParaRPr lang="en-US" sz="1100" dirty="0"/>
           </a:p>
@@ -21944,7 +22776,7 @@
           <a:bodyPr wrap="square" rtlCol="0" anchor="ctr"/>
           <a:lstStyle/>
           <a:p>
-            <a:pPr marL="0" indent="0" algn="r">
+            <a:pPr algn="r" indent="0" marL="0">
               <a:buNone/>
             </a:pPr>
             <a:r>
@@ -22010,7 +22842,7 @@
           <a:bodyPr wrap="square" rtlCol="0" anchor="ctr"/>
           <a:lstStyle/>
           <a:p>
-            <a:pPr marL="0" indent="0">
+            <a:pPr indent="0" marL="0">
               <a:buNone/>
             </a:pPr>
             <a:r>
@@ -22049,7 +22881,7 @@
           <a:bodyPr wrap="square" lIns="0" tIns="0" rIns="0" bIns="0" rtlCol="0" anchor="ctr"/>
           <a:lstStyle/>
           <a:p>
-            <a:pPr marL="0" indent="0">
+            <a:pPr indent="0" marL="0">
               <a:buNone/>
             </a:pPr>
             <a:r>
@@ -22061,7 +22893,7 @@
                 <a:ea typeface="Calibri" pitchFamily="34" charset="-122"/>
                 <a:cs typeface="Calibri" pitchFamily="34" charset="-120"/>
               </a:rPr>
-              <a:t>Engineering Objectives</a:t>
+              <a:t>Engineering Goals</a:t>
             </a:r>
             <a:endParaRPr lang="en-US" sz="1800" dirty="0"/>
           </a:p>
@@ -22113,13 +22945,13 @@
           <a:p>
             <a:pPr marL="342900" indent="-342900">
               <a:spcAft>
-                <a:spcPts val="1000"/>
+                <a:spcPts val="1200"/>
               </a:spcAft>
               <a:buSzPct val="100000"/>
               <a:buChar char="•"/>
             </a:pPr>
             <a:r>
-              <a:rPr lang="en-US" sz="1250" dirty="0">
+              <a:rPr lang="en-US" sz="1300" dirty="0">
                 <a:solidFill>
                   <a:srgbClr val="334155"/>
                 </a:solidFill>
@@ -22127,20 +22959,20 @@
                 <a:ea typeface="Calibri" pitchFamily="34" charset="-122"/>
                 <a:cs typeface="Calibri" pitchFamily="34" charset="-120"/>
               </a:rPr>
-              <a:t>Harmonize multi-source genomic databases (ClinVar, gnomAD SV, 1000G) via 50% reciprocal overlap.</a:t>
-            </a:r>
-            <a:endParaRPr lang="en-US" sz="1250" dirty="0"/>
+              <a:t>Combine multi-source DNA databases (ClinVar, gnomAD) using a strict 50% length overlap rule.</a:t>
+            </a:r>
+            <a:endParaRPr lang="en-US" sz="1300" dirty="0"/>
           </a:p>
           <a:p>
             <a:pPr marL="342900" indent="-342900">
               <a:spcAft>
-                <a:spcPts val="1000"/>
+                <a:spcPts val="1200"/>
               </a:spcAft>
               <a:buSzPct val="100000"/>
               <a:buChar char="•"/>
             </a:pPr>
             <a:r>
-              <a:rPr lang="en-US" sz="1250" dirty="0">
+              <a:rPr lang="en-US" sz="1300" dirty="0">
                 <a:solidFill>
                   <a:srgbClr val="334155"/>
                 </a:solidFill>
@@ -22148,20 +22980,20 @@
                 <a:ea typeface="Calibri" pitchFamily="34" charset="-122"/>
                 <a:cs typeface="Calibri" pitchFamily="34" charset="-120"/>
               </a:rPr>
-              <a:t>Formulate a 24-dimensional non-leaking feature vector with strict chromosomal disjoint holdouts.</a:t>
-            </a:r>
-            <a:endParaRPr lang="en-US" sz="1250" dirty="0"/>
+              <a:t>Engineer 24 leak-free features and evaluate on completely unseen holdout chromosomes.</a:t>
+            </a:r>
+            <a:endParaRPr lang="en-US" sz="1300" dirty="0"/>
           </a:p>
           <a:p>
             <a:pPr marL="342900" indent="-342900">
               <a:spcAft>
-                <a:spcPts val="1000"/>
+                <a:spcPts val="1200"/>
               </a:spcAft>
               <a:buSzPct val="100000"/>
               <a:buChar char="•"/>
             </a:pPr>
             <a:r>
-              <a:rPr lang="en-US" sz="1250" dirty="0">
+              <a:rPr lang="en-US" sz="1300" dirty="0">
                 <a:solidFill>
                   <a:srgbClr val="334155"/>
                 </a:solidFill>
@@ -22169,20 +23001,20 @@
                 <a:ea typeface="Calibri" pitchFamily="34" charset="-122"/>
                 <a:cs typeface="Calibri" pitchFamily="34" charset="-120"/>
               </a:rPr>
-              <a:t>Architect Deep Tabular ResNet and Multimodal Sequence-Epigenetics neural networks.</a:t>
-            </a:r>
-            <a:endParaRPr lang="en-US" sz="1250" dirty="0"/>
+              <a:t>Build Deep Tabular ResNet and Multimodal sequence models to outperform classical tree models.</a:t>
+            </a:r>
+            <a:endParaRPr lang="en-US" sz="1300" dirty="0"/>
           </a:p>
           <a:p>
             <a:pPr marL="342900" indent="-342900">
               <a:spcAft>
-                <a:spcPts val="1000"/>
+                <a:spcPts val="1200"/>
               </a:spcAft>
               <a:buSzPct val="100000"/>
               <a:buChar char="•"/>
             </a:pPr>
             <a:r>
-              <a:rPr lang="en-US" sz="1250" dirty="0">
+              <a:rPr lang="en-US" sz="1300" dirty="0">
                 <a:solidFill>
                   <a:srgbClr val="334155"/>
                 </a:solidFill>
@@ -22190,9 +23022,9 @@
                 <a:ea typeface="Calibri" pitchFamily="34" charset="-122"/>
                 <a:cs typeface="Calibri" pitchFamily="34" charset="-120"/>
               </a:rPr>
-              <a:t>Deploy Split Conformal Prediction (95% certified coverage) and TreeSHAP explainability in a production CLI tool.</a:t>
-            </a:r>
-            <a:endParaRPr lang="en-US" sz="1250" dirty="0"/>
+              <a:t>Deploy 95% mathematical confidence bounds and TreeSHAP visual explanations into a fast CLI tool.</a:t>
+            </a:r>
+            <a:endParaRPr lang="en-US" sz="1300" dirty="0"/>
           </a:p>
         </p:txBody>
       </p:sp>
@@ -22244,7 +23076,7 @@
           <a:bodyPr wrap="square" rtlCol="0" anchor="ctr"/>
           <a:lstStyle/>
           <a:p>
-            <a:pPr marL="0" indent="0">
+            <a:pPr indent="0" marL="0">
               <a:buNone/>
             </a:pPr>
             <a:r>
@@ -22256,7 +23088,7 @@
                 <a:ea typeface="Calibri" pitchFamily="34" charset="-122"/>
                 <a:cs typeface="Calibri" pitchFamily="34" charset="-120"/>
               </a:rPr>
-              <a:t>KEY SCIENTIFIC CONTRIBUTIONS</a:t>
+              <a:t>KEY DEMONSTRATED OUTCOMES</a:t>
             </a:r>
             <a:endParaRPr lang="en-US" sz="1150" dirty="0"/>
           </a:p>
@@ -22283,7 +23115,7 @@
           <a:bodyPr wrap="square" lIns="0" tIns="0" rIns="0" bIns="0" rtlCol="0" anchor="ctr"/>
           <a:lstStyle/>
           <a:p>
-            <a:pPr marL="0" indent="0">
+            <a:pPr indent="0" marL="0">
               <a:buNone/>
             </a:pPr>
             <a:r>
@@ -22295,7 +23127,7 @@
                 <a:ea typeface="Calibri" pitchFamily="34" charset="-122"/>
                 <a:cs typeface="Calibri" pitchFamily="34" charset="-120"/>
               </a:rPr>
-              <a:t>Demonstrated Outcomes</a:t>
+              <a:t>What We Actually Delivered</a:t>
             </a:r>
             <a:endParaRPr lang="en-US" sz="1800" dirty="0"/>
           </a:p>
@@ -22347,13 +23179,13 @@
           <a:p>
             <a:pPr marL="342900" indent="-342900">
               <a:spcAft>
-                <a:spcPts val="1000"/>
+                <a:spcPts val="1200"/>
               </a:spcAft>
               <a:buSzPct val="100000"/>
               <a:buChar char="•"/>
             </a:pPr>
             <a:r>
-              <a:rPr lang="en-US" sz="1250" dirty="0">
+              <a:rPr lang="en-US" sz="1300" dirty="0">
                 <a:solidFill>
                   <a:srgbClr val="334155"/>
                 </a:solidFill>
@@ -22361,20 +23193,20 @@
                 <a:ea typeface="Calibri" pitchFamily="34" charset="-122"/>
                 <a:cs typeface="Calibri" pitchFamily="34" charset="-120"/>
               </a:rPr>
-              <a:t>Eliminated Genomic Leakage: Enforced 0.0% locus overlap via Chr 19–22, X, Y disjoint testing.</a:t>
-            </a:r>
-            <a:endParaRPr lang="en-US" sz="1250" dirty="0"/>
+              <a:t>Zero-Leakage Benchmark: Tested strictly on unseen Chromosomes 19–22, X, Y (0% data leakage).</a:t>
+            </a:r>
+            <a:endParaRPr lang="en-US" sz="1300" dirty="0"/>
           </a:p>
           <a:p>
             <a:pPr marL="342900" indent="-342900">
               <a:spcAft>
-                <a:spcPts val="1000"/>
+                <a:spcPts val="1200"/>
               </a:spcAft>
               <a:buSzPct val="100000"/>
               <a:buChar char="•"/>
             </a:pPr>
             <a:r>
-              <a:rPr lang="en-US" sz="1250" dirty="0">
+              <a:rPr lang="en-US" sz="1300" dirty="0">
                 <a:solidFill>
                   <a:srgbClr val="334155"/>
                 </a:solidFill>
@@ -22382,20 +23214,20 @@
                 <a:ea typeface="Calibri" pitchFamily="34" charset="-122"/>
                 <a:cs typeface="Calibri" pitchFamily="34" charset="-120"/>
               </a:rPr>
-              <a:t>Benchmark Superiority: Peak 0.9705 PR-AUC and 94.4% clinical sensitivity on unseen chromosomes.</a:t>
-            </a:r>
-            <a:endParaRPr lang="en-US" sz="1250" dirty="0"/>
+              <a:t>State-of-the-Art Detection: 0.9705 PR-AUC and 94.4% clinical sensitivity on unseen test chromosomes.</a:t>
+            </a:r>
+            <a:endParaRPr lang="en-US" sz="1300" dirty="0"/>
           </a:p>
           <a:p>
             <a:pPr marL="342900" indent="-342900">
               <a:spcAft>
-                <a:spcPts val="1000"/>
+                <a:spcPts val="1200"/>
               </a:spcAft>
               <a:buSzPct val="100000"/>
               <a:buChar char="•"/>
             </a:pPr>
             <a:r>
-              <a:rPr lang="en-US" sz="1250" dirty="0">
+              <a:rPr lang="en-US" sz="1300" dirty="0">
                 <a:solidFill>
                   <a:srgbClr val="334155"/>
                 </a:solidFill>
@@ -22403,20 +23235,20 @@
                 <a:ea typeface="Calibri" pitchFamily="34" charset="-122"/>
                 <a:cs typeface="Calibri" pitchFamily="34" charset="-120"/>
               </a:rPr>
-              <a:t>Drastic False Negative Reduction: Slashed missed pathogenic variants from 1,745 down to 414 (&gt;60% reduction).</a:t>
-            </a:r>
-            <a:endParaRPr lang="en-US" sz="1250" dirty="0"/>
+              <a:t>Slashed Missed Diseases: Cut false negatives from 1,745 down to 414 (over 60% reduction vs XGBoost).</a:t>
+            </a:r>
+            <a:endParaRPr lang="en-US" sz="1300" dirty="0"/>
           </a:p>
           <a:p>
             <a:pPr marL="342900" indent="-342900">
               <a:spcAft>
-                <a:spcPts val="1000"/>
+                <a:spcPts val="1200"/>
               </a:spcAft>
               <a:buSzPct val="100000"/>
               <a:buChar char="•"/>
             </a:pPr>
             <a:r>
-              <a:rPr lang="en-US" sz="1250" dirty="0">
+              <a:rPr lang="en-US" sz="1300" dirty="0">
                 <a:solidFill>
                   <a:srgbClr val="334155"/>
                 </a:solidFill>
@@ -22424,9 +23256,9 @@
                 <a:ea typeface="Calibri" pitchFamily="34" charset="-122"/>
                 <a:cs typeface="Calibri" pitchFamily="34" charset="-120"/>
               </a:rPr>
-              <a:t>Clinical Backlog Triage: Resolved 48.8% of 34,466 ClinVar VUS into actionable risk tiers.</a:t>
-            </a:r>
-            <a:endParaRPr lang="en-US" sz="1250" dirty="0"/>
+              <a:t>Solved 48.8% of Uncertain Variants: Successfully triaged 16,801 of 34,466 unreviewed ClinVar VUS.</a:t>
+            </a:r>
+            <a:endParaRPr lang="en-US" sz="1300" dirty="0"/>
           </a:p>
         </p:txBody>
       </p:sp>
@@ -22446,7 +23278,6 @@
         <a:solidFill>
           <a:srgbClr val="F8FAFC"/>
         </a:solidFill>
-        <a:effectLst/>
       </p:bgPr>
     </p:bg>
     <p:spTree>
@@ -22484,7 +23315,7 @@
           <a:bodyPr wrap="square" rtlCol="0" anchor="ctr"/>
           <a:lstStyle/>
           <a:p>
-            <a:pPr marL="0" indent="0">
+            <a:pPr indent="0" marL="0">
               <a:buNone/>
             </a:pPr>
             <a:r>
@@ -22523,7 +23354,7 @@
           <a:bodyPr wrap="square" lIns="0" tIns="0" rIns="0" bIns="0" rtlCol="0" anchor="ctr"/>
           <a:lstStyle/>
           <a:p>
-            <a:pPr marL="0" indent="0">
+            <a:pPr indent="0" marL="0">
               <a:buNone/>
             </a:pPr>
             <a:r>
@@ -22562,7 +23393,7 @@
           <a:bodyPr wrap="square" lIns="0" tIns="0" rIns="0" bIns="0" rtlCol="0" anchor="ctr"/>
           <a:lstStyle/>
           <a:p>
-            <a:pPr marL="0" indent="0">
+            <a:pPr indent="0" marL="0">
               <a:buNone/>
             </a:pPr>
             <a:r>
@@ -22574,7 +23405,7 @@
                 <a:ea typeface="Calibri" pitchFamily="34" charset="-122"/>
                 <a:cs typeface="Calibri" pitchFamily="34" charset="-120"/>
               </a:rPr>
-              <a:t>Modular end-to-end framework translating patient sequencing data into actionable clinical intelligence</a:t>
+              <a:t>A modular end-to-end pipeline turning raw patient sequencing files into fast clinical decisions</a:t>
             </a:r>
             <a:endParaRPr lang="en-US" sz="1400" dirty="0"/>
           </a:p>
@@ -22624,7 +23455,7 @@
           <a:bodyPr wrap="square" rtlCol="0" anchor="ctr"/>
           <a:lstStyle/>
           <a:p>
-            <a:pPr marL="0" indent="0">
+            <a:pPr indent="0" marL="0">
               <a:buNone/>
             </a:pPr>
             <a:r>
@@ -22636,7 +23467,7 @@
                 <a:ea typeface="Calibri" pitchFamily="34" charset="-122"/>
                 <a:cs typeface="Calibri" pitchFamily="34" charset="-120"/>
               </a:rPr>
-              <a:t>Group 15  |  Final Project Review  |  AI-Based Structural Variant Prioritization</a:t>
+              <a:t>Department of Artificial Intelligence  |  Final Project Review  |  Amrita Vishwa Vidyapeetham</a:t>
             </a:r>
             <a:endParaRPr lang="en-US" sz="1100" dirty="0"/>
           </a:p>
@@ -22663,7 +23494,7 @@
           <a:bodyPr wrap="square" rtlCol="0" anchor="ctr"/>
           <a:lstStyle/>
           <a:p>
-            <a:pPr marL="0" indent="0" algn="r">
+            <a:pPr algn="r" indent="0" marL="0">
               <a:buNone/>
             </a:pPr>
             <a:r>
@@ -22756,7 +23587,7 @@
           <a:bodyPr wrap="square" lIns="0" tIns="0" rIns="0" bIns="0" rtlCol="0" anchor="ctr"/>
           <a:lstStyle/>
           <a:p>
-            <a:pPr marL="0" indent="0" algn="ctr">
+            <a:pPr algn="ctr" indent="0" marL="0">
               <a:buNone/>
             </a:pPr>
             <a:r>
@@ -22795,7 +23626,7 @@
           <a:bodyPr wrap="square" lIns="0" tIns="0" rIns="0" bIns="0" rtlCol="0" anchor="ctr"/>
           <a:lstStyle/>
           <a:p>
-            <a:pPr marL="0" indent="0">
+            <a:pPr indent="0" marL="0">
               <a:buNone/>
             </a:pPr>
             <a:r>
@@ -22834,7 +23665,7 @@
           <a:bodyPr wrap="square" lIns="0" tIns="0" rIns="0" bIns="0" rtlCol="0" anchor="ctr"/>
           <a:lstStyle/>
           <a:p>
-            <a:pPr marL="0" indent="0">
+            <a:pPr indent="0" marL="0">
               <a:buNone/>
             </a:pPr>
             <a:r>
@@ -22846,7 +23677,7 @@
                 <a:ea typeface="Calibri" pitchFamily="34" charset="-122"/>
                 <a:cs typeface="Calibri" pitchFamily="34" charset="-120"/>
               </a:rPr>
-              <a:t>Multi-Source Integration</a:t>
+              <a:t>Read Patient Files</a:t>
             </a:r>
             <a:endParaRPr lang="en-US" sz="1200" dirty="0"/>
           </a:p>
@@ -22912,7 +23743,7 @@
                 <a:ea typeface="Calibri" pitchFamily="34" charset="-122"/>
                 <a:cs typeface="Calibri" pitchFamily="34" charset="-120"/>
               </a:rPr>
-              <a:t>Parse Sniffles2/cuteSV long-read VCFs</a:t>
+              <a:t>Parse patient sequencing files (VCF)</a:t>
             </a:r>
             <a:endParaRPr lang="en-US" sz="1250" dirty="0"/>
           </a:p>
@@ -22933,7 +23764,7 @@
                 <a:ea typeface="Calibri" pitchFamily="34" charset="-122"/>
                 <a:cs typeface="Calibri" pitchFamily="34" charset="-120"/>
               </a:rPr>
-              <a:t>Filter high-confidence SVs (&gt;= 50 bp)</a:t>
+              <a:t>Filter large variants (&gt;= 50 base pairs)</a:t>
             </a:r>
             <a:endParaRPr lang="en-US" sz="1250" dirty="0"/>
           </a:p>
@@ -22954,7 +23785,7 @@
                 <a:ea typeface="Calibri" pitchFamily="34" charset="-122"/>
                 <a:cs typeface="Calibri" pitchFamily="34" charset="-120"/>
               </a:rPr>
-              <a:t>50% reciprocal coordinate overlap</a:t>
+              <a:t>Match with reference databases</a:t>
             </a:r>
             <a:endParaRPr lang="en-US" sz="1250" dirty="0"/>
           </a:p>
@@ -22975,7 +23806,7 @@
                 <a:ea typeface="Calibri" pitchFamily="34" charset="-122"/>
                 <a:cs typeface="Calibri" pitchFamily="34" charset="-120"/>
               </a:rPr>
-              <a:t>Ingest ClinVar &amp; gnomAD SV catalogs</a:t>
+              <a:t>Use 50% length overlap rule</a:t>
             </a:r>
             <a:endParaRPr lang="en-US" sz="1250" dirty="0"/>
           </a:p>
@@ -23056,7 +23887,7 @@
           <a:bodyPr wrap="square" lIns="0" tIns="0" rIns="0" bIns="0" rtlCol="0" anchor="ctr"/>
           <a:lstStyle/>
           <a:p>
-            <a:pPr marL="0" indent="0" algn="ctr">
+            <a:pPr algn="ctr" indent="0" marL="0">
               <a:buNone/>
             </a:pPr>
             <a:r>
@@ -23095,7 +23926,7 @@
           <a:bodyPr wrap="square" lIns="0" tIns="0" rIns="0" bIns="0" rtlCol="0" anchor="ctr"/>
           <a:lstStyle/>
           <a:p>
-            <a:pPr marL="0" indent="0">
+            <a:pPr indent="0" marL="0">
               <a:buNone/>
             </a:pPr>
             <a:r>
@@ -23134,7 +23965,7 @@
           <a:bodyPr wrap="square" lIns="0" tIns="0" rIns="0" bIns="0" rtlCol="0" anchor="ctr"/>
           <a:lstStyle/>
           <a:p>
-            <a:pPr marL="0" indent="0">
+            <a:pPr indent="0" marL="0">
               <a:buNone/>
             </a:pPr>
             <a:r>
@@ -23146,7 +23977,7 @@
                 <a:ea typeface="Calibri" pitchFamily="34" charset="-122"/>
                 <a:cs typeface="Calibri" pitchFamily="34" charset="-120"/>
               </a:rPr>
-              <a:t>Zero-Leakage Engineering</a:t>
+              <a:t>Calculate 24 Signals</a:t>
             </a:r>
             <a:endParaRPr lang="en-US" sz="1200" dirty="0"/>
           </a:p>
@@ -23212,7 +24043,7 @@
                 <a:ea typeface="Calibri" pitchFamily="34" charset="-122"/>
                 <a:cs typeface="Calibri" pitchFamily="34" charset="-120"/>
               </a:rPr>
-              <a:t>Compute 24 biological features</a:t>
+              <a:t>Compute population rarity in humans</a:t>
             </a:r>
             <a:endParaRPr lang="en-US" sz="1250" dirty="0"/>
           </a:p>
@@ -23233,7 +24064,7 @@
                 <a:ea typeface="Calibri" pitchFamily="34" charset="-122"/>
                 <a:cs typeface="Calibri" pitchFamily="34" charset="-120"/>
               </a:rPr>
-              <a:t>gnomAD global AF &amp; 7 continental AFs</a:t>
+              <a:t>Score gene importance to survival</a:t>
             </a:r>
             <a:endParaRPr lang="en-US" sz="1250" dirty="0"/>
           </a:p>
@@ -23254,7 +24085,7 @@
                 <a:ea typeface="Calibri" pitchFamily="34" charset="-122"/>
                 <a:cs typeface="Calibri" pitchFamily="34" charset="-120"/>
               </a:rPr>
-              <a:t>pLI haploinsufficiency &amp; LOEUF scores</a:t>
+              <a:t>Extract mutation length &amp; type</a:t>
             </a:r>
             <a:endParaRPr lang="en-US" sz="1250" dirty="0"/>
           </a:p>
@@ -23275,7 +24106,7 @@
                 <a:ea typeface="Calibri" pitchFamily="34" charset="-122"/>
                 <a:cs typeface="Calibri" pitchFamily="34" charset="-120"/>
               </a:rPr>
-              <a:t>Chromosomal disjoint holdout split</a:t>
+              <a:t>Split chromosomes to prevent leakage</a:t>
             </a:r>
             <a:endParaRPr lang="en-US" sz="1250" dirty="0"/>
           </a:p>
@@ -23356,7 +24187,7 @@
           <a:bodyPr wrap="square" lIns="0" tIns="0" rIns="0" bIns="0" rtlCol="0" anchor="ctr"/>
           <a:lstStyle/>
           <a:p>
-            <a:pPr marL="0" indent="0" algn="ctr">
+            <a:pPr algn="ctr" indent="0" marL="0">
               <a:buNone/>
             </a:pPr>
             <a:r>
@@ -23395,7 +24226,7 @@
           <a:bodyPr wrap="square" lIns="0" tIns="0" rIns="0" bIns="0" rtlCol="0" anchor="ctr"/>
           <a:lstStyle/>
           <a:p>
-            <a:pPr marL="0" indent="0">
+            <a:pPr indent="0" marL="0">
               <a:buNone/>
             </a:pPr>
             <a:r>
@@ -23434,7 +24265,7 @@
           <a:bodyPr wrap="square" lIns="0" tIns="0" rIns="0" bIns="0" rtlCol="0" anchor="ctr"/>
           <a:lstStyle/>
           <a:p>
-            <a:pPr marL="0" indent="0">
+            <a:pPr indent="0" marL="0">
               <a:buNone/>
             </a:pPr>
             <a:r>
@@ -23446,7 +24277,7 @@
                 <a:ea typeface="Calibri" pitchFamily="34" charset="-122"/>
                 <a:cs typeface="Calibri" pitchFamily="34" charset="-120"/>
               </a:rPr>
-              <a:t>DL &amp; Multimodal Inference</a:t>
+              <a:t>Run Neural Models</a:t>
             </a:r>
             <a:endParaRPr lang="en-US" sz="1200" dirty="0"/>
           </a:p>
@@ -23512,7 +24343,7 @@
                 <a:ea typeface="Calibri" pitchFamily="34" charset="-122"/>
                 <a:cs typeface="Calibri" pitchFamily="34" charset="-120"/>
               </a:rPr>
-              <a:t>PyTorch Tabular ResNet (skip connects)</a:t>
+              <a:t>Tabular ResNet with skip connections</a:t>
             </a:r>
             <a:endParaRPr lang="en-US" sz="1250" dirty="0"/>
           </a:p>
@@ -23533,7 +24364,7 @@
                 <a:ea typeface="Calibri" pitchFamily="34" charset="-122"/>
                 <a:cs typeface="Calibri" pitchFamily="34" charset="-120"/>
               </a:rPr>
-              <a:t>Multimodal Net (DNA seq + 5mC)</a:t>
+              <a:t>Multimodal net with DNA sequence context</a:t>
             </a:r>
             <a:endParaRPr lang="en-US" sz="1250" dirty="0"/>
           </a:p>
@@ -23554,7 +24385,7 @@
                 <a:ea typeface="Calibri" pitchFamily="34" charset="-122"/>
                 <a:cs typeface="Calibri" pitchFamily="34" charset="-120"/>
               </a:rPr>
-              <a:t>Outputs continuous calibrated index</a:t>
+              <a:t>Outputs calibrated risk score (0 to 1)</a:t>
             </a:r>
             <a:endParaRPr lang="en-US" sz="1250" dirty="0"/>
           </a:p>
@@ -23575,7 +24406,7 @@
                 <a:ea typeface="Calibri" pitchFamily="34" charset="-122"/>
                 <a:cs typeface="Calibri" pitchFamily="34" charset="-120"/>
               </a:rPr>
-              <a:t>94.4% clinical sensitivity</a:t>
+              <a:t>Reaches 94.4% disease detection rate</a:t>
             </a:r>
             <a:endParaRPr lang="en-US" sz="1250" dirty="0"/>
           </a:p>
@@ -23656,7 +24487,7 @@
           <a:bodyPr wrap="square" lIns="0" tIns="0" rIns="0" bIns="0" rtlCol="0" anchor="ctr"/>
           <a:lstStyle/>
           <a:p>
-            <a:pPr marL="0" indent="0" algn="ctr">
+            <a:pPr algn="ctr" indent="0" marL="0">
               <a:buNone/>
             </a:pPr>
             <a:r>
@@ -23695,7 +24526,7 @@
           <a:bodyPr wrap="square" lIns="0" tIns="0" rIns="0" bIns="0" rtlCol="0" anchor="ctr"/>
           <a:lstStyle/>
           <a:p>
-            <a:pPr marL="0" indent="0">
+            <a:pPr indent="0" marL="0">
               <a:buNone/>
             </a:pPr>
             <a:r>
@@ -23734,7 +24565,7 @@
           <a:bodyPr wrap="square" lIns="0" tIns="0" rIns="0" bIns="0" rtlCol="0" anchor="ctr"/>
           <a:lstStyle/>
           <a:p>
-            <a:pPr marL="0" indent="0">
+            <a:pPr indent="0" marL="0">
               <a:buNone/>
             </a:pPr>
             <a:r>
@@ -23746,7 +24577,7 @@
                 <a:ea typeface="Calibri" pitchFamily="34" charset="-122"/>
                 <a:cs typeface="Calibri" pitchFamily="34" charset="-120"/>
               </a:rPr>
-              <a:t>Certified Explainability</a:t>
+              <a:t>Explain &amp; Guarantee</a:t>
             </a:r>
             <a:endParaRPr lang="en-US" sz="1200" dirty="0"/>
           </a:p>
@@ -23812,7 +24643,7 @@
                 <a:ea typeface="Calibri" pitchFamily="34" charset="-122"/>
                 <a:cs typeface="Calibri" pitchFamily="34" charset="-120"/>
               </a:rPr>
-              <a:t>Split Conformal Prediction (95% guarantee)</a:t>
+              <a:t>95% mathematical confidence intervals</a:t>
             </a:r>
             <a:endParaRPr lang="en-US" sz="1250" dirty="0"/>
           </a:p>
@@ -23833,7 +24664,7 @@
                 <a:ea typeface="Calibri" pitchFamily="34" charset="-122"/>
                 <a:cs typeface="Calibri" pitchFamily="34" charset="-120"/>
               </a:rPr>
-              <a:t>Local TreeSHAP waterfall attributions</a:t>
+              <a:t>TreeSHAP visual feature explanations</a:t>
             </a:r>
             <a:endParaRPr lang="en-US" sz="1250" dirty="0"/>
           </a:p>
@@ -23854,7 +24685,7 @@
                 <a:ea typeface="Calibri" pitchFamily="34" charset="-122"/>
                 <a:cs typeface="Calibri" pitchFamily="34" charset="-120"/>
               </a:rPr>
-              <a:t>Production CLI tool (prioritize_sv.py)</a:t>
+              <a:t>Fast CLI tool (prioritize_sv.py)</a:t>
             </a:r>
             <a:endParaRPr lang="en-US" sz="1250" dirty="0"/>
           </a:p>
@@ -23875,7 +24706,7 @@
                 <a:ea typeface="Calibri" pitchFamily="34" charset="-122"/>
                 <a:cs typeface="Calibri" pitchFamily="34" charset="-120"/>
               </a:rPr>
-              <a:t>Interactive HTML &amp; triage queue export</a:t>
+              <a:t>Generates interactive HTML doctor report</a:t>
             </a:r>
             <a:endParaRPr lang="en-US" sz="1250" dirty="0"/>
           </a:p>
@@ -23897,7 +24728,6 @@
         <a:solidFill>
           <a:srgbClr val="F8FAFC"/>
         </a:solidFill>
-        <a:effectLst/>
       </p:bgPr>
     </p:bg>
     <p:spTree>
@@ -23935,7 +24765,7 @@
           <a:bodyPr wrap="square" rtlCol="0" anchor="ctr"/>
           <a:lstStyle/>
           <a:p>
-            <a:pPr marL="0" indent="0">
+            <a:pPr indent="0" marL="0">
               <a:buNone/>
             </a:pPr>
             <a:r>
@@ -23974,7 +24804,7 @@
           <a:bodyPr wrap="square" lIns="0" tIns="0" rIns="0" bIns="0" rtlCol="0" anchor="ctr"/>
           <a:lstStyle/>
           <a:p>
-            <a:pPr marL="0" indent="0">
+            <a:pPr indent="0" marL="0">
               <a:buNone/>
             </a:pPr>
             <a:r>
@@ -24013,7 +24843,7 @@
           <a:bodyPr wrap="square" lIns="0" tIns="0" rIns="0" bIns="0" rtlCol="0" anchor="ctr"/>
           <a:lstStyle/>
           <a:p>
-            <a:pPr marL="0" indent="0">
+            <a:pPr indent="0" marL="0">
               <a:buNone/>
             </a:pPr>
             <a:r>
@@ -24025,7 +24855,7 @@
                 <a:ea typeface="Calibri" pitchFamily="34" charset="-122"/>
                 <a:cs typeface="Calibri" pitchFamily="34" charset="-120"/>
               </a:rPr>
-              <a:t>Multi-cohort genomic databases underpinning model development and independent validation</a:t>
+              <a:t>The verified gold-standard databases used for model training and test validation</a:t>
             </a:r>
             <a:endParaRPr lang="en-US" sz="1400" dirty="0"/>
           </a:p>
@@ -24075,7 +24905,7 @@
           <a:bodyPr wrap="square" rtlCol="0" anchor="ctr"/>
           <a:lstStyle/>
           <a:p>
-            <a:pPr marL="0" indent="0">
+            <a:pPr indent="0" marL="0">
               <a:buNone/>
             </a:pPr>
             <a:r>
@@ -24087,7 +24917,7 @@
                 <a:ea typeface="Calibri" pitchFamily="34" charset="-122"/>
                 <a:cs typeface="Calibri" pitchFamily="34" charset="-120"/>
               </a:rPr>
-              <a:t>Group 15  |  Final Project Review  |  AI-Based Structural Variant Prioritization</a:t>
+              <a:t>Department of Artificial Intelligence  |  Final Project Review  |  Amrita Vishwa Vidyapeetham</a:t>
             </a:r>
             <a:endParaRPr lang="en-US" sz="1100" dirty="0"/>
           </a:p>
@@ -24114,7 +24944,7 @@
           <a:bodyPr wrap="square" rtlCol="0" anchor="ctr"/>
           <a:lstStyle/>
           <a:p>
-            <a:pPr marL="0" indent="0" algn="r">
+            <a:pPr algn="r" indent="0" marL="0">
               <a:buNone/>
             </a:pPr>
             <a:r>
@@ -24155,34 +24985,10 @@
             <a:tbl>
               <a:tblPr/>
               <a:tblGrid>
-                <a:gridCol w="2286000">
-                  <a:extLst>
-                    <a:ext uri="{9D8B030D-6E8A-4147-A177-3AD203B41FA5}">
-                      <a16:colId xmlns:a16="http://schemas.microsoft.com/office/drawing/2014/main" val="20000"/>
-                    </a:ext>
-                  </a:extLst>
-                </a:gridCol>
-                <a:gridCol w="1645920">
-                  <a:extLst>
-                    <a:ext uri="{9D8B030D-6E8A-4147-A177-3AD203B41FA5}">
-                      <a16:colId xmlns:a16="http://schemas.microsoft.com/office/drawing/2014/main" val="20001"/>
-                    </a:ext>
-                  </a:extLst>
-                </a:gridCol>
-                <a:gridCol w="3474720">
-                  <a:extLst>
-                    <a:ext uri="{9D8B030D-6E8A-4147-A177-3AD203B41FA5}">
-                      <a16:colId xmlns:a16="http://schemas.microsoft.com/office/drawing/2014/main" val="20002"/>
-                    </a:ext>
-                  </a:extLst>
-                </a:gridCol>
-                <a:gridCol w="3322015">
-                  <a:extLst>
-                    <a:ext uri="{9D8B030D-6E8A-4147-A177-3AD203B41FA5}">
-                      <a16:colId xmlns:a16="http://schemas.microsoft.com/office/drawing/2014/main" val="20003"/>
-                    </a:ext>
-                  </a:extLst>
-                </a:gridCol>
+                <a:gridCol w="2286000"/>
+                <a:gridCol w="1645920"/>
+                <a:gridCol w="3474720"/>
+                <a:gridCol w="3322015"/>
               </a:tblGrid>
               <a:tr h="877824">
                 <a:tc>
@@ -24190,7 +24996,7 @@
                     <a:bodyPr/>
                     <a:lstStyle/>
                     <a:p>
-                      <a:pPr marL="0" indent="0" algn="l">
+                      <a:pPr algn="l" indent="0" marL="0">
                         <a:buNone/>
                       </a:pPr>
                       <a:r>
@@ -24204,7 +25010,7 @@
                       <a:endParaRPr lang="en-US" sz="1200" dirty="0"/>
                     </a:p>
                   </a:txBody>
-                  <a:tcPr anchor="ctr">
+                  <a:tcPr marL="91440" marR="91440" marT="45720" marB="45720" anchor="ctr">
                     <a:lnL w="12700" cap="flat" cmpd="sng" algn="ctr">
                       <a:solidFill>
                         <a:srgbClr val="CBD5E1"/>
@@ -24251,7 +25057,7 @@
                     <a:bodyPr/>
                     <a:lstStyle/>
                     <a:p>
-                      <a:pPr marL="0" indent="0" algn="l">
+                      <a:pPr algn="l" indent="0" marL="0">
                         <a:buNone/>
                       </a:pPr>
                       <a:r>
@@ -24265,7 +25071,7 @@
                       <a:endParaRPr lang="en-US" sz="1200" dirty="0"/>
                     </a:p>
                   </a:txBody>
-                  <a:tcPr anchor="ctr">
+                  <a:tcPr marL="91440" marR="91440" marT="45720" marB="45720" anchor="ctr">
                     <a:lnL w="12700" cap="flat" cmpd="sng" algn="ctr">
                       <a:solidFill>
                         <a:srgbClr val="CBD5E1"/>
@@ -24312,7 +25118,7 @@
                     <a:bodyPr/>
                     <a:lstStyle/>
                     <a:p>
-                      <a:pPr marL="0" indent="0" algn="l">
+                      <a:pPr algn="l" indent="0" marL="0">
                         <a:buNone/>
                       </a:pPr>
                       <a:r>
@@ -24321,12 +25127,12 @@
                             <a:srgbClr val="FFFFFF"/>
                           </a:solidFill>
                         </a:rPr>
-                        <a:t>Genomic Scope</a:t>
+                        <a:t>Variant Types Included</a:t>
                       </a:r>
                       <a:endParaRPr lang="en-US" sz="1200" dirty="0"/>
                     </a:p>
                   </a:txBody>
-                  <a:tcPr anchor="ctr">
+                  <a:tcPr marL="91440" marR="91440" marT="45720" marB="45720" anchor="ctr">
                     <a:lnL w="12700" cap="flat" cmpd="sng" algn="ctr">
                       <a:solidFill>
                         <a:srgbClr val="CBD5E1"/>
@@ -24373,7 +25179,7 @@
                     <a:bodyPr/>
                     <a:lstStyle/>
                     <a:p>
-                      <a:pPr marL="0" indent="0" algn="l">
+                      <a:pPr algn="l" indent="0" marL="0">
                         <a:buNone/>
                       </a:pPr>
                       <a:r>
@@ -24382,12 +25188,12 @@
                             <a:srgbClr val="FFFFFF"/>
                           </a:solidFill>
                         </a:rPr>
-                        <a:t>Role in Pipeline</a:t>
+                        <a:t>What We Used It For</a:t>
                       </a:r>
                       <a:endParaRPr lang="en-US" sz="1200" dirty="0"/>
                     </a:p>
                   </a:txBody>
-                  <a:tcPr anchor="ctr">
+                  <a:tcPr marL="91440" marR="91440" marT="45720" marB="45720" anchor="ctr">
                     <a:lnL w="12700" cap="flat" cmpd="sng" algn="ctr">
                       <a:solidFill>
                         <a:srgbClr val="CBD5E1"/>
@@ -24429,11 +25235,6 @@
                     </a:solidFill>
                   </a:tcPr>
                 </a:tc>
-                <a:extLst>
-                  <a:ext uri="{0D108BD9-81ED-4DB2-BD59-A6C34878D82A}">
-                    <a16:rowId xmlns:a16="http://schemas.microsoft.com/office/drawing/2014/main" val="10000"/>
-                  </a:ext>
-                </a:extLst>
               </a:tr>
               <a:tr h="877824">
                 <a:tc>
@@ -24441,7 +25242,7 @@
                     <a:bodyPr/>
                     <a:lstStyle/>
                     <a:p>
-                      <a:pPr marL="0" indent="0" algn="l">
+                      <a:pPr algn="l" indent="0" marL="0">
                         <a:buNone/>
                       </a:pPr>
                       <a:r>
@@ -24455,7 +25256,7 @@
                       <a:endParaRPr lang="en-US" sz="1150" dirty="0"/>
                     </a:p>
                   </a:txBody>
-                  <a:tcPr anchor="ctr">
+                  <a:tcPr marL="91440" marR="91440" marT="45720" marB="45720" anchor="ctr">
                     <a:lnL w="12700" cap="flat" cmpd="sng" algn="ctr">
                       <a:solidFill>
                         <a:srgbClr val="CBD5E1"/>
@@ -24499,7 +25300,7 @@
                     <a:bodyPr/>
                     <a:lstStyle/>
                     <a:p>
-                      <a:pPr marL="0" indent="0" algn="l">
+                      <a:pPr algn="l" indent="0" marL="0">
                         <a:buNone/>
                       </a:pPr>
                       <a:r>
@@ -24513,7 +25314,7 @@
                       <a:endParaRPr lang="en-US" sz="1150" dirty="0"/>
                     </a:p>
                   </a:txBody>
-                  <a:tcPr anchor="ctr">
+                  <a:tcPr marL="91440" marR="91440" marT="45720" marB="45720" anchor="ctr">
                     <a:lnL w="12700" cap="flat" cmpd="sng" algn="ctr">
                       <a:solidFill>
                         <a:srgbClr val="CBD5E1"/>
@@ -24557,7 +25358,7 @@
                     <a:bodyPr/>
                     <a:lstStyle/>
                     <a:p>
-                      <a:pPr marL="0" indent="0" algn="l">
+                      <a:pPr algn="l" indent="0" marL="0">
                         <a:buNone/>
                       </a:pPr>
                       <a:r>
@@ -24571,7 +25372,7 @@
                       <a:endParaRPr lang="en-US" sz="1100" dirty="0"/>
                     </a:p>
                   </a:txBody>
-                  <a:tcPr anchor="ctr">
+                  <a:tcPr marL="91440" marR="91440" marT="45720" marB="45720" anchor="ctr">
                     <a:lnL w="12700" cap="flat" cmpd="sng" algn="ctr">
                       <a:solidFill>
                         <a:srgbClr val="CBD5E1"/>
@@ -24615,7 +25416,7 @@
                     <a:bodyPr/>
                     <a:lstStyle/>
                     <a:p>
-                      <a:pPr marL="0" indent="0" algn="l">
+                      <a:pPr algn="l" indent="0" marL="0">
                         <a:buNone/>
                       </a:pPr>
                       <a:r>
@@ -24624,12 +25425,12 @@
                             <a:srgbClr val="334155"/>
                           </a:solidFill>
                         </a:rPr>
-                        <a:t>Clinical ground-truth labels (Pathogenic vs Benign)</a:t>
+                        <a:t>Doctor-verified labels (1 = Disease-causing, 0 = Harmless).</a:t>
                       </a:r>
                       <a:endParaRPr lang="en-US" sz="1100" dirty="0"/>
                     </a:p>
                   </a:txBody>
-                  <a:tcPr anchor="ctr">
+                  <a:tcPr marL="91440" marR="91440" marT="45720" marB="45720" anchor="ctr">
                     <a:lnL w="12700" cap="flat" cmpd="sng" algn="ctr">
                       <a:solidFill>
                         <a:srgbClr val="CBD5E1"/>
@@ -24668,11 +25469,6 @@
                     </a:lnB>
                   </a:tcPr>
                 </a:tc>
-                <a:extLst>
-                  <a:ext uri="{0D108BD9-81ED-4DB2-BD59-A6C34878D82A}">
-                    <a16:rowId xmlns:a16="http://schemas.microsoft.com/office/drawing/2014/main" val="10001"/>
-                  </a:ext>
-                </a:extLst>
               </a:tr>
               <a:tr h="877824">
                 <a:tc>
@@ -24680,7 +25476,7 @@
                     <a:bodyPr/>
                     <a:lstStyle/>
                     <a:p>
-                      <a:pPr marL="0" indent="0" algn="l">
+                      <a:pPr algn="l" indent="0" marL="0">
                         <a:buNone/>
                       </a:pPr>
                       <a:r>
@@ -24694,7 +25490,7 @@
                       <a:endParaRPr lang="en-US" sz="1150" dirty="0"/>
                     </a:p>
                   </a:txBody>
-                  <a:tcPr anchor="ctr">
+                  <a:tcPr marL="91440" marR="91440" marT="45720" marB="45720" anchor="ctr">
                     <a:lnL w="12700" cap="flat" cmpd="sng" algn="ctr">
                       <a:solidFill>
                         <a:srgbClr val="CBD5E1"/>
@@ -24738,7 +25534,7 @@
                     <a:bodyPr/>
                     <a:lstStyle/>
                     <a:p>
-                      <a:pPr marL="0" indent="0" algn="l">
+                      <a:pPr algn="l" indent="0" marL="0">
                         <a:buNone/>
                       </a:pPr>
                       <a:r>
@@ -24752,7 +25548,7 @@
                       <a:endParaRPr lang="en-US" sz="1150" dirty="0"/>
                     </a:p>
                   </a:txBody>
-                  <a:tcPr anchor="ctr">
+                  <a:tcPr marL="91440" marR="91440" marT="45720" marB="45720" anchor="ctr">
                     <a:lnL w="12700" cap="flat" cmpd="sng" algn="ctr">
                       <a:solidFill>
                         <a:srgbClr val="CBD5E1"/>
@@ -24796,7 +25592,7 @@
                     <a:bodyPr/>
                     <a:lstStyle/>
                     <a:p>
-                      <a:pPr marL="0" indent="0" algn="l">
+                      <a:pPr algn="l" indent="0" marL="0">
                         <a:buNone/>
                       </a:pPr>
                       <a:r>
@@ -24805,12 +25601,12 @@
                             <a:srgbClr val="334155"/>
                           </a:solidFill>
                         </a:rPr>
-                        <a:t>14,891 genomes across 7 continental populations</a:t>
+                        <a:t>Sequenced from 15,000 healthy individuals worldwide</a:t>
                       </a:r>
                       <a:endParaRPr lang="en-US" sz="1100" dirty="0"/>
                     </a:p>
                   </a:txBody>
-                  <a:tcPr anchor="ctr">
+                  <a:tcPr marL="91440" marR="91440" marT="45720" marB="45720" anchor="ctr">
                     <a:lnL w="12700" cap="flat" cmpd="sng" algn="ctr">
                       <a:solidFill>
                         <a:srgbClr val="CBD5E1"/>
@@ -24854,7 +25650,7 @@
                     <a:bodyPr/>
                     <a:lstStyle/>
                     <a:p>
-                      <a:pPr marL="0" indent="0" algn="l">
+                      <a:pPr algn="l" indent="0" marL="0">
                         <a:buNone/>
                       </a:pPr>
                       <a:r>
@@ -24863,12 +25659,12 @@
                             <a:srgbClr val="334155"/>
                           </a:solidFill>
                         </a:rPr>
-                        <a:t>Baseline allele frequency spectrum and PopMax</a:t>
+                        <a:t>Baseline population frequencies (to check how rare a variant is in healthy humans).</a:t>
                       </a:r>
                       <a:endParaRPr lang="en-US" sz="1100" dirty="0"/>
                     </a:p>
                   </a:txBody>
-                  <a:tcPr anchor="ctr">
+                  <a:tcPr marL="91440" marR="91440" marT="45720" marB="45720" anchor="ctr">
                     <a:lnL w="12700" cap="flat" cmpd="sng" algn="ctr">
                       <a:solidFill>
                         <a:srgbClr val="CBD5E1"/>
@@ -24907,11 +25703,6 @@
                     </a:lnB>
                   </a:tcPr>
                 </a:tc>
-                <a:extLst>
-                  <a:ext uri="{0D108BD9-81ED-4DB2-BD59-A6C34878D82A}">
-                    <a16:rowId xmlns:a16="http://schemas.microsoft.com/office/drawing/2014/main" val="10002"/>
-                  </a:ext>
-                </a:extLst>
               </a:tr>
               <a:tr h="877824">
                 <a:tc>
@@ -24919,7 +25710,7 @@
                     <a:bodyPr/>
                     <a:lstStyle/>
                     <a:p>
-                      <a:pPr marL="0" indent="0" algn="l">
+                      <a:pPr algn="l" indent="0" marL="0">
                         <a:buNone/>
                       </a:pPr>
                       <a:r>
@@ -24928,12 +25719,12 @@
                             <a:srgbClr val="0F172A"/>
                           </a:solidFill>
                         </a:rPr>
-                        <a:t>1000 Genomes (Phase 3)</a:t>
+                        <a:t>1000 Genomes Project</a:t>
                       </a:r>
                       <a:endParaRPr lang="en-US" sz="1150" dirty="0"/>
                     </a:p>
                   </a:txBody>
-                  <a:tcPr anchor="ctr">
+                  <a:tcPr marL="91440" marR="91440" marT="45720" marB="45720" anchor="ctr">
                     <a:lnL w="12700" cap="flat" cmpd="sng" algn="ctr">
                       <a:solidFill>
                         <a:srgbClr val="CBD5E1"/>
@@ -24977,7 +25768,7 @@
                     <a:bodyPr/>
                     <a:lstStyle/>
                     <a:p>
-                      <a:pPr marL="0" indent="0" algn="l">
+                      <a:pPr algn="l" indent="0" marL="0">
                         <a:buNone/>
                       </a:pPr>
                       <a:r>
@@ -24991,7 +25782,7 @@
                       <a:endParaRPr lang="en-US" sz="1150" dirty="0"/>
                     </a:p>
                   </a:txBody>
-                  <a:tcPr anchor="ctr">
+                  <a:tcPr marL="91440" marR="91440" marT="45720" marB="45720" anchor="ctr">
                     <a:lnL w="12700" cap="flat" cmpd="sng" algn="ctr">
                       <a:solidFill>
                         <a:srgbClr val="CBD5E1"/>
@@ -25035,7 +25826,7 @@
                     <a:bodyPr/>
                     <a:lstStyle/>
                     <a:p>
-                      <a:pPr marL="0" indent="0" algn="l">
+                      <a:pPr algn="l" indent="0" marL="0">
                         <a:buNone/>
                       </a:pPr>
                       <a:r>
@@ -25044,12 +25835,12 @@
                             <a:srgbClr val="334155"/>
                           </a:solidFill>
                         </a:rPr>
-                        <a:t>2,504 multi-ethnic individuals</a:t>
+                        <a:t>Diverse population samples from across the globe</a:t>
                       </a:r>
                       <a:endParaRPr lang="en-US" sz="1100" dirty="0"/>
                     </a:p>
                   </a:txBody>
-                  <a:tcPr anchor="ctr">
+                  <a:tcPr marL="91440" marR="91440" marT="45720" marB="45720" anchor="ctr">
                     <a:lnL w="12700" cap="flat" cmpd="sng" algn="ctr">
                       <a:solidFill>
                         <a:srgbClr val="CBD5E1"/>
@@ -25093,7 +25884,7 @@
                     <a:bodyPr/>
                     <a:lstStyle/>
                     <a:p>
-                      <a:pPr marL="0" indent="0" algn="l">
+                      <a:pPr algn="l" indent="0" marL="0">
                         <a:buNone/>
                       </a:pPr>
                       <a:r>
@@ -25102,12 +25893,12 @@
                             <a:srgbClr val="334155"/>
                           </a:solidFill>
                         </a:rPr>
-                        <a:t>Independent cross-validation for polymorphic SVs</a:t>
+                        <a:t>Independent cross-checking to confirm harmless common mutations.</a:t>
                       </a:r>
                       <a:endParaRPr lang="en-US" sz="1100" dirty="0"/>
                     </a:p>
                   </a:txBody>
-                  <a:tcPr anchor="ctr">
+                  <a:tcPr marL="91440" marR="91440" marT="45720" marB="45720" anchor="ctr">
                     <a:lnL w="12700" cap="flat" cmpd="sng" algn="ctr">
                       <a:solidFill>
                         <a:srgbClr val="CBD5E1"/>
@@ -25146,11 +25937,6 @@
                     </a:lnB>
                   </a:tcPr>
                 </a:tc>
-                <a:extLst>
-                  <a:ext uri="{0D108BD9-81ED-4DB2-BD59-A6C34878D82A}">
-                    <a16:rowId xmlns:a16="http://schemas.microsoft.com/office/drawing/2014/main" val="10003"/>
-                  </a:ext>
-                </a:extLst>
               </a:tr>
               <a:tr h="877824">
                 <a:tc>
@@ -25158,7 +25944,7 @@
                     <a:bodyPr/>
                     <a:lstStyle/>
                     <a:p>
-                      <a:pPr marL="0" indent="0" algn="l">
+                      <a:pPr algn="l" indent="0" marL="0">
                         <a:buNone/>
                       </a:pPr>
                       <a:r>
@@ -25167,12 +25953,12 @@
                             <a:srgbClr val="2563EB"/>
                           </a:solidFill>
                         </a:rPr>
-                        <a:t>Final Harmonized Matrix</a:t>
+                        <a:t>Our Harmonized Dataset</a:t>
                       </a:r>
                       <a:endParaRPr lang="en-US" sz="1200" dirty="0"/>
                     </a:p>
                   </a:txBody>
-                  <a:tcPr anchor="ctr">
+                  <a:tcPr marL="91440" marR="91440" marT="45720" marB="45720" anchor="ctr">
                     <a:lnL w="12700" cap="flat" cmpd="sng" algn="ctr">
                       <a:solidFill>
                         <a:srgbClr val="CBD5E1"/>
@@ -25219,7 +26005,7 @@
                     <a:bodyPr/>
                     <a:lstStyle/>
                     <a:p>
-                      <a:pPr marL="0" indent="0" algn="l">
+                      <a:pPr algn="l" indent="0" marL="0">
                         <a:buNone/>
                       </a:pPr>
                       <a:r>
@@ -25233,7 +26019,7 @@
                       <a:endParaRPr lang="en-US" sz="1200" dirty="0"/>
                     </a:p>
                   </a:txBody>
-                  <a:tcPr anchor="ctr">
+                  <a:tcPr marL="91440" marR="91440" marT="45720" marB="45720" anchor="ctr">
                     <a:lnL w="12700" cap="flat" cmpd="sng" algn="ctr">
                       <a:solidFill>
                         <a:srgbClr val="CBD5E1"/>
@@ -25280,7 +26066,7 @@
                     <a:bodyPr/>
                     <a:lstStyle/>
                     <a:p>
-                      <a:pPr marL="0" indent="0" algn="l">
+                      <a:pPr algn="l" indent="0" marL="0">
                         <a:buNone/>
                       </a:pPr>
                       <a:r>
@@ -25289,12 +26075,12 @@
                             <a:srgbClr val="2563EB"/>
                           </a:solidFill>
                         </a:rPr>
-                        <a:t>High-confidence labeled cohort (&gt;= 50 bp)</a:t>
+                        <a:t>High-confidence labeled mutations (&gt;= 50 bp)</a:t>
                       </a:r>
                       <a:endParaRPr lang="en-US" sz="1150" dirty="0"/>
                     </a:p>
                   </a:txBody>
-                  <a:tcPr anchor="ctr">
+                  <a:tcPr marL="91440" marR="91440" marT="45720" marB="45720" anchor="ctr">
                     <a:lnL w="12700" cap="flat" cmpd="sng" algn="ctr">
                       <a:solidFill>
                         <a:srgbClr val="CBD5E1"/>
@@ -25341,7 +26127,7 @@
                     <a:bodyPr/>
                     <a:lstStyle/>
                     <a:p>
-                      <a:pPr marL="0" indent="0" algn="l">
+                      <a:pPr algn="l" indent="0" marL="0">
                         <a:buNone/>
                       </a:pPr>
                       <a:r>
@@ -25350,12 +26136,12 @@
                             <a:srgbClr val="2563EB"/>
                           </a:solidFill>
                         </a:rPr>
-                        <a:t>35,414 Train / 8,854 Chromosomal Holdout Test</a:t>
+                        <a:t>35,414 Training (Chr 1-18) / 8,854 Unseen Test (Chr 19-22, X, Y).</a:t>
                       </a:r>
                       <a:endParaRPr lang="en-US" sz="1150" dirty="0"/>
                     </a:p>
                   </a:txBody>
-                  <a:tcPr anchor="ctr">
+                  <a:tcPr marL="91440" marR="91440" marT="45720" marB="45720" anchor="ctr">
                     <a:lnL w="12700" cap="flat" cmpd="sng" algn="ctr">
                       <a:solidFill>
                         <a:srgbClr val="CBD5E1"/>
@@ -25397,11 +26183,6 @@
                     </a:solidFill>
                   </a:tcPr>
                 </a:tc>
-                <a:extLst>
-                  <a:ext uri="{0D108BD9-81ED-4DB2-BD59-A6C34878D82A}">
-                    <a16:rowId xmlns:a16="http://schemas.microsoft.com/office/drawing/2014/main" val="10004"/>
-                  </a:ext>
-                </a:extLst>
               </a:tr>
             </a:tbl>
           </a:graphicData>
@@ -25708,319 +26489,4 @@
     </a:ext>
   </a:extLst>
 </a:theme>
-</file>
-
-<file path=ppt/theme/theme2.xml><?xml version="1.0" encoding="utf-8"?>
-<a:theme xmlns:a="http://schemas.openxmlformats.org/drawingml/2006/main" name="Office Theme">
-  <a:themeElements>
-    <a:clrScheme name="Office">
-      <a:dk1>
-        <a:sysClr val="windowText" lastClr="000000"/>
-      </a:dk1>
-      <a:lt1>
-        <a:sysClr val="window" lastClr="FFFFFF"/>
-      </a:lt1>
-      <a:dk2>
-        <a:srgbClr val="0E2841"/>
-      </a:dk2>
-      <a:lt2>
-        <a:srgbClr val="E8E8E8"/>
-      </a:lt2>
-      <a:accent1>
-        <a:srgbClr val="156082"/>
-      </a:accent1>
-      <a:accent2>
-        <a:srgbClr val="E97132"/>
-      </a:accent2>
-      <a:accent3>
-        <a:srgbClr val="196B24"/>
-      </a:accent3>
-      <a:accent4>
-        <a:srgbClr val="0F9ED5"/>
-      </a:accent4>
-      <a:accent5>
-        <a:srgbClr val="A02B93"/>
-      </a:accent5>
-      <a:accent6>
-        <a:srgbClr val="4EA72E"/>
-      </a:accent6>
-      <a:hlink>
-        <a:srgbClr val="467886"/>
-      </a:hlink>
-      <a:folHlink>
-        <a:srgbClr val="96607D"/>
-      </a:folHlink>
-    </a:clrScheme>
-    <a:fontScheme name="Office">
-      <a:majorFont>
-        <a:latin typeface="Aptos Display" panose="02110004020202020204"/>
-        <a:ea typeface=""/>
-        <a:cs typeface=""/>
-        <a:font script="Jpan" typeface="游ゴシック Light"/>
-        <a:font script="Hang" typeface="맑은 고딕"/>
-        <a:font script="Hans" typeface="等线 Light"/>
-        <a:font script="Hant" typeface="新細明體"/>
-        <a:font script="Arab" typeface="Times New Roman"/>
-        <a:font script="Hebr" typeface="Times New Roman"/>
-        <a:font script="Thai" typeface="Angsana New"/>
-        <a:font script="Ethi" typeface="Nyala"/>
-        <a:font script="Beng" typeface="Vrinda"/>
-        <a:font script="Gujr" typeface="Shruti"/>
-        <a:font script="Khmr" typeface="MoolBoran"/>
-        <a:font script="Knda" typeface="Tunga"/>
-        <a:font script="Guru" typeface="Raavi"/>
-        <a:font script="Cans" typeface="Euphemia"/>
-        <a:font script="Cher" typeface="Plantagenet Cherokee"/>
-        <a:font script="Yiii" typeface="Microsoft Yi Baiti"/>
-        <a:font script="Tibt" typeface="Microsoft Himalaya"/>
-        <a:font script="Thaa" typeface="MV Boli"/>
-        <a:font script="Deva" typeface="Mangal"/>
-        <a:font script="Telu" typeface="Gautami"/>
-        <a:font script="Taml" typeface="Latha"/>
-        <a:font script="Syrc" typeface="Estrangelo Edessa"/>
-        <a:font script="Orya" typeface="Kalinga"/>
-        <a:font script="Mlym" typeface="Kartika"/>
-        <a:font script="Laoo" typeface="DokChampa"/>
-        <a:font script="Sinh" typeface="Iskoola Pota"/>
-        <a:font script="Mong" typeface="Mongolian Baiti"/>
-        <a:font script="Viet" typeface="Times New Roman"/>
-        <a:font script="Uigh" typeface="Microsoft Uighur"/>
-        <a:font script="Geor" typeface="Sylfaen"/>
-        <a:font script="Armn" typeface="Arial"/>
-        <a:font script="Bugi" typeface="Leelawadee UI"/>
-        <a:font script="Bopo" typeface="Microsoft JhengHei"/>
-        <a:font script="Java" typeface="Javanese Text"/>
-        <a:font script="Lisu" typeface="Segoe UI"/>
-        <a:font script="Mymr" typeface="Myanmar Text"/>
-        <a:font script="Nkoo" typeface="Ebrima"/>
-        <a:font script="Olck" typeface="Nirmala UI"/>
-        <a:font script="Osma" typeface="Ebrima"/>
-        <a:font script="Phag" typeface="Phagspa"/>
-        <a:font script="Syrn" typeface="Estrangelo Edessa"/>
-        <a:font script="Syrj" typeface="Estrangelo Edessa"/>
-        <a:font script="Syre" typeface="Estrangelo Edessa"/>
-        <a:font script="Sora" typeface="Nirmala UI"/>
-        <a:font script="Tale" typeface="Microsoft Tai Le"/>
-        <a:font script="Talu" typeface="Microsoft New Tai Lue"/>
-        <a:font script="Tfng" typeface="Ebrima"/>
-      </a:majorFont>
-      <a:minorFont>
-        <a:latin typeface="Aptos" panose="02110004020202020204"/>
-        <a:ea typeface=""/>
-        <a:cs typeface=""/>
-        <a:font script="Jpan" typeface="游ゴシック"/>
-        <a:font script="Hang" typeface="맑은 고딕"/>
-        <a:font script="Hans" typeface="等线"/>
-        <a:font script="Hant" typeface="新細明體"/>
-        <a:font script="Arab" typeface="Arial"/>
-        <a:font script="Hebr" typeface="Arial"/>
-        <a:font script="Thai" typeface="Cordia New"/>
-        <a:font script="Ethi" typeface="Nyala"/>
-        <a:font script="Beng" typeface="Vrinda"/>
-        <a:font script="Gujr" typeface="Shruti"/>
-        <a:font script="Khmr" typeface="DaunPenh"/>
-        <a:font script="Knda" typeface="Tunga"/>
-        <a:font script="Guru" typeface="Raavi"/>
-        <a:font script="Cans" typeface="Euphemia"/>
-        <a:font script="Cher" typeface="Plantagenet Cherokee"/>
-        <a:font script="Yiii" typeface="Microsoft Yi Baiti"/>
-        <a:font script="Tibt" typeface="Microsoft Himalaya"/>
-        <a:font script="Thaa" typeface="MV Boli"/>
-        <a:font script="Deva" typeface="Mangal"/>
-        <a:font script="Telu" typeface="Gautami"/>
-        <a:font script="Taml" typeface="Latha"/>
-        <a:font script="Syrc" typeface="Estrangelo Edessa"/>
-        <a:font script="Orya" typeface="Kalinga"/>
-        <a:font script="Mlym" typeface="Kartika"/>
-        <a:font script="Laoo" typeface="DokChampa"/>
-        <a:font script="Sinh" typeface="Iskoola Pota"/>
-        <a:font script="Mong" typeface="Mongolian Baiti"/>
-        <a:font script="Viet" typeface="Arial"/>
-        <a:font script="Uigh" typeface="Microsoft Uighur"/>
-        <a:font script="Geor" typeface="Sylfaen"/>
-        <a:font script="Armn" typeface="Arial"/>
-        <a:font script="Bugi" typeface="Leelawadee UI"/>
-        <a:font script="Bopo" typeface="Microsoft JhengHei"/>
-        <a:font script="Java" typeface="Javanese Text"/>
-        <a:font script="Lisu" typeface="Segoe UI"/>
-        <a:font script="Mymr" typeface="Myanmar Text"/>
-        <a:font script="Nkoo" typeface="Ebrima"/>
-        <a:font script="Olck" typeface="Nirmala UI"/>
-        <a:font script="Osma" typeface="Ebrima"/>
-        <a:font script="Phag" typeface="Phagspa"/>
-        <a:font script="Syrn" typeface="Estrangelo Edessa"/>
-        <a:font script="Syrj" typeface="Estrangelo Edessa"/>
-        <a:font script="Syre" typeface="Estrangelo Edessa"/>
-        <a:font script="Sora" typeface="Nirmala UI"/>
-        <a:font script="Tale" typeface="Microsoft Tai Le"/>
-        <a:font script="Talu" typeface="Microsoft New Tai Lue"/>
-        <a:font script="Tfng" typeface="Ebrima"/>
-      </a:minorFont>
-    </a:fontScheme>
-    <a:fmtScheme name="Office">
-      <a:fillStyleLst>
-        <a:solidFill>
-          <a:schemeClr val="phClr"/>
-        </a:solidFill>
-        <a:gradFill rotWithShape="1">
-          <a:gsLst>
-            <a:gs pos="0">
-              <a:schemeClr val="phClr">
-                <a:lumMod val="110000"/>
-                <a:satMod val="105000"/>
-                <a:tint val="67000"/>
-              </a:schemeClr>
-            </a:gs>
-            <a:gs pos="50000">
-              <a:schemeClr val="phClr">
-                <a:lumMod val="105000"/>
-                <a:satMod val="103000"/>
-                <a:tint val="73000"/>
-              </a:schemeClr>
-            </a:gs>
-            <a:gs pos="100000">
-              <a:schemeClr val="phClr">
-                <a:lumMod val="105000"/>
-                <a:satMod val="109000"/>
-                <a:tint val="81000"/>
-              </a:schemeClr>
-            </a:gs>
-          </a:gsLst>
-          <a:lin ang="5400000" scaled="0"/>
-        </a:gradFill>
-        <a:gradFill rotWithShape="1">
-          <a:gsLst>
-            <a:gs pos="0">
-              <a:schemeClr val="phClr">
-                <a:satMod val="103000"/>
-                <a:lumMod val="102000"/>
-                <a:tint val="94000"/>
-              </a:schemeClr>
-            </a:gs>
-            <a:gs pos="50000">
-              <a:schemeClr val="phClr">
-                <a:satMod val="110000"/>
-                <a:lumMod val="100000"/>
-                <a:shade val="100000"/>
-              </a:schemeClr>
-            </a:gs>
-            <a:gs pos="100000">
-              <a:schemeClr val="phClr">
-                <a:lumMod val="99000"/>
-                <a:satMod val="120000"/>
-                <a:shade val="78000"/>
-              </a:schemeClr>
-            </a:gs>
-          </a:gsLst>
-          <a:lin ang="5400000" scaled="0"/>
-        </a:gradFill>
-      </a:fillStyleLst>
-      <a:lnStyleLst>
-        <a:ln w="12700" cap="flat" cmpd="sng" algn="ctr">
-          <a:solidFill>
-            <a:schemeClr val="phClr"/>
-          </a:solidFill>
-          <a:prstDash val="solid"/>
-          <a:miter lim="800000"/>
-        </a:ln>
-        <a:ln w="19050" cap="flat" cmpd="sng" algn="ctr">
-          <a:solidFill>
-            <a:schemeClr val="phClr"/>
-          </a:solidFill>
-          <a:prstDash val="solid"/>
-          <a:miter lim="800000"/>
-        </a:ln>
-        <a:ln w="25400" cap="flat" cmpd="sng" algn="ctr">
-          <a:solidFill>
-            <a:schemeClr val="phClr"/>
-          </a:solidFill>
-          <a:prstDash val="solid"/>
-          <a:miter lim="800000"/>
-        </a:ln>
-      </a:lnStyleLst>
-      <a:effectStyleLst>
-        <a:effectStyle>
-          <a:effectLst/>
-        </a:effectStyle>
-        <a:effectStyle>
-          <a:effectLst/>
-        </a:effectStyle>
-        <a:effectStyle>
-          <a:effectLst>
-            <a:outerShdw blurRad="57150" dist="19050" dir="5400000" algn="ctr" rotWithShape="0">
-              <a:srgbClr val="000000">
-                <a:alpha val="63000"/>
-              </a:srgbClr>
-            </a:outerShdw>
-          </a:effectLst>
-        </a:effectStyle>
-      </a:effectStyleLst>
-      <a:bgFillStyleLst>
-        <a:solidFill>
-          <a:schemeClr val="phClr"/>
-        </a:solidFill>
-        <a:solidFill>
-          <a:schemeClr val="phClr">
-            <a:tint val="95000"/>
-            <a:satMod val="170000"/>
-          </a:schemeClr>
-        </a:solidFill>
-        <a:gradFill rotWithShape="1">
-          <a:gsLst>
-            <a:gs pos="0">
-              <a:schemeClr val="phClr">
-                <a:tint val="93000"/>
-                <a:satMod val="150000"/>
-                <a:shade val="98000"/>
-                <a:lumMod val="102000"/>
-              </a:schemeClr>
-            </a:gs>
-            <a:gs pos="50000">
-              <a:schemeClr val="phClr">
-                <a:tint val="98000"/>
-                <a:satMod val="130000"/>
-                <a:shade val="90000"/>
-                <a:lumMod val="103000"/>
-              </a:schemeClr>
-            </a:gs>
-            <a:gs pos="100000">
-              <a:schemeClr val="phClr">
-                <a:shade val="63000"/>
-                <a:satMod val="120000"/>
-              </a:schemeClr>
-            </a:gs>
-          </a:gsLst>
-          <a:lin ang="5400000" scaled="0"/>
-        </a:gradFill>
-      </a:bgFillStyleLst>
-    </a:fmtScheme>
-  </a:themeElements>
-  <a:objectDefaults>
-    <a:lnDef>
-      <a:spPr/>
-      <a:bodyPr/>
-      <a:lstStyle/>
-      <a:style>
-        <a:lnRef idx="2">
-          <a:schemeClr val="accent1"/>
-        </a:lnRef>
-        <a:fillRef idx="0">
-          <a:schemeClr val="accent1"/>
-        </a:fillRef>
-        <a:effectRef idx="1">
-          <a:schemeClr val="accent1"/>
-        </a:effectRef>
-        <a:fontRef idx="minor">
-          <a:schemeClr val="tx1"/>
-        </a:fontRef>
-      </a:style>
-    </a:lnDef>
-  </a:objectDefaults>
-  <a:extraClrSchemeLst/>
-  <a:extLst>
-    <a:ext uri="{05A4C25C-085E-4340-85A3-A5531E510DB2}">
-      <thm15:themeFamily xmlns:thm15="http://schemas.microsoft.com/office/thememl/2012/main" name="Office Theme" id="{2E142A2C-CD16-42D6-873A-C26D2A0506FA}" vid="{1BDDFF52-6CD6-40A5-AB3C-68EB2F1E4D0A}"/>
-    </a:ext>
-  </a:extLst>
-</a:theme>
 </file>